--- a/raws/画图.pptx
+++ b/raws/画图.pptx
@@ -5,19 +5,21 @@
     <p:sldMasterId id="2147483648" r:id="rId1"/>
   </p:sldMasterIdLst>
   <p:sldIdLst>
-    <p:sldId id="256" r:id="rId3"/>
-    <p:sldId id="257" r:id="rId4"/>
-    <p:sldId id="259" r:id="rId5"/>
-    <p:sldId id="260" r:id="rId6"/>
-    <p:sldId id="261" r:id="rId7"/>
-    <p:sldId id="262" r:id="rId8"/>
-    <p:sldId id="263" r:id="rId9"/>
-    <p:sldId id="264" r:id="rId10"/>
+    <p:sldId id="256" r:id="rId2"/>
+    <p:sldId id="257" r:id="rId3"/>
+    <p:sldId id="259" r:id="rId4"/>
+    <p:sldId id="260" r:id="rId5"/>
+    <p:sldId id="261" r:id="rId6"/>
+    <p:sldId id="262" r:id="rId7"/>
+    <p:sldId id="263" r:id="rId8"/>
+    <p:sldId id="264" r:id="rId9"/>
+    <p:sldId id="265" r:id="rId10"/>
+    <p:sldId id="266" r:id="rId11"/>
   </p:sldIdLst>
   <p:sldSz cx="12192000" cy="6858000"/>
   <p:notesSz cx="6858000" cy="9144000"/>
   <p:custDataLst>
-    <p:tags r:id="rId14"/>
+    <p:tags r:id="rId12"/>
   </p:custDataLst>
   <p:defaultTextStyle>
     <a:defPPr>
@@ -114,6 +116,11 @@
       </a:defRPr>
     </a:lvl9pPr>
   </p:defaultTextStyle>
+  <p:extLst>
+    <p:ext uri="{EFAFB233-063F-42B5-8137-9DF3F51BA10A}">
+      <p15:sldGuideLst xmlns:p15="http://schemas.microsoft.com/office/powerpoint/2012/main"/>
+    </p:ext>
+  </p:extLst>
 </p:presentation>
 </file>
 
@@ -159,10 +166,9 @@
           </a:lstStyle>
           <a:p>
             <a:r>
-              <a:rPr lang="zh-CN" altLang="en-US" smtClean="0"/>
+              <a:rPr lang="zh-CN" altLang="en-US"/>
               <a:t>单击此处编辑母版标题样式</a:t>
             </a:r>
-            <a:endParaRPr lang="zh-CN" altLang="en-US"/>
           </a:p>
         </p:txBody>
       </p:sp>
@@ -224,10 +230,9 @@
           </a:lstStyle>
           <a:p>
             <a:r>
-              <a:rPr lang="zh-CN" altLang="en-US" smtClean="0"/>
+              <a:rPr lang="zh-CN" altLang="en-US"/>
               <a:t>单击此处编辑母版副标题样式</a:t>
             </a:r>
-            <a:endParaRPr lang="zh-CN" altLang="en-US"/>
           </a:p>
         </p:txBody>
       </p:sp>
@@ -248,6 +253,7 @@
           <a:p>
             <a:fld id="{D997B5FA-0921-464F-AAE1-844C04324D75}" type="datetimeFigureOut">
               <a:rPr lang="zh-CN" altLang="en-US" smtClean="0"/>
+              <a:t>2026/8/5</a:t>
             </a:fld>
             <a:endParaRPr lang="zh-CN" altLang="en-US"/>
           </a:p>
@@ -289,6 +295,7 @@
           <a:p>
             <a:fld id="{565CE74E-AB26-4998-AD42-012C4C1AD076}" type="slidenum">
               <a:rPr lang="zh-CN" altLang="en-US" smtClean="0"/>
+              <a:t>‹#›</a:t>
             </a:fld>
             <a:endParaRPr lang="zh-CN" altLang="en-US"/>
           </a:p>
@@ -335,10 +342,9 @@
           <a:lstStyle/>
           <a:p>
             <a:r>
-              <a:rPr lang="zh-CN" altLang="en-US" smtClean="0"/>
+              <a:rPr lang="zh-CN" altLang="en-US"/>
               <a:t>单击此处编辑母版标题样式</a:t>
             </a:r>
-            <a:endParaRPr lang="zh-CN" altLang="en-US"/>
           </a:p>
         </p:txBody>
       </p:sp>
@@ -359,42 +365,37 @@
           <a:p>
             <a:pPr lvl="0"/>
             <a:r>
-              <a:rPr lang="zh-CN" altLang="en-US" smtClean="0"/>
+              <a:rPr lang="zh-CN" altLang="en-US"/>
               <a:t>单击此处编辑母版文本样式</a:t>
             </a:r>
-            <a:endParaRPr lang="zh-CN" altLang="en-US" smtClean="0"/>
           </a:p>
           <a:p>
             <a:pPr lvl="1"/>
             <a:r>
-              <a:rPr lang="zh-CN" altLang="en-US" smtClean="0"/>
+              <a:rPr lang="zh-CN" altLang="en-US"/>
               <a:t>第二级</a:t>
             </a:r>
-            <a:endParaRPr lang="zh-CN" altLang="en-US" smtClean="0"/>
           </a:p>
           <a:p>
             <a:pPr lvl="2"/>
             <a:r>
-              <a:rPr lang="zh-CN" altLang="en-US" smtClean="0"/>
+              <a:rPr lang="zh-CN" altLang="en-US"/>
               <a:t>第三级</a:t>
             </a:r>
-            <a:endParaRPr lang="zh-CN" altLang="en-US" smtClean="0"/>
           </a:p>
           <a:p>
             <a:pPr lvl="3"/>
             <a:r>
-              <a:rPr lang="zh-CN" altLang="en-US" smtClean="0"/>
+              <a:rPr lang="zh-CN" altLang="en-US"/>
               <a:t>第四级</a:t>
             </a:r>
-            <a:endParaRPr lang="zh-CN" altLang="en-US" smtClean="0"/>
           </a:p>
           <a:p>
             <a:pPr lvl="4"/>
             <a:r>
-              <a:rPr lang="zh-CN" altLang="en-US" smtClean="0"/>
+              <a:rPr lang="zh-CN" altLang="en-US"/>
               <a:t>第五级</a:t>
             </a:r>
-            <a:endParaRPr lang="zh-CN" altLang="en-US"/>
           </a:p>
         </p:txBody>
       </p:sp>
@@ -415,6 +416,7 @@
           <a:p>
             <a:fld id="{D997B5FA-0921-464F-AAE1-844C04324D75}" type="datetimeFigureOut">
               <a:rPr lang="zh-CN" altLang="en-US" smtClean="0"/>
+              <a:t>2026/8/5</a:t>
             </a:fld>
             <a:endParaRPr lang="zh-CN" altLang="en-US"/>
           </a:p>
@@ -456,6 +458,7 @@
           <a:p>
             <a:fld id="{565CE74E-AB26-4998-AD42-012C4C1AD076}" type="slidenum">
               <a:rPr lang="zh-CN" altLang="en-US" smtClean="0"/>
+              <a:t>‹#›</a:t>
             </a:fld>
             <a:endParaRPr lang="zh-CN" altLang="en-US"/>
           </a:p>
@@ -507,10 +510,9 @@
           <a:lstStyle/>
           <a:p>
             <a:r>
-              <a:rPr lang="zh-CN" altLang="en-US" smtClean="0"/>
+              <a:rPr lang="zh-CN" altLang="en-US"/>
               <a:t>单击此处编辑母版标题样式</a:t>
             </a:r>
-            <a:endParaRPr lang="zh-CN" altLang="en-US"/>
           </a:p>
         </p:txBody>
       </p:sp>
@@ -536,42 +538,37 @@
           <a:p>
             <a:pPr lvl="0"/>
             <a:r>
-              <a:rPr lang="zh-CN" altLang="en-US" smtClean="0"/>
+              <a:rPr lang="zh-CN" altLang="en-US"/>
               <a:t>单击此处编辑母版文本样式</a:t>
             </a:r>
-            <a:endParaRPr lang="zh-CN" altLang="en-US" smtClean="0"/>
           </a:p>
           <a:p>
             <a:pPr lvl="1"/>
             <a:r>
-              <a:rPr lang="zh-CN" altLang="en-US" smtClean="0"/>
+              <a:rPr lang="zh-CN" altLang="en-US"/>
               <a:t>第二级</a:t>
             </a:r>
-            <a:endParaRPr lang="zh-CN" altLang="en-US" smtClean="0"/>
           </a:p>
           <a:p>
             <a:pPr lvl="2"/>
             <a:r>
-              <a:rPr lang="zh-CN" altLang="en-US" smtClean="0"/>
+              <a:rPr lang="zh-CN" altLang="en-US"/>
               <a:t>第三级</a:t>
             </a:r>
-            <a:endParaRPr lang="zh-CN" altLang="en-US" smtClean="0"/>
           </a:p>
           <a:p>
             <a:pPr lvl="3"/>
             <a:r>
-              <a:rPr lang="zh-CN" altLang="en-US" smtClean="0"/>
+              <a:rPr lang="zh-CN" altLang="en-US"/>
               <a:t>第四级</a:t>
             </a:r>
-            <a:endParaRPr lang="zh-CN" altLang="en-US" smtClean="0"/>
           </a:p>
           <a:p>
             <a:pPr lvl="4"/>
             <a:r>
-              <a:rPr lang="zh-CN" altLang="en-US" smtClean="0"/>
+              <a:rPr lang="zh-CN" altLang="en-US"/>
               <a:t>第五级</a:t>
             </a:r>
-            <a:endParaRPr lang="zh-CN" altLang="en-US"/>
           </a:p>
         </p:txBody>
       </p:sp>
@@ -592,6 +589,7 @@
           <a:p>
             <a:fld id="{D997B5FA-0921-464F-AAE1-844C04324D75}" type="datetimeFigureOut">
               <a:rPr lang="zh-CN" altLang="en-US" smtClean="0"/>
+              <a:t>2026/8/5</a:t>
             </a:fld>
             <a:endParaRPr lang="zh-CN" altLang="en-US"/>
           </a:p>
@@ -633,6 +631,7 @@
           <a:p>
             <a:fld id="{565CE74E-AB26-4998-AD42-012C4C1AD076}" type="slidenum">
               <a:rPr lang="zh-CN" altLang="en-US" smtClean="0"/>
+              <a:t>‹#›</a:t>
             </a:fld>
             <a:endParaRPr lang="zh-CN" altLang="en-US"/>
           </a:p>
@@ -679,10 +678,9 @@
           <a:lstStyle/>
           <a:p>
             <a:r>
-              <a:rPr lang="zh-CN" altLang="en-US" smtClean="0"/>
+              <a:rPr lang="zh-CN" altLang="en-US"/>
               <a:t>单击此处编辑母版标题样式</a:t>
             </a:r>
-            <a:endParaRPr lang="zh-CN" altLang="en-US"/>
           </a:p>
         </p:txBody>
       </p:sp>
@@ -703,42 +701,37 @@
           <a:p>
             <a:pPr lvl="0"/>
             <a:r>
-              <a:rPr lang="zh-CN" altLang="en-US" smtClean="0"/>
+              <a:rPr lang="zh-CN" altLang="en-US"/>
               <a:t>单击此处编辑母版文本样式</a:t>
             </a:r>
-            <a:endParaRPr lang="zh-CN" altLang="en-US" smtClean="0"/>
           </a:p>
           <a:p>
             <a:pPr lvl="1"/>
             <a:r>
-              <a:rPr lang="zh-CN" altLang="en-US" smtClean="0"/>
+              <a:rPr lang="zh-CN" altLang="en-US"/>
               <a:t>第二级</a:t>
             </a:r>
-            <a:endParaRPr lang="zh-CN" altLang="en-US" smtClean="0"/>
           </a:p>
           <a:p>
             <a:pPr lvl="2"/>
             <a:r>
-              <a:rPr lang="zh-CN" altLang="en-US" smtClean="0"/>
+              <a:rPr lang="zh-CN" altLang="en-US"/>
               <a:t>第三级</a:t>
             </a:r>
-            <a:endParaRPr lang="zh-CN" altLang="en-US" smtClean="0"/>
           </a:p>
           <a:p>
             <a:pPr lvl="3"/>
             <a:r>
-              <a:rPr lang="zh-CN" altLang="en-US" smtClean="0"/>
+              <a:rPr lang="zh-CN" altLang="en-US"/>
               <a:t>第四级</a:t>
             </a:r>
-            <a:endParaRPr lang="zh-CN" altLang="en-US" smtClean="0"/>
           </a:p>
           <a:p>
             <a:pPr lvl="4"/>
             <a:r>
-              <a:rPr lang="zh-CN" altLang="en-US" smtClean="0"/>
+              <a:rPr lang="zh-CN" altLang="en-US"/>
               <a:t>第五级</a:t>
             </a:r>
-            <a:endParaRPr lang="zh-CN" altLang="en-US"/>
           </a:p>
         </p:txBody>
       </p:sp>
@@ -759,6 +752,7 @@
           <a:p>
             <a:fld id="{D997B5FA-0921-464F-AAE1-844C04324D75}" type="datetimeFigureOut">
               <a:rPr lang="zh-CN" altLang="en-US" smtClean="0"/>
+              <a:t>2026/8/5</a:t>
             </a:fld>
             <a:endParaRPr lang="zh-CN" altLang="en-US"/>
           </a:p>
@@ -800,6 +794,7 @@
           <a:p>
             <a:fld id="{565CE74E-AB26-4998-AD42-012C4C1AD076}" type="slidenum">
               <a:rPr lang="zh-CN" altLang="en-US" smtClean="0"/>
+              <a:t>‹#›</a:t>
             </a:fld>
             <a:endParaRPr lang="zh-CN" altLang="en-US"/>
           </a:p>
@@ -855,10 +850,9 @@
           </a:lstStyle>
           <a:p>
             <a:r>
-              <a:rPr lang="zh-CN" altLang="en-US" smtClean="0"/>
+              <a:rPr lang="zh-CN" altLang="en-US"/>
               <a:t>单击此处编辑母版标题样式</a:t>
             </a:r>
-            <a:endParaRPr lang="zh-CN" altLang="en-US"/>
           </a:p>
         </p:txBody>
       </p:sp>
@@ -975,10 +969,9 @@
           <a:p>
             <a:pPr lvl="0"/>
             <a:r>
-              <a:rPr lang="zh-CN" altLang="en-US" smtClean="0"/>
+              <a:rPr lang="zh-CN" altLang="en-US"/>
               <a:t>单击此处编辑母版文本样式</a:t>
             </a:r>
-            <a:endParaRPr lang="zh-CN" altLang="en-US" smtClean="0"/>
           </a:p>
         </p:txBody>
       </p:sp>
@@ -999,6 +992,7 @@
           <a:p>
             <a:fld id="{D997B5FA-0921-464F-AAE1-844C04324D75}" type="datetimeFigureOut">
               <a:rPr lang="zh-CN" altLang="en-US" smtClean="0"/>
+              <a:t>2026/8/5</a:t>
             </a:fld>
             <a:endParaRPr lang="zh-CN" altLang="en-US"/>
           </a:p>
@@ -1040,6 +1034,7 @@
           <a:p>
             <a:fld id="{565CE74E-AB26-4998-AD42-012C4C1AD076}" type="slidenum">
               <a:rPr lang="zh-CN" altLang="en-US" smtClean="0"/>
+              <a:t>‹#›</a:t>
             </a:fld>
             <a:endParaRPr lang="zh-CN" altLang="en-US"/>
           </a:p>
@@ -1086,10 +1081,9 @@
           <a:lstStyle/>
           <a:p>
             <a:r>
-              <a:rPr lang="zh-CN" altLang="en-US" smtClean="0"/>
+              <a:rPr lang="zh-CN" altLang="en-US"/>
               <a:t>单击此处编辑母版标题样式</a:t>
             </a:r>
-            <a:endParaRPr lang="zh-CN" altLang="en-US"/>
           </a:p>
         </p:txBody>
       </p:sp>
@@ -1115,42 +1109,37 @@
           <a:p>
             <a:pPr lvl="0"/>
             <a:r>
-              <a:rPr lang="zh-CN" altLang="en-US" smtClean="0"/>
+              <a:rPr lang="zh-CN" altLang="en-US"/>
               <a:t>单击此处编辑母版文本样式</a:t>
             </a:r>
-            <a:endParaRPr lang="zh-CN" altLang="en-US" smtClean="0"/>
           </a:p>
           <a:p>
             <a:pPr lvl="1"/>
             <a:r>
-              <a:rPr lang="zh-CN" altLang="en-US" smtClean="0"/>
+              <a:rPr lang="zh-CN" altLang="en-US"/>
               <a:t>第二级</a:t>
             </a:r>
-            <a:endParaRPr lang="zh-CN" altLang="en-US" smtClean="0"/>
           </a:p>
           <a:p>
             <a:pPr lvl="2"/>
             <a:r>
-              <a:rPr lang="zh-CN" altLang="en-US" smtClean="0"/>
+              <a:rPr lang="zh-CN" altLang="en-US"/>
               <a:t>第三级</a:t>
             </a:r>
-            <a:endParaRPr lang="zh-CN" altLang="en-US" smtClean="0"/>
           </a:p>
           <a:p>
             <a:pPr lvl="3"/>
             <a:r>
-              <a:rPr lang="zh-CN" altLang="en-US" smtClean="0"/>
+              <a:rPr lang="zh-CN" altLang="en-US"/>
               <a:t>第四级</a:t>
             </a:r>
-            <a:endParaRPr lang="zh-CN" altLang="en-US" smtClean="0"/>
           </a:p>
           <a:p>
             <a:pPr lvl="4"/>
             <a:r>
-              <a:rPr lang="zh-CN" altLang="en-US" smtClean="0"/>
+              <a:rPr lang="zh-CN" altLang="en-US"/>
               <a:t>第五级</a:t>
             </a:r>
-            <a:endParaRPr lang="zh-CN" altLang="en-US"/>
           </a:p>
         </p:txBody>
       </p:sp>
@@ -1176,42 +1165,37 @@
           <a:p>
             <a:pPr lvl="0"/>
             <a:r>
-              <a:rPr lang="zh-CN" altLang="en-US" smtClean="0"/>
+              <a:rPr lang="zh-CN" altLang="en-US"/>
               <a:t>单击此处编辑母版文本样式</a:t>
             </a:r>
-            <a:endParaRPr lang="zh-CN" altLang="en-US" smtClean="0"/>
           </a:p>
           <a:p>
             <a:pPr lvl="1"/>
             <a:r>
-              <a:rPr lang="zh-CN" altLang="en-US" smtClean="0"/>
+              <a:rPr lang="zh-CN" altLang="en-US"/>
               <a:t>第二级</a:t>
             </a:r>
-            <a:endParaRPr lang="zh-CN" altLang="en-US" smtClean="0"/>
           </a:p>
           <a:p>
             <a:pPr lvl="2"/>
             <a:r>
-              <a:rPr lang="zh-CN" altLang="en-US" smtClean="0"/>
+              <a:rPr lang="zh-CN" altLang="en-US"/>
               <a:t>第三级</a:t>
             </a:r>
-            <a:endParaRPr lang="zh-CN" altLang="en-US" smtClean="0"/>
           </a:p>
           <a:p>
             <a:pPr lvl="3"/>
             <a:r>
-              <a:rPr lang="zh-CN" altLang="en-US" smtClean="0"/>
+              <a:rPr lang="zh-CN" altLang="en-US"/>
               <a:t>第四级</a:t>
             </a:r>
-            <a:endParaRPr lang="zh-CN" altLang="en-US" smtClean="0"/>
           </a:p>
           <a:p>
             <a:pPr lvl="4"/>
             <a:r>
-              <a:rPr lang="zh-CN" altLang="en-US" smtClean="0"/>
+              <a:rPr lang="zh-CN" altLang="en-US"/>
               <a:t>第五级</a:t>
             </a:r>
-            <a:endParaRPr lang="zh-CN" altLang="en-US"/>
           </a:p>
         </p:txBody>
       </p:sp>
@@ -1232,6 +1216,7 @@
           <a:p>
             <a:fld id="{D997B5FA-0921-464F-AAE1-844C04324D75}" type="datetimeFigureOut">
               <a:rPr lang="zh-CN" altLang="en-US" smtClean="0"/>
+              <a:t>2026/8/5</a:t>
             </a:fld>
             <a:endParaRPr lang="zh-CN" altLang="en-US"/>
           </a:p>
@@ -1273,6 +1258,7 @@
           <a:p>
             <a:fld id="{565CE74E-AB26-4998-AD42-012C4C1AD076}" type="slidenum">
               <a:rPr lang="zh-CN" altLang="en-US" smtClean="0"/>
+              <a:t>‹#›</a:t>
             </a:fld>
             <a:endParaRPr lang="zh-CN" altLang="en-US"/>
           </a:p>
@@ -1324,10 +1310,9 @@
           <a:lstStyle/>
           <a:p>
             <a:r>
-              <a:rPr lang="zh-CN" altLang="en-US" smtClean="0"/>
+              <a:rPr lang="zh-CN" altLang="en-US"/>
               <a:t>单击此处编辑母版标题样式</a:t>
             </a:r>
-            <a:endParaRPr lang="zh-CN" altLang="en-US"/>
           </a:p>
         </p:txBody>
       </p:sp>
@@ -1390,10 +1375,9 @@
           <a:p>
             <a:pPr lvl="0"/>
             <a:r>
-              <a:rPr lang="zh-CN" altLang="en-US" smtClean="0"/>
+              <a:rPr lang="zh-CN" altLang="en-US"/>
               <a:t>单击此处编辑母版文本样式</a:t>
             </a:r>
-            <a:endParaRPr lang="zh-CN" altLang="en-US" smtClean="0"/>
           </a:p>
         </p:txBody>
       </p:sp>
@@ -1419,42 +1403,37 @@
           <a:p>
             <a:pPr lvl="0"/>
             <a:r>
-              <a:rPr lang="zh-CN" altLang="en-US" smtClean="0"/>
+              <a:rPr lang="zh-CN" altLang="en-US"/>
               <a:t>单击此处编辑母版文本样式</a:t>
             </a:r>
-            <a:endParaRPr lang="zh-CN" altLang="en-US" smtClean="0"/>
           </a:p>
           <a:p>
             <a:pPr lvl="1"/>
             <a:r>
-              <a:rPr lang="zh-CN" altLang="en-US" smtClean="0"/>
+              <a:rPr lang="zh-CN" altLang="en-US"/>
               <a:t>第二级</a:t>
             </a:r>
-            <a:endParaRPr lang="zh-CN" altLang="en-US" smtClean="0"/>
           </a:p>
           <a:p>
             <a:pPr lvl="2"/>
             <a:r>
-              <a:rPr lang="zh-CN" altLang="en-US" smtClean="0"/>
+              <a:rPr lang="zh-CN" altLang="en-US"/>
               <a:t>第三级</a:t>
             </a:r>
-            <a:endParaRPr lang="zh-CN" altLang="en-US" smtClean="0"/>
           </a:p>
           <a:p>
             <a:pPr lvl="3"/>
             <a:r>
-              <a:rPr lang="zh-CN" altLang="en-US" smtClean="0"/>
+              <a:rPr lang="zh-CN" altLang="en-US"/>
               <a:t>第四级</a:t>
             </a:r>
-            <a:endParaRPr lang="zh-CN" altLang="en-US" smtClean="0"/>
           </a:p>
           <a:p>
             <a:pPr lvl="4"/>
             <a:r>
-              <a:rPr lang="zh-CN" altLang="en-US" smtClean="0"/>
+              <a:rPr lang="zh-CN" altLang="en-US"/>
               <a:t>第五级</a:t>
             </a:r>
-            <a:endParaRPr lang="zh-CN" altLang="en-US"/>
           </a:p>
         </p:txBody>
       </p:sp>
@@ -1517,10 +1496,9 @@
           <a:p>
             <a:pPr lvl="0"/>
             <a:r>
-              <a:rPr lang="zh-CN" altLang="en-US" smtClean="0"/>
+              <a:rPr lang="zh-CN" altLang="en-US"/>
               <a:t>单击此处编辑母版文本样式</a:t>
             </a:r>
-            <a:endParaRPr lang="zh-CN" altLang="en-US" smtClean="0"/>
           </a:p>
         </p:txBody>
       </p:sp>
@@ -1546,42 +1524,37 @@
           <a:p>
             <a:pPr lvl="0"/>
             <a:r>
-              <a:rPr lang="zh-CN" altLang="en-US" smtClean="0"/>
+              <a:rPr lang="zh-CN" altLang="en-US"/>
               <a:t>单击此处编辑母版文本样式</a:t>
             </a:r>
-            <a:endParaRPr lang="zh-CN" altLang="en-US" smtClean="0"/>
           </a:p>
           <a:p>
             <a:pPr lvl="1"/>
             <a:r>
-              <a:rPr lang="zh-CN" altLang="en-US" smtClean="0"/>
+              <a:rPr lang="zh-CN" altLang="en-US"/>
               <a:t>第二级</a:t>
             </a:r>
-            <a:endParaRPr lang="zh-CN" altLang="en-US" smtClean="0"/>
           </a:p>
           <a:p>
             <a:pPr lvl="2"/>
             <a:r>
-              <a:rPr lang="zh-CN" altLang="en-US" smtClean="0"/>
+              <a:rPr lang="zh-CN" altLang="en-US"/>
               <a:t>第三级</a:t>
             </a:r>
-            <a:endParaRPr lang="zh-CN" altLang="en-US" smtClean="0"/>
           </a:p>
           <a:p>
             <a:pPr lvl="3"/>
             <a:r>
-              <a:rPr lang="zh-CN" altLang="en-US" smtClean="0"/>
+              <a:rPr lang="zh-CN" altLang="en-US"/>
               <a:t>第四级</a:t>
             </a:r>
-            <a:endParaRPr lang="zh-CN" altLang="en-US" smtClean="0"/>
           </a:p>
           <a:p>
             <a:pPr lvl="4"/>
             <a:r>
-              <a:rPr lang="zh-CN" altLang="en-US" smtClean="0"/>
+              <a:rPr lang="zh-CN" altLang="en-US"/>
               <a:t>第五级</a:t>
             </a:r>
-            <a:endParaRPr lang="zh-CN" altLang="en-US"/>
           </a:p>
         </p:txBody>
       </p:sp>
@@ -1602,6 +1575,7 @@
           <a:p>
             <a:fld id="{D997B5FA-0921-464F-AAE1-844C04324D75}" type="datetimeFigureOut">
               <a:rPr lang="zh-CN" altLang="en-US" smtClean="0"/>
+              <a:t>2026/8/5</a:t>
             </a:fld>
             <a:endParaRPr lang="zh-CN" altLang="en-US"/>
           </a:p>
@@ -1643,6 +1617,7 @@
           <a:p>
             <a:fld id="{565CE74E-AB26-4998-AD42-012C4C1AD076}" type="slidenum">
               <a:rPr lang="zh-CN" altLang="en-US" smtClean="0"/>
+              <a:t>‹#›</a:t>
             </a:fld>
             <a:endParaRPr lang="zh-CN" altLang="en-US"/>
           </a:p>
@@ -1689,10 +1664,9 @@
           <a:lstStyle/>
           <a:p>
             <a:r>
-              <a:rPr lang="zh-CN" altLang="en-US" smtClean="0"/>
+              <a:rPr lang="zh-CN" altLang="en-US"/>
               <a:t>单击此处编辑母版标题样式</a:t>
             </a:r>
-            <a:endParaRPr lang="zh-CN" altLang="en-US"/>
           </a:p>
         </p:txBody>
       </p:sp>
@@ -1713,6 +1687,7 @@
           <a:p>
             <a:fld id="{D997B5FA-0921-464F-AAE1-844C04324D75}" type="datetimeFigureOut">
               <a:rPr lang="zh-CN" altLang="en-US" smtClean="0"/>
+              <a:t>2026/8/5</a:t>
             </a:fld>
             <a:endParaRPr lang="zh-CN" altLang="en-US"/>
           </a:p>
@@ -1754,6 +1729,7 @@
           <a:p>
             <a:fld id="{565CE74E-AB26-4998-AD42-012C4C1AD076}" type="slidenum">
               <a:rPr lang="zh-CN" altLang="en-US" smtClean="0"/>
+              <a:t>‹#›</a:t>
             </a:fld>
             <a:endParaRPr lang="zh-CN" altLang="en-US"/>
           </a:p>
@@ -1801,6 +1777,7 @@
           <a:p>
             <a:fld id="{D997B5FA-0921-464F-AAE1-844C04324D75}" type="datetimeFigureOut">
               <a:rPr lang="zh-CN" altLang="en-US" smtClean="0"/>
+              <a:t>2026/8/5</a:t>
             </a:fld>
             <a:endParaRPr lang="zh-CN" altLang="en-US"/>
           </a:p>
@@ -1842,6 +1819,7 @@
           <a:p>
             <a:fld id="{565CE74E-AB26-4998-AD42-012C4C1AD076}" type="slidenum">
               <a:rPr lang="zh-CN" altLang="en-US" smtClean="0"/>
+              <a:t>‹#›</a:t>
             </a:fld>
             <a:endParaRPr lang="zh-CN" altLang="en-US"/>
           </a:p>
@@ -1897,10 +1875,9 @@
           </a:lstStyle>
           <a:p>
             <a:r>
-              <a:rPr lang="zh-CN" altLang="en-US" smtClean="0"/>
+              <a:rPr lang="zh-CN" altLang="en-US"/>
               <a:t>单击此处编辑母版标题样式</a:t>
             </a:r>
-            <a:endParaRPr lang="zh-CN" altLang="en-US"/>
           </a:p>
         </p:txBody>
       </p:sp>
@@ -1954,42 +1931,37 @@
           <a:p>
             <a:pPr lvl="0"/>
             <a:r>
-              <a:rPr lang="zh-CN" altLang="en-US" smtClean="0"/>
+              <a:rPr lang="zh-CN" altLang="en-US"/>
               <a:t>单击此处编辑母版文本样式</a:t>
             </a:r>
-            <a:endParaRPr lang="zh-CN" altLang="en-US" smtClean="0"/>
           </a:p>
           <a:p>
             <a:pPr lvl="1"/>
             <a:r>
-              <a:rPr lang="zh-CN" altLang="en-US" smtClean="0"/>
+              <a:rPr lang="zh-CN" altLang="en-US"/>
               <a:t>第二级</a:t>
             </a:r>
-            <a:endParaRPr lang="zh-CN" altLang="en-US" smtClean="0"/>
           </a:p>
           <a:p>
             <a:pPr lvl="2"/>
             <a:r>
-              <a:rPr lang="zh-CN" altLang="en-US" smtClean="0"/>
+              <a:rPr lang="zh-CN" altLang="en-US"/>
               <a:t>第三级</a:t>
             </a:r>
-            <a:endParaRPr lang="zh-CN" altLang="en-US" smtClean="0"/>
           </a:p>
           <a:p>
             <a:pPr lvl="3"/>
             <a:r>
-              <a:rPr lang="zh-CN" altLang="en-US" smtClean="0"/>
+              <a:rPr lang="zh-CN" altLang="en-US"/>
               <a:t>第四级</a:t>
             </a:r>
-            <a:endParaRPr lang="zh-CN" altLang="en-US" smtClean="0"/>
           </a:p>
           <a:p>
             <a:pPr lvl="4"/>
             <a:r>
-              <a:rPr lang="zh-CN" altLang="en-US" smtClean="0"/>
+              <a:rPr lang="zh-CN" altLang="en-US"/>
               <a:t>第五级</a:t>
             </a:r>
-            <a:endParaRPr lang="zh-CN" altLang="en-US"/>
           </a:p>
         </p:txBody>
       </p:sp>
@@ -2052,10 +2024,9 @@
           <a:p>
             <a:pPr lvl="0"/>
             <a:r>
-              <a:rPr lang="zh-CN" altLang="en-US" smtClean="0"/>
+              <a:rPr lang="zh-CN" altLang="en-US"/>
               <a:t>单击此处编辑母版文本样式</a:t>
             </a:r>
-            <a:endParaRPr lang="zh-CN" altLang="en-US" smtClean="0"/>
           </a:p>
         </p:txBody>
       </p:sp>
@@ -2076,6 +2047,7 @@
           <a:p>
             <a:fld id="{D997B5FA-0921-464F-AAE1-844C04324D75}" type="datetimeFigureOut">
               <a:rPr lang="zh-CN" altLang="en-US" smtClean="0"/>
+              <a:t>2026/8/5</a:t>
             </a:fld>
             <a:endParaRPr lang="zh-CN" altLang="en-US"/>
           </a:p>
@@ -2117,6 +2089,7 @@
           <a:p>
             <a:fld id="{565CE74E-AB26-4998-AD42-012C4C1AD076}" type="slidenum">
               <a:rPr lang="zh-CN" altLang="en-US" smtClean="0"/>
+              <a:t>‹#›</a:t>
             </a:fld>
             <a:endParaRPr lang="zh-CN" altLang="en-US"/>
           </a:p>
@@ -2172,10 +2145,9 @@
           </a:lstStyle>
           <a:p>
             <a:r>
-              <a:rPr lang="zh-CN" altLang="en-US" smtClean="0"/>
+              <a:rPr lang="zh-CN" altLang="en-US"/>
               <a:t>单击此处编辑母版标题样式</a:t>
             </a:r>
-            <a:endParaRPr lang="zh-CN" altLang="en-US"/>
           </a:p>
         </p:txBody>
       </p:sp>
@@ -2299,10 +2271,9 @@
           <a:p>
             <a:pPr lvl="0"/>
             <a:r>
-              <a:rPr lang="zh-CN" altLang="en-US" smtClean="0"/>
+              <a:rPr lang="zh-CN" altLang="en-US"/>
               <a:t>单击此处编辑母版文本样式</a:t>
             </a:r>
-            <a:endParaRPr lang="zh-CN" altLang="en-US" smtClean="0"/>
           </a:p>
         </p:txBody>
       </p:sp>
@@ -2323,6 +2294,7 @@
           <a:p>
             <a:fld id="{D997B5FA-0921-464F-AAE1-844C04324D75}" type="datetimeFigureOut">
               <a:rPr lang="zh-CN" altLang="en-US" smtClean="0"/>
+              <a:t>2026/8/5</a:t>
             </a:fld>
             <a:endParaRPr lang="zh-CN" altLang="en-US"/>
           </a:p>
@@ -2364,6 +2336,7 @@
           <a:p>
             <a:fld id="{565CE74E-AB26-4998-AD42-012C4C1AD076}" type="slidenum">
               <a:rPr lang="zh-CN" altLang="en-US" smtClean="0"/>
+              <a:t>‹#›</a:t>
             </a:fld>
             <a:endParaRPr lang="zh-CN" altLang="en-US"/>
           </a:p>
@@ -2425,10 +2398,9 @@
           <a:lstStyle/>
           <a:p>
             <a:r>
-              <a:rPr lang="zh-CN" altLang="en-US" smtClean="0"/>
+              <a:rPr lang="zh-CN" altLang="en-US"/>
               <a:t>单击此处编辑母版标题样式</a:t>
             </a:r>
-            <a:endParaRPr lang="zh-CN" altLang="en-US"/>
           </a:p>
         </p:txBody>
       </p:sp>
@@ -2459,42 +2431,37 @@
           <a:p>
             <a:pPr lvl="0"/>
             <a:r>
-              <a:rPr lang="zh-CN" altLang="en-US" smtClean="0"/>
+              <a:rPr lang="zh-CN" altLang="en-US"/>
               <a:t>单击此处编辑母版文本样式</a:t>
             </a:r>
-            <a:endParaRPr lang="zh-CN" altLang="en-US" smtClean="0"/>
           </a:p>
           <a:p>
             <a:pPr lvl="1"/>
             <a:r>
-              <a:rPr lang="zh-CN" altLang="en-US" smtClean="0"/>
+              <a:rPr lang="zh-CN" altLang="en-US"/>
               <a:t>第二级</a:t>
             </a:r>
-            <a:endParaRPr lang="zh-CN" altLang="en-US" smtClean="0"/>
           </a:p>
           <a:p>
             <a:pPr lvl="2"/>
             <a:r>
-              <a:rPr lang="zh-CN" altLang="en-US" smtClean="0"/>
+              <a:rPr lang="zh-CN" altLang="en-US"/>
               <a:t>第三级</a:t>
             </a:r>
-            <a:endParaRPr lang="zh-CN" altLang="en-US" smtClean="0"/>
           </a:p>
           <a:p>
             <a:pPr lvl="3"/>
             <a:r>
-              <a:rPr lang="zh-CN" altLang="en-US" smtClean="0"/>
+              <a:rPr lang="zh-CN" altLang="en-US"/>
               <a:t>第四级</a:t>
             </a:r>
-            <a:endParaRPr lang="zh-CN" altLang="en-US" smtClean="0"/>
           </a:p>
           <a:p>
             <a:pPr lvl="4"/>
             <a:r>
-              <a:rPr lang="zh-CN" altLang="en-US" smtClean="0"/>
+              <a:rPr lang="zh-CN" altLang="en-US"/>
               <a:t>第五级</a:t>
             </a:r>
-            <a:endParaRPr lang="zh-CN" altLang="en-US"/>
           </a:p>
         </p:txBody>
       </p:sp>
@@ -2533,6 +2500,7 @@
           <a:p>
             <a:fld id="{D997B5FA-0921-464F-AAE1-844C04324D75}" type="datetimeFigureOut">
               <a:rPr lang="zh-CN" altLang="en-US" smtClean="0"/>
+              <a:t>2026/8/5</a:t>
             </a:fld>
             <a:endParaRPr lang="zh-CN" altLang="en-US"/>
           </a:p>
@@ -2610,6 +2578,7 @@
           <a:p>
             <a:fld id="{565CE74E-AB26-4998-AD42-012C4C1AD076}" type="slidenum">
               <a:rPr lang="zh-CN" altLang="en-US" smtClean="0"/>
+              <a:t>‹#›</a:t>
             </a:fld>
             <a:endParaRPr lang="zh-CN" altLang="en-US"/>
           </a:p>
@@ -2923,7 +2892,14 @@
         <p:cNvGrpSpPr/>
         <p:nvPr/>
       </p:nvGrpSpPr>
-      <p:grpSpPr/>
+      <p:grpSpPr>
+        <a:xfrm>
+          <a:off x="0" y="0"/>
+          <a:ext cx="0" cy="0"/>
+          <a:chOff x="0" y="0"/>
+          <a:chExt cx="0" cy="0"/>
+        </a:xfrm>
+      </p:grpSpPr>
       <p:sp>
         <p:nvSpPr>
           <p:cNvPr id="5" name="文本框 4"/>
@@ -2949,13 +2925,13 @@
           <a:bodyPr wrap="square" rtlCol="0">
             <a:spAutoFit/>
           </a:bodyPr>
+          <a:lstStyle/>
           <a:p>
             <a:pPr algn="ctr"/>
             <a:r>
               <a:rPr lang="zh-CN" altLang="en-US"/>
               <a:t>浏览器</a:t>
             </a:r>
-            <a:endParaRPr lang="zh-CN" altLang="en-US"/>
           </a:p>
         </p:txBody>
       </p:sp>
@@ -2995,6 +2971,7 @@
         </p:style>
         <p:txBody>
           <a:bodyPr rtlCol="0" anchor="ctr"/>
+          <a:lstStyle/>
           <a:p>
             <a:pPr algn="ctr"/>
             <a:endParaRPr lang="zh-CN" altLang="en-US"/>
@@ -3026,6 +3003,7 @@
           <a:bodyPr wrap="square" rtlCol="0">
             <a:spAutoFit/>
           </a:bodyPr>
+          <a:lstStyle/>
           <a:p>
             <a:pPr algn="ctr"/>
             <a:r>
@@ -3036,7 +3014,6 @@
               <a:rPr lang="zh-CN" altLang="en-US"/>
               <a:t>代理</a:t>
             </a:r>
-            <a:endParaRPr lang="zh-CN" altLang="en-US"/>
           </a:p>
         </p:txBody>
       </p:sp>
@@ -3088,6 +3065,7 @@
         </p:style>
         <p:txBody>
           <a:bodyPr rtlCol="0" anchor="ctr"/>
+          <a:lstStyle/>
           <a:p>
             <a:pPr algn="ctr"/>
             <a:endParaRPr lang="zh-CN" altLang="en-US"/>
@@ -3114,17 +3092,13 @@
           <a:bodyPr wrap="none" rtlCol="0" anchor="t">
             <a:spAutoFit/>
           </a:bodyPr>
+          <a:lstStyle/>
           <a:p>
             <a:pPr algn="ctr"/>
             <a:r>
               <a:rPr lang="zh-CN" altLang="en-US"/>
-              <a:t>本地开发</a:t>
-            </a:r>
-            <a:r>
-              <a:rPr lang="zh-CN" altLang="en-US"/>
-              <a:t>服务器</a:t>
-            </a:r>
-            <a:endParaRPr lang="zh-CN" altLang="en-US"/>
+              <a:t>本地开发服务器</a:t>
+            </a:r>
           </a:p>
         </p:txBody>
       </p:sp>
@@ -3164,6 +3138,7 @@
         </p:style>
         <p:txBody>
           <a:bodyPr rtlCol="0" anchor="ctr"/>
+          <a:lstStyle/>
           <a:p>
             <a:pPr algn="ctr"/>
             <a:endParaRPr lang="zh-CN" altLang="en-US"/>
@@ -3206,6 +3181,7 @@
         </p:style>
         <p:txBody>
           <a:bodyPr rtlCol="0" anchor="ctr"/>
+          <a:lstStyle/>
           <a:p>
             <a:pPr algn="ctr"/>
             <a:endParaRPr lang="zh-CN" altLang="en-US"/>
@@ -3232,16 +3208,12 @@
           <a:bodyPr wrap="square" rtlCol="0">
             <a:spAutoFit/>
           </a:bodyPr>
+          <a:lstStyle/>
           <a:p>
             <a:r>
               <a:rPr lang="zh-CN" altLang="en-US"/>
-              <a:t>提供代理</a:t>
-            </a:r>
-            <a:r>
-              <a:rPr lang="zh-CN" altLang="en-US"/>
-              <a:t>请求</a:t>
-            </a:r>
-            <a:endParaRPr lang="zh-CN" altLang="en-US"/>
+              <a:t>提供代理请求</a:t>
+            </a:r>
           </a:p>
         </p:txBody>
       </p:sp>
@@ -3270,13 +3242,13 @@
           <a:bodyPr wrap="square" rtlCol="0">
             <a:spAutoFit/>
           </a:bodyPr>
+          <a:lstStyle/>
           <a:p>
             <a:pPr algn="ctr"/>
             <a:r>
               <a:rPr lang="zh-CN" altLang="en-US"/>
               <a:t>后端服务</a:t>
             </a:r>
-            <a:endParaRPr lang="zh-CN" altLang="en-US"/>
           </a:p>
           <a:p>
             <a:pPr algn="ctr"/>
@@ -3284,7 +3256,6 @@
               <a:rPr lang="zh-CN" altLang="en-US"/>
               <a:t>可能有多个</a:t>
             </a:r>
-            <a:endParaRPr lang="zh-CN" altLang="en-US"/>
           </a:p>
         </p:txBody>
       </p:sp>
@@ -3308,16 +3279,12 @@
           <a:bodyPr wrap="square" rtlCol="0">
             <a:spAutoFit/>
           </a:bodyPr>
+          <a:lstStyle/>
           <a:p>
             <a:r>
               <a:rPr lang="zh-CN" altLang="en-US"/>
-              <a:t>跨域接口</a:t>
-            </a:r>
-            <a:r>
-              <a:rPr lang="zh-CN" altLang="en-US"/>
-              <a:t>请求</a:t>
-            </a:r>
-            <a:endParaRPr lang="zh-CN" altLang="en-US"/>
+              <a:t>跨域接口请求</a:t>
+            </a:r>
           </a:p>
         </p:txBody>
       </p:sp>
@@ -3357,6 +3324,7 @@
         </p:style>
         <p:txBody>
           <a:bodyPr rtlCol="0" anchor="ctr"/>
+          <a:lstStyle/>
           <a:p>
             <a:pPr algn="ctr"/>
             <a:endParaRPr lang="zh-CN" altLang="en-US"/>
@@ -3383,12 +3351,12 @@
           <a:bodyPr wrap="square" rtlCol="0">
             <a:spAutoFit/>
           </a:bodyPr>
+          <a:lstStyle/>
           <a:p>
             <a:r>
               <a:rPr lang="zh-CN" altLang="en-US"/>
               <a:t>返回数据</a:t>
             </a:r>
-            <a:endParaRPr lang="zh-CN" altLang="en-US"/>
           </a:p>
         </p:txBody>
       </p:sp>
@@ -3428,6 +3396,7 @@
         </p:style>
         <p:txBody>
           <a:bodyPr rtlCol="0" anchor="ctr"/>
+          <a:lstStyle/>
           <a:p>
             <a:pPr algn="ctr"/>
             <a:endParaRPr lang="zh-CN" altLang="en-US"/>
@@ -3454,19 +3423,18 @@
           <a:bodyPr wrap="square" rtlCol="0">
             <a:spAutoFit/>
           </a:bodyPr>
+          <a:lstStyle/>
           <a:p>
             <a:r>
               <a:rPr lang="zh-CN" altLang="en-US"/>
               <a:t>返回</a:t>
             </a:r>
-            <a:endParaRPr lang="zh-CN" altLang="en-US"/>
           </a:p>
           <a:p>
             <a:r>
               <a:rPr lang="zh-CN" altLang="en-US"/>
               <a:t>数据</a:t>
             </a:r>
-            <a:endParaRPr lang="zh-CN" altLang="en-US"/>
           </a:p>
         </p:txBody>
       </p:sp>
@@ -3490,16 +3458,12 @@
           <a:bodyPr wrap="square" rtlCol="0">
             <a:spAutoFit/>
           </a:bodyPr>
+          <a:lstStyle/>
           <a:p>
             <a:r>
               <a:rPr lang="zh-CN" altLang="en-US"/>
-              <a:t>接口</a:t>
-            </a:r>
-            <a:r>
-              <a:rPr lang="zh-CN" altLang="en-US"/>
-              <a:t>请求</a:t>
-            </a:r>
-            <a:endParaRPr lang="zh-CN" altLang="en-US"/>
+              <a:t>接口请求</a:t>
+            </a:r>
           </a:p>
         </p:txBody>
       </p:sp>
@@ -3539,6 +3503,7 @@
         </p:style>
         <p:txBody>
           <a:bodyPr rtlCol="0" anchor="ctr"/>
+          <a:lstStyle/>
           <a:p>
             <a:pPr algn="ctr"/>
             <a:endParaRPr lang="zh-CN" altLang="en-US"/>
@@ -3565,20 +3530,1152 @@
           <a:bodyPr wrap="square" rtlCol="0">
             <a:spAutoFit/>
           </a:bodyPr>
+          <a:lstStyle/>
           <a:p>
             <a:r>
               <a:rPr lang="zh-CN" altLang="en-US"/>
-              <a:t>返回</a:t>
-            </a:r>
-            <a:r>
-              <a:rPr lang="zh-CN" altLang="en-US"/>
-              <a:t>数据</a:t>
-            </a:r>
-            <a:endParaRPr lang="zh-CN" altLang="en-US"/>
+              <a:t>返回数据</a:t>
+            </a:r>
           </a:p>
         </p:txBody>
       </p:sp>
     </p:spTree>
+  </p:cSld>
+  <p:clrMapOvr>
+    <a:masterClrMapping/>
+  </p:clrMapOvr>
+</p:sld>
+</file>
+
+<file path=ppt/slides/slide10.xml><?xml version="1.0" encoding="utf-8"?>
+<p:sld xmlns:a="http://schemas.openxmlformats.org/drawingml/2006/main" xmlns:r="http://schemas.openxmlformats.org/officeDocument/2006/relationships" xmlns:p="http://schemas.openxmlformats.org/presentationml/2006/main">
+  <p:cSld>
+    <p:spTree>
+      <p:nvGrpSpPr>
+        <p:cNvPr id="1" name="">
+          <a:extLst>
+            <a:ext uri="{FF2B5EF4-FFF2-40B4-BE49-F238E27FC236}">
+              <a16:creationId xmlns:a16="http://schemas.microsoft.com/office/drawing/2014/main" id="{11CB7C9A-C2BE-DEF0-2A71-32244C4B1A7E}"/>
+            </a:ext>
+          </a:extLst>
+        </p:cNvPr>
+        <p:cNvGrpSpPr/>
+        <p:nvPr/>
+      </p:nvGrpSpPr>
+      <p:grpSpPr>
+        <a:xfrm>
+          <a:off x="0" y="0"/>
+          <a:ext cx="0" cy="0"/>
+          <a:chOff x="0" y="0"/>
+          <a:chExt cx="0" cy="0"/>
+        </a:xfrm>
+      </p:grpSpPr>
+      <p:sp>
+        <p:nvSpPr>
+          <p:cNvPr id="5" name="文本框 4">
+            <a:extLst>
+              <a:ext uri="{FF2B5EF4-FFF2-40B4-BE49-F238E27FC236}">
+                <a16:creationId xmlns:a16="http://schemas.microsoft.com/office/drawing/2014/main" id="{F8723017-89D1-F105-13B6-21FF68505DAB}"/>
+              </a:ext>
+            </a:extLst>
+          </p:cNvPr>
+          <p:cNvSpPr txBox="1"/>
+          <p:nvPr/>
+        </p:nvSpPr>
+        <p:spPr>
+          <a:xfrm>
+            <a:off x="839880" y="489267"/>
+            <a:ext cx="926465" cy="306705"/>
+          </a:xfrm>
+          <a:prstGeom prst="rect">
+            <a:avLst/>
+          </a:prstGeom>
+          <a:noFill/>
+          <a:ln w="12700">
+            <a:solidFill>
+              <a:schemeClr val="tx1"/>
+            </a:solidFill>
+          </a:ln>
+        </p:spPr>
+        <p:txBody>
+          <a:bodyPr wrap="square" rtlCol="0">
+            <a:spAutoFit/>
+          </a:bodyPr>
+          <a:lstStyle/>
+          <a:p>
+            <a:pPr algn="ctr"/>
+            <a:r>
+              <a:rPr lang="zh-CN" altLang="en-US" sz="1400" dirty="0"/>
+              <a:t>开发者</a:t>
+            </a:r>
+          </a:p>
+        </p:txBody>
+      </p:sp>
+      <p:sp>
+        <p:nvSpPr>
+          <p:cNvPr id="15" name="文本框 14">
+            <a:extLst>
+              <a:ext uri="{FF2B5EF4-FFF2-40B4-BE49-F238E27FC236}">
+                <a16:creationId xmlns:a16="http://schemas.microsoft.com/office/drawing/2014/main" id="{F3D560F4-AADD-36CE-0F8E-2DC63D3AD708}"/>
+              </a:ext>
+            </a:extLst>
+          </p:cNvPr>
+          <p:cNvSpPr txBox="1"/>
+          <p:nvPr/>
+        </p:nvSpPr>
+        <p:spPr>
+          <a:xfrm>
+            <a:off x="3962211" y="479696"/>
+            <a:ext cx="1365885" cy="306705"/>
+          </a:xfrm>
+          <a:prstGeom prst="rect">
+            <a:avLst/>
+          </a:prstGeom>
+          <a:noFill/>
+          <a:ln w="12700">
+            <a:solidFill>
+              <a:schemeClr val="tx1"/>
+            </a:solidFill>
+          </a:ln>
+        </p:spPr>
+        <p:txBody>
+          <a:bodyPr wrap="square" rtlCol="0">
+            <a:spAutoFit/>
+          </a:bodyPr>
+          <a:lstStyle/>
+          <a:p>
+            <a:pPr algn="ctr"/>
+            <a:r>
+              <a:rPr lang="zh-CN" altLang="en-US" sz="1400" dirty="0"/>
+              <a:t>本地服务</a:t>
+            </a:r>
+          </a:p>
+        </p:txBody>
+      </p:sp>
+      <p:cxnSp>
+        <p:nvCxnSpPr>
+          <p:cNvPr id="2" name="直接连接符 1">
+            <a:extLst>
+              <a:ext uri="{FF2B5EF4-FFF2-40B4-BE49-F238E27FC236}">
+                <a16:creationId xmlns:a16="http://schemas.microsoft.com/office/drawing/2014/main" id="{1676E00A-1EF0-9440-8E13-A82F315A58A3}"/>
+              </a:ext>
+            </a:extLst>
+          </p:cNvPr>
+          <p:cNvCxnSpPr>
+            <a:cxnSpLocks/>
+          </p:cNvCxnSpPr>
+          <p:nvPr/>
+        </p:nvCxnSpPr>
+        <p:spPr>
+          <a:xfrm>
+            <a:off x="1303112" y="934720"/>
+            <a:ext cx="0" cy="5493294"/>
+          </a:xfrm>
+          <a:prstGeom prst="line">
+            <a:avLst/>
+          </a:prstGeom>
+          <a:ln w="19050">
+            <a:solidFill>
+              <a:schemeClr val="tx1">
+                <a:lumMod val="95000"/>
+                <a:lumOff val="5000"/>
+              </a:schemeClr>
+            </a:solidFill>
+          </a:ln>
+        </p:spPr>
+        <p:style>
+          <a:lnRef idx="1">
+            <a:schemeClr val="accent1"/>
+          </a:lnRef>
+          <a:fillRef idx="0">
+            <a:schemeClr val="accent1"/>
+          </a:fillRef>
+          <a:effectRef idx="0">
+            <a:schemeClr val="accent1"/>
+          </a:effectRef>
+          <a:fontRef idx="minor">
+            <a:schemeClr val="tx1"/>
+          </a:fontRef>
+        </p:style>
+      </p:cxnSp>
+      <p:cxnSp>
+        <p:nvCxnSpPr>
+          <p:cNvPr id="3" name="直接连接符 2">
+            <a:extLst>
+              <a:ext uri="{FF2B5EF4-FFF2-40B4-BE49-F238E27FC236}">
+                <a16:creationId xmlns:a16="http://schemas.microsoft.com/office/drawing/2014/main" id="{D7BC58BF-1A67-F28A-94E1-8A95D86F961A}"/>
+              </a:ext>
+            </a:extLst>
+          </p:cNvPr>
+          <p:cNvCxnSpPr>
+            <a:cxnSpLocks/>
+          </p:cNvCxnSpPr>
+          <p:nvPr/>
+        </p:nvCxnSpPr>
+        <p:spPr>
+          <a:xfrm>
+            <a:off x="4645153" y="925149"/>
+            <a:ext cx="0" cy="5493294"/>
+          </a:xfrm>
+          <a:prstGeom prst="line">
+            <a:avLst/>
+          </a:prstGeom>
+          <a:ln w="19050">
+            <a:solidFill>
+              <a:schemeClr val="tx1">
+                <a:lumMod val="95000"/>
+                <a:lumOff val="5000"/>
+              </a:schemeClr>
+            </a:solidFill>
+          </a:ln>
+        </p:spPr>
+        <p:style>
+          <a:lnRef idx="1">
+            <a:schemeClr val="accent1"/>
+          </a:lnRef>
+          <a:fillRef idx="0">
+            <a:schemeClr val="accent1"/>
+          </a:fillRef>
+          <a:effectRef idx="0">
+            <a:schemeClr val="accent1"/>
+          </a:effectRef>
+          <a:fontRef idx="minor">
+            <a:schemeClr val="tx1"/>
+          </a:fontRef>
+        </p:style>
+      </p:cxnSp>
+      <p:sp>
+        <p:nvSpPr>
+          <p:cNvPr id="25" name="文本框 24">
+            <a:extLst>
+              <a:ext uri="{FF2B5EF4-FFF2-40B4-BE49-F238E27FC236}">
+                <a16:creationId xmlns:a16="http://schemas.microsoft.com/office/drawing/2014/main" id="{F78C3EE3-23AF-2936-A5BF-ED7BDA4E25EF}"/>
+              </a:ext>
+            </a:extLst>
+          </p:cNvPr>
+          <p:cNvSpPr txBox="1"/>
+          <p:nvPr/>
+        </p:nvSpPr>
+        <p:spPr>
+          <a:xfrm>
+            <a:off x="2845478" y="1574747"/>
+            <a:ext cx="1647376" cy="461665"/>
+          </a:xfrm>
+          <a:prstGeom prst="rect">
+            <a:avLst/>
+          </a:prstGeom>
+          <a:noFill/>
+        </p:spPr>
+        <p:txBody>
+          <a:bodyPr wrap="square" rtlCol="0">
+            <a:spAutoFit/>
+          </a:bodyPr>
+          <a:lstStyle/>
+          <a:p>
+            <a:pPr algn="ctr"/>
+            <a:r>
+              <a:rPr lang="zh-CN" altLang="en-US" sz="1200" dirty="0"/>
+              <a:t>打包代码，生成结果启动本地服务</a:t>
+            </a:r>
+          </a:p>
+        </p:txBody>
+      </p:sp>
+      <p:sp>
+        <p:nvSpPr>
+          <p:cNvPr id="27" name="右箭头 26">
+            <a:extLst>
+              <a:ext uri="{FF2B5EF4-FFF2-40B4-BE49-F238E27FC236}">
+                <a16:creationId xmlns:a16="http://schemas.microsoft.com/office/drawing/2014/main" id="{5DBC3FC3-791F-DA87-8615-FB3F3212FCD1}"/>
+              </a:ext>
+            </a:extLst>
+          </p:cNvPr>
+          <p:cNvSpPr/>
+          <p:nvPr/>
+        </p:nvSpPr>
+        <p:spPr>
+          <a:xfrm rot="5400000">
+            <a:off x="4067470" y="1697464"/>
+            <a:ext cx="810100" cy="173455"/>
+          </a:xfrm>
+          <a:prstGeom prst="rightArrow">
+            <a:avLst/>
+          </a:prstGeom>
+          <a:ln>
+            <a:noFill/>
+          </a:ln>
+        </p:spPr>
+        <p:style>
+          <a:lnRef idx="2">
+            <a:schemeClr val="accent1">
+              <a:shade val="50000"/>
+            </a:schemeClr>
+          </a:lnRef>
+          <a:fillRef idx="1">
+            <a:schemeClr val="accent1"/>
+          </a:fillRef>
+          <a:effectRef idx="0">
+            <a:schemeClr val="accent1"/>
+          </a:effectRef>
+          <a:fontRef idx="minor">
+            <a:schemeClr val="lt1"/>
+          </a:fontRef>
+        </p:style>
+        <p:txBody>
+          <a:bodyPr rtlCol="0" anchor="ctr"/>
+          <a:lstStyle/>
+          <a:p>
+            <a:pPr algn="ctr"/>
+            <a:endParaRPr lang="zh-CN" altLang="en-US" sz="1400"/>
+          </a:p>
+        </p:txBody>
+      </p:sp>
+      <p:sp>
+        <p:nvSpPr>
+          <p:cNvPr id="4" name="右箭头 3">
+            <a:extLst>
+              <a:ext uri="{FF2B5EF4-FFF2-40B4-BE49-F238E27FC236}">
+                <a16:creationId xmlns:a16="http://schemas.microsoft.com/office/drawing/2014/main" id="{D9826BAE-F5DF-403B-201B-046E1670494D}"/>
+              </a:ext>
+            </a:extLst>
+          </p:cNvPr>
+          <p:cNvSpPr/>
+          <p:nvPr/>
+        </p:nvSpPr>
+        <p:spPr>
+          <a:xfrm>
+            <a:off x="1498893" y="1068343"/>
+            <a:ext cx="2993961" cy="219112"/>
+          </a:xfrm>
+          <a:prstGeom prst="rightArrow">
+            <a:avLst/>
+          </a:prstGeom>
+          <a:ln>
+            <a:noFill/>
+          </a:ln>
+        </p:spPr>
+        <p:style>
+          <a:lnRef idx="2">
+            <a:schemeClr val="accent1">
+              <a:shade val="50000"/>
+            </a:schemeClr>
+          </a:lnRef>
+          <a:fillRef idx="1">
+            <a:schemeClr val="accent1"/>
+          </a:fillRef>
+          <a:effectRef idx="0">
+            <a:schemeClr val="accent1"/>
+          </a:effectRef>
+          <a:fontRef idx="minor">
+            <a:schemeClr val="lt1"/>
+          </a:fontRef>
+        </p:style>
+        <p:txBody>
+          <a:bodyPr rtlCol="0" anchor="ctr"/>
+          <a:lstStyle/>
+          <a:p>
+            <a:pPr algn="ctr"/>
+            <a:endParaRPr lang="zh-CN" altLang="en-US" sz="1400"/>
+          </a:p>
+        </p:txBody>
+      </p:sp>
+      <p:cxnSp>
+        <p:nvCxnSpPr>
+          <p:cNvPr id="7" name="直接连接符 6">
+            <a:extLst>
+              <a:ext uri="{FF2B5EF4-FFF2-40B4-BE49-F238E27FC236}">
+                <a16:creationId xmlns:a16="http://schemas.microsoft.com/office/drawing/2014/main" id="{B8490421-EF53-B012-E2CA-CD58913E44C3}"/>
+              </a:ext>
+            </a:extLst>
+          </p:cNvPr>
+          <p:cNvCxnSpPr>
+            <a:cxnSpLocks/>
+          </p:cNvCxnSpPr>
+          <p:nvPr/>
+        </p:nvCxnSpPr>
+        <p:spPr>
+          <a:xfrm>
+            <a:off x="9897110" y="934720"/>
+            <a:ext cx="0" cy="5564051"/>
+          </a:xfrm>
+          <a:prstGeom prst="line">
+            <a:avLst/>
+          </a:prstGeom>
+          <a:ln w="19050">
+            <a:solidFill>
+              <a:schemeClr val="tx1">
+                <a:lumMod val="95000"/>
+                <a:lumOff val="5000"/>
+              </a:schemeClr>
+            </a:solidFill>
+          </a:ln>
+        </p:spPr>
+        <p:style>
+          <a:lnRef idx="1">
+            <a:schemeClr val="accent1"/>
+          </a:lnRef>
+          <a:fillRef idx="0">
+            <a:schemeClr val="accent1"/>
+          </a:fillRef>
+          <a:effectRef idx="0">
+            <a:schemeClr val="accent1"/>
+          </a:effectRef>
+          <a:fontRef idx="minor">
+            <a:schemeClr val="tx1"/>
+          </a:fontRef>
+        </p:style>
+      </p:cxnSp>
+      <p:sp>
+        <p:nvSpPr>
+          <p:cNvPr id="8" name="文本框 7">
+            <a:extLst>
+              <a:ext uri="{FF2B5EF4-FFF2-40B4-BE49-F238E27FC236}">
+                <a16:creationId xmlns:a16="http://schemas.microsoft.com/office/drawing/2014/main" id="{5748A862-17B7-78E7-BD13-31E62611EC50}"/>
+              </a:ext>
+            </a:extLst>
+          </p:cNvPr>
+          <p:cNvSpPr txBox="1"/>
+          <p:nvPr/>
+        </p:nvSpPr>
+        <p:spPr>
+          <a:xfrm>
+            <a:off x="9214168" y="489267"/>
+            <a:ext cx="1365885" cy="306705"/>
+          </a:xfrm>
+          <a:prstGeom prst="rect">
+            <a:avLst/>
+          </a:prstGeom>
+          <a:noFill/>
+          <a:ln w="12700">
+            <a:solidFill>
+              <a:schemeClr val="tx1"/>
+            </a:solidFill>
+          </a:ln>
+        </p:spPr>
+        <p:txBody>
+          <a:bodyPr wrap="square" rtlCol="0">
+            <a:spAutoFit/>
+          </a:bodyPr>
+          <a:lstStyle/>
+          <a:p>
+            <a:pPr algn="ctr"/>
+            <a:r>
+              <a:rPr lang="zh-CN" altLang="en-US" sz="1400" dirty="0"/>
+              <a:t>浏览器端</a:t>
+            </a:r>
+          </a:p>
+        </p:txBody>
+      </p:sp>
+      <p:sp>
+        <p:nvSpPr>
+          <p:cNvPr id="9" name="右箭头 3">
+            <a:extLst>
+              <a:ext uri="{FF2B5EF4-FFF2-40B4-BE49-F238E27FC236}">
+                <a16:creationId xmlns:a16="http://schemas.microsoft.com/office/drawing/2014/main" id="{6F5FE3EA-6399-0400-F2AD-1625BFD7D0EF}"/>
+              </a:ext>
+            </a:extLst>
+          </p:cNvPr>
+          <p:cNvSpPr/>
+          <p:nvPr/>
+        </p:nvSpPr>
+        <p:spPr>
+          <a:xfrm>
+            <a:off x="4806497" y="1991146"/>
+            <a:ext cx="4862189" cy="207010"/>
+          </a:xfrm>
+          <a:prstGeom prst="leftRightArrow">
+            <a:avLst/>
+          </a:prstGeom>
+          <a:ln>
+            <a:noFill/>
+          </a:ln>
+        </p:spPr>
+        <p:style>
+          <a:lnRef idx="2">
+            <a:schemeClr val="accent1">
+              <a:shade val="50000"/>
+            </a:schemeClr>
+          </a:lnRef>
+          <a:fillRef idx="1">
+            <a:schemeClr val="accent1"/>
+          </a:fillRef>
+          <a:effectRef idx="0">
+            <a:schemeClr val="accent1"/>
+          </a:effectRef>
+          <a:fontRef idx="minor">
+            <a:schemeClr val="lt1"/>
+          </a:fontRef>
+        </p:style>
+        <p:txBody>
+          <a:bodyPr rtlCol="0" anchor="ctr"/>
+          <a:lstStyle/>
+          <a:p>
+            <a:pPr algn="ctr"/>
+            <a:endParaRPr lang="zh-CN" altLang="en-US" sz="1400"/>
+          </a:p>
+        </p:txBody>
+      </p:sp>
+      <p:sp>
+        <p:nvSpPr>
+          <p:cNvPr id="10" name="文本框 9">
+            <a:extLst>
+              <a:ext uri="{FF2B5EF4-FFF2-40B4-BE49-F238E27FC236}">
+                <a16:creationId xmlns:a16="http://schemas.microsoft.com/office/drawing/2014/main" id="{2545C99C-B7C6-833D-B1CE-A74900AE8738}"/>
+              </a:ext>
+            </a:extLst>
+          </p:cNvPr>
+          <p:cNvSpPr txBox="1"/>
+          <p:nvPr/>
+        </p:nvSpPr>
+        <p:spPr>
+          <a:xfrm>
+            <a:off x="2062088" y="806266"/>
+            <a:ext cx="1733991" cy="276999"/>
+          </a:xfrm>
+          <a:prstGeom prst="rect">
+            <a:avLst/>
+          </a:prstGeom>
+          <a:noFill/>
+        </p:spPr>
+        <p:txBody>
+          <a:bodyPr wrap="square" rtlCol="0">
+            <a:spAutoFit/>
+          </a:bodyPr>
+          <a:lstStyle/>
+          <a:p>
+            <a:r>
+              <a:rPr lang="zh-CN" altLang="en-US" sz="1200" dirty="0"/>
+              <a:t>以</a:t>
+            </a:r>
+            <a:r>
+              <a:rPr lang="en-US" altLang="zh-CN" sz="1200" dirty="0"/>
+              <a:t>watch</a:t>
+            </a:r>
+            <a:r>
+              <a:rPr lang="zh-CN" altLang="en-US" sz="1200" dirty="0"/>
+              <a:t>模式启动服务</a:t>
+            </a:r>
+          </a:p>
+        </p:txBody>
+      </p:sp>
+      <p:sp>
+        <p:nvSpPr>
+          <p:cNvPr id="16" name="文本框 15">
+            <a:extLst>
+              <a:ext uri="{FF2B5EF4-FFF2-40B4-BE49-F238E27FC236}">
+                <a16:creationId xmlns:a16="http://schemas.microsoft.com/office/drawing/2014/main" id="{D8A5EC62-B7BD-225B-FE5D-86DD0B03C9E5}"/>
+              </a:ext>
+            </a:extLst>
+          </p:cNvPr>
+          <p:cNvSpPr txBox="1"/>
+          <p:nvPr/>
+        </p:nvSpPr>
+        <p:spPr>
+          <a:xfrm>
+            <a:off x="6457302" y="2999073"/>
+            <a:ext cx="1560579" cy="276999"/>
+          </a:xfrm>
+          <a:prstGeom prst="rect">
+            <a:avLst/>
+          </a:prstGeom>
+          <a:noFill/>
+        </p:spPr>
+        <p:txBody>
+          <a:bodyPr wrap="square" rtlCol="0">
+            <a:spAutoFit/>
+          </a:bodyPr>
+          <a:lstStyle/>
+          <a:p>
+            <a:r>
+              <a:rPr lang="zh-CN" altLang="en-US" sz="1200" dirty="0"/>
+              <a:t>通知代码存在更新</a:t>
+            </a:r>
+          </a:p>
+        </p:txBody>
+      </p:sp>
+      <p:sp>
+        <p:nvSpPr>
+          <p:cNvPr id="60" name="文本框 59">
+            <a:extLst>
+              <a:ext uri="{FF2B5EF4-FFF2-40B4-BE49-F238E27FC236}">
+                <a16:creationId xmlns:a16="http://schemas.microsoft.com/office/drawing/2014/main" id="{607DF931-91EB-98F7-8649-266E7DFF7C44}"/>
+              </a:ext>
+            </a:extLst>
+          </p:cNvPr>
+          <p:cNvSpPr txBox="1"/>
+          <p:nvPr/>
+        </p:nvSpPr>
+        <p:spPr>
+          <a:xfrm>
+            <a:off x="4631684" y="1664522"/>
+            <a:ext cx="5211814" cy="276999"/>
+          </a:xfrm>
+          <a:prstGeom prst="rect">
+            <a:avLst/>
+          </a:prstGeom>
+          <a:noFill/>
+        </p:spPr>
+        <p:txBody>
+          <a:bodyPr wrap="square" rtlCol="0">
+            <a:spAutoFit/>
+          </a:bodyPr>
+          <a:lstStyle/>
+          <a:p>
+            <a:pPr algn="ctr"/>
+            <a:r>
+              <a:rPr lang="zh-CN" altLang="en-US" sz="1200" dirty="0"/>
+              <a:t>浏览器请求页面，服务返回打包后文件 </a:t>
+            </a:r>
+            <a:r>
+              <a:rPr lang="en-US" altLang="zh-CN" sz="1200" dirty="0"/>
+              <a:t>+ runtime</a:t>
+            </a:r>
+            <a:r>
+              <a:rPr lang="zh-CN" altLang="en-US" sz="1200" dirty="0"/>
+              <a:t>代码，建立</a:t>
+            </a:r>
+            <a:r>
+              <a:rPr lang="en-US" altLang="zh-CN" sz="1200" dirty="0"/>
+              <a:t>WebSocket</a:t>
+            </a:r>
+            <a:r>
+              <a:rPr lang="zh-CN" altLang="en-US" sz="1200" dirty="0"/>
+              <a:t>连接</a:t>
+            </a:r>
+          </a:p>
+        </p:txBody>
+      </p:sp>
+      <p:sp>
+        <p:nvSpPr>
+          <p:cNvPr id="75" name="右箭头 3">
+            <a:extLst>
+              <a:ext uri="{FF2B5EF4-FFF2-40B4-BE49-F238E27FC236}">
+                <a16:creationId xmlns:a16="http://schemas.microsoft.com/office/drawing/2014/main" id="{E08DF61F-A8A4-3762-3D3D-EAF8940A2958}"/>
+              </a:ext>
+            </a:extLst>
+          </p:cNvPr>
+          <p:cNvSpPr/>
+          <p:nvPr/>
+        </p:nvSpPr>
+        <p:spPr>
+          <a:xfrm>
+            <a:off x="4806498" y="3253180"/>
+            <a:ext cx="4862187" cy="207010"/>
+          </a:xfrm>
+          <a:prstGeom prst="rightArrow">
+            <a:avLst/>
+          </a:prstGeom>
+          <a:ln>
+            <a:noFill/>
+          </a:ln>
+        </p:spPr>
+        <p:style>
+          <a:lnRef idx="2">
+            <a:schemeClr val="accent1">
+              <a:shade val="50000"/>
+            </a:schemeClr>
+          </a:lnRef>
+          <a:fillRef idx="1">
+            <a:schemeClr val="accent1"/>
+          </a:fillRef>
+          <a:effectRef idx="0">
+            <a:schemeClr val="accent1"/>
+          </a:effectRef>
+          <a:fontRef idx="minor">
+            <a:schemeClr val="lt1"/>
+          </a:fontRef>
+        </p:style>
+        <p:txBody>
+          <a:bodyPr rtlCol="0" anchor="ctr"/>
+          <a:lstStyle/>
+          <a:p>
+            <a:pPr algn="ctr"/>
+            <a:endParaRPr lang="zh-CN" altLang="en-US" sz="1400"/>
+          </a:p>
+        </p:txBody>
+      </p:sp>
+      <p:sp>
+        <p:nvSpPr>
+          <p:cNvPr id="21" name="右箭头 3">
+            <a:extLst>
+              <a:ext uri="{FF2B5EF4-FFF2-40B4-BE49-F238E27FC236}">
+                <a16:creationId xmlns:a16="http://schemas.microsoft.com/office/drawing/2014/main" id="{4D09BF65-EBCE-24C5-CEA6-05CC716F26B2}"/>
+              </a:ext>
+            </a:extLst>
+          </p:cNvPr>
+          <p:cNvSpPr/>
+          <p:nvPr/>
+        </p:nvSpPr>
+        <p:spPr>
+          <a:xfrm>
+            <a:off x="1498892" y="2609532"/>
+            <a:ext cx="2993961" cy="219112"/>
+          </a:xfrm>
+          <a:prstGeom prst="rightArrow">
+            <a:avLst/>
+          </a:prstGeom>
+          <a:ln>
+            <a:noFill/>
+          </a:ln>
+        </p:spPr>
+        <p:style>
+          <a:lnRef idx="2">
+            <a:schemeClr val="accent1">
+              <a:shade val="50000"/>
+            </a:schemeClr>
+          </a:lnRef>
+          <a:fillRef idx="1">
+            <a:schemeClr val="accent1"/>
+          </a:fillRef>
+          <a:effectRef idx="0">
+            <a:schemeClr val="accent1"/>
+          </a:effectRef>
+          <a:fontRef idx="minor">
+            <a:schemeClr val="lt1"/>
+          </a:fontRef>
+        </p:style>
+        <p:txBody>
+          <a:bodyPr rtlCol="0" anchor="ctr"/>
+          <a:lstStyle/>
+          <a:p>
+            <a:pPr algn="ctr"/>
+            <a:endParaRPr lang="zh-CN" altLang="en-US" sz="1400"/>
+          </a:p>
+        </p:txBody>
+      </p:sp>
+      <p:sp>
+        <p:nvSpPr>
+          <p:cNvPr id="24" name="文本框 23">
+            <a:extLst>
+              <a:ext uri="{FF2B5EF4-FFF2-40B4-BE49-F238E27FC236}">
+                <a16:creationId xmlns:a16="http://schemas.microsoft.com/office/drawing/2014/main" id="{496BFC8B-E1D6-C6BE-50E0-6ED21896AD7C}"/>
+              </a:ext>
+            </a:extLst>
+          </p:cNvPr>
+          <p:cNvSpPr txBox="1"/>
+          <p:nvPr/>
+        </p:nvSpPr>
+        <p:spPr>
+          <a:xfrm>
+            <a:off x="2539045" y="2315098"/>
+            <a:ext cx="864606" cy="276999"/>
+          </a:xfrm>
+          <a:prstGeom prst="rect">
+            <a:avLst/>
+          </a:prstGeom>
+          <a:noFill/>
+        </p:spPr>
+        <p:txBody>
+          <a:bodyPr wrap="square" rtlCol="0">
+            <a:spAutoFit/>
+          </a:bodyPr>
+          <a:lstStyle/>
+          <a:p>
+            <a:r>
+              <a:rPr lang="zh-CN" altLang="en-US" sz="1200" dirty="0"/>
+              <a:t>修改源码</a:t>
+            </a:r>
+          </a:p>
+        </p:txBody>
+      </p:sp>
+      <p:sp>
+        <p:nvSpPr>
+          <p:cNvPr id="26" name="文本框 25">
+            <a:extLst>
+              <a:ext uri="{FF2B5EF4-FFF2-40B4-BE49-F238E27FC236}">
+                <a16:creationId xmlns:a16="http://schemas.microsoft.com/office/drawing/2014/main" id="{F0BB7F10-4E64-D961-091F-7A48A24D6A12}"/>
+              </a:ext>
+            </a:extLst>
+          </p:cNvPr>
+          <p:cNvSpPr txBox="1"/>
+          <p:nvPr/>
+        </p:nvSpPr>
+        <p:spPr>
+          <a:xfrm>
+            <a:off x="3304014" y="3025011"/>
+            <a:ext cx="1188840" cy="276999"/>
+          </a:xfrm>
+          <a:prstGeom prst="rect">
+            <a:avLst/>
+          </a:prstGeom>
+          <a:noFill/>
+        </p:spPr>
+        <p:txBody>
+          <a:bodyPr wrap="square" rtlCol="0">
+            <a:spAutoFit/>
+          </a:bodyPr>
+          <a:lstStyle/>
+          <a:p>
+            <a:r>
+              <a:rPr lang="zh-CN" altLang="en-US" sz="1200" dirty="0"/>
+              <a:t>重新打包代码</a:t>
+            </a:r>
+          </a:p>
+        </p:txBody>
+      </p:sp>
+      <p:sp>
+        <p:nvSpPr>
+          <p:cNvPr id="29" name="右箭头 26">
+            <a:extLst>
+              <a:ext uri="{FF2B5EF4-FFF2-40B4-BE49-F238E27FC236}">
+                <a16:creationId xmlns:a16="http://schemas.microsoft.com/office/drawing/2014/main" id="{D4D33EF2-6C54-F023-76BA-B5FAEF89C362}"/>
+              </a:ext>
+            </a:extLst>
+          </p:cNvPr>
+          <p:cNvSpPr/>
+          <p:nvPr/>
+        </p:nvSpPr>
+        <p:spPr>
+          <a:xfrm rot="5400000">
+            <a:off x="4232687" y="3072292"/>
+            <a:ext cx="530982" cy="182438"/>
+          </a:xfrm>
+          <a:prstGeom prst="rightArrow">
+            <a:avLst/>
+          </a:prstGeom>
+          <a:ln>
+            <a:noFill/>
+          </a:ln>
+        </p:spPr>
+        <p:style>
+          <a:lnRef idx="2">
+            <a:schemeClr val="accent1">
+              <a:shade val="50000"/>
+            </a:schemeClr>
+          </a:lnRef>
+          <a:fillRef idx="1">
+            <a:schemeClr val="accent1"/>
+          </a:fillRef>
+          <a:effectRef idx="0">
+            <a:schemeClr val="accent1"/>
+          </a:effectRef>
+          <a:fontRef idx="minor">
+            <a:schemeClr val="lt1"/>
+          </a:fontRef>
+        </p:style>
+        <p:txBody>
+          <a:bodyPr rtlCol="0" anchor="ctr"/>
+          <a:lstStyle/>
+          <a:p>
+            <a:pPr algn="ctr"/>
+            <a:endParaRPr lang="zh-CN" altLang="en-US" sz="1400"/>
+          </a:p>
+        </p:txBody>
+      </p:sp>
+      <p:sp>
+        <p:nvSpPr>
+          <p:cNvPr id="31" name="文本框 30">
+            <a:extLst>
+              <a:ext uri="{FF2B5EF4-FFF2-40B4-BE49-F238E27FC236}">
+                <a16:creationId xmlns:a16="http://schemas.microsoft.com/office/drawing/2014/main" id="{C435B378-1AF9-DA39-7030-52C494A4E5D5}"/>
+              </a:ext>
+            </a:extLst>
+          </p:cNvPr>
+          <p:cNvSpPr txBox="1"/>
+          <p:nvPr/>
+        </p:nvSpPr>
+        <p:spPr>
+          <a:xfrm>
+            <a:off x="5455038" y="3634258"/>
+            <a:ext cx="3565106" cy="276999"/>
+          </a:xfrm>
+          <a:prstGeom prst="rect">
+            <a:avLst/>
+          </a:prstGeom>
+          <a:noFill/>
+        </p:spPr>
+        <p:txBody>
+          <a:bodyPr wrap="square" rtlCol="0">
+            <a:spAutoFit/>
+          </a:bodyPr>
+          <a:lstStyle/>
+          <a:p>
+            <a:r>
+              <a:rPr lang="zh-CN" altLang="en-US" sz="1200" dirty="0"/>
+              <a:t>浏览器请求</a:t>
+            </a:r>
+            <a:r>
+              <a:rPr lang="en-US" altLang="zh-CN" sz="1200" dirty="0"/>
+              <a:t>xxx.hot-update.json</a:t>
+            </a:r>
+            <a:r>
+              <a:rPr lang="zh-CN" altLang="en-US" sz="1200" dirty="0"/>
+              <a:t>，服务返回更新清单</a:t>
+            </a:r>
+          </a:p>
+        </p:txBody>
+      </p:sp>
+      <p:sp>
+        <p:nvSpPr>
+          <p:cNvPr id="33" name="右箭头 3">
+            <a:extLst>
+              <a:ext uri="{FF2B5EF4-FFF2-40B4-BE49-F238E27FC236}">
+                <a16:creationId xmlns:a16="http://schemas.microsoft.com/office/drawing/2014/main" id="{36C8A68D-7E00-CEA8-E8AD-D000BA394EAD}"/>
+              </a:ext>
+            </a:extLst>
+          </p:cNvPr>
+          <p:cNvSpPr/>
+          <p:nvPr/>
+        </p:nvSpPr>
+        <p:spPr>
+          <a:xfrm>
+            <a:off x="4806497" y="3967190"/>
+            <a:ext cx="4862189" cy="207010"/>
+          </a:xfrm>
+          <a:prstGeom prst="leftRightArrow">
+            <a:avLst/>
+          </a:prstGeom>
+          <a:ln>
+            <a:noFill/>
+          </a:ln>
+        </p:spPr>
+        <p:style>
+          <a:lnRef idx="2">
+            <a:schemeClr val="accent1">
+              <a:shade val="50000"/>
+            </a:schemeClr>
+          </a:lnRef>
+          <a:fillRef idx="1">
+            <a:schemeClr val="accent1"/>
+          </a:fillRef>
+          <a:effectRef idx="0">
+            <a:schemeClr val="accent1"/>
+          </a:effectRef>
+          <a:fontRef idx="minor">
+            <a:schemeClr val="lt1"/>
+          </a:fontRef>
+        </p:style>
+        <p:txBody>
+          <a:bodyPr rtlCol="0" anchor="ctr"/>
+          <a:lstStyle/>
+          <a:p>
+            <a:pPr algn="ctr"/>
+            <a:endParaRPr lang="zh-CN" altLang="en-US" sz="1400"/>
+          </a:p>
+        </p:txBody>
+      </p:sp>
+      <p:sp>
+        <p:nvSpPr>
+          <p:cNvPr id="34" name="文本框 33">
+            <a:extLst>
+              <a:ext uri="{FF2B5EF4-FFF2-40B4-BE49-F238E27FC236}">
+                <a16:creationId xmlns:a16="http://schemas.microsoft.com/office/drawing/2014/main" id="{455E1189-F4E0-869D-E6C7-7A7713BA9538}"/>
+              </a:ext>
+            </a:extLst>
+          </p:cNvPr>
+          <p:cNvSpPr txBox="1"/>
+          <p:nvPr/>
+        </p:nvSpPr>
+        <p:spPr>
+          <a:xfrm>
+            <a:off x="5327439" y="4362324"/>
+            <a:ext cx="3887386" cy="276999"/>
+          </a:xfrm>
+          <a:prstGeom prst="rect">
+            <a:avLst/>
+          </a:prstGeom>
+          <a:noFill/>
+        </p:spPr>
+        <p:txBody>
+          <a:bodyPr wrap="square" rtlCol="0">
+            <a:spAutoFit/>
+          </a:bodyPr>
+          <a:lstStyle/>
+          <a:p>
+            <a:r>
+              <a:rPr lang="zh-CN" altLang="en-US" sz="1200" dirty="0"/>
+              <a:t>浏览器批量请求新模块文件</a:t>
+            </a:r>
+            <a:r>
+              <a:rPr lang="en-US" altLang="zh-CN" sz="1200"/>
+              <a:t>xxx.</a:t>
+            </a:r>
+            <a:r>
+              <a:rPr lang="en-US" altLang="zh-CN" sz="1200" dirty="0"/>
+              <a:t>hot-update.js</a:t>
+            </a:r>
+            <a:r>
+              <a:rPr lang="zh-CN" altLang="en-US" sz="1200" dirty="0"/>
+              <a:t>，服务返回</a:t>
+            </a:r>
+          </a:p>
+        </p:txBody>
+      </p:sp>
+      <p:sp>
+        <p:nvSpPr>
+          <p:cNvPr id="35" name="右箭头 3">
+            <a:extLst>
+              <a:ext uri="{FF2B5EF4-FFF2-40B4-BE49-F238E27FC236}">
+                <a16:creationId xmlns:a16="http://schemas.microsoft.com/office/drawing/2014/main" id="{DC538117-5E0E-9192-AB58-87F7F9B36C03}"/>
+              </a:ext>
+            </a:extLst>
+          </p:cNvPr>
+          <p:cNvSpPr/>
+          <p:nvPr/>
+        </p:nvSpPr>
+        <p:spPr>
+          <a:xfrm>
+            <a:off x="4806497" y="4639323"/>
+            <a:ext cx="4862189" cy="207010"/>
+          </a:xfrm>
+          <a:prstGeom prst="leftRightArrow">
+            <a:avLst/>
+          </a:prstGeom>
+          <a:ln>
+            <a:noFill/>
+          </a:ln>
+        </p:spPr>
+        <p:style>
+          <a:lnRef idx="2">
+            <a:schemeClr val="accent1">
+              <a:shade val="50000"/>
+            </a:schemeClr>
+          </a:lnRef>
+          <a:fillRef idx="1">
+            <a:schemeClr val="accent1"/>
+          </a:fillRef>
+          <a:effectRef idx="0">
+            <a:schemeClr val="accent1"/>
+          </a:effectRef>
+          <a:fontRef idx="minor">
+            <a:schemeClr val="lt1"/>
+          </a:fontRef>
+        </p:style>
+        <p:txBody>
+          <a:bodyPr rtlCol="0" anchor="ctr"/>
+          <a:lstStyle/>
+          <a:p>
+            <a:pPr algn="ctr"/>
+            <a:endParaRPr lang="zh-CN" altLang="en-US" sz="1400"/>
+          </a:p>
+        </p:txBody>
+      </p:sp>
+      <p:sp>
+        <p:nvSpPr>
+          <p:cNvPr id="36" name="右箭头 26">
+            <a:extLst>
+              <a:ext uri="{FF2B5EF4-FFF2-40B4-BE49-F238E27FC236}">
+                <a16:creationId xmlns:a16="http://schemas.microsoft.com/office/drawing/2014/main" id="{D37A77A6-EA50-D413-F08B-F991A39231A0}"/>
+              </a:ext>
+            </a:extLst>
+          </p:cNvPr>
+          <p:cNvSpPr/>
+          <p:nvPr/>
+        </p:nvSpPr>
+        <p:spPr>
+          <a:xfrm rot="5400000">
+            <a:off x="9678700" y="5061151"/>
+            <a:ext cx="810100" cy="173455"/>
+          </a:xfrm>
+          <a:prstGeom prst="rightArrow">
+            <a:avLst/>
+          </a:prstGeom>
+          <a:ln>
+            <a:noFill/>
+          </a:ln>
+        </p:spPr>
+        <p:style>
+          <a:lnRef idx="2">
+            <a:schemeClr val="accent1">
+              <a:shade val="50000"/>
+            </a:schemeClr>
+          </a:lnRef>
+          <a:fillRef idx="1">
+            <a:schemeClr val="accent1"/>
+          </a:fillRef>
+          <a:effectRef idx="0">
+            <a:schemeClr val="accent1"/>
+          </a:effectRef>
+          <a:fontRef idx="minor">
+            <a:schemeClr val="lt1"/>
+          </a:fontRef>
+        </p:style>
+        <p:txBody>
+          <a:bodyPr rtlCol="0" anchor="ctr"/>
+          <a:lstStyle/>
+          <a:p>
+            <a:pPr algn="ctr"/>
+            <a:endParaRPr lang="zh-CN" altLang="en-US" sz="1400"/>
+          </a:p>
+        </p:txBody>
+      </p:sp>
+      <p:sp>
+        <p:nvSpPr>
+          <p:cNvPr id="37" name="文本框 36">
+            <a:extLst>
+              <a:ext uri="{FF2B5EF4-FFF2-40B4-BE49-F238E27FC236}">
+                <a16:creationId xmlns:a16="http://schemas.microsoft.com/office/drawing/2014/main" id="{FF9D06FA-BA8C-03BD-DD92-24796080140F}"/>
+              </a:ext>
+            </a:extLst>
+          </p:cNvPr>
+          <p:cNvSpPr txBox="1"/>
+          <p:nvPr/>
+        </p:nvSpPr>
+        <p:spPr>
+          <a:xfrm>
+            <a:off x="10170478" y="4917045"/>
+            <a:ext cx="1188765" cy="461665"/>
+          </a:xfrm>
+          <a:prstGeom prst="rect">
+            <a:avLst/>
+          </a:prstGeom>
+          <a:noFill/>
+        </p:spPr>
+        <p:txBody>
+          <a:bodyPr wrap="square" rtlCol="0">
+            <a:spAutoFit/>
+          </a:bodyPr>
+          <a:lstStyle/>
+          <a:p>
+            <a:r>
+              <a:rPr lang="zh-CN" altLang="en-US" sz="1200" dirty="0"/>
+              <a:t>使用模块冒泡方式更新代码</a:t>
+            </a:r>
+            <a:endParaRPr lang="en-US" altLang="zh-CN" sz="1200" dirty="0"/>
+          </a:p>
+        </p:txBody>
+      </p:sp>
+      <p:sp>
+        <p:nvSpPr>
+          <p:cNvPr id="41" name="文本框 40">
+            <a:extLst>
+              <a:ext uri="{FF2B5EF4-FFF2-40B4-BE49-F238E27FC236}">
+                <a16:creationId xmlns:a16="http://schemas.microsoft.com/office/drawing/2014/main" id="{4E4D53B1-70FF-D036-BA73-2AD32B6272AB}"/>
+              </a:ext>
+            </a:extLst>
+          </p:cNvPr>
+          <p:cNvSpPr txBox="1"/>
+          <p:nvPr/>
+        </p:nvSpPr>
+        <p:spPr>
+          <a:xfrm>
+            <a:off x="9938387" y="5713584"/>
+            <a:ext cx="1743980" cy="276999"/>
+          </a:xfrm>
+          <a:prstGeom prst="rect">
+            <a:avLst/>
+          </a:prstGeom>
+          <a:noFill/>
+        </p:spPr>
+        <p:txBody>
+          <a:bodyPr wrap="square" rtlCol="0">
+            <a:spAutoFit/>
+          </a:bodyPr>
+          <a:lstStyle/>
+          <a:p>
+            <a:r>
+              <a:rPr lang="zh-CN" altLang="en-US" sz="1200" dirty="0"/>
+              <a:t>最终呈现更新后的效果</a:t>
+            </a:r>
+            <a:endParaRPr lang="en-US" altLang="zh-CN" sz="1200" dirty="0"/>
+          </a:p>
+        </p:txBody>
+      </p:sp>
+    </p:spTree>
+    <p:extLst>
+      <p:ext uri="{BB962C8B-B14F-4D97-AF65-F5344CB8AC3E}">
+        <p14:creationId xmlns:p14="http://schemas.microsoft.com/office/powerpoint/2010/main" val="3467654465"/>
+      </p:ext>
+    </p:extLst>
   </p:cSld>
   <p:clrMapOvr>
     <a:masterClrMapping/>
@@ -3595,7 +4692,14 @@
         <p:cNvGrpSpPr/>
         <p:nvPr/>
       </p:nvGrpSpPr>
-      <p:grpSpPr/>
+      <p:grpSpPr>
+        <a:xfrm>
+          <a:off x="0" y="0"/>
+          <a:ext cx="0" cy="0"/>
+          <a:chOff x="0" y="0"/>
+          <a:chExt cx="0" cy="0"/>
+        </a:xfrm>
+      </p:grpSpPr>
       <p:sp>
         <p:nvSpPr>
           <p:cNvPr id="5" name="文本框 4"/>
@@ -3621,13 +4725,13 @@
           <a:bodyPr wrap="square" rtlCol="0">
             <a:spAutoFit/>
           </a:bodyPr>
+          <a:lstStyle/>
           <a:p>
             <a:pPr algn="ctr"/>
             <a:r>
               <a:rPr lang="zh-CN" altLang="en-US" sz="1400"/>
               <a:t>浏览器</a:t>
             </a:r>
-            <a:endParaRPr lang="zh-CN" altLang="en-US" sz="1400"/>
           </a:p>
         </p:txBody>
       </p:sp>
@@ -3667,6 +4771,7 @@
         </p:style>
         <p:txBody>
           <a:bodyPr rtlCol="0" anchor="ctr"/>
+          <a:lstStyle/>
           <a:p>
             <a:pPr algn="ctr"/>
             <a:endParaRPr lang="zh-CN" altLang="en-US" sz="1400"/>
@@ -3709,6 +4814,7 @@
         </p:style>
         <p:txBody>
           <a:bodyPr rtlCol="0" anchor="ctr"/>
+          <a:lstStyle/>
           <a:p>
             <a:pPr algn="ctr"/>
             <a:endParaRPr lang="zh-CN" altLang="en-US" sz="1400"/>
@@ -3735,12 +4841,12 @@
           <a:bodyPr wrap="square" rtlCol="0">
             <a:spAutoFit/>
           </a:bodyPr>
+          <a:lstStyle/>
           <a:p>
             <a:r>
               <a:rPr lang="zh-CN" altLang="en-US" sz="1400"/>
               <a:t>准备页面数据</a:t>
             </a:r>
-            <a:endParaRPr lang="zh-CN" altLang="en-US" sz="1400"/>
           </a:p>
         </p:txBody>
       </p:sp>
@@ -3769,6 +4875,7 @@
           <a:bodyPr wrap="square" rtlCol="0">
             <a:spAutoFit/>
           </a:bodyPr>
+          <a:lstStyle/>
           <a:p>
             <a:pPr algn="ctr"/>
             <a:r>
@@ -3779,7 +4886,6 @@
               <a:rPr lang="zh-CN" altLang="en-US" sz="1400"/>
               <a:t>服务端</a:t>
             </a:r>
-            <a:endParaRPr lang="zh-CN" altLang="en-US" sz="1400"/>
           </a:p>
         </p:txBody>
       </p:sp>
@@ -3819,6 +4925,7 @@
         </p:style>
         <p:txBody>
           <a:bodyPr rtlCol="0" anchor="ctr"/>
+          <a:lstStyle/>
           <a:p>
             <a:pPr algn="ctr"/>
             <a:endParaRPr lang="zh-CN" altLang="en-US" sz="1400"/>
@@ -3845,12 +4952,12 @@
           <a:bodyPr wrap="square" rtlCol="0">
             <a:spAutoFit/>
           </a:bodyPr>
+          <a:lstStyle/>
           <a:p>
             <a:r>
               <a:rPr lang="zh-CN" altLang="en-US" sz="1400"/>
               <a:t>请求页面</a:t>
             </a:r>
-            <a:endParaRPr lang="zh-CN" altLang="en-US" sz="1400"/>
           </a:p>
         </p:txBody>
       </p:sp>
@@ -3874,12 +4981,12 @@
           <a:bodyPr wrap="square" rtlCol="0">
             <a:spAutoFit/>
           </a:bodyPr>
+          <a:lstStyle/>
           <a:p>
             <a:r>
               <a:rPr lang="zh-CN" altLang="en-US" sz="1400"/>
               <a:t>收到请求</a:t>
             </a:r>
-            <a:endParaRPr lang="zh-CN" altLang="en-US" sz="1400"/>
           </a:p>
         </p:txBody>
       </p:sp>
@@ -3979,12 +5086,12 @@
           <a:bodyPr wrap="square" rtlCol="0">
             <a:spAutoFit/>
           </a:bodyPr>
+          <a:lstStyle/>
           <a:p>
             <a:r>
               <a:rPr lang="zh-CN" altLang="en-US" sz="1400"/>
               <a:t>返回数据</a:t>
             </a:r>
-            <a:endParaRPr lang="zh-CN" altLang="en-US" sz="1400"/>
           </a:p>
         </p:txBody>
       </p:sp>
@@ -4008,12 +5115,12 @@
           <a:bodyPr wrap="square" rtlCol="0">
             <a:spAutoFit/>
           </a:bodyPr>
+          <a:lstStyle/>
           <a:p>
             <a:r>
               <a:rPr lang="zh-CN" altLang="en-US" sz="1400"/>
               <a:t>收到数据</a:t>
             </a:r>
-            <a:endParaRPr lang="zh-CN" altLang="en-US" sz="1400"/>
           </a:p>
         </p:txBody>
       </p:sp>
@@ -4053,6 +5160,7 @@
         </p:style>
         <p:txBody>
           <a:bodyPr rtlCol="0" anchor="ctr"/>
+          <a:lstStyle/>
           <a:p>
             <a:pPr algn="ctr"/>
             <a:endParaRPr lang="zh-CN" altLang="en-US" sz="1400"/>
@@ -4079,12 +5187,12 @@
           <a:bodyPr wrap="square" rtlCol="0">
             <a:spAutoFit/>
           </a:bodyPr>
+          <a:lstStyle/>
           <a:p>
             <a:r>
               <a:rPr lang="zh-CN" altLang="en-US" sz="1400"/>
               <a:t>渲染</a:t>
             </a:r>
-            <a:endParaRPr lang="zh-CN" altLang="en-US" sz="1400"/>
           </a:p>
         </p:txBody>
       </p:sp>
@@ -4108,16 +5216,12 @@
           <a:bodyPr wrap="square" rtlCol="0">
             <a:spAutoFit/>
           </a:bodyPr>
+          <a:lstStyle/>
           <a:p>
             <a:r>
               <a:rPr lang="zh-CN" altLang="en-US" sz="1400"/>
-              <a:t>展示</a:t>
-            </a:r>
-            <a:r>
-              <a:rPr lang="zh-CN" altLang="en-US" sz="1400"/>
-              <a:t>页面</a:t>
-            </a:r>
-            <a:endParaRPr lang="zh-CN" altLang="en-US" sz="1400"/>
+              <a:t>展示页面</a:t>
+            </a:r>
           </a:p>
         </p:txBody>
       </p:sp>
@@ -4146,13 +5250,13 @@
           <a:bodyPr wrap="square" rtlCol="0">
             <a:spAutoFit/>
           </a:bodyPr>
+          <a:lstStyle/>
           <a:p>
             <a:pPr algn="ctr"/>
             <a:r>
               <a:rPr lang="zh-CN" altLang="en-US" sz="1400"/>
               <a:t>浏览器</a:t>
             </a:r>
-            <a:endParaRPr lang="zh-CN" altLang="en-US" sz="1400"/>
           </a:p>
         </p:txBody>
       </p:sp>
@@ -4192,6 +5296,7 @@
         </p:style>
         <p:txBody>
           <a:bodyPr rtlCol="0" anchor="ctr"/>
+          <a:lstStyle/>
           <a:p>
             <a:pPr algn="ctr"/>
             <a:endParaRPr lang="zh-CN" altLang="en-US" sz="1400"/>
@@ -4234,6 +5339,7 @@
         </p:style>
         <p:txBody>
           <a:bodyPr rtlCol="0" anchor="ctr"/>
+          <a:lstStyle/>
           <a:p>
             <a:pPr algn="ctr"/>
             <a:endParaRPr lang="zh-CN" altLang="en-US" sz="1400"/>
@@ -4260,16 +5366,12 @@
           <a:bodyPr wrap="square" rtlCol="0">
             <a:spAutoFit/>
           </a:bodyPr>
+          <a:lstStyle/>
           <a:p>
             <a:r>
               <a:rPr lang="zh-CN" altLang="en-US" sz="1400"/>
-              <a:t>准备</a:t>
-            </a:r>
-            <a:r>
-              <a:rPr lang="zh-CN" altLang="en-US" sz="1400"/>
-              <a:t>部分页面数据</a:t>
-            </a:r>
-            <a:endParaRPr lang="zh-CN" altLang="en-US" sz="1400"/>
+              <a:t>准备部分页面数据</a:t>
+            </a:r>
           </a:p>
         </p:txBody>
       </p:sp>
@@ -4298,6 +5400,7 @@
           <a:bodyPr wrap="square" rtlCol="0">
             <a:spAutoFit/>
           </a:bodyPr>
+          <a:lstStyle/>
           <a:p>
             <a:pPr algn="ctr"/>
             <a:r>
@@ -4308,7 +5411,6 @@
               <a:rPr lang="zh-CN" altLang="en-US" sz="1400"/>
               <a:t>服务端</a:t>
             </a:r>
-            <a:endParaRPr lang="zh-CN" altLang="en-US" sz="1400"/>
           </a:p>
         </p:txBody>
       </p:sp>
@@ -4348,6 +5450,7 @@
         </p:style>
         <p:txBody>
           <a:bodyPr rtlCol="0" anchor="ctr"/>
+          <a:lstStyle/>
           <a:p>
             <a:pPr algn="ctr"/>
             <a:endParaRPr lang="zh-CN" altLang="en-US" sz="1400"/>
@@ -4374,12 +5477,12 @@
           <a:bodyPr wrap="square" rtlCol="0">
             <a:spAutoFit/>
           </a:bodyPr>
+          <a:lstStyle/>
           <a:p>
             <a:r>
               <a:rPr lang="zh-CN" altLang="en-US" sz="1400"/>
               <a:t>请求页面</a:t>
             </a:r>
-            <a:endParaRPr lang="zh-CN" altLang="en-US" sz="1400"/>
           </a:p>
         </p:txBody>
       </p:sp>
@@ -4403,12 +5506,12 @@
           <a:bodyPr wrap="square" rtlCol="0">
             <a:spAutoFit/>
           </a:bodyPr>
+          <a:lstStyle/>
           <a:p>
             <a:r>
               <a:rPr lang="zh-CN" altLang="en-US" sz="1400"/>
               <a:t>收到请求</a:t>
             </a:r>
-            <a:endParaRPr lang="zh-CN" altLang="en-US" sz="1400"/>
           </a:p>
         </p:txBody>
       </p:sp>
@@ -4508,16 +5611,12 @@
           <a:bodyPr wrap="square" rtlCol="0">
             <a:spAutoFit/>
           </a:bodyPr>
+          <a:lstStyle/>
           <a:p>
             <a:r>
               <a:rPr lang="zh-CN" altLang="en-US" sz="1400"/>
-              <a:t>返回</a:t>
-            </a:r>
-            <a:r>
-              <a:rPr lang="zh-CN" altLang="en-US" sz="1400"/>
-              <a:t>部分数据</a:t>
-            </a:r>
-            <a:endParaRPr lang="zh-CN" altLang="en-US" sz="1400"/>
+              <a:t>返回部分数据</a:t>
+            </a:r>
           </a:p>
         </p:txBody>
       </p:sp>
@@ -4541,12 +5640,12 @@
           <a:bodyPr wrap="square" rtlCol="0">
             <a:spAutoFit/>
           </a:bodyPr>
+          <a:lstStyle/>
           <a:p>
             <a:r>
               <a:rPr lang="zh-CN" altLang="en-US" sz="1400"/>
               <a:t>收到数据</a:t>
             </a:r>
-            <a:endParaRPr lang="zh-CN" altLang="en-US" sz="1400"/>
           </a:p>
         </p:txBody>
       </p:sp>
@@ -4586,6 +5685,7 @@
         </p:style>
         <p:txBody>
           <a:bodyPr rtlCol="0" anchor="ctr"/>
+          <a:lstStyle/>
           <a:p>
             <a:pPr algn="ctr"/>
             <a:endParaRPr lang="zh-CN" altLang="en-US" sz="1400"/>
@@ -4612,12 +5712,12 @@
           <a:bodyPr wrap="square" rtlCol="0">
             <a:spAutoFit/>
           </a:bodyPr>
+          <a:lstStyle/>
           <a:p>
             <a:r>
               <a:rPr lang="zh-CN" altLang="en-US" sz="1400"/>
               <a:t>渲染</a:t>
             </a:r>
-            <a:endParaRPr lang="zh-CN" altLang="en-US" sz="1400"/>
           </a:p>
         </p:txBody>
       </p:sp>
@@ -4641,16 +5741,12 @@
           <a:bodyPr wrap="square" rtlCol="0">
             <a:spAutoFit/>
           </a:bodyPr>
+          <a:lstStyle/>
           <a:p>
             <a:r>
               <a:rPr lang="zh-CN" altLang="en-US" sz="1400"/>
-              <a:t>展示</a:t>
-            </a:r>
-            <a:r>
-              <a:rPr lang="zh-CN" altLang="en-US" sz="1400"/>
-              <a:t>部分页面</a:t>
-            </a:r>
-            <a:endParaRPr lang="zh-CN" altLang="en-US" sz="1400"/>
+              <a:t>展示部分页面</a:t>
+            </a:r>
           </a:p>
         </p:txBody>
       </p:sp>
@@ -4681,17 +5777,13 @@
           <a:bodyPr wrap="square" rtlCol="0">
             <a:spAutoFit/>
           </a:bodyPr>
+          <a:lstStyle/>
           <a:p>
             <a:pPr algn="ctr"/>
             <a:r>
               <a:rPr lang="zh-CN" altLang="en-US" sz="1400"/>
-              <a:t>非流式</a:t>
-            </a:r>
-            <a:r>
-              <a:rPr lang="zh-CN" altLang="en-US" sz="1400"/>
-              <a:t>渲染</a:t>
-            </a:r>
-            <a:endParaRPr lang="zh-CN" altLang="en-US" sz="1400"/>
+              <a:t>非流式渲染</a:t>
+            </a:r>
           </a:p>
         </p:txBody>
       </p:sp>
@@ -4731,6 +5823,7 @@
         </p:style>
         <p:txBody>
           <a:bodyPr rtlCol="0" anchor="ctr"/>
+          <a:lstStyle/>
           <a:p>
             <a:pPr algn="ctr"/>
             <a:endParaRPr lang="zh-CN" altLang="en-US" sz="1400"/>
@@ -4757,16 +5850,12 @@
           <a:bodyPr wrap="square" rtlCol="0">
             <a:spAutoFit/>
           </a:bodyPr>
+          <a:lstStyle/>
           <a:p>
             <a:r>
               <a:rPr lang="zh-CN" altLang="en-US" sz="1400"/>
-              <a:t>准备</a:t>
-            </a:r>
-            <a:r>
-              <a:rPr lang="zh-CN" altLang="en-US" sz="1400"/>
-              <a:t>部分页面数据</a:t>
-            </a:r>
-            <a:endParaRPr lang="zh-CN" altLang="en-US" sz="1400"/>
+              <a:t>准备部分页面数据</a:t>
+            </a:r>
           </a:p>
         </p:txBody>
       </p:sp>
@@ -4790,16 +5879,12 @@
           <a:bodyPr wrap="square" rtlCol="0">
             <a:spAutoFit/>
           </a:bodyPr>
+          <a:lstStyle/>
           <a:p>
             <a:r>
               <a:rPr lang="zh-CN" altLang="en-US" sz="1400"/>
-              <a:t>返回</a:t>
-            </a:r>
-            <a:r>
-              <a:rPr lang="zh-CN" altLang="en-US" sz="1400"/>
-              <a:t>部分数据</a:t>
-            </a:r>
-            <a:endParaRPr lang="zh-CN" altLang="en-US" sz="1400"/>
+              <a:t>返回部分数据</a:t>
+            </a:r>
           </a:p>
         </p:txBody>
       </p:sp>
@@ -4839,6 +5924,7 @@
         </p:style>
         <p:txBody>
           <a:bodyPr rtlCol="0" anchor="ctr"/>
+          <a:lstStyle/>
           <a:p>
             <a:pPr algn="ctr"/>
             <a:endParaRPr lang="zh-CN" altLang="en-US" sz="1400"/>
@@ -4865,12 +5951,12 @@
           <a:bodyPr wrap="square" rtlCol="0">
             <a:spAutoFit/>
           </a:bodyPr>
+          <a:lstStyle/>
           <a:p>
             <a:r>
               <a:rPr lang="zh-CN" altLang="en-US" sz="1400"/>
               <a:t>收到数据</a:t>
             </a:r>
-            <a:endParaRPr lang="zh-CN" altLang="en-US" sz="1400"/>
           </a:p>
         </p:txBody>
       </p:sp>
@@ -4910,6 +5996,7 @@
         </p:style>
         <p:txBody>
           <a:bodyPr rtlCol="0" anchor="ctr"/>
+          <a:lstStyle/>
           <a:p>
             <a:pPr algn="ctr"/>
             <a:endParaRPr lang="zh-CN" altLang="en-US" sz="1400"/>
@@ -4936,12 +6023,12 @@
           <a:bodyPr wrap="square" rtlCol="0">
             <a:spAutoFit/>
           </a:bodyPr>
+          <a:lstStyle/>
           <a:p>
             <a:r>
               <a:rPr lang="zh-CN" altLang="en-US" sz="1400"/>
               <a:t>渲染</a:t>
             </a:r>
-            <a:endParaRPr lang="zh-CN" altLang="en-US" sz="1400"/>
           </a:p>
         </p:txBody>
       </p:sp>
@@ -4965,16 +6052,12 @@
           <a:bodyPr wrap="square" rtlCol="0">
             <a:spAutoFit/>
           </a:bodyPr>
+          <a:lstStyle/>
           <a:p>
             <a:r>
               <a:rPr lang="zh-CN" altLang="en-US" sz="1400"/>
-              <a:t>展示</a:t>
-            </a:r>
-            <a:r>
-              <a:rPr lang="zh-CN" altLang="en-US" sz="1400"/>
-              <a:t>部分页面</a:t>
-            </a:r>
-            <a:endParaRPr lang="zh-CN" altLang="en-US" sz="1400"/>
+              <a:t>展示部分页面</a:t>
+            </a:r>
           </a:p>
         </p:txBody>
       </p:sp>
@@ -5005,17 +6088,13 @@
           <a:bodyPr wrap="square" rtlCol="0">
             <a:spAutoFit/>
           </a:bodyPr>
+          <a:lstStyle/>
           <a:p>
             <a:pPr algn="ctr"/>
             <a:r>
               <a:rPr lang="zh-CN" altLang="en-US" sz="1400"/>
-              <a:t>流式</a:t>
-            </a:r>
-            <a:r>
-              <a:rPr lang="zh-CN" altLang="en-US" sz="1400"/>
-              <a:t>渲染</a:t>
-            </a:r>
-            <a:endParaRPr lang="zh-CN" altLang="en-US" sz="1400"/>
+              <a:t>流式渲染</a:t>
+            </a:r>
           </a:p>
         </p:txBody>
       </p:sp>
@@ -5055,6 +6134,7 @@
         </p:style>
         <p:txBody>
           <a:bodyPr rtlCol="0" anchor="ctr"/>
+          <a:lstStyle/>
           <a:p>
             <a:pPr algn="ctr"/>
             <a:endParaRPr lang="zh-CN" altLang="en-US" sz="1400"/>
@@ -5110,6 +6190,7 @@
         </p:style>
         <p:txBody>
           <a:bodyPr rtlCol="0" anchor="ctr"/>
+          <a:lstStyle/>
           <a:p>
             <a:pPr algn="ctr"/>
             <a:endParaRPr lang="zh-CN" altLang="en-US"/>
@@ -5136,16 +6217,12 @@
           <a:bodyPr wrap="square" rtlCol="0">
             <a:spAutoFit/>
           </a:bodyPr>
+          <a:lstStyle/>
           <a:p>
             <a:r>
               <a:rPr lang="zh-CN" altLang="en-US" sz="1400"/>
-              <a:t>可以重复</a:t>
-            </a:r>
-            <a:r>
-              <a:rPr lang="zh-CN" altLang="en-US" sz="1400"/>
-              <a:t>多次</a:t>
-            </a:r>
-            <a:endParaRPr lang="zh-CN" altLang="en-US" sz="1400"/>
+              <a:t>可以重复多次</a:t>
+            </a:r>
           </a:p>
         </p:txBody>
       </p:sp>
@@ -5169,16 +6246,12 @@
           <a:bodyPr wrap="square" rtlCol="0">
             <a:spAutoFit/>
           </a:bodyPr>
+          <a:lstStyle/>
           <a:p>
             <a:r>
               <a:rPr lang="zh-CN" altLang="en-US" sz="1400"/>
-              <a:t>准备</a:t>
-            </a:r>
-            <a:r>
-              <a:rPr lang="zh-CN" altLang="en-US" sz="1400"/>
-              <a:t>最后的数据</a:t>
-            </a:r>
-            <a:endParaRPr lang="zh-CN" altLang="en-US" sz="1400"/>
+              <a:t>准备最后的数据</a:t>
+            </a:r>
           </a:p>
         </p:txBody>
       </p:sp>
@@ -5202,16 +6275,12 @@
           <a:bodyPr wrap="square" rtlCol="0">
             <a:spAutoFit/>
           </a:bodyPr>
+          <a:lstStyle/>
           <a:p>
             <a:r>
               <a:rPr lang="zh-CN" altLang="en-US" sz="1400"/>
-              <a:t>返回最后的</a:t>
-            </a:r>
-            <a:r>
-              <a:rPr lang="zh-CN" altLang="en-US" sz="1400"/>
-              <a:t>数据</a:t>
-            </a:r>
-            <a:endParaRPr lang="zh-CN" altLang="en-US" sz="1400"/>
+              <a:t>返回最后的数据</a:t>
+            </a:r>
           </a:p>
         </p:txBody>
       </p:sp>
@@ -5235,12 +6304,12 @@
           <a:bodyPr wrap="square" rtlCol="0">
             <a:spAutoFit/>
           </a:bodyPr>
+          <a:lstStyle/>
           <a:p>
             <a:r>
               <a:rPr lang="zh-CN" altLang="en-US" sz="1400"/>
               <a:t>收到数据</a:t>
             </a:r>
-            <a:endParaRPr lang="zh-CN" altLang="en-US" sz="1400"/>
           </a:p>
         </p:txBody>
       </p:sp>
@@ -5280,6 +6349,7 @@
         </p:style>
         <p:txBody>
           <a:bodyPr rtlCol="0" anchor="ctr"/>
+          <a:lstStyle/>
           <a:p>
             <a:pPr algn="ctr"/>
             <a:endParaRPr lang="zh-CN" altLang="en-US" sz="1400"/>
@@ -5306,12 +6376,12 @@
           <a:bodyPr wrap="square" rtlCol="0">
             <a:spAutoFit/>
           </a:bodyPr>
+          <a:lstStyle/>
           <a:p>
             <a:r>
               <a:rPr lang="zh-CN" altLang="en-US" sz="1400"/>
               <a:t>渲染</a:t>
             </a:r>
-            <a:endParaRPr lang="zh-CN" altLang="en-US" sz="1400"/>
           </a:p>
         </p:txBody>
       </p:sp>
@@ -5335,16 +6405,12 @@
           <a:bodyPr wrap="square" rtlCol="0">
             <a:spAutoFit/>
           </a:bodyPr>
+          <a:lstStyle/>
           <a:p>
             <a:r>
               <a:rPr lang="zh-CN" altLang="en-US" sz="1400"/>
-              <a:t>展示</a:t>
-            </a:r>
-            <a:r>
-              <a:rPr lang="zh-CN" altLang="en-US" sz="1400"/>
-              <a:t>完整页面</a:t>
-            </a:r>
-            <a:endParaRPr lang="zh-CN" altLang="en-US" sz="1400"/>
+              <a:t>展示完整页面</a:t>
+            </a:r>
           </a:p>
         </p:txBody>
       </p:sp>
@@ -5384,6 +6450,7 @@
         </p:style>
         <p:txBody>
           <a:bodyPr rtlCol="0" anchor="ctr"/>
+          <a:lstStyle/>
           <a:p>
             <a:pPr algn="ctr"/>
             <a:endParaRPr lang="zh-CN" altLang="en-US" sz="1400"/>
@@ -5407,7 +6474,14 @@
         <p:cNvGrpSpPr/>
         <p:nvPr/>
       </p:nvGrpSpPr>
-      <p:grpSpPr/>
+      <p:grpSpPr>
+        <a:xfrm>
+          <a:off x="0" y="0"/>
+          <a:ext cx="0" cy="0"/>
+          <a:chOff x="0" y="0"/>
+          <a:chExt cx="0" cy="0"/>
+        </a:xfrm>
+      </p:grpSpPr>
       <p:sp>
         <p:nvSpPr>
           <p:cNvPr id="5" name="文本框 4"/>
@@ -5433,13 +6507,13 @@
           <a:bodyPr wrap="square" rtlCol="0">
             <a:spAutoFit/>
           </a:bodyPr>
+          <a:lstStyle/>
           <a:p>
             <a:pPr algn="ctr"/>
             <a:r>
               <a:rPr lang="zh-CN" altLang="en-US" sz="1400"/>
               <a:t>浏览器</a:t>
             </a:r>
-            <a:endParaRPr lang="zh-CN" altLang="en-US" sz="1400"/>
           </a:p>
         </p:txBody>
       </p:sp>
@@ -5479,6 +6553,7 @@
         </p:style>
         <p:txBody>
           <a:bodyPr rtlCol="0" anchor="ctr"/>
+          <a:lstStyle/>
           <a:p>
             <a:pPr algn="ctr"/>
             <a:endParaRPr lang="zh-CN" altLang="en-US" sz="1400"/>
@@ -5521,6 +6596,7 @@
         </p:style>
         <p:txBody>
           <a:bodyPr rtlCol="0" anchor="ctr"/>
+          <a:lstStyle/>
           <a:p>
             <a:pPr algn="ctr"/>
             <a:endParaRPr lang="zh-CN" altLang="en-US" sz="1400"/>
@@ -5547,12 +6623,12 @@
           <a:bodyPr wrap="square" rtlCol="0">
             <a:spAutoFit/>
           </a:bodyPr>
+          <a:lstStyle/>
           <a:p>
             <a:r>
               <a:rPr lang="zh-CN" altLang="en-US" sz="1400"/>
               <a:t>准备数据</a:t>
             </a:r>
-            <a:endParaRPr lang="zh-CN" altLang="en-US" sz="1400"/>
           </a:p>
         </p:txBody>
       </p:sp>
@@ -5581,6 +6657,7 @@
           <a:bodyPr wrap="square" rtlCol="0">
             <a:spAutoFit/>
           </a:bodyPr>
+          <a:lstStyle/>
           <a:p>
             <a:pPr algn="ctr"/>
             <a:r>
@@ -5591,7 +6668,6 @@
               <a:rPr lang="zh-CN" altLang="en-US" sz="1400"/>
               <a:t>服务端</a:t>
             </a:r>
-            <a:endParaRPr lang="zh-CN" altLang="en-US" sz="1400"/>
           </a:p>
         </p:txBody>
       </p:sp>
@@ -5631,6 +6707,7 @@
         </p:style>
         <p:txBody>
           <a:bodyPr rtlCol="0" anchor="ctr"/>
+          <a:lstStyle/>
           <a:p>
             <a:pPr algn="ctr"/>
             <a:endParaRPr lang="zh-CN" altLang="en-US" sz="1400"/>
@@ -5657,16 +6734,12 @@
           <a:bodyPr wrap="square" rtlCol="0">
             <a:spAutoFit/>
           </a:bodyPr>
+          <a:lstStyle/>
           <a:p>
             <a:r>
               <a:rPr lang="zh-CN" altLang="en-US" sz="1400"/>
-              <a:t>请求</a:t>
-            </a:r>
-            <a:r>
-              <a:rPr lang="zh-CN" altLang="en-US" sz="1400"/>
-              <a:t>数据接口</a:t>
-            </a:r>
-            <a:endParaRPr lang="zh-CN" altLang="en-US" sz="1400"/>
+              <a:t>请求数据接口</a:t>
+            </a:r>
           </a:p>
         </p:txBody>
       </p:sp>
@@ -5690,12 +6763,12 @@
           <a:bodyPr wrap="square" rtlCol="0">
             <a:spAutoFit/>
           </a:bodyPr>
+          <a:lstStyle/>
           <a:p>
             <a:r>
               <a:rPr lang="zh-CN" altLang="en-US" sz="1400"/>
               <a:t>收到请求</a:t>
             </a:r>
-            <a:endParaRPr lang="zh-CN" altLang="en-US" sz="1400"/>
           </a:p>
         </p:txBody>
       </p:sp>
@@ -5795,12 +6868,12 @@
           <a:bodyPr wrap="square" rtlCol="0">
             <a:spAutoFit/>
           </a:bodyPr>
+          <a:lstStyle/>
           <a:p>
             <a:r>
               <a:rPr lang="zh-CN" altLang="en-US" sz="1400"/>
               <a:t>返回数据</a:t>
             </a:r>
-            <a:endParaRPr lang="zh-CN" altLang="en-US" sz="1400"/>
           </a:p>
         </p:txBody>
       </p:sp>
@@ -5824,12 +6897,12 @@
           <a:bodyPr wrap="square" rtlCol="0">
             <a:spAutoFit/>
           </a:bodyPr>
+          <a:lstStyle/>
           <a:p>
             <a:r>
               <a:rPr lang="zh-CN" altLang="en-US" sz="1400"/>
               <a:t>收到数据</a:t>
             </a:r>
-            <a:endParaRPr lang="zh-CN" altLang="en-US" sz="1400"/>
           </a:p>
         </p:txBody>
       </p:sp>
@@ -5869,6 +6942,7 @@
         </p:style>
         <p:txBody>
           <a:bodyPr rtlCol="0" anchor="ctr"/>
+          <a:lstStyle/>
           <a:p>
             <a:pPr algn="ctr"/>
             <a:endParaRPr lang="zh-CN" altLang="en-US" sz="1400"/>
@@ -5895,16 +6969,12 @@
           <a:bodyPr wrap="square" rtlCol="0">
             <a:spAutoFit/>
           </a:bodyPr>
+          <a:lstStyle/>
           <a:p>
             <a:r>
               <a:rPr lang="zh-CN" altLang="en-US" sz="1400"/>
-              <a:t>展示</a:t>
-            </a:r>
-            <a:r>
-              <a:rPr lang="zh-CN" altLang="en-US" sz="1400"/>
-              <a:t>数据</a:t>
-            </a:r>
-            <a:endParaRPr lang="zh-CN" altLang="en-US" sz="1400"/>
+              <a:t>展示数据</a:t>
+            </a:r>
           </a:p>
         </p:txBody>
       </p:sp>
@@ -5933,13 +7003,13 @@
           <a:bodyPr wrap="square" rtlCol="0">
             <a:spAutoFit/>
           </a:bodyPr>
+          <a:lstStyle/>
           <a:p>
             <a:pPr algn="ctr"/>
             <a:r>
               <a:rPr lang="zh-CN" altLang="en-US" sz="1400"/>
               <a:t>浏览器</a:t>
             </a:r>
-            <a:endParaRPr lang="zh-CN" altLang="en-US" sz="1400"/>
           </a:p>
         </p:txBody>
       </p:sp>
@@ -5979,6 +7049,7 @@
         </p:style>
         <p:txBody>
           <a:bodyPr rtlCol="0" anchor="ctr"/>
+          <a:lstStyle/>
           <a:p>
             <a:pPr algn="ctr"/>
             <a:endParaRPr lang="zh-CN" altLang="en-US" sz="1400"/>
@@ -6021,6 +7092,7 @@
         </p:style>
         <p:txBody>
           <a:bodyPr rtlCol="0" anchor="ctr"/>
+          <a:lstStyle/>
           <a:p>
             <a:pPr algn="ctr"/>
             <a:endParaRPr lang="zh-CN" altLang="en-US" sz="1400"/>
@@ -6047,16 +7119,12 @@
           <a:bodyPr wrap="square" rtlCol="0">
             <a:spAutoFit/>
           </a:bodyPr>
+          <a:lstStyle/>
           <a:p>
             <a:r>
               <a:rPr lang="zh-CN" altLang="en-US" sz="1400"/>
-              <a:t>准备</a:t>
-            </a:r>
-            <a:r>
-              <a:rPr lang="zh-CN" altLang="en-US" sz="1400"/>
-              <a:t>部分数据</a:t>
-            </a:r>
-            <a:endParaRPr lang="zh-CN" altLang="en-US" sz="1400"/>
+              <a:t>准备部分数据</a:t>
+            </a:r>
           </a:p>
         </p:txBody>
       </p:sp>
@@ -6085,6 +7153,7 @@
           <a:bodyPr wrap="square" rtlCol="0">
             <a:spAutoFit/>
           </a:bodyPr>
+          <a:lstStyle/>
           <a:p>
             <a:pPr algn="ctr"/>
             <a:r>
@@ -6095,7 +7164,6 @@
               <a:rPr lang="zh-CN" altLang="en-US" sz="1400"/>
               <a:t>服务端</a:t>
             </a:r>
-            <a:endParaRPr lang="zh-CN" altLang="en-US" sz="1400"/>
           </a:p>
         </p:txBody>
       </p:sp>
@@ -6135,6 +7203,7 @@
         </p:style>
         <p:txBody>
           <a:bodyPr rtlCol="0" anchor="ctr"/>
+          <a:lstStyle/>
           <a:p>
             <a:pPr algn="ctr"/>
             <a:endParaRPr lang="zh-CN" altLang="en-US" sz="1400"/>
@@ -6161,6 +7230,7 @@
           <a:bodyPr wrap="square" rtlCol="0">
             <a:spAutoFit/>
           </a:bodyPr>
+          <a:lstStyle/>
           <a:p>
             <a:r>
               <a:rPr lang="zh-CN" altLang="en-US" sz="1400">
@@ -6192,12 +7262,12 @@
           <a:bodyPr wrap="square" rtlCol="0">
             <a:spAutoFit/>
           </a:bodyPr>
+          <a:lstStyle/>
           <a:p>
             <a:r>
               <a:rPr lang="zh-CN" altLang="en-US" sz="1400"/>
               <a:t>收到请求</a:t>
             </a:r>
-            <a:endParaRPr lang="zh-CN" altLang="en-US" sz="1400"/>
           </a:p>
         </p:txBody>
       </p:sp>
@@ -6297,16 +7367,12 @@
           <a:bodyPr wrap="square" rtlCol="0">
             <a:spAutoFit/>
           </a:bodyPr>
+          <a:lstStyle/>
           <a:p>
             <a:r>
               <a:rPr lang="zh-CN" altLang="en-US" sz="1400"/>
-              <a:t>返回</a:t>
-            </a:r>
-            <a:r>
-              <a:rPr lang="zh-CN" altLang="en-US" sz="1400"/>
-              <a:t>部分数据</a:t>
-            </a:r>
-            <a:endParaRPr lang="zh-CN" altLang="en-US" sz="1400"/>
+              <a:t>返回部分数据</a:t>
+            </a:r>
           </a:p>
         </p:txBody>
       </p:sp>
@@ -6330,12 +7396,12 @@
           <a:bodyPr wrap="square" rtlCol="0">
             <a:spAutoFit/>
           </a:bodyPr>
+          <a:lstStyle/>
           <a:p>
             <a:r>
               <a:rPr lang="zh-CN" altLang="en-US" sz="1400"/>
               <a:t>收到数据</a:t>
             </a:r>
-            <a:endParaRPr lang="zh-CN" altLang="en-US" sz="1400"/>
           </a:p>
         </p:txBody>
       </p:sp>
@@ -6375,6 +7441,7 @@
         </p:style>
         <p:txBody>
           <a:bodyPr rtlCol="0" anchor="ctr"/>
+          <a:lstStyle/>
           <a:p>
             <a:pPr algn="ctr"/>
             <a:endParaRPr lang="zh-CN" altLang="en-US" sz="1400"/>
@@ -6401,16 +7468,12 @@
           <a:bodyPr wrap="square" rtlCol="0">
             <a:spAutoFit/>
           </a:bodyPr>
+          <a:lstStyle/>
           <a:p>
             <a:r>
               <a:rPr lang="zh-CN" altLang="en-US" sz="1400"/>
-              <a:t>展示部分</a:t>
-            </a:r>
-            <a:r>
-              <a:rPr lang="zh-CN" altLang="en-US" sz="1400"/>
-              <a:t>数据</a:t>
-            </a:r>
-            <a:endParaRPr lang="zh-CN" altLang="en-US" sz="1400"/>
+              <a:t>展示部分数据</a:t>
+            </a:r>
           </a:p>
         </p:txBody>
       </p:sp>
@@ -6441,17 +7504,13 @@
           <a:bodyPr wrap="square" rtlCol="0">
             <a:spAutoFit/>
           </a:bodyPr>
+          <a:lstStyle/>
           <a:p>
             <a:pPr algn="ctr"/>
             <a:r>
               <a:rPr lang="zh-CN" altLang="en-US" sz="1400"/>
-              <a:t>非流式</a:t>
-            </a:r>
-            <a:r>
-              <a:rPr lang="zh-CN" altLang="en-US" sz="1400"/>
-              <a:t>传输</a:t>
-            </a:r>
-            <a:endParaRPr lang="zh-CN" altLang="en-US" sz="1400"/>
+              <a:t>非流式传输</a:t>
+            </a:r>
           </a:p>
         </p:txBody>
       </p:sp>
@@ -6491,6 +7550,7 @@
         </p:style>
         <p:txBody>
           <a:bodyPr rtlCol="0" anchor="ctr"/>
+          <a:lstStyle/>
           <a:p>
             <a:pPr algn="ctr"/>
             <a:endParaRPr lang="zh-CN" altLang="en-US" sz="1400"/>
@@ -6517,17 +7577,13 @@
           <a:bodyPr wrap="square" rtlCol="0">
             <a:spAutoFit/>
           </a:bodyPr>
+          <a:lstStyle/>
           <a:p>
             <a:pPr algn="ctr"/>
             <a:r>
               <a:rPr lang="zh-CN" altLang="en-US" sz="1400"/>
-              <a:t>准备</a:t>
-            </a:r>
-            <a:r>
-              <a:rPr lang="zh-CN" altLang="en-US" sz="1400"/>
-              <a:t>部分数据</a:t>
-            </a:r>
-            <a:endParaRPr lang="zh-CN" altLang="en-US" sz="1400"/>
+              <a:t>准备部分数据</a:t>
+            </a:r>
           </a:p>
         </p:txBody>
       </p:sp>
@@ -6551,16 +7607,12 @@
           <a:bodyPr wrap="square" rtlCol="0">
             <a:spAutoFit/>
           </a:bodyPr>
+          <a:lstStyle/>
           <a:p>
             <a:r>
               <a:rPr lang="zh-CN" altLang="en-US" sz="1400"/>
-              <a:t>返回</a:t>
-            </a:r>
-            <a:r>
-              <a:rPr lang="zh-CN" altLang="en-US" sz="1400"/>
-              <a:t>部分数据</a:t>
-            </a:r>
-            <a:endParaRPr lang="zh-CN" altLang="en-US" sz="1400"/>
+              <a:t>返回部分数据</a:t>
+            </a:r>
           </a:p>
         </p:txBody>
       </p:sp>
@@ -6600,6 +7652,7 @@
         </p:style>
         <p:txBody>
           <a:bodyPr rtlCol="0" anchor="ctr"/>
+          <a:lstStyle/>
           <a:p>
             <a:pPr algn="ctr"/>
             <a:endParaRPr lang="zh-CN" altLang="en-US" sz="1400"/>
@@ -6626,12 +7679,12 @@
           <a:bodyPr wrap="square" rtlCol="0">
             <a:spAutoFit/>
           </a:bodyPr>
+          <a:lstStyle/>
           <a:p>
             <a:r>
               <a:rPr lang="zh-CN" altLang="en-US" sz="1400"/>
               <a:t>收到数据</a:t>
             </a:r>
-            <a:endParaRPr lang="zh-CN" altLang="en-US" sz="1400"/>
           </a:p>
         </p:txBody>
       </p:sp>
@@ -6671,6 +7724,7 @@
         </p:style>
         <p:txBody>
           <a:bodyPr rtlCol="0" anchor="ctr"/>
+          <a:lstStyle/>
           <a:p>
             <a:pPr algn="ctr"/>
             <a:endParaRPr lang="zh-CN" altLang="en-US" sz="1400"/>
@@ -6697,16 +7751,12 @@
           <a:bodyPr wrap="square" rtlCol="0">
             <a:spAutoFit/>
           </a:bodyPr>
+          <a:lstStyle/>
           <a:p>
             <a:r>
               <a:rPr lang="zh-CN" altLang="en-US" sz="1400"/>
-              <a:t>展示部分</a:t>
-            </a:r>
-            <a:r>
-              <a:rPr lang="zh-CN" altLang="en-US" sz="1400"/>
-              <a:t>数据</a:t>
-            </a:r>
-            <a:endParaRPr lang="zh-CN" altLang="en-US" sz="1400"/>
+              <a:t>展示部分数据</a:t>
+            </a:r>
           </a:p>
         </p:txBody>
       </p:sp>
@@ -6737,17 +7787,13 @@
           <a:bodyPr wrap="square" rtlCol="0">
             <a:spAutoFit/>
           </a:bodyPr>
+          <a:lstStyle/>
           <a:p>
             <a:pPr algn="ctr"/>
             <a:r>
               <a:rPr lang="zh-CN" altLang="en-US" sz="1400"/>
-              <a:t>流式</a:t>
-            </a:r>
-            <a:r>
-              <a:rPr lang="zh-CN" altLang="en-US" sz="1400"/>
-              <a:t>传输</a:t>
-            </a:r>
-            <a:endParaRPr lang="zh-CN" altLang="en-US" sz="1400"/>
+              <a:t>流式传输</a:t>
+            </a:r>
           </a:p>
         </p:txBody>
       </p:sp>
@@ -6787,6 +7833,7 @@
         </p:style>
         <p:txBody>
           <a:bodyPr rtlCol="0" anchor="ctr"/>
+          <a:lstStyle/>
           <a:p>
             <a:pPr algn="ctr"/>
             <a:endParaRPr lang="zh-CN" altLang="en-US" sz="1400"/>
@@ -6842,6 +7889,7 @@
         </p:style>
         <p:txBody>
           <a:bodyPr rtlCol="0" anchor="ctr"/>
+          <a:lstStyle/>
           <a:p>
             <a:pPr algn="ctr"/>
             <a:endParaRPr lang="zh-CN" altLang="en-US"/>
@@ -6868,16 +7916,12 @@
           <a:bodyPr wrap="square" rtlCol="0">
             <a:spAutoFit/>
           </a:bodyPr>
+          <a:lstStyle/>
           <a:p>
             <a:r>
               <a:rPr lang="zh-CN" altLang="en-US" sz="1400"/>
-              <a:t>可以重复</a:t>
-            </a:r>
-            <a:r>
-              <a:rPr lang="zh-CN" altLang="en-US" sz="1400"/>
-              <a:t>多次</a:t>
-            </a:r>
-            <a:endParaRPr lang="zh-CN" altLang="en-US" sz="1400"/>
+              <a:t>可以重复多次</a:t>
+            </a:r>
           </a:p>
         </p:txBody>
       </p:sp>
@@ -6901,16 +7945,12 @@
           <a:bodyPr wrap="square" rtlCol="0">
             <a:spAutoFit/>
           </a:bodyPr>
+          <a:lstStyle/>
           <a:p>
             <a:r>
               <a:rPr lang="zh-CN" altLang="en-US" sz="1400"/>
-              <a:t>准备</a:t>
-            </a:r>
-            <a:r>
-              <a:rPr lang="zh-CN" altLang="en-US" sz="1400"/>
-              <a:t>最后的数据</a:t>
-            </a:r>
-            <a:endParaRPr lang="zh-CN" altLang="en-US" sz="1400"/>
+              <a:t>准备最后的数据</a:t>
+            </a:r>
           </a:p>
         </p:txBody>
       </p:sp>
@@ -6934,16 +7974,12 @@
           <a:bodyPr wrap="square" rtlCol="0">
             <a:spAutoFit/>
           </a:bodyPr>
+          <a:lstStyle/>
           <a:p>
             <a:r>
               <a:rPr lang="zh-CN" altLang="en-US" sz="1400"/>
-              <a:t>返回最后的</a:t>
-            </a:r>
-            <a:r>
-              <a:rPr lang="zh-CN" altLang="en-US" sz="1400"/>
-              <a:t>数据</a:t>
-            </a:r>
-            <a:endParaRPr lang="zh-CN" altLang="en-US" sz="1400"/>
+              <a:t>返回最后的数据</a:t>
+            </a:r>
           </a:p>
         </p:txBody>
       </p:sp>
@@ -6967,12 +8003,12 @@
           <a:bodyPr wrap="square" rtlCol="0">
             <a:spAutoFit/>
           </a:bodyPr>
+          <a:lstStyle/>
           <a:p>
             <a:r>
               <a:rPr lang="zh-CN" altLang="en-US" sz="1400"/>
               <a:t>收到数据</a:t>
             </a:r>
-            <a:endParaRPr lang="zh-CN" altLang="en-US" sz="1400"/>
           </a:p>
         </p:txBody>
       </p:sp>
@@ -7012,6 +8048,7 @@
         </p:style>
         <p:txBody>
           <a:bodyPr rtlCol="0" anchor="ctr"/>
+          <a:lstStyle/>
           <a:p>
             <a:pPr algn="ctr"/>
             <a:endParaRPr lang="zh-CN" altLang="en-US" sz="1400"/>
@@ -7038,16 +8075,12 @@
           <a:bodyPr wrap="square" rtlCol="0">
             <a:spAutoFit/>
           </a:bodyPr>
+          <a:lstStyle/>
           <a:p>
             <a:r>
               <a:rPr lang="zh-CN" altLang="en-US" sz="1400"/>
-              <a:t>展示完整</a:t>
-            </a:r>
-            <a:r>
-              <a:rPr lang="zh-CN" altLang="en-US" sz="1400"/>
-              <a:t>数据</a:t>
-            </a:r>
-            <a:endParaRPr lang="zh-CN" altLang="en-US" sz="1400"/>
+              <a:t>展示完整数据</a:t>
+            </a:r>
           </a:p>
         </p:txBody>
       </p:sp>
@@ -7087,6 +8120,7 @@
         </p:style>
         <p:txBody>
           <a:bodyPr rtlCol="0" anchor="ctr"/>
+          <a:lstStyle/>
           <a:p>
             <a:pPr algn="ctr"/>
             <a:endParaRPr lang="zh-CN" altLang="en-US" sz="1400"/>
@@ -7129,6 +8163,7 @@
         </p:style>
         <p:txBody>
           <a:bodyPr rtlCol="0" anchor="ctr"/>
+          <a:lstStyle/>
           <a:p>
             <a:pPr algn="ctr"/>
             <a:endParaRPr lang="zh-CN" altLang="en-US" sz="1400"/>
@@ -7152,7 +8187,14 @@
         <p:cNvGrpSpPr/>
         <p:nvPr/>
       </p:nvGrpSpPr>
-      <p:grpSpPr/>
+      <p:grpSpPr>
+        <a:xfrm>
+          <a:off x="0" y="0"/>
+          <a:ext cx="0" cy="0"/>
+          <a:chOff x="0" y="0"/>
+          <a:chExt cx="0" cy="0"/>
+        </a:xfrm>
+      </p:grpSpPr>
       <p:sp>
         <p:nvSpPr>
           <p:cNvPr id="5" name="文本框 4"/>
@@ -7178,13 +8220,13 @@
           <a:bodyPr wrap="square" rtlCol="0">
             <a:spAutoFit/>
           </a:bodyPr>
+          <a:lstStyle/>
           <a:p>
             <a:pPr algn="ctr"/>
             <a:r>
               <a:rPr lang="zh-CN" altLang="en-US" sz="1400"/>
               <a:t>代码</a:t>
             </a:r>
-            <a:endParaRPr lang="zh-CN" altLang="en-US" sz="1400"/>
           </a:p>
         </p:txBody>
       </p:sp>
@@ -7213,13 +8255,13 @@
           <a:bodyPr wrap="square" rtlCol="0">
             <a:spAutoFit/>
           </a:bodyPr>
+          <a:lstStyle/>
           <a:p>
             <a:pPr algn="ctr"/>
             <a:r>
               <a:rPr lang="en-US" altLang="zh-CN" sz="1400"/>
               <a:t>Tokens</a:t>
             </a:r>
-            <a:endParaRPr lang="en-US" altLang="zh-CN" sz="1400"/>
           </a:p>
         </p:txBody>
       </p:sp>
@@ -7248,13 +8290,13 @@
           <a:bodyPr wrap="square" rtlCol="0">
             <a:spAutoFit/>
           </a:bodyPr>
+          <a:lstStyle/>
           <a:p>
             <a:pPr algn="ctr"/>
             <a:r>
               <a:rPr lang="en-US" altLang="zh-CN" sz="1400"/>
               <a:t>AST</a:t>
             </a:r>
-            <a:endParaRPr lang="en-US" altLang="zh-CN" sz="1400"/>
           </a:p>
         </p:txBody>
       </p:sp>
@@ -7308,6 +8350,7 @@
           </p:style>
           <p:txBody>
             <a:bodyPr rtlCol="0" anchor="ctr"/>
+            <a:lstStyle/>
             <a:p>
               <a:pPr algn="ctr"/>
               <a:endParaRPr lang="zh-CN" altLang="en-US" sz="1400"/>
@@ -7334,12 +8377,12 @@
             <a:bodyPr wrap="square" rtlCol="0">
               <a:spAutoFit/>
             </a:bodyPr>
+            <a:lstStyle/>
             <a:p>
               <a:r>
                 <a:rPr lang="zh-CN" altLang="en-US" sz="1400"/>
                 <a:t>词法分析</a:t>
               </a:r>
-              <a:endParaRPr lang="zh-CN" altLang="en-US" sz="1400"/>
             </a:p>
           </p:txBody>
         </p:sp>
@@ -7394,6 +8437,7 @@
           </p:style>
           <p:txBody>
             <a:bodyPr rtlCol="0" anchor="ctr"/>
+            <a:lstStyle/>
             <a:p>
               <a:pPr algn="ctr"/>
               <a:endParaRPr lang="zh-CN" altLang="en-US" sz="1400"/>
@@ -7420,12 +8464,12 @@
             <a:bodyPr wrap="square" rtlCol="0">
               <a:spAutoFit/>
             </a:bodyPr>
+            <a:lstStyle/>
             <a:p>
               <a:r>
                 <a:rPr lang="zh-CN" altLang="en-US" sz="1400"/>
                 <a:t>语法分析</a:t>
               </a:r>
-              <a:endParaRPr lang="zh-CN" altLang="en-US" sz="1400"/>
             </a:p>
           </p:txBody>
         </p:sp>
@@ -7450,12 +8494,12 @@
           <a:bodyPr wrap="square" rtlCol="0" anchor="t">
             <a:spAutoFit/>
           </a:bodyPr>
+          <a:lstStyle/>
           <a:p>
             <a:r>
               <a:rPr lang="zh-CN" altLang="en-US"/>
               <a:t>const a = 2 + 1</a:t>
             </a:r>
-            <a:endParaRPr lang="zh-CN" altLang="en-US"/>
           </a:p>
         </p:txBody>
       </p:sp>
@@ -7480,13 +8524,26 @@
                 <a:tableStyleId>{5C22544A-7EE6-4342-B048-85BDC9FD1C3A}</a:tableStyleId>
               </a:tblPr>
               <a:tblGrid>
-                <a:gridCol w="1045210"/>
-                <a:gridCol w="1045210"/>
+                <a:gridCol w="1045210">
+                  <a:extLst>
+                    <a:ext uri="{9D8B030D-6E8A-4147-A177-3AD203B41FA5}">
+                      <a16:colId xmlns:a16="http://schemas.microsoft.com/office/drawing/2014/main" val="20000"/>
+                    </a:ext>
+                  </a:extLst>
+                </a:gridCol>
+                <a:gridCol w="1045210">
+                  <a:extLst>
+                    <a:ext uri="{9D8B030D-6E8A-4147-A177-3AD203B41FA5}">
+                      <a16:colId xmlns:a16="http://schemas.microsoft.com/office/drawing/2014/main" val="20001"/>
+                    </a:ext>
+                  </a:extLst>
+                </a:gridCol>
               </a:tblGrid>
               <a:tr h="365760">
                 <a:tc>
                   <a:txBody>
                     <a:bodyPr/>
+                    <a:lstStyle/>
                     <a:p>
                       <a:pPr algn="ctr">
                         <a:buNone/>
@@ -7495,14 +8552,14 @@
                         <a:rPr lang="zh-CN" altLang="en-US" sz="1000"/>
                         <a:t>类型</a:t>
                       </a:r>
-                      <a:endParaRPr lang="zh-CN" altLang="en-US" sz="1000"/>
                     </a:p>
                   </a:txBody>
-                  <a:tcPr anchor="ctr" anchorCtr="0"/>
+                  <a:tcPr anchor="ctr"/>
                 </a:tc>
                 <a:tc>
                   <a:txBody>
                     <a:bodyPr/>
+                    <a:lstStyle/>
                     <a:p>
                       <a:pPr algn="ctr">
                         <a:buNone/>
@@ -7511,16 +8568,21 @@
                         <a:rPr lang="zh-CN" altLang="en-US" sz="1000"/>
                         <a:t>值</a:t>
                       </a:r>
-                      <a:endParaRPr lang="zh-CN" altLang="en-US" sz="1000"/>
                     </a:p>
                   </a:txBody>
-                  <a:tcPr anchor="ctr" anchorCtr="0"/>
+                  <a:tcPr anchor="ctr"/>
                 </a:tc>
+                <a:extLst>
+                  <a:ext uri="{0D108BD9-81ED-4DB2-BD59-A6C34878D82A}">
+                    <a16:rowId xmlns:a16="http://schemas.microsoft.com/office/drawing/2014/main" val="10000"/>
+                  </a:ext>
+                </a:extLst>
               </a:tr>
               <a:tr h="379095">
                 <a:tc>
                   <a:txBody>
                     <a:bodyPr/>
+                    <a:lstStyle/>
                     <a:p>
                       <a:pPr algn="ctr">
                         <a:buNone/>
@@ -7534,11 +8596,12 @@
                       <a:endParaRPr lang="zh-CN" altLang="en-US" sz="1000"/>
                     </a:p>
                   </a:txBody>
-                  <a:tcPr anchor="ctr" anchorCtr="0"/>
+                  <a:tcPr anchor="ctr"/>
                 </a:tc>
                 <a:tc>
                   <a:txBody>
                     <a:bodyPr/>
+                    <a:lstStyle/>
                     <a:p>
                       <a:pPr algn="ctr">
                         <a:buNone/>
@@ -7552,13 +8615,19 @@
                       <a:endParaRPr lang="zh-CN" altLang="en-US" sz="1000"/>
                     </a:p>
                   </a:txBody>
-                  <a:tcPr anchor="ctr" anchorCtr="0"/>
+                  <a:tcPr anchor="ctr"/>
                 </a:tc>
+                <a:extLst>
+                  <a:ext uri="{0D108BD9-81ED-4DB2-BD59-A6C34878D82A}">
+                    <a16:rowId xmlns:a16="http://schemas.microsoft.com/office/drawing/2014/main" val="10001"/>
+                  </a:ext>
+                </a:extLst>
               </a:tr>
               <a:tr h="379095">
                 <a:tc>
                   <a:txBody>
                     <a:bodyPr/>
+                    <a:lstStyle/>
                     <a:p>
                       <a:pPr algn="ctr">
                         <a:buNone/>
@@ -7572,11 +8641,12 @@
                       <a:endParaRPr lang="zh-CN" altLang="en-US" sz="1000"/>
                     </a:p>
                   </a:txBody>
-                  <a:tcPr anchor="ctr" anchorCtr="0"/>
+                  <a:tcPr anchor="ctr"/>
                 </a:tc>
                 <a:tc>
                   <a:txBody>
                     <a:bodyPr/>
+                    <a:lstStyle/>
                     <a:p>
                       <a:pPr algn="ctr">
                         <a:buNone/>
@@ -7590,13 +8660,19 @@
                       <a:endParaRPr lang="zh-CN" altLang="en-US" sz="1000"/>
                     </a:p>
                   </a:txBody>
-                  <a:tcPr anchor="ctr" anchorCtr="0"/>
+                  <a:tcPr anchor="ctr"/>
                 </a:tc>
+                <a:extLst>
+                  <a:ext uri="{0D108BD9-81ED-4DB2-BD59-A6C34878D82A}">
+                    <a16:rowId xmlns:a16="http://schemas.microsoft.com/office/drawing/2014/main" val="10002"/>
+                  </a:ext>
+                </a:extLst>
               </a:tr>
               <a:tr h="379095">
                 <a:tc>
                   <a:txBody>
                     <a:bodyPr/>
+                    <a:lstStyle/>
                     <a:p>
                       <a:pPr algn="ctr">
                         <a:buNone/>
@@ -7610,11 +8686,12 @@
                       <a:endParaRPr lang="zh-CN" altLang="en-US" sz="1000"/>
                     </a:p>
                   </a:txBody>
-                  <a:tcPr anchor="ctr" anchorCtr="0"/>
+                  <a:tcPr anchor="ctr"/>
                 </a:tc>
                 <a:tc>
                   <a:txBody>
                     <a:bodyPr/>
+                    <a:lstStyle/>
                     <a:p>
                       <a:pPr algn="ctr">
                         <a:buNone/>
@@ -7628,13 +8705,19 @@
                       <a:endParaRPr lang="zh-CN" altLang="en-US" sz="1000"/>
                     </a:p>
                   </a:txBody>
-                  <a:tcPr anchor="ctr" anchorCtr="0"/>
+                  <a:tcPr anchor="ctr"/>
                 </a:tc>
+                <a:extLst>
+                  <a:ext uri="{0D108BD9-81ED-4DB2-BD59-A6C34878D82A}">
+                    <a16:rowId xmlns:a16="http://schemas.microsoft.com/office/drawing/2014/main" val="10003"/>
+                  </a:ext>
+                </a:extLst>
               </a:tr>
               <a:tr h="379095">
                 <a:tc>
                   <a:txBody>
                     <a:bodyPr/>
+                    <a:lstStyle/>
                     <a:p>
                       <a:pPr algn="ctr">
                         <a:buNone/>
@@ -7648,11 +8731,12 @@
                       <a:endParaRPr lang="zh-CN" altLang="en-US" sz="1000"/>
                     </a:p>
                   </a:txBody>
-                  <a:tcPr anchor="ctr" anchorCtr="0"/>
+                  <a:tcPr anchor="ctr"/>
                 </a:tc>
                 <a:tc>
                   <a:txBody>
                     <a:bodyPr/>
+                    <a:lstStyle/>
                     <a:p>
                       <a:pPr algn="ctr">
                         <a:buNone/>
@@ -7666,13 +8750,19 @@
                       <a:endParaRPr lang="zh-CN" altLang="en-US" sz="1000"/>
                     </a:p>
                   </a:txBody>
-                  <a:tcPr anchor="ctr" anchorCtr="0"/>
+                  <a:tcPr anchor="ctr"/>
                 </a:tc>
+                <a:extLst>
+                  <a:ext uri="{0D108BD9-81ED-4DB2-BD59-A6C34878D82A}">
+                    <a16:rowId xmlns:a16="http://schemas.microsoft.com/office/drawing/2014/main" val="10004"/>
+                  </a:ext>
+                </a:extLst>
               </a:tr>
               <a:tr h="379095">
                 <a:tc>
                   <a:txBody>
                     <a:bodyPr/>
+                    <a:lstStyle/>
                     <a:p>
                       <a:pPr algn="ctr">
                         <a:buNone/>
@@ -7686,11 +8776,12 @@
                       <a:endParaRPr lang="zh-CN" altLang="en-US" sz="1000"/>
                     </a:p>
                   </a:txBody>
-                  <a:tcPr anchor="ctr" anchorCtr="0"/>
+                  <a:tcPr anchor="ctr"/>
                 </a:tc>
                 <a:tc>
                   <a:txBody>
                     <a:bodyPr/>
+                    <a:lstStyle/>
                     <a:p>
                       <a:pPr algn="ctr">
                         <a:buNone/>
@@ -7704,13 +8795,19 @@
                       <a:endParaRPr lang="zh-CN" altLang="en-US" sz="1000"/>
                     </a:p>
                   </a:txBody>
-                  <a:tcPr anchor="ctr" anchorCtr="0"/>
+                  <a:tcPr anchor="ctr"/>
                 </a:tc>
+                <a:extLst>
+                  <a:ext uri="{0D108BD9-81ED-4DB2-BD59-A6C34878D82A}">
+                    <a16:rowId xmlns:a16="http://schemas.microsoft.com/office/drawing/2014/main" val="10005"/>
+                  </a:ext>
+                </a:extLst>
               </a:tr>
               <a:tr h="379095">
                 <a:tc>
                   <a:txBody>
                     <a:bodyPr/>
+                    <a:lstStyle/>
                     <a:p>
                       <a:pPr algn="ctr">
                         <a:buNone/>
@@ -7724,11 +8821,12 @@
                       <a:endParaRPr lang="zh-CN" altLang="en-US" sz="1000"/>
                     </a:p>
                   </a:txBody>
-                  <a:tcPr anchor="ctr" anchorCtr="0"/>
+                  <a:tcPr anchor="ctr"/>
                 </a:tc>
                 <a:tc>
                   <a:txBody>
                     <a:bodyPr/>
+                    <a:lstStyle/>
                     <a:p>
                       <a:pPr algn="ctr">
                         <a:buNone/>
@@ -7742,8 +8840,13 @@
                       <a:endParaRPr lang="zh-CN" altLang="en-US" sz="1000"/>
                     </a:p>
                   </a:txBody>
-                  <a:tcPr anchor="ctr" anchorCtr="0"/>
+                  <a:tcPr anchor="ctr"/>
                 </a:tc>
+                <a:extLst>
+                  <a:ext uri="{0D108BD9-81ED-4DB2-BD59-A6C34878D82A}">
+                    <a16:rowId xmlns:a16="http://schemas.microsoft.com/office/drawing/2014/main" val="10006"/>
+                  </a:ext>
+                </a:extLst>
               </a:tr>
             </a:tbl>
           </a:graphicData>
@@ -7788,6 +8891,7 @@
             <a:bodyPr wrap="square" rtlCol="0">
               <a:spAutoFit/>
             </a:bodyPr>
+            <a:lstStyle/>
             <a:p>
               <a:pPr algn="ctr"/>
               <a:r>
@@ -7798,7 +8902,6 @@
                 <a:rPr lang="en-US" altLang="zh-CN" sz="1400"/>
                 <a:t> script</a:t>
               </a:r>
-              <a:endParaRPr lang="en-US" altLang="zh-CN" sz="1400"/>
             </a:p>
           </p:txBody>
         </p:sp>
@@ -7827,6 +8930,7 @@
             <a:bodyPr wrap="square" rtlCol="0">
               <a:spAutoFit/>
             </a:bodyPr>
+            <a:lstStyle/>
             <a:p>
               <a:pPr algn="ctr"/>
               <a:r>
@@ -7835,13 +8939,8 @@
               </a:r>
               <a:r>
                 <a:rPr lang="en-US" altLang="zh-CN" sz="1400"/>
-                <a:t> </a:t>
+                <a:t> const</a:t>
               </a:r>
-              <a:r>
-                <a:rPr lang="en-US" altLang="zh-CN" sz="1400"/>
-                <a:t>const</a:t>
-              </a:r>
-              <a:endParaRPr lang="en-US" altLang="zh-CN" sz="1400"/>
             </a:p>
           </p:txBody>
         </p:sp>
@@ -7870,6 +8969,7 @@
             <a:bodyPr wrap="square" rtlCol="0">
               <a:spAutoFit/>
             </a:bodyPr>
+            <a:lstStyle/>
             <a:p>
               <a:pPr algn="ctr"/>
               <a:r>
@@ -7880,7 +8980,6 @@
                 <a:rPr lang="en-US" altLang="zh-CN" sz="1400"/>
                 <a:t> a</a:t>
               </a:r>
-              <a:endParaRPr lang="en-US" altLang="zh-CN" sz="1400"/>
             </a:p>
           </p:txBody>
         </p:sp>
@@ -7909,6 +9008,7 @@
             <a:bodyPr wrap="square" rtlCol="0">
               <a:spAutoFit/>
             </a:bodyPr>
+            <a:lstStyle/>
             <a:p>
               <a:pPr algn="ctr"/>
               <a:r>
@@ -7919,7 +9019,6 @@
                 <a:rPr lang="en-US" altLang="zh-CN" sz="1400"/>
                 <a:t> +</a:t>
               </a:r>
-              <a:endParaRPr lang="en-US" altLang="zh-CN" sz="1400"/>
             </a:p>
           </p:txBody>
         </p:sp>
@@ -7962,6 +9061,7 @@
               <a:bodyPr wrap="square" rtlCol="0">
                 <a:spAutoFit/>
               </a:bodyPr>
+              <a:lstStyle/>
               <a:p>
                 <a:pPr algn="ctr"/>
                 <a:r>
@@ -7972,7 +9072,6 @@
                   <a:rPr lang="en-US" altLang="zh-CN" sz="1400"/>
                   <a:t> 2</a:t>
                 </a:r>
-                <a:endParaRPr lang="en-US" altLang="zh-CN" sz="1400"/>
               </a:p>
             </p:txBody>
           </p:sp>
@@ -8001,6 +9100,7 @@
               <a:bodyPr wrap="square" rtlCol="0">
                 <a:spAutoFit/>
               </a:bodyPr>
+              <a:lstStyle/>
               <a:p>
                 <a:pPr algn="ctr"/>
                 <a:r>
@@ -8011,7 +9111,6 @@
                   <a:rPr lang="en-US" sz="1400"/>
                   <a:t> 1</a:t>
                 </a:r>
-                <a:endParaRPr lang="en-US" sz="1400"/>
               </a:p>
             </p:txBody>
           </p:sp>
@@ -8202,7 +9301,14 @@
         <p:cNvGrpSpPr/>
         <p:nvPr/>
       </p:nvGrpSpPr>
-      <p:grpSpPr/>
+      <p:grpSpPr>
+        <a:xfrm>
+          <a:off x="0" y="0"/>
+          <a:ext cx="0" cy="0"/>
+          <a:chOff x="0" y="0"/>
+          <a:chExt cx="0" cy="0"/>
+        </a:xfrm>
+      </p:grpSpPr>
       <p:sp>
         <p:nvSpPr>
           <p:cNvPr id="5" name="文本框 4"/>
@@ -8228,13 +9334,13 @@
           <a:bodyPr wrap="square" rtlCol="0">
             <a:spAutoFit/>
           </a:bodyPr>
+          <a:lstStyle/>
           <a:p>
             <a:pPr algn="ctr"/>
             <a:r>
               <a:rPr lang="zh-CN" altLang="en-US" sz="1400"/>
               <a:t>代码</a:t>
             </a:r>
-            <a:endParaRPr lang="zh-CN" altLang="en-US" sz="1400"/>
           </a:p>
         </p:txBody>
       </p:sp>
@@ -8288,6 +9394,7 @@
           </p:style>
           <p:txBody>
             <a:bodyPr rtlCol="0" anchor="ctr"/>
+            <a:lstStyle/>
             <a:p>
               <a:pPr algn="ctr"/>
               <a:endParaRPr lang="zh-CN" altLang="en-US" sz="1400"/>
@@ -8314,12 +9421,12 @@
             <a:bodyPr wrap="square" rtlCol="0">
               <a:spAutoFit/>
             </a:bodyPr>
+            <a:lstStyle/>
             <a:p>
               <a:r>
                 <a:rPr lang="zh-CN" altLang="en-US" sz="1400"/>
                 <a:t>解析</a:t>
               </a:r>
-              <a:endParaRPr lang="zh-CN" altLang="en-US" sz="1400"/>
             </a:p>
           </p:txBody>
         </p:sp>
@@ -8374,6 +9481,7 @@
           </p:style>
           <p:txBody>
             <a:bodyPr rtlCol="0" anchor="ctr"/>
+            <a:lstStyle/>
             <a:p>
               <a:pPr algn="ctr"/>
               <a:endParaRPr lang="zh-CN" altLang="en-US" sz="1400"/>
@@ -8400,6 +9508,7 @@
             <a:bodyPr wrap="square" rtlCol="0">
               <a:spAutoFit/>
             </a:bodyPr>
+            <a:lstStyle/>
             <a:p>
               <a:r>
                 <a:rPr lang="zh-CN" altLang="en-US" sz="1400"/>
@@ -8413,7 +9522,6 @@
                 <a:rPr lang="zh-CN" altLang="en-US" sz="1400"/>
                 <a:t>修改</a:t>
               </a:r>
-              <a:endParaRPr lang="zh-CN" altLang="en-US" sz="1400"/>
             </a:p>
           </p:txBody>
         </p:sp>
@@ -8438,6 +9546,7 @@
           <a:bodyPr wrap="square" rtlCol="0" anchor="t">
             <a:spAutoFit/>
           </a:bodyPr>
+          <a:lstStyle/>
           <a:p>
             <a:r>
               <a:rPr lang="en-US" altLang="zh-CN"/>
@@ -8452,13 +9561,8 @@
           <a:p>
             <a:r>
               <a:rPr lang="en-US" altLang="zh-CN"/>
-              <a:t>consol</a:t>
-            </a:r>
-            <a:r>
-              <a:rPr lang="en-US" altLang="zh-CN"/>
-              <a:t>e.log(a)</a:t>
-            </a:r>
-            <a:endParaRPr lang="en-US" altLang="zh-CN"/>
+              <a:t>console.log(a)</a:t>
+            </a:r>
           </a:p>
         </p:txBody>
       </p:sp>
@@ -8501,6 +9605,7 @@
             <a:bodyPr wrap="square" rtlCol="0">
               <a:spAutoFit/>
             </a:bodyPr>
+            <a:lstStyle/>
             <a:p>
               <a:pPr algn="ctr"/>
               <a:r>
@@ -8536,13 +9641,13 @@
             <a:bodyPr wrap="square" rtlCol="0">
               <a:spAutoFit/>
             </a:bodyPr>
+            <a:lstStyle/>
             <a:p>
               <a:pPr algn="ctr"/>
               <a:r>
                 <a:rPr lang="en-US" altLang="zh-CN" sz="1400"/>
                 <a:t>......</a:t>
               </a:r>
-              <a:endParaRPr lang="en-US" altLang="zh-CN" sz="1400"/>
             </a:p>
           </p:txBody>
         </p:sp>
@@ -8571,6 +9676,7 @@
             <a:bodyPr wrap="square" rtlCol="0">
               <a:spAutoFit/>
             </a:bodyPr>
+            <a:lstStyle/>
             <a:p>
               <a:pPr algn="ctr"/>
               <a:r>
@@ -8608,6 +9714,7 @@
             <a:bodyPr wrap="square" rtlCol="0">
               <a:spAutoFit/>
             </a:bodyPr>
+            <a:lstStyle/>
             <a:p>
               <a:pPr algn="ctr"/>
               <a:r>
@@ -8645,6 +9752,7 @@
             <a:bodyPr wrap="square" rtlCol="0">
               <a:spAutoFit/>
             </a:bodyPr>
+            <a:lstStyle/>
             <a:p>
               <a:pPr algn="ctr"/>
               <a:r>
@@ -8820,6 +9928,7 @@
           <a:bodyPr wrap="square" rtlCol="0">
             <a:spAutoFit/>
           </a:bodyPr>
+          <a:lstStyle/>
           <a:p>
             <a:pPr algn="ctr"/>
             <a:r>
@@ -8828,13 +9937,8 @@
             </a:r>
             <a:r>
               <a:rPr lang="zh-CN" altLang="en-US" sz="1400"/>
-              <a:t>抽象</a:t>
-            </a:r>
-            <a:r>
-              <a:rPr lang="zh-CN" altLang="en-US" sz="1400"/>
-              <a:t>语法树</a:t>
-            </a:r>
-            <a:endParaRPr lang="zh-CN" altLang="en-US" sz="1400"/>
+              <a:t>抽象语法树</a:t>
+            </a:r>
           </a:p>
         </p:txBody>
       </p:sp>
@@ -8877,6 +9981,7 @@
             <a:bodyPr wrap="square" rtlCol="0">
               <a:spAutoFit/>
             </a:bodyPr>
+            <a:lstStyle/>
             <a:p>
               <a:pPr algn="ctr"/>
               <a:r>
@@ -8912,13 +10017,13 @@
             <a:bodyPr wrap="square" rtlCol="0">
               <a:spAutoFit/>
             </a:bodyPr>
+            <a:lstStyle/>
             <a:p>
               <a:pPr algn="ctr"/>
               <a:r>
                 <a:rPr lang="en-US" altLang="zh-CN" sz="1400"/>
                 <a:t>......</a:t>
               </a:r>
-              <a:endParaRPr lang="en-US" altLang="zh-CN" sz="1400"/>
             </a:p>
           </p:txBody>
         </p:sp>
@@ -8947,6 +10052,7 @@
             <a:bodyPr wrap="square" rtlCol="0">
               <a:spAutoFit/>
             </a:bodyPr>
+            <a:lstStyle/>
             <a:p>
               <a:pPr algn="ctr"/>
               <a:r>
@@ -8984,6 +10090,7 @@
             <a:bodyPr wrap="square" rtlCol="0">
               <a:spAutoFit/>
             </a:bodyPr>
+            <a:lstStyle/>
             <a:p>
               <a:pPr algn="ctr"/>
               <a:r>
@@ -9021,6 +10128,7 @@
             <a:bodyPr wrap="square" rtlCol="0">
               <a:spAutoFit/>
             </a:bodyPr>
+            <a:lstStyle/>
             <a:p>
               <a:pPr algn="ctr"/>
               <a:r>
@@ -9196,6 +10304,7 @@
           <a:bodyPr wrap="square" rtlCol="0">
             <a:spAutoFit/>
           </a:bodyPr>
+          <a:lstStyle/>
           <a:p>
             <a:pPr algn="ctr"/>
             <a:r>
@@ -9204,11 +10313,7 @@
             </a:r>
             <a:r>
               <a:rPr lang="zh-CN" altLang="en-US" sz="1400"/>
-              <a:t>抽象语法树（</a:t>
-            </a:r>
-            <a:r>
-              <a:rPr lang="zh-CN" altLang="en-US" sz="1400"/>
-              <a:t>新）</a:t>
+              <a:t>抽象语法树（新）</a:t>
             </a:r>
             <a:endParaRPr lang="en-US" altLang="zh-CN" sz="1400"/>
           </a:p>
@@ -9264,6 +10369,7 @@
           </p:style>
           <p:txBody>
             <a:bodyPr rtlCol="0" anchor="ctr"/>
+            <a:lstStyle/>
             <a:p>
               <a:pPr algn="ctr"/>
               <a:endParaRPr lang="zh-CN" altLang="en-US" sz="1400"/>
@@ -9290,12 +10396,12 @@
             <a:bodyPr wrap="square" rtlCol="0">
               <a:spAutoFit/>
             </a:bodyPr>
+            <a:lstStyle/>
             <a:p>
               <a:r>
                 <a:rPr lang="zh-CN" altLang="en-US" sz="1400"/>
                 <a:t>生成</a:t>
               </a:r>
-              <a:endParaRPr lang="zh-CN" altLang="en-US" sz="1400"/>
             </a:p>
           </p:txBody>
         </p:sp>
@@ -9320,6 +10426,7 @@
           <a:bodyPr wrap="square" rtlCol="0" anchor="t">
             <a:spAutoFit/>
           </a:bodyPr>
+          <a:lstStyle/>
           <a:p>
             <a:r>
               <a:rPr lang="en-US" altLang="zh-CN"/>
@@ -9334,13 +10441,8 @@
           <a:p>
             <a:r>
               <a:rPr lang="en-US" altLang="zh-CN"/>
-              <a:t>consol</a:t>
-            </a:r>
-            <a:r>
-              <a:rPr lang="en-US" altLang="zh-CN"/>
-              <a:t>e.log(a)</a:t>
-            </a:r>
-            <a:endParaRPr lang="en-US" altLang="zh-CN"/>
+              <a:t>console.log(a)</a:t>
+            </a:r>
           </a:p>
         </p:txBody>
       </p:sp>
@@ -9369,15 +10471,12 @@
           <a:bodyPr wrap="square" rtlCol="0">
             <a:spAutoFit/>
           </a:bodyPr>
+          <a:lstStyle/>
           <a:p>
             <a:pPr algn="ctr"/>
             <a:r>
               <a:rPr lang="zh-CN" altLang="en-US" sz="1400"/>
-              <a:t>代码（</a:t>
-            </a:r>
-            <a:r>
-              <a:rPr lang="zh-CN" altLang="en-US" sz="1400"/>
-              <a:t>新）</a:t>
+              <a:t>代码（新）</a:t>
             </a:r>
             <a:endParaRPr lang="en-US" altLang="zh-CN" sz="1400"/>
           </a:p>
@@ -9400,7 +10499,14 @@
         <p:cNvGrpSpPr/>
         <p:nvPr/>
       </p:nvGrpSpPr>
-      <p:grpSpPr/>
+      <p:grpSpPr>
+        <a:xfrm>
+          <a:off x="0" y="0"/>
+          <a:ext cx="0" cy="0"/>
+          <a:chOff x="0" y="0"/>
+          <a:chExt cx="0" cy="0"/>
+        </a:xfrm>
+      </p:grpSpPr>
       <p:sp>
         <p:nvSpPr>
           <p:cNvPr id="5" name="文本框 4"/>
@@ -9426,6 +10532,7 @@
           <a:bodyPr wrap="square" rtlCol="0">
             <a:spAutoFit/>
           </a:bodyPr>
+          <a:lstStyle/>
           <a:p>
             <a:pPr algn="ctr"/>
             <a:r>
@@ -9436,7 +10543,6 @@
               <a:rPr lang="zh-CN" altLang="en-US"/>
               <a:t>.js</a:t>
             </a:r>
-            <a:endParaRPr lang="zh-CN" altLang="en-US"/>
           </a:p>
         </p:txBody>
       </p:sp>
@@ -9490,6 +10596,7 @@
           </p:style>
           <p:txBody>
             <a:bodyPr rtlCol="0" anchor="ctr"/>
+            <a:lstStyle/>
             <a:p>
               <a:pPr algn="ctr"/>
               <a:endParaRPr lang="zh-CN" altLang="en-US"/>
@@ -9516,12 +10623,12 @@
             <a:bodyPr wrap="square" rtlCol="0">
               <a:spAutoFit/>
             </a:bodyPr>
+            <a:lstStyle/>
             <a:p>
               <a:r>
                 <a:rPr lang="zh-CN" altLang="en-US"/>
                 <a:t>生成</a:t>
               </a:r>
-              <a:endParaRPr lang="zh-CN" altLang="en-US"/>
             </a:p>
           </p:txBody>
         </p:sp>
@@ -9551,6 +10658,7 @@
           <a:bodyPr wrap="square" rtlCol="0">
             <a:spAutoFit/>
           </a:bodyPr>
+          <a:lstStyle/>
           <a:p>
             <a:pPr algn="ctr"/>
             <a:r>
@@ -9561,7 +10669,6 @@
               <a:rPr lang="zh-CN" altLang="en-US"/>
               <a:t>.js</a:t>
             </a:r>
-            <a:endParaRPr lang="zh-CN" altLang="en-US"/>
           </a:p>
         </p:txBody>
       </p:sp>
@@ -9615,6 +10722,7 @@
           </p:style>
           <p:txBody>
             <a:bodyPr rtlCol="0" anchor="ctr"/>
+            <a:lstStyle/>
             <a:p>
               <a:pPr algn="ctr"/>
               <a:endParaRPr lang="zh-CN" altLang="en-US"/>
@@ -9641,12 +10749,12 @@
             <a:bodyPr wrap="square" rtlCol="0">
               <a:spAutoFit/>
             </a:bodyPr>
+            <a:lstStyle/>
             <a:p>
               <a:r>
                 <a:rPr lang="zh-CN" altLang="en-US"/>
                 <a:t>生成</a:t>
               </a:r>
-              <a:endParaRPr lang="zh-CN" altLang="en-US"/>
             </a:p>
           </p:txBody>
         </p:sp>
@@ -9676,6 +10784,7 @@
           <a:bodyPr wrap="square" rtlCol="0">
             <a:spAutoFit/>
           </a:bodyPr>
+          <a:lstStyle/>
           <a:p>
             <a:pPr algn="ctr"/>
             <a:r>
@@ -9686,7 +10795,6 @@
               <a:rPr lang="zh-CN" altLang="en-US"/>
               <a:t>.js</a:t>
             </a:r>
-            <a:endParaRPr lang="zh-CN" altLang="en-US"/>
           </a:p>
         </p:txBody>
       </p:sp>
@@ -9715,6 +10823,7 @@
           <a:bodyPr wrap="square" rtlCol="0">
             <a:spAutoFit/>
           </a:bodyPr>
+          <a:lstStyle/>
           <a:p>
             <a:pPr algn="ctr"/>
             <a:r>
@@ -9725,7 +10834,6 @@
               <a:rPr lang="zh-CN" altLang="en-US"/>
               <a:t>.js</a:t>
             </a:r>
-            <a:endParaRPr lang="zh-CN" altLang="en-US"/>
           </a:p>
         </p:txBody>
       </p:sp>
@@ -9754,6 +10862,7 @@
           <a:bodyPr wrap="square" rtlCol="0">
             <a:spAutoFit/>
           </a:bodyPr>
+          <a:lstStyle/>
           <a:p>
             <a:pPr algn="ctr"/>
             <a:r>
@@ -9766,13 +10875,8 @@
             </a:r>
             <a:r>
               <a:rPr lang="en-US" altLang="zh-CN"/>
-              <a:t>.</a:t>
-            </a:r>
-            <a:r>
-              <a:rPr lang="en-US" altLang="zh-CN"/>
-              <a:t>map</a:t>
-            </a:r>
-            <a:endParaRPr lang="en-US" altLang="zh-CN"/>
+              <a:t>.map</a:t>
+            </a:r>
           </a:p>
         </p:txBody>
       </p:sp>
@@ -9801,6 +10905,7 @@
           <a:bodyPr wrap="square" rtlCol="0">
             <a:spAutoFit/>
           </a:bodyPr>
+          <a:lstStyle/>
           <a:p>
             <a:pPr algn="ctr"/>
             <a:r>
@@ -9813,13 +10918,8 @@
             </a:r>
             <a:r>
               <a:rPr lang="en-US" altLang="zh-CN"/>
-              <a:t>.</a:t>
-            </a:r>
-            <a:r>
-              <a:rPr lang="en-US" altLang="zh-CN"/>
-              <a:t>map</a:t>
-            </a:r>
-            <a:endParaRPr lang="en-US" altLang="zh-CN"/>
+              <a:t>.map</a:t>
+            </a:r>
           </a:p>
         </p:txBody>
       </p:sp>
@@ -9873,6 +10973,7 @@
           </p:style>
           <p:txBody>
             <a:bodyPr rtlCol="0" anchor="ctr"/>
+            <a:lstStyle/>
             <a:p>
               <a:pPr algn="ctr"/>
               <a:endParaRPr lang="zh-CN" altLang="en-US"/>
@@ -9899,12 +11000,12 @@
             <a:bodyPr wrap="square" rtlCol="0">
               <a:spAutoFit/>
             </a:bodyPr>
+            <a:lstStyle/>
             <a:p>
               <a:r>
                 <a:rPr lang="zh-CN" altLang="en-US"/>
                 <a:t>生成</a:t>
               </a:r>
-              <a:endParaRPr lang="zh-CN" altLang="en-US"/>
             </a:p>
           </p:txBody>
         </p:sp>
@@ -10001,7 +11102,14 @@
         <p:cNvGrpSpPr/>
         <p:nvPr/>
       </p:nvGrpSpPr>
-      <p:grpSpPr/>
+      <p:grpSpPr>
+        <a:xfrm>
+          <a:off x="0" y="0"/>
+          <a:ext cx="0" cy="0"/>
+          <a:chOff x="0" y="0"/>
+          <a:chExt cx="0" cy="0"/>
+        </a:xfrm>
+      </p:grpSpPr>
       <p:sp>
         <p:nvSpPr>
           <p:cNvPr id="5" name="文本框 4"/>
@@ -10025,6 +11133,7 @@
           <a:bodyPr wrap="square" rtlCol="0">
             <a:spAutoFit/>
           </a:bodyPr>
+          <a:lstStyle/>
           <a:p>
             <a:pPr algn="ctr"/>
             <a:r>
@@ -10043,7 +11152,6 @@
               <a:rPr lang="zh-CN" altLang="en-US"/>
               <a:t>.js</a:t>
             </a:r>
-            <a:endParaRPr lang="zh-CN" altLang="en-US"/>
           </a:p>
         </p:txBody>
       </p:sp>
@@ -10097,6 +11205,7 @@
           </p:style>
           <p:txBody>
             <a:bodyPr rtlCol="0" anchor="ctr"/>
+            <a:lstStyle/>
             <a:p>
               <a:pPr algn="ctr"/>
               <a:endParaRPr lang="zh-CN" altLang="en-US"/>
@@ -10123,12 +11232,12 @@
             <a:bodyPr wrap="square" rtlCol="0">
               <a:spAutoFit/>
             </a:bodyPr>
+            <a:lstStyle/>
             <a:p>
               <a:r>
                 <a:rPr lang="zh-CN" altLang="en-US"/>
                 <a:t>生成</a:t>
               </a:r>
-              <a:endParaRPr lang="zh-CN" altLang="en-US"/>
             </a:p>
           </p:txBody>
         </p:sp>
@@ -10158,13 +11267,13 @@
           <a:bodyPr wrap="square" rtlCol="0">
             <a:spAutoFit/>
           </a:bodyPr>
+          <a:lstStyle/>
           <a:p>
             <a:pPr algn="ctr"/>
             <a:r>
               <a:rPr lang="en-US" altLang="zh-CN"/>
               <a:t>44</a:t>
             </a:r>
-            <a:endParaRPr lang="en-US" altLang="zh-CN"/>
           </a:p>
           <a:p>
             <a:pPr algn="ctr"/>
@@ -10174,13 +11283,8 @@
             </a:r>
             <a:r>
               <a:rPr lang="zh-CN" altLang="en-US"/>
-              <a:t>中</a:t>
-            </a:r>
-            <a:r>
-              <a:rPr lang="zh-CN" altLang="en-US"/>
-              <a:t>代码</a:t>
-            </a:r>
-            <a:endParaRPr lang="zh-CN" altLang="en-US"/>
+              <a:t>中代码</a:t>
+            </a:r>
           </a:p>
         </p:txBody>
       </p:sp>
@@ -10209,6 +11313,7 @@
           <a:bodyPr wrap="square" rtlCol="0">
             <a:spAutoFit/>
           </a:bodyPr>
+          <a:lstStyle/>
           <a:p>
             <a:pPr algn="ctr"/>
             <a:r>
@@ -10219,7 +11324,6 @@
               <a:rPr lang="zh-CN" altLang="en-US"/>
               <a:t>.js</a:t>
             </a:r>
-            <a:endParaRPr lang="zh-CN" altLang="en-US"/>
           </a:p>
           <a:p>
             <a:pPr algn="ctr"/>
@@ -10227,7 +11331,6 @@
               <a:rPr lang="zh-CN" altLang="en-US"/>
               <a:t>源代码</a:t>
             </a:r>
-            <a:endParaRPr lang="zh-CN" altLang="en-US"/>
           </a:p>
         </p:txBody>
       </p:sp>
@@ -10256,6 +11359,7 @@
           <a:bodyPr wrap="square" rtlCol="0">
             <a:spAutoFit/>
           </a:bodyPr>
+          <a:lstStyle/>
           <a:p>
             <a:pPr algn="ctr"/>
             <a:r>
@@ -10266,7 +11370,6 @@
               <a:rPr lang="zh-CN" altLang="en-US"/>
               <a:t>数据</a:t>
             </a:r>
-            <a:endParaRPr lang="zh-CN" altLang="en-US"/>
           </a:p>
         </p:txBody>
       </p:sp>
@@ -10318,6 +11421,7 @@
         </p:style>
         <p:txBody>
           <a:bodyPr rtlCol="0" anchor="ctr"/>
+          <a:lstStyle/>
           <a:p>
             <a:pPr algn="ctr"/>
             <a:endParaRPr lang="zh-CN" altLang="en-US"/>
@@ -10360,6 +11464,7 @@
         </p:style>
         <p:txBody>
           <a:bodyPr rtlCol="0" anchor="ctr"/>
+          <a:lstStyle/>
           <a:p>
             <a:pPr algn="ctr"/>
             <a:endParaRPr lang="zh-CN" altLang="en-US"/>
@@ -10402,6 +11507,7 @@
         </p:style>
         <p:txBody>
           <a:bodyPr rtlCol="0" anchor="ctr"/>
+          <a:lstStyle/>
           <a:p>
             <a:pPr algn="ctr"/>
             <a:endParaRPr lang="zh-CN" altLang="en-US"/>
@@ -10425,7 +11531,14 @@
         <p:cNvGrpSpPr/>
         <p:nvPr/>
       </p:nvGrpSpPr>
-      <p:grpSpPr/>
+      <p:grpSpPr>
+        <a:xfrm>
+          <a:off x="0" y="0"/>
+          <a:ext cx="0" cy="0"/>
+          <a:chOff x="0" y="0"/>
+          <a:chExt cx="0" cy="0"/>
+        </a:xfrm>
+      </p:grpSpPr>
       <p:grpSp>
         <p:nvGrpSpPr>
           <p:cNvPr id="31" name="组合 30"/>
@@ -10476,6 +11589,7 @@
           </p:style>
           <p:txBody>
             <a:bodyPr rtlCol="0" anchor="ctr"/>
+            <a:lstStyle/>
             <a:p>
               <a:pPr algn="ctr"/>
               <a:endParaRPr lang="zh-CN" altLang="en-US"/>
@@ -10502,12 +11616,12 @@
             <a:bodyPr wrap="square" rtlCol="0">
               <a:spAutoFit/>
             </a:bodyPr>
+            <a:lstStyle/>
             <a:p>
               <a:r>
                 <a:rPr lang="zh-CN" altLang="en-US"/>
                 <a:t>编译</a:t>
               </a:r>
-              <a:endParaRPr lang="zh-CN" altLang="en-US"/>
             </a:p>
           </p:txBody>
         </p:sp>
@@ -10537,6 +11651,7 @@
           <a:bodyPr wrap="square" rtlCol="0">
             <a:spAutoFit/>
           </a:bodyPr>
+          <a:lstStyle/>
           <a:p>
             <a:pPr algn="ctr"/>
             <a:r>
@@ -10551,7 +11666,6 @@
               <a:rPr lang="en-US" altLang="zh-CN"/>
               <a:t>scss</a:t>
             </a:r>
-            <a:endParaRPr lang="en-US" altLang="zh-CN"/>
           </a:p>
           <a:p>
             <a:pPr algn="ctr"/>
@@ -10563,7 +11677,6 @@
               <a:rPr lang="zh-CN" altLang="en-US"/>
               <a:t>文件</a:t>
             </a:r>
-            <a:endParaRPr lang="zh-CN" altLang="en-US"/>
           </a:p>
         </p:txBody>
       </p:sp>
@@ -10617,6 +11730,7 @@
           </p:style>
           <p:txBody>
             <a:bodyPr rtlCol="0" anchor="ctr"/>
+            <a:lstStyle/>
             <a:p>
               <a:pPr algn="ctr"/>
               <a:endParaRPr lang="zh-CN" altLang="en-US"/>
@@ -10643,12 +11757,12 @@
             <a:bodyPr wrap="square" rtlCol="0">
               <a:spAutoFit/>
             </a:bodyPr>
+            <a:lstStyle/>
             <a:p>
               <a:r>
                 <a:rPr lang="zh-CN" altLang="en-US"/>
                 <a:t>编译</a:t>
               </a:r>
-              <a:endParaRPr lang="zh-CN" altLang="en-US"/>
             </a:p>
           </p:txBody>
         </p:sp>
@@ -10678,6 +11792,7 @@
           <a:bodyPr wrap="square" rtlCol="0">
             <a:spAutoFit/>
           </a:bodyPr>
+          <a:lstStyle/>
           <a:p>
             <a:pPr algn="ctr"/>
             <a:r>
@@ -10692,7 +11807,6 @@
               <a:rPr lang="en-US" altLang="zh-CN"/>
               <a:t>less</a:t>
             </a:r>
-            <a:endParaRPr lang="en-US" altLang="zh-CN"/>
           </a:p>
           <a:p>
             <a:pPr algn="ctr"/>
@@ -10704,7 +11818,6 @@
               <a:rPr lang="zh-CN" altLang="en-US"/>
               <a:t>文件</a:t>
             </a:r>
-            <a:endParaRPr lang="zh-CN" altLang="en-US"/>
           </a:p>
         </p:txBody>
       </p:sp>
@@ -10733,6 +11846,7 @@
           <a:bodyPr wrap="square" rtlCol="0">
             <a:spAutoFit/>
           </a:bodyPr>
+          <a:lstStyle/>
           <a:p>
             <a:pPr algn="ctr"/>
             <a:r>
@@ -10747,7 +11861,6 @@
               <a:rPr lang="en-US" altLang="zh-CN"/>
               <a:t>css</a:t>
             </a:r>
-            <a:endParaRPr lang="en-US" altLang="zh-CN"/>
           </a:p>
           <a:p>
             <a:pPr algn="ctr"/>
@@ -10759,19 +11872,13 @@
               <a:rPr lang="zh-CN" altLang="en-US"/>
               <a:t>文件</a:t>
             </a:r>
-            <a:endParaRPr lang="zh-CN" altLang="en-US"/>
           </a:p>
           <a:p>
             <a:pPr algn="ctr"/>
             <a:r>
               <a:rPr lang="zh-CN" altLang="en-US"/>
-              <a:t>中间</a:t>
-            </a:r>
-            <a:r>
-              <a:rPr lang="zh-CN" altLang="en-US"/>
-              <a:t>产物</a:t>
-            </a:r>
-            <a:endParaRPr lang="zh-CN" altLang="en-US"/>
+              <a:t>中间产物</a:t>
+            </a:r>
           </a:p>
         </p:txBody>
       </p:sp>
@@ -10825,6 +11932,7 @@
           </p:style>
           <p:txBody>
             <a:bodyPr rtlCol="0" anchor="ctr"/>
+            <a:lstStyle/>
             <a:p>
               <a:pPr algn="ctr"/>
               <a:endParaRPr lang="zh-CN" altLang="en-US"/>
@@ -10851,12 +11959,12 @@
             <a:bodyPr wrap="square" rtlCol="0">
               <a:spAutoFit/>
             </a:bodyPr>
+            <a:lstStyle/>
             <a:p>
               <a:r>
                 <a:rPr lang="zh-CN" altLang="en-US"/>
                 <a:t>编译</a:t>
               </a:r>
-              <a:endParaRPr lang="zh-CN" altLang="en-US"/>
             </a:p>
           </p:txBody>
         </p:sp>
@@ -10886,6 +11994,7 @@
           <a:bodyPr wrap="square" rtlCol="0">
             <a:spAutoFit/>
           </a:bodyPr>
+          <a:lstStyle/>
           <a:p>
             <a:pPr algn="ctr"/>
             <a:r>
@@ -10922,21 +12031,13 @@
               </a:rPr>
               <a:t>文件</a:t>
             </a:r>
-            <a:endParaRPr lang="zh-CN" altLang="en-US">
-              <a:sym typeface="+mn-ea"/>
-            </a:endParaRPr>
           </a:p>
           <a:p>
             <a:pPr algn="ctr"/>
             <a:r>
               <a:rPr lang="zh-CN" altLang="en-US"/>
-              <a:t>最终</a:t>
-            </a:r>
-            <a:r>
-              <a:rPr lang="zh-CN" altLang="en-US"/>
-              <a:t>产物</a:t>
-            </a:r>
-            <a:endParaRPr lang="zh-CN" altLang="en-US"/>
+              <a:t>最终产物</a:t>
+            </a:r>
           </a:p>
         </p:txBody>
       </p:sp>
@@ -10989,6 +12090,7 @@
         </p:style>
         <p:txBody>
           <a:bodyPr rtlCol="0" anchor="ctr"/>
+          <a:lstStyle/>
           <a:p>
             <a:pPr algn="ctr"/>
             <a:endParaRPr lang="zh-CN" altLang="en-US"/>
@@ -11015,6 +12117,7 @@
           <a:bodyPr wrap="square" rtlCol="0">
             <a:spAutoFit/>
           </a:bodyPr>
+          <a:lstStyle/>
           <a:p>
             <a:r>
               <a:rPr lang="en-US" altLang="zh-CN"/>
@@ -11022,13 +12125,8 @@
             </a:r>
             <a:r>
               <a:rPr lang="zh-CN" altLang="en-US"/>
-              <a:t>预处理</a:t>
-            </a:r>
-            <a:r>
-              <a:rPr lang="zh-CN" altLang="en-US"/>
-              <a:t>器</a:t>
-            </a:r>
-            <a:endParaRPr lang="zh-CN" altLang="en-US"/>
+              <a:t>预处理器</a:t>
+            </a:r>
           </a:p>
         </p:txBody>
       </p:sp>
@@ -11081,6 +12179,7 @@
         </p:style>
         <p:txBody>
           <a:bodyPr rtlCol="0" anchor="ctr"/>
+          <a:lstStyle/>
           <a:p>
             <a:pPr algn="ctr"/>
             <a:endParaRPr lang="zh-CN" altLang="en-US"/>
@@ -11107,6 +12206,7 @@
           <a:bodyPr wrap="square" rtlCol="0">
             <a:spAutoFit/>
           </a:bodyPr>
+          <a:lstStyle/>
           <a:p>
             <a:r>
               <a:rPr lang="en-US" altLang="zh-CN"/>
@@ -11114,13 +12214,8 @@
             </a:r>
             <a:r>
               <a:rPr lang="zh-CN" altLang="en-US"/>
-              <a:t>后处理</a:t>
-            </a:r>
-            <a:r>
-              <a:rPr lang="zh-CN" altLang="en-US"/>
-              <a:t>器</a:t>
-            </a:r>
-            <a:endParaRPr lang="zh-CN" altLang="en-US"/>
+              <a:t>后处理器</a:t>
+            </a:r>
           </a:p>
         </p:txBody>
       </p:sp>
@@ -11132,18 +12227,1183 @@
 </p:sld>
 </file>
 
+<file path=ppt/slides/slide9.xml><?xml version="1.0" encoding="utf-8"?>
+<p:sld xmlns:a="http://schemas.openxmlformats.org/drawingml/2006/main" xmlns:r="http://schemas.openxmlformats.org/officeDocument/2006/relationships" xmlns:p="http://schemas.openxmlformats.org/presentationml/2006/main">
+  <p:cSld>
+    <p:spTree>
+      <p:nvGrpSpPr>
+        <p:cNvPr id="1" name="">
+          <a:extLst>
+            <a:ext uri="{FF2B5EF4-FFF2-40B4-BE49-F238E27FC236}">
+              <a16:creationId xmlns:a16="http://schemas.microsoft.com/office/drawing/2014/main" id="{8309A1E3-B2F1-76B3-2635-C4336E3A694C}"/>
+            </a:ext>
+          </a:extLst>
+        </p:cNvPr>
+        <p:cNvGrpSpPr/>
+        <p:nvPr/>
+      </p:nvGrpSpPr>
+      <p:grpSpPr>
+        <a:xfrm>
+          <a:off x="0" y="0"/>
+          <a:ext cx="0" cy="0"/>
+          <a:chOff x="0" y="0"/>
+          <a:chExt cx="0" cy="0"/>
+        </a:xfrm>
+      </p:grpSpPr>
+      <p:sp>
+        <p:nvSpPr>
+          <p:cNvPr id="5" name="文本框 4">
+            <a:extLst>
+              <a:ext uri="{FF2B5EF4-FFF2-40B4-BE49-F238E27FC236}">
+                <a16:creationId xmlns:a16="http://schemas.microsoft.com/office/drawing/2014/main" id="{0E3AB260-D1EC-2A5A-831B-BE5230D7129C}"/>
+              </a:ext>
+            </a:extLst>
+          </p:cNvPr>
+          <p:cNvSpPr txBox="1"/>
+          <p:nvPr/>
+        </p:nvSpPr>
+        <p:spPr>
+          <a:xfrm>
+            <a:off x="1917566" y="489267"/>
+            <a:ext cx="926465" cy="306705"/>
+          </a:xfrm>
+          <a:prstGeom prst="rect">
+            <a:avLst/>
+          </a:prstGeom>
+          <a:noFill/>
+          <a:ln w="12700">
+            <a:solidFill>
+              <a:schemeClr val="tx1"/>
+            </a:solidFill>
+          </a:ln>
+        </p:spPr>
+        <p:txBody>
+          <a:bodyPr wrap="square" rtlCol="0">
+            <a:spAutoFit/>
+          </a:bodyPr>
+          <a:lstStyle/>
+          <a:p>
+            <a:pPr algn="ctr"/>
+            <a:r>
+              <a:rPr lang="zh-CN" altLang="en-US" sz="1400" dirty="0"/>
+              <a:t>用户</a:t>
+            </a:r>
+          </a:p>
+        </p:txBody>
+      </p:sp>
+      <p:sp>
+        <p:nvSpPr>
+          <p:cNvPr id="15" name="文本框 14">
+            <a:extLst>
+              <a:ext uri="{FF2B5EF4-FFF2-40B4-BE49-F238E27FC236}">
+                <a16:creationId xmlns:a16="http://schemas.microsoft.com/office/drawing/2014/main" id="{D53D0C52-B368-F842-068A-CBEB92E39B85}"/>
+              </a:ext>
+            </a:extLst>
+          </p:cNvPr>
+          <p:cNvSpPr txBox="1"/>
+          <p:nvPr/>
+        </p:nvSpPr>
+        <p:spPr>
+          <a:xfrm>
+            <a:off x="5423535" y="489267"/>
+            <a:ext cx="1365885" cy="306705"/>
+          </a:xfrm>
+          <a:prstGeom prst="rect">
+            <a:avLst/>
+          </a:prstGeom>
+          <a:noFill/>
+          <a:ln w="12700">
+            <a:solidFill>
+              <a:schemeClr val="tx1"/>
+            </a:solidFill>
+          </a:ln>
+        </p:spPr>
+        <p:txBody>
+          <a:bodyPr wrap="square" rtlCol="0">
+            <a:spAutoFit/>
+          </a:bodyPr>
+          <a:lstStyle/>
+          <a:p>
+            <a:pPr algn="ctr"/>
+            <a:r>
+              <a:rPr lang="en-US" altLang="zh-CN" sz="1400" dirty="0"/>
+              <a:t>Agent</a:t>
+            </a:r>
+            <a:r>
+              <a:rPr lang="zh-CN" altLang="en-US" sz="1400" dirty="0"/>
+              <a:t>软件</a:t>
+            </a:r>
+          </a:p>
+        </p:txBody>
+      </p:sp>
+      <p:sp>
+        <p:nvSpPr>
+          <p:cNvPr id="17" name="右箭头 16">
+            <a:extLst>
+              <a:ext uri="{FF2B5EF4-FFF2-40B4-BE49-F238E27FC236}">
+                <a16:creationId xmlns:a16="http://schemas.microsoft.com/office/drawing/2014/main" id="{B31FE6E8-3B67-2717-0F5C-12BEC33D5180}"/>
+              </a:ext>
+            </a:extLst>
+          </p:cNvPr>
+          <p:cNvSpPr/>
+          <p:nvPr/>
+        </p:nvSpPr>
+        <p:spPr>
+          <a:xfrm rot="10800000">
+            <a:off x="6264566" y="2893213"/>
+            <a:ext cx="3436762" cy="207010"/>
+          </a:xfrm>
+          <a:prstGeom prst="rightArrow">
+            <a:avLst/>
+          </a:prstGeom>
+          <a:ln>
+            <a:noFill/>
+          </a:ln>
+        </p:spPr>
+        <p:style>
+          <a:lnRef idx="2">
+            <a:schemeClr val="accent1">
+              <a:shade val="50000"/>
+            </a:schemeClr>
+          </a:lnRef>
+          <a:fillRef idx="1">
+            <a:schemeClr val="accent1"/>
+          </a:fillRef>
+          <a:effectRef idx="0">
+            <a:schemeClr val="accent1"/>
+          </a:effectRef>
+          <a:fontRef idx="minor">
+            <a:schemeClr val="lt1"/>
+          </a:fontRef>
+        </p:style>
+        <p:txBody>
+          <a:bodyPr rtlCol="0" anchor="ctr"/>
+          <a:lstStyle/>
+          <a:p>
+            <a:pPr algn="ctr"/>
+            <a:endParaRPr lang="zh-CN" altLang="en-US" sz="1400" dirty="0"/>
+          </a:p>
+        </p:txBody>
+      </p:sp>
+      <p:sp>
+        <p:nvSpPr>
+          <p:cNvPr id="18" name="文本框 17">
+            <a:extLst>
+              <a:ext uri="{FF2B5EF4-FFF2-40B4-BE49-F238E27FC236}">
+                <a16:creationId xmlns:a16="http://schemas.microsoft.com/office/drawing/2014/main" id="{4BF56C4A-4CDD-CB90-7E36-393E108C93EA}"/>
+              </a:ext>
+            </a:extLst>
+          </p:cNvPr>
+          <p:cNvSpPr txBox="1"/>
+          <p:nvPr/>
+        </p:nvSpPr>
+        <p:spPr>
+          <a:xfrm>
+            <a:off x="6863224" y="929311"/>
+            <a:ext cx="2239446" cy="461665"/>
+          </a:xfrm>
+          <a:prstGeom prst="rect">
+            <a:avLst/>
+          </a:prstGeom>
+          <a:noFill/>
+        </p:spPr>
+        <p:txBody>
+          <a:bodyPr wrap="square" rtlCol="0">
+            <a:spAutoFit/>
+          </a:bodyPr>
+          <a:lstStyle/>
+          <a:p>
+            <a:r>
+              <a:rPr lang="zh-CN" altLang="en-US" sz="1200" dirty="0"/>
+              <a:t>提供能力列表，例如访问网页</a:t>
+            </a:r>
+            <a:r>
+              <a:rPr lang="en-US" altLang="zh-CN" sz="1200" dirty="0"/>
+              <a:t>/</a:t>
+            </a:r>
+            <a:r>
+              <a:rPr lang="zh-CN" altLang="en-US" sz="1200" dirty="0"/>
+              <a:t>编辑文件</a:t>
+            </a:r>
+            <a:r>
+              <a:rPr lang="en-US" altLang="zh-CN" sz="1200" dirty="0"/>
+              <a:t>/</a:t>
+            </a:r>
+            <a:r>
+              <a:rPr lang="zh-CN" altLang="en-US" sz="1200" dirty="0"/>
+              <a:t>执行命令等</a:t>
+            </a:r>
+          </a:p>
+        </p:txBody>
+      </p:sp>
+      <p:cxnSp>
+        <p:nvCxnSpPr>
+          <p:cNvPr id="2" name="直接连接符 1">
+            <a:extLst>
+              <a:ext uri="{FF2B5EF4-FFF2-40B4-BE49-F238E27FC236}">
+                <a16:creationId xmlns:a16="http://schemas.microsoft.com/office/drawing/2014/main" id="{5A50B811-E678-D3CB-F11A-05E289F74390}"/>
+              </a:ext>
+            </a:extLst>
+          </p:cNvPr>
+          <p:cNvCxnSpPr>
+            <a:cxnSpLocks/>
+          </p:cNvCxnSpPr>
+          <p:nvPr/>
+        </p:nvCxnSpPr>
+        <p:spPr>
+          <a:xfrm>
+            <a:off x="2380798" y="934720"/>
+            <a:ext cx="0" cy="4338320"/>
+          </a:xfrm>
+          <a:prstGeom prst="line">
+            <a:avLst/>
+          </a:prstGeom>
+          <a:ln w="19050">
+            <a:solidFill>
+              <a:schemeClr val="tx1">
+                <a:lumMod val="95000"/>
+                <a:lumOff val="5000"/>
+              </a:schemeClr>
+            </a:solidFill>
+          </a:ln>
+        </p:spPr>
+        <p:style>
+          <a:lnRef idx="1">
+            <a:schemeClr val="accent1"/>
+          </a:lnRef>
+          <a:fillRef idx="0">
+            <a:schemeClr val="accent1"/>
+          </a:fillRef>
+          <a:effectRef idx="0">
+            <a:schemeClr val="accent1"/>
+          </a:effectRef>
+          <a:fontRef idx="minor">
+            <a:schemeClr val="tx1"/>
+          </a:fontRef>
+        </p:style>
+      </p:cxnSp>
+      <p:cxnSp>
+        <p:nvCxnSpPr>
+          <p:cNvPr id="3" name="直接连接符 2">
+            <a:extLst>
+              <a:ext uri="{FF2B5EF4-FFF2-40B4-BE49-F238E27FC236}">
+                <a16:creationId xmlns:a16="http://schemas.microsoft.com/office/drawing/2014/main" id="{735DC50B-EFC4-79B5-C58C-5E4660B81B91}"/>
+              </a:ext>
+            </a:extLst>
+          </p:cNvPr>
+          <p:cNvCxnSpPr>
+            <a:cxnSpLocks/>
+          </p:cNvCxnSpPr>
+          <p:nvPr/>
+        </p:nvCxnSpPr>
+        <p:spPr>
+          <a:xfrm>
+            <a:off x="6106477" y="934720"/>
+            <a:ext cx="0" cy="4338320"/>
+          </a:xfrm>
+          <a:prstGeom prst="line">
+            <a:avLst/>
+          </a:prstGeom>
+          <a:ln w="19050">
+            <a:solidFill>
+              <a:schemeClr val="tx1">
+                <a:lumMod val="95000"/>
+                <a:lumOff val="5000"/>
+              </a:schemeClr>
+            </a:solidFill>
+          </a:ln>
+        </p:spPr>
+        <p:style>
+          <a:lnRef idx="1">
+            <a:schemeClr val="accent1"/>
+          </a:lnRef>
+          <a:fillRef idx="0">
+            <a:schemeClr val="accent1"/>
+          </a:fillRef>
+          <a:effectRef idx="0">
+            <a:schemeClr val="accent1"/>
+          </a:effectRef>
+          <a:fontRef idx="minor">
+            <a:schemeClr val="tx1"/>
+          </a:fontRef>
+        </p:style>
+      </p:cxnSp>
+      <p:sp>
+        <p:nvSpPr>
+          <p:cNvPr id="25" name="文本框 24">
+            <a:extLst>
+              <a:ext uri="{FF2B5EF4-FFF2-40B4-BE49-F238E27FC236}">
+                <a16:creationId xmlns:a16="http://schemas.microsoft.com/office/drawing/2014/main" id="{308E3629-0FA5-DDDD-7A0E-3AD783FDD0A1}"/>
+              </a:ext>
+            </a:extLst>
+          </p:cNvPr>
+          <p:cNvSpPr txBox="1"/>
+          <p:nvPr/>
+        </p:nvSpPr>
+        <p:spPr>
+          <a:xfrm>
+            <a:off x="4985594" y="3209938"/>
+            <a:ext cx="875881" cy="276999"/>
+          </a:xfrm>
+          <a:prstGeom prst="rect">
+            <a:avLst/>
+          </a:prstGeom>
+          <a:noFill/>
+        </p:spPr>
+        <p:txBody>
+          <a:bodyPr wrap="square" rtlCol="0">
+            <a:spAutoFit/>
+          </a:bodyPr>
+          <a:lstStyle/>
+          <a:p>
+            <a:r>
+              <a:rPr lang="zh-CN" altLang="en-US" sz="1200" dirty="0"/>
+              <a:t>访问网页</a:t>
+            </a:r>
+          </a:p>
+        </p:txBody>
+      </p:sp>
+      <p:sp>
+        <p:nvSpPr>
+          <p:cNvPr id="27" name="右箭头 26">
+            <a:extLst>
+              <a:ext uri="{FF2B5EF4-FFF2-40B4-BE49-F238E27FC236}">
+                <a16:creationId xmlns:a16="http://schemas.microsoft.com/office/drawing/2014/main" id="{65C57FA4-93B7-2C48-500F-DC2E65B5DF7F}"/>
+              </a:ext>
+            </a:extLst>
+          </p:cNvPr>
+          <p:cNvSpPr/>
+          <p:nvPr/>
+        </p:nvSpPr>
+        <p:spPr>
+          <a:xfrm rot="5400000">
+            <a:off x="5474887" y="3290069"/>
+            <a:ext cx="751578" cy="207010"/>
+          </a:xfrm>
+          <a:prstGeom prst="rightArrow">
+            <a:avLst/>
+          </a:prstGeom>
+          <a:ln>
+            <a:noFill/>
+          </a:ln>
+        </p:spPr>
+        <p:style>
+          <a:lnRef idx="2">
+            <a:schemeClr val="accent1">
+              <a:shade val="50000"/>
+            </a:schemeClr>
+          </a:lnRef>
+          <a:fillRef idx="1">
+            <a:schemeClr val="accent1"/>
+          </a:fillRef>
+          <a:effectRef idx="0">
+            <a:schemeClr val="accent1"/>
+          </a:effectRef>
+          <a:fontRef idx="minor">
+            <a:schemeClr val="lt1"/>
+          </a:fontRef>
+        </p:style>
+        <p:txBody>
+          <a:bodyPr rtlCol="0" anchor="ctr"/>
+          <a:lstStyle/>
+          <a:p>
+            <a:pPr algn="ctr"/>
+            <a:endParaRPr lang="zh-CN" altLang="en-US" sz="1400"/>
+          </a:p>
+        </p:txBody>
+      </p:sp>
+      <p:sp>
+        <p:nvSpPr>
+          <p:cNvPr id="4" name="右箭头 3">
+            <a:extLst>
+              <a:ext uri="{FF2B5EF4-FFF2-40B4-BE49-F238E27FC236}">
+                <a16:creationId xmlns:a16="http://schemas.microsoft.com/office/drawing/2014/main" id="{15F12ABC-6C90-684B-9636-036103048017}"/>
+              </a:ext>
+            </a:extLst>
+          </p:cNvPr>
+          <p:cNvSpPr/>
+          <p:nvPr/>
+        </p:nvSpPr>
+        <p:spPr>
+          <a:xfrm>
+            <a:off x="2538911" y="2120308"/>
+            <a:ext cx="3367219" cy="207010"/>
+          </a:xfrm>
+          <a:prstGeom prst="rightArrow">
+            <a:avLst/>
+          </a:prstGeom>
+          <a:ln>
+            <a:noFill/>
+          </a:ln>
+        </p:spPr>
+        <p:style>
+          <a:lnRef idx="2">
+            <a:schemeClr val="accent1">
+              <a:shade val="50000"/>
+            </a:schemeClr>
+          </a:lnRef>
+          <a:fillRef idx="1">
+            <a:schemeClr val="accent1"/>
+          </a:fillRef>
+          <a:effectRef idx="0">
+            <a:schemeClr val="accent1"/>
+          </a:effectRef>
+          <a:fontRef idx="minor">
+            <a:schemeClr val="lt1"/>
+          </a:fontRef>
+        </p:style>
+        <p:txBody>
+          <a:bodyPr rtlCol="0" anchor="ctr"/>
+          <a:lstStyle/>
+          <a:p>
+            <a:pPr algn="ctr"/>
+            <a:endParaRPr lang="zh-CN" altLang="en-US" sz="1400"/>
+          </a:p>
+        </p:txBody>
+      </p:sp>
+      <p:cxnSp>
+        <p:nvCxnSpPr>
+          <p:cNvPr id="7" name="直接连接符 6">
+            <a:extLst>
+              <a:ext uri="{FF2B5EF4-FFF2-40B4-BE49-F238E27FC236}">
+                <a16:creationId xmlns:a16="http://schemas.microsoft.com/office/drawing/2014/main" id="{69372EE3-FADD-2F11-3811-1161E4864F05}"/>
+              </a:ext>
+            </a:extLst>
+          </p:cNvPr>
+          <p:cNvCxnSpPr>
+            <a:cxnSpLocks/>
+          </p:cNvCxnSpPr>
+          <p:nvPr/>
+        </p:nvCxnSpPr>
+        <p:spPr>
+          <a:xfrm>
+            <a:off x="9897110" y="934720"/>
+            <a:ext cx="0" cy="4490720"/>
+          </a:xfrm>
+          <a:prstGeom prst="line">
+            <a:avLst/>
+          </a:prstGeom>
+          <a:ln w="19050">
+            <a:solidFill>
+              <a:schemeClr val="tx1">
+                <a:lumMod val="95000"/>
+                <a:lumOff val="5000"/>
+              </a:schemeClr>
+            </a:solidFill>
+          </a:ln>
+        </p:spPr>
+        <p:style>
+          <a:lnRef idx="1">
+            <a:schemeClr val="accent1"/>
+          </a:lnRef>
+          <a:fillRef idx="0">
+            <a:schemeClr val="accent1"/>
+          </a:fillRef>
+          <a:effectRef idx="0">
+            <a:schemeClr val="accent1"/>
+          </a:effectRef>
+          <a:fontRef idx="minor">
+            <a:schemeClr val="tx1"/>
+          </a:fontRef>
+        </p:style>
+      </p:cxnSp>
+      <p:sp>
+        <p:nvSpPr>
+          <p:cNvPr id="8" name="文本框 7">
+            <a:extLst>
+              <a:ext uri="{FF2B5EF4-FFF2-40B4-BE49-F238E27FC236}">
+                <a16:creationId xmlns:a16="http://schemas.microsoft.com/office/drawing/2014/main" id="{1917D9CB-7C30-EB24-FFB2-777CC9D2AAC9}"/>
+              </a:ext>
+            </a:extLst>
+          </p:cNvPr>
+          <p:cNvSpPr txBox="1"/>
+          <p:nvPr/>
+        </p:nvSpPr>
+        <p:spPr>
+          <a:xfrm>
+            <a:off x="9214168" y="489267"/>
+            <a:ext cx="1365885" cy="306705"/>
+          </a:xfrm>
+          <a:prstGeom prst="rect">
+            <a:avLst/>
+          </a:prstGeom>
+          <a:noFill/>
+          <a:ln w="12700">
+            <a:solidFill>
+              <a:schemeClr val="tx1"/>
+            </a:solidFill>
+          </a:ln>
+        </p:spPr>
+        <p:txBody>
+          <a:bodyPr wrap="square" rtlCol="0">
+            <a:spAutoFit/>
+          </a:bodyPr>
+          <a:lstStyle/>
+          <a:p>
+            <a:pPr algn="ctr"/>
+            <a:r>
+              <a:rPr lang="zh-CN" altLang="en-US" sz="1400" dirty="0"/>
+              <a:t>大模型</a:t>
+            </a:r>
+          </a:p>
+        </p:txBody>
+      </p:sp>
+      <p:sp>
+        <p:nvSpPr>
+          <p:cNvPr id="9" name="右箭头 3">
+            <a:extLst>
+              <a:ext uri="{FF2B5EF4-FFF2-40B4-BE49-F238E27FC236}">
+                <a16:creationId xmlns:a16="http://schemas.microsoft.com/office/drawing/2014/main" id="{9DDA457B-19D4-F43F-A03E-3C9D116F3D67}"/>
+              </a:ext>
+            </a:extLst>
+          </p:cNvPr>
+          <p:cNvSpPr/>
+          <p:nvPr/>
+        </p:nvSpPr>
+        <p:spPr>
+          <a:xfrm>
+            <a:off x="6264565" y="1347341"/>
+            <a:ext cx="3436764" cy="207010"/>
+          </a:xfrm>
+          <a:prstGeom prst="rightArrow">
+            <a:avLst/>
+          </a:prstGeom>
+          <a:ln>
+            <a:noFill/>
+          </a:ln>
+        </p:spPr>
+        <p:style>
+          <a:lnRef idx="2">
+            <a:schemeClr val="accent1">
+              <a:shade val="50000"/>
+            </a:schemeClr>
+          </a:lnRef>
+          <a:fillRef idx="1">
+            <a:schemeClr val="accent1"/>
+          </a:fillRef>
+          <a:effectRef idx="0">
+            <a:schemeClr val="accent1"/>
+          </a:effectRef>
+          <a:fontRef idx="minor">
+            <a:schemeClr val="lt1"/>
+          </a:fontRef>
+        </p:style>
+        <p:txBody>
+          <a:bodyPr rtlCol="0" anchor="ctr"/>
+          <a:lstStyle/>
+          <a:p>
+            <a:pPr algn="ctr"/>
+            <a:endParaRPr lang="zh-CN" altLang="en-US" sz="1400"/>
+          </a:p>
+        </p:txBody>
+      </p:sp>
+      <p:sp>
+        <p:nvSpPr>
+          <p:cNvPr id="10" name="文本框 9">
+            <a:extLst>
+              <a:ext uri="{FF2B5EF4-FFF2-40B4-BE49-F238E27FC236}">
+                <a16:creationId xmlns:a16="http://schemas.microsoft.com/office/drawing/2014/main" id="{3C40FADA-13EB-4393-5F07-4EFF679AF956}"/>
+              </a:ext>
+            </a:extLst>
+          </p:cNvPr>
+          <p:cNvSpPr txBox="1"/>
+          <p:nvPr/>
+        </p:nvSpPr>
+        <p:spPr>
+          <a:xfrm>
+            <a:off x="3344166" y="1837882"/>
+            <a:ext cx="1733991" cy="276999"/>
+          </a:xfrm>
+          <a:prstGeom prst="rect">
+            <a:avLst/>
+          </a:prstGeom>
+          <a:noFill/>
+        </p:spPr>
+        <p:txBody>
+          <a:bodyPr wrap="square" rtlCol="0">
+            <a:spAutoFit/>
+          </a:bodyPr>
+          <a:lstStyle/>
+          <a:p>
+            <a:r>
+              <a:rPr lang="zh-CN" altLang="en-US" sz="1200" dirty="0"/>
+              <a:t>用户要求完成某个任务</a:t>
+            </a:r>
+          </a:p>
+        </p:txBody>
+      </p:sp>
+      <p:sp>
+        <p:nvSpPr>
+          <p:cNvPr id="16" name="文本框 15">
+            <a:extLst>
+              <a:ext uri="{FF2B5EF4-FFF2-40B4-BE49-F238E27FC236}">
+                <a16:creationId xmlns:a16="http://schemas.microsoft.com/office/drawing/2014/main" id="{FC9BA993-E666-713E-BFF1-E2D75CC64660}"/>
+              </a:ext>
+            </a:extLst>
+          </p:cNvPr>
+          <p:cNvSpPr txBox="1"/>
+          <p:nvPr/>
+        </p:nvSpPr>
+        <p:spPr>
+          <a:xfrm>
+            <a:off x="7172579" y="1822235"/>
+            <a:ext cx="1620736" cy="276999"/>
+          </a:xfrm>
+          <a:prstGeom prst="rect">
+            <a:avLst/>
+          </a:prstGeom>
+          <a:noFill/>
+        </p:spPr>
+        <p:txBody>
+          <a:bodyPr wrap="square" rtlCol="0">
+            <a:spAutoFit/>
+          </a:bodyPr>
+          <a:lstStyle/>
+          <a:p>
+            <a:r>
+              <a:rPr lang="zh-CN" altLang="en-US" sz="1200" dirty="0"/>
+              <a:t>将要求转发给大模型</a:t>
+            </a:r>
+          </a:p>
+        </p:txBody>
+      </p:sp>
+      <p:sp>
+        <p:nvSpPr>
+          <p:cNvPr id="19" name="文本框 18">
+            <a:extLst>
+              <a:ext uri="{FF2B5EF4-FFF2-40B4-BE49-F238E27FC236}">
+                <a16:creationId xmlns:a16="http://schemas.microsoft.com/office/drawing/2014/main" id="{391069A4-42DD-B067-ECD1-61654AA2A7FC}"/>
+              </a:ext>
+            </a:extLst>
+          </p:cNvPr>
+          <p:cNvSpPr txBox="1"/>
+          <p:nvPr/>
+        </p:nvSpPr>
+        <p:spPr>
+          <a:xfrm>
+            <a:off x="6512277" y="2622788"/>
+            <a:ext cx="2941341" cy="276999"/>
+          </a:xfrm>
+          <a:prstGeom prst="rect">
+            <a:avLst/>
+          </a:prstGeom>
+          <a:noFill/>
+        </p:spPr>
+        <p:txBody>
+          <a:bodyPr wrap="square" rtlCol="0">
+            <a:spAutoFit/>
+          </a:bodyPr>
+          <a:lstStyle/>
+          <a:p>
+            <a:r>
+              <a:rPr lang="zh-CN" altLang="en-US" sz="1200" dirty="0"/>
+              <a:t>要求</a:t>
+            </a:r>
+            <a:r>
+              <a:rPr lang="en-US" altLang="zh-CN" sz="1200" dirty="0"/>
+              <a:t>Agent</a:t>
+            </a:r>
+            <a:r>
+              <a:rPr lang="zh-CN" altLang="en-US" sz="1200" dirty="0"/>
+              <a:t>调用某些能力，例如访问网页</a:t>
+            </a:r>
+          </a:p>
+        </p:txBody>
+      </p:sp>
+      <p:sp>
+        <p:nvSpPr>
+          <p:cNvPr id="20" name="文本框 19">
+            <a:extLst>
+              <a:ext uri="{FF2B5EF4-FFF2-40B4-BE49-F238E27FC236}">
+                <a16:creationId xmlns:a16="http://schemas.microsoft.com/office/drawing/2014/main" id="{2C417CB5-0514-66FB-7580-647194250E94}"/>
+              </a:ext>
+            </a:extLst>
+          </p:cNvPr>
+          <p:cNvSpPr txBox="1"/>
+          <p:nvPr/>
+        </p:nvSpPr>
+        <p:spPr>
+          <a:xfrm>
+            <a:off x="10173335" y="2466547"/>
+            <a:ext cx="641986" cy="276999"/>
+          </a:xfrm>
+          <a:prstGeom prst="rect">
+            <a:avLst/>
+          </a:prstGeom>
+          <a:noFill/>
+        </p:spPr>
+        <p:txBody>
+          <a:bodyPr wrap="square" rtlCol="0">
+            <a:spAutoFit/>
+          </a:bodyPr>
+          <a:lstStyle/>
+          <a:p>
+            <a:r>
+              <a:rPr lang="zh-CN" altLang="en-US" sz="1200" dirty="0"/>
+              <a:t>思考</a:t>
+            </a:r>
+          </a:p>
+        </p:txBody>
+      </p:sp>
+      <p:sp>
+        <p:nvSpPr>
+          <p:cNvPr id="22" name="右箭头 26">
+            <a:extLst>
+              <a:ext uri="{FF2B5EF4-FFF2-40B4-BE49-F238E27FC236}">
+                <a16:creationId xmlns:a16="http://schemas.microsoft.com/office/drawing/2014/main" id="{AD867472-9C8D-B08A-453D-B71CE75BAF22}"/>
+              </a:ext>
+            </a:extLst>
+          </p:cNvPr>
+          <p:cNvSpPr/>
+          <p:nvPr/>
+        </p:nvSpPr>
+        <p:spPr>
+          <a:xfrm rot="5400000">
+            <a:off x="9783336" y="2543740"/>
+            <a:ext cx="647582" cy="207010"/>
+          </a:xfrm>
+          <a:prstGeom prst="rightArrow">
+            <a:avLst/>
+          </a:prstGeom>
+          <a:ln>
+            <a:noFill/>
+          </a:ln>
+        </p:spPr>
+        <p:style>
+          <a:lnRef idx="2">
+            <a:schemeClr val="accent1">
+              <a:shade val="50000"/>
+            </a:schemeClr>
+          </a:lnRef>
+          <a:fillRef idx="1">
+            <a:schemeClr val="accent1"/>
+          </a:fillRef>
+          <a:effectRef idx="0">
+            <a:schemeClr val="accent1"/>
+          </a:effectRef>
+          <a:fontRef idx="minor">
+            <a:schemeClr val="lt1"/>
+          </a:fontRef>
+        </p:style>
+        <p:txBody>
+          <a:bodyPr rtlCol="0" anchor="ctr"/>
+          <a:lstStyle/>
+          <a:p>
+            <a:pPr algn="ctr"/>
+            <a:endParaRPr lang="zh-CN" altLang="en-US" sz="1400"/>
+          </a:p>
+        </p:txBody>
+      </p:sp>
+      <p:sp>
+        <p:nvSpPr>
+          <p:cNvPr id="28" name="文本框 27">
+            <a:extLst>
+              <a:ext uri="{FF2B5EF4-FFF2-40B4-BE49-F238E27FC236}">
+                <a16:creationId xmlns:a16="http://schemas.microsoft.com/office/drawing/2014/main" id="{BB0047A4-7DBD-4F0A-62E1-37B826E808B8}"/>
+              </a:ext>
+            </a:extLst>
+          </p:cNvPr>
+          <p:cNvSpPr txBox="1"/>
+          <p:nvPr/>
+        </p:nvSpPr>
+        <p:spPr>
+          <a:xfrm>
+            <a:off x="7108955" y="3380695"/>
+            <a:ext cx="1785678" cy="276999"/>
+          </a:xfrm>
+          <a:prstGeom prst="rect">
+            <a:avLst/>
+          </a:prstGeom>
+          <a:noFill/>
+        </p:spPr>
+        <p:txBody>
+          <a:bodyPr wrap="square" rtlCol="0">
+            <a:spAutoFit/>
+          </a:bodyPr>
+          <a:lstStyle/>
+          <a:p>
+            <a:r>
+              <a:rPr lang="zh-CN" altLang="en-US" sz="1200" dirty="0"/>
+              <a:t>网页内容返回给大模型</a:t>
+            </a:r>
+          </a:p>
+        </p:txBody>
+      </p:sp>
+      <p:sp>
+        <p:nvSpPr>
+          <p:cNvPr id="30" name="文本框 29">
+            <a:extLst>
+              <a:ext uri="{FF2B5EF4-FFF2-40B4-BE49-F238E27FC236}">
+                <a16:creationId xmlns:a16="http://schemas.microsoft.com/office/drawing/2014/main" id="{2EC295D3-B2CE-196A-5336-0F5A18EC5345}"/>
+              </a:ext>
+            </a:extLst>
+          </p:cNvPr>
+          <p:cNvSpPr txBox="1"/>
+          <p:nvPr/>
+        </p:nvSpPr>
+        <p:spPr>
+          <a:xfrm>
+            <a:off x="10207943" y="4020511"/>
+            <a:ext cx="641986" cy="276999"/>
+          </a:xfrm>
+          <a:prstGeom prst="rect">
+            <a:avLst/>
+          </a:prstGeom>
+          <a:noFill/>
+        </p:spPr>
+        <p:txBody>
+          <a:bodyPr wrap="square" rtlCol="0">
+            <a:spAutoFit/>
+          </a:bodyPr>
+          <a:lstStyle/>
+          <a:p>
+            <a:r>
+              <a:rPr lang="zh-CN" altLang="en-US" sz="1200" dirty="0"/>
+              <a:t>思考</a:t>
+            </a:r>
+          </a:p>
+        </p:txBody>
+      </p:sp>
+      <p:sp>
+        <p:nvSpPr>
+          <p:cNvPr id="44" name="右箭头 26">
+            <a:extLst>
+              <a:ext uri="{FF2B5EF4-FFF2-40B4-BE49-F238E27FC236}">
+                <a16:creationId xmlns:a16="http://schemas.microsoft.com/office/drawing/2014/main" id="{00A29DDD-847A-E257-6ACA-5B9916F28041}"/>
+              </a:ext>
+            </a:extLst>
+          </p:cNvPr>
+          <p:cNvSpPr/>
+          <p:nvPr/>
+        </p:nvSpPr>
+        <p:spPr>
+          <a:xfrm rot="5400000">
+            <a:off x="9707813" y="4105940"/>
+            <a:ext cx="770158" cy="207010"/>
+          </a:xfrm>
+          <a:prstGeom prst="rightArrow">
+            <a:avLst/>
+          </a:prstGeom>
+          <a:ln>
+            <a:noFill/>
+          </a:ln>
+        </p:spPr>
+        <p:style>
+          <a:lnRef idx="2">
+            <a:schemeClr val="accent1">
+              <a:shade val="50000"/>
+            </a:schemeClr>
+          </a:lnRef>
+          <a:fillRef idx="1">
+            <a:schemeClr val="accent1"/>
+          </a:fillRef>
+          <a:effectRef idx="0">
+            <a:schemeClr val="accent1"/>
+          </a:effectRef>
+          <a:fontRef idx="minor">
+            <a:schemeClr val="lt1"/>
+          </a:fontRef>
+        </p:style>
+        <p:txBody>
+          <a:bodyPr rtlCol="0" anchor="ctr"/>
+          <a:lstStyle/>
+          <a:p>
+            <a:pPr algn="ctr"/>
+            <a:endParaRPr lang="zh-CN" altLang="en-US" sz="1400"/>
+          </a:p>
+        </p:txBody>
+      </p:sp>
+      <p:sp>
+        <p:nvSpPr>
+          <p:cNvPr id="57" name="文本框 56">
+            <a:extLst>
+              <a:ext uri="{FF2B5EF4-FFF2-40B4-BE49-F238E27FC236}">
+                <a16:creationId xmlns:a16="http://schemas.microsoft.com/office/drawing/2014/main" id="{A4330A45-BDDF-3184-F1F4-48424A18B090}"/>
+              </a:ext>
+            </a:extLst>
+          </p:cNvPr>
+          <p:cNvSpPr txBox="1"/>
+          <p:nvPr/>
+        </p:nvSpPr>
+        <p:spPr>
+          <a:xfrm>
+            <a:off x="7332785" y="4281338"/>
+            <a:ext cx="1201614" cy="276999"/>
+          </a:xfrm>
+          <a:prstGeom prst="rect">
+            <a:avLst/>
+          </a:prstGeom>
+          <a:noFill/>
+        </p:spPr>
+        <p:txBody>
+          <a:bodyPr wrap="square" rtlCol="0">
+            <a:spAutoFit/>
+          </a:bodyPr>
+          <a:lstStyle/>
+          <a:p>
+            <a:r>
+              <a:rPr lang="zh-CN" altLang="en-US" sz="1200" dirty="0"/>
+              <a:t>给出最后结果</a:t>
+            </a:r>
+          </a:p>
+        </p:txBody>
+      </p:sp>
+      <p:sp>
+        <p:nvSpPr>
+          <p:cNvPr id="59" name="右箭头 16">
+            <a:extLst>
+              <a:ext uri="{FF2B5EF4-FFF2-40B4-BE49-F238E27FC236}">
+                <a16:creationId xmlns:a16="http://schemas.microsoft.com/office/drawing/2014/main" id="{0B3BED17-0C6F-3267-BCD9-C33B60FCFB21}"/>
+              </a:ext>
+            </a:extLst>
+          </p:cNvPr>
+          <p:cNvSpPr/>
+          <p:nvPr/>
+        </p:nvSpPr>
+        <p:spPr>
+          <a:xfrm rot="10800000">
+            <a:off x="2533095" y="4531122"/>
+            <a:ext cx="3388360" cy="207010"/>
+          </a:xfrm>
+          <a:prstGeom prst="rightArrow">
+            <a:avLst/>
+          </a:prstGeom>
+          <a:ln>
+            <a:noFill/>
+          </a:ln>
+        </p:spPr>
+        <p:style>
+          <a:lnRef idx="2">
+            <a:schemeClr val="accent1">
+              <a:shade val="50000"/>
+            </a:schemeClr>
+          </a:lnRef>
+          <a:fillRef idx="1">
+            <a:schemeClr val="accent1"/>
+          </a:fillRef>
+          <a:effectRef idx="0">
+            <a:schemeClr val="accent1"/>
+          </a:effectRef>
+          <a:fontRef idx="minor">
+            <a:schemeClr val="lt1"/>
+          </a:fontRef>
+        </p:style>
+        <p:txBody>
+          <a:bodyPr rtlCol="0" anchor="ctr"/>
+          <a:lstStyle/>
+          <a:p>
+            <a:pPr algn="ctr"/>
+            <a:endParaRPr lang="zh-CN" altLang="en-US" sz="1400"/>
+          </a:p>
+        </p:txBody>
+      </p:sp>
+      <p:sp>
+        <p:nvSpPr>
+          <p:cNvPr id="60" name="文本框 59">
+            <a:extLst>
+              <a:ext uri="{FF2B5EF4-FFF2-40B4-BE49-F238E27FC236}">
+                <a16:creationId xmlns:a16="http://schemas.microsoft.com/office/drawing/2014/main" id="{77BEAAFE-39B5-B5B1-FD30-A58590172550}"/>
+              </a:ext>
+            </a:extLst>
+          </p:cNvPr>
+          <p:cNvSpPr txBox="1"/>
+          <p:nvPr/>
+        </p:nvSpPr>
+        <p:spPr>
+          <a:xfrm>
+            <a:off x="3607106" y="4281338"/>
+            <a:ext cx="1410247" cy="276999"/>
+          </a:xfrm>
+          <a:prstGeom prst="rect">
+            <a:avLst/>
+          </a:prstGeom>
+          <a:noFill/>
+        </p:spPr>
+        <p:txBody>
+          <a:bodyPr wrap="square" rtlCol="0">
+            <a:spAutoFit/>
+          </a:bodyPr>
+          <a:lstStyle/>
+          <a:p>
+            <a:r>
+              <a:rPr lang="zh-CN" altLang="en-US" sz="1200" dirty="0"/>
+              <a:t>返回结果给用户</a:t>
+            </a:r>
+          </a:p>
+        </p:txBody>
+      </p:sp>
+      <p:sp>
+        <p:nvSpPr>
+          <p:cNvPr id="75" name="右箭头 3">
+            <a:extLst>
+              <a:ext uri="{FF2B5EF4-FFF2-40B4-BE49-F238E27FC236}">
+                <a16:creationId xmlns:a16="http://schemas.microsoft.com/office/drawing/2014/main" id="{3F8B3BE0-334A-A669-66B0-42238A915C4A}"/>
+              </a:ext>
+            </a:extLst>
+          </p:cNvPr>
+          <p:cNvSpPr/>
+          <p:nvPr/>
+        </p:nvSpPr>
+        <p:spPr>
+          <a:xfrm>
+            <a:off x="6264565" y="2116444"/>
+            <a:ext cx="3436764" cy="207010"/>
+          </a:xfrm>
+          <a:prstGeom prst="rightArrow">
+            <a:avLst/>
+          </a:prstGeom>
+          <a:ln>
+            <a:noFill/>
+          </a:ln>
+        </p:spPr>
+        <p:style>
+          <a:lnRef idx="2">
+            <a:schemeClr val="accent1">
+              <a:shade val="50000"/>
+            </a:schemeClr>
+          </a:lnRef>
+          <a:fillRef idx="1">
+            <a:schemeClr val="accent1"/>
+          </a:fillRef>
+          <a:effectRef idx="0">
+            <a:schemeClr val="accent1"/>
+          </a:effectRef>
+          <a:fontRef idx="minor">
+            <a:schemeClr val="lt1"/>
+          </a:fontRef>
+        </p:style>
+        <p:txBody>
+          <a:bodyPr rtlCol="0" anchor="ctr"/>
+          <a:lstStyle/>
+          <a:p>
+            <a:pPr algn="ctr"/>
+            <a:endParaRPr lang="zh-CN" altLang="en-US" sz="1400"/>
+          </a:p>
+        </p:txBody>
+      </p:sp>
+      <p:sp>
+        <p:nvSpPr>
+          <p:cNvPr id="76" name="右箭头 3">
+            <a:extLst>
+              <a:ext uri="{FF2B5EF4-FFF2-40B4-BE49-F238E27FC236}">
+                <a16:creationId xmlns:a16="http://schemas.microsoft.com/office/drawing/2014/main" id="{1493F43E-5E09-1485-9413-453E287050AD}"/>
+              </a:ext>
+            </a:extLst>
+          </p:cNvPr>
+          <p:cNvSpPr/>
+          <p:nvPr/>
+        </p:nvSpPr>
+        <p:spPr>
+          <a:xfrm>
+            <a:off x="6264565" y="3647315"/>
+            <a:ext cx="3436764" cy="207010"/>
+          </a:xfrm>
+          <a:prstGeom prst="rightArrow">
+            <a:avLst/>
+          </a:prstGeom>
+          <a:ln>
+            <a:noFill/>
+          </a:ln>
+        </p:spPr>
+        <p:style>
+          <a:lnRef idx="2">
+            <a:schemeClr val="accent1">
+              <a:shade val="50000"/>
+            </a:schemeClr>
+          </a:lnRef>
+          <a:fillRef idx="1">
+            <a:schemeClr val="accent1"/>
+          </a:fillRef>
+          <a:effectRef idx="0">
+            <a:schemeClr val="accent1"/>
+          </a:effectRef>
+          <a:fontRef idx="minor">
+            <a:schemeClr val="lt1"/>
+          </a:fontRef>
+        </p:style>
+        <p:txBody>
+          <a:bodyPr rtlCol="0" anchor="ctr"/>
+          <a:lstStyle/>
+          <a:p>
+            <a:pPr algn="ctr"/>
+            <a:endParaRPr lang="zh-CN" altLang="en-US" sz="1400"/>
+          </a:p>
+        </p:txBody>
+      </p:sp>
+      <p:sp>
+        <p:nvSpPr>
+          <p:cNvPr id="77" name="右箭头 16">
+            <a:extLst>
+              <a:ext uri="{FF2B5EF4-FFF2-40B4-BE49-F238E27FC236}">
+                <a16:creationId xmlns:a16="http://schemas.microsoft.com/office/drawing/2014/main" id="{9935EDAC-8FD1-B632-1428-DF885D921575}"/>
+              </a:ext>
+            </a:extLst>
+          </p:cNvPr>
+          <p:cNvSpPr/>
+          <p:nvPr/>
+        </p:nvSpPr>
+        <p:spPr>
+          <a:xfrm rot="10800000">
+            <a:off x="6264566" y="4531122"/>
+            <a:ext cx="3436762" cy="207010"/>
+          </a:xfrm>
+          <a:prstGeom prst="rightArrow">
+            <a:avLst/>
+          </a:prstGeom>
+          <a:ln>
+            <a:noFill/>
+          </a:ln>
+        </p:spPr>
+        <p:style>
+          <a:lnRef idx="2">
+            <a:schemeClr val="accent1">
+              <a:shade val="50000"/>
+            </a:schemeClr>
+          </a:lnRef>
+          <a:fillRef idx="1">
+            <a:schemeClr val="accent1"/>
+          </a:fillRef>
+          <a:effectRef idx="0">
+            <a:schemeClr val="accent1"/>
+          </a:effectRef>
+          <a:fontRef idx="minor">
+            <a:schemeClr val="lt1"/>
+          </a:fontRef>
+        </p:style>
+        <p:txBody>
+          <a:bodyPr rtlCol="0" anchor="ctr"/>
+          <a:lstStyle/>
+          <a:p>
+            <a:pPr algn="ctr"/>
+            <a:endParaRPr lang="zh-CN" altLang="en-US" sz="1400" dirty="0"/>
+          </a:p>
+        </p:txBody>
+      </p:sp>
+    </p:spTree>
+    <p:extLst>
+      <p:ext uri="{BB962C8B-B14F-4D97-AF65-F5344CB8AC3E}">
+        <p14:creationId xmlns:p14="http://schemas.microsoft.com/office/powerpoint/2010/main" val="2290987455"/>
+      </p:ext>
+    </p:extLst>
+  </p:cSld>
+  <p:clrMapOvr>
+    <a:masterClrMapping/>
+  </p:clrMapOvr>
+</p:sld>
+</file>
+
 <file path=ppt/tags/tag1.xml><?xml version="1.0" encoding="utf-8"?>
-<p:tagLst xmlns:p="http://schemas.openxmlformats.org/presentationml/2006/main">
-  <p:tag name="KSO_WM_UNIT_TABLE_BEAUTIFY" val="smartTable{e8ebea44-6430-4dd4-bcdd-21c1d86577b7}"/>
-  <p:tag name="TABLE_ENDDRAG_ORIGIN_RECT" val="164*208"/>
-  <p:tag name="TABLE_ENDDRAG_RECT" val="144*165*164*208"/>
+<p:tagLst xmlns:a="http://schemas.openxmlformats.org/drawingml/2006/main" xmlns:r="http://schemas.openxmlformats.org/officeDocument/2006/relationships" xmlns:p="http://schemas.openxmlformats.org/presentationml/2006/main">
+  <p:tag name="COMMONDATA" val="eyJoZGlkIjoiMjllZmI5NGRiYWI2ZDdkMDRmZDNiMGUwOWVjNmRmODYifQ=="/>
+  <p:tag name="KSO_WPP_MARK_KEY" val="7792a17e-91d7-4c44-992a-cf0a45656bd2"/>
 </p:tagLst>
 </file>
 
 <file path=ppt/tags/tag2.xml><?xml version="1.0" encoding="utf-8"?>
-<p:tagLst xmlns:p="http://schemas.openxmlformats.org/presentationml/2006/main">
-  <p:tag name="COMMONDATA" val="eyJoZGlkIjoiMjllZmI5NGRiYWI2ZDdkMDRmZDNiMGUwOWVjNmRmODYifQ=="/>
-  <p:tag name="KSO_WPP_MARK_KEY" val="7792a17e-91d7-4c44-992a-cf0a45656bd2"/>
+<p:tagLst xmlns:a="http://schemas.openxmlformats.org/drawingml/2006/main" xmlns:r="http://schemas.openxmlformats.org/officeDocument/2006/relationships" xmlns:p="http://schemas.openxmlformats.org/presentationml/2006/main">
+  <p:tag name="KSO_WM_UNIT_TABLE_BEAUTIFY" val="smartTable{e8ebea44-6430-4dd4-bcdd-21c1d86577b7}"/>
+  <p:tag name="TABLE_ENDDRAG_ORIGIN_RECT" val="164*208"/>
+  <p:tag name="TABLE_ENDDRAG_RECT" val="144*165*164*208"/>
 </p:tagLst>
 </file>
 
@@ -11398,6 +13658,8 @@
       </a:bgFillStyleLst>
     </a:fmtScheme>
   </a:themeElements>
+  <a:objectDefaults/>
+  <a:extraClrSchemeLst/>
   <a:extLst>
     <a:ext uri="{05A4C25C-085E-4340-85A3-A5531E510DB2}">
       <thm15:themeFamily xmlns:thm15="http://schemas.microsoft.com/office/thememl/2012/main" name="Office Theme" id="{62F939B6-93AF-4DB8-9C6B-D6C7DFDC589F}" vid="{4A3C46E8-61CC-4603-A589-7422A47A8E4A}"/>

--- a/raws/画图.pptx
+++ b/raws/画图.pptx
@@ -5,21 +5,22 @@
     <p:sldMasterId id="2147483648" r:id="rId1"/>
   </p:sldMasterIdLst>
   <p:sldIdLst>
-    <p:sldId id="256" r:id="rId2"/>
-    <p:sldId id="257" r:id="rId3"/>
-    <p:sldId id="259" r:id="rId4"/>
-    <p:sldId id="260" r:id="rId5"/>
-    <p:sldId id="261" r:id="rId6"/>
-    <p:sldId id="262" r:id="rId7"/>
-    <p:sldId id="263" r:id="rId8"/>
-    <p:sldId id="264" r:id="rId9"/>
-    <p:sldId id="265" r:id="rId10"/>
-    <p:sldId id="266" r:id="rId11"/>
+    <p:sldId id="256" r:id="rId3"/>
+    <p:sldId id="257" r:id="rId4"/>
+    <p:sldId id="259" r:id="rId5"/>
+    <p:sldId id="260" r:id="rId6"/>
+    <p:sldId id="261" r:id="rId7"/>
+    <p:sldId id="262" r:id="rId8"/>
+    <p:sldId id="263" r:id="rId9"/>
+    <p:sldId id="264" r:id="rId10"/>
+    <p:sldId id="265" r:id="rId11"/>
+    <p:sldId id="266" r:id="rId12"/>
+    <p:sldId id="267" r:id="rId13"/>
   </p:sldIdLst>
   <p:sldSz cx="12192000" cy="6858000"/>
   <p:notesSz cx="6858000" cy="9144000"/>
   <p:custDataLst>
-    <p:tags r:id="rId12"/>
+    <p:tags r:id="rId17"/>
   </p:custDataLst>
   <p:defaultTextStyle>
     <a:defPPr>
@@ -116,11 +117,6 @@
       </a:defRPr>
     </a:lvl9pPr>
   </p:defaultTextStyle>
-  <p:extLst>
-    <p:ext uri="{EFAFB233-063F-42B5-8137-9DF3F51BA10A}">
-      <p15:sldGuideLst xmlns:p15="http://schemas.microsoft.com/office/powerpoint/2012/main"/>
-    </p:ext>
-  </p:extLst>
 </p:presentation>
 </file>
 
@@ -169,6 +165,7 @@
               <a:rPr lang="zh-CN" altLang="en-US"/>
               <a:t>单击此处编辑母版标题样式</a:t>
             </a:r>
+            <a:endParaRPr lang="zh-CN" altLang="en-US"/>
           </a:p>
         </p:txBody>
       </p:sp>
@@ -233,6 +230,7 @@
               <a:rPr lang="zh-CN" altLang="en-US"/>
               <a:t>单击此处编辑母版副标题样式</a:t>
             </a:r>
+            <a:endParaRPr lang="zh-CN" altLang="en-US"/>
           </a:p>
         </p:txBody>
       </p:sp>
@@ -253,7 +251,6 @@
           <a:p>
             <a:fld id="{D997B5FA-0921-464F-AAE1-844C04324D75}" type="datetimeFigureOut">
               <a:rPr lang="zh-CN" altLang="en-US" smtClean="0"/>
-              <a:t>2026/8/5</a:t>
             </a:fld>
             <a:endParaRPr lang="zh-CN" altLang="en-US"/>
           </a:p>
@@ -295,7 +292,6 @@
           <a:p>
             <a:fld id="{565CE74E-AB26-4998-AD42-012C4C1AD076}" type="slidenum">
               <a:rPr lang="zh-CN" altLang="en-US" smtClean="0"/>
-              <a:t>‹#›</a:t>
             </a:fld>
             <a:endParaRPr lang="zh-CN" altLang="en-US"/>
           </a:p>
@@ -345,6 +341,7 @@
               <a:rPr lang="zh-CN" altLang="en-US"/>
               <a:t>单击此处编辑母版标题样式</a:t>
             </a:r>
+            <a:endParaRPr lang="zh-CN" altLang="en-US"/>
           </a:p>
         </p:txBody>
       </p:sp>
@@ -368,6 +365,7 @@
               <a:rPr lang="zh-CN" altLang="en-US"/>
               <a:t>单击此处编辑母版文本样式</a:t>
             </a:r>
+            <a:endParaRPr lang="zh-CN" altLang="en-US"/>
           </a:p>
           <a:p>
             <a:pPr lvl="1"/>
@@ -375,6 +373,7 @@
               <a:rPr lang="zh-CN" altLang="en-US"/>
               <a:t>第二级</a:t>
             </a:r>
+            <a:endParaRPr lang="zh-CN" altLang="en-US"/>
           </a:p>
           <a:p>
             <a:pPr lvl="2"/>
@@ -382,6 +381,7 @@
               <a:rPr lang="zh-CN" altLang="en-US"/>
               <a:t>第三级</a:t>
             </a:r>
+            <a:endParaRPr lang="zh-CN" altLang="en-US"/>
           </a:p>
           <a:p>
             <a:pPr lvl="3"/>
@@ -389,6 +389,7 @@
               <a:rPr lang="zh-CN" altLang="en-US"/>
               <a:t>第四级</a:t>
             </a:r>
+            <a:endParaRPr lang="zh-CN" altLang="en-US"/>
           </a:p>
           <a:p>
             <a:pPr lvl="4"/>
@@ -396,6 +397,7 @@
               <a:rPr lang="zh-CN" altLang="en-US"/>
               <a:t>第五级</a:t>
             </a:r>
+            <a:endParaRPr lang="zh-CN" altLang="en-US"/>
           </a:p>
         </p:txBody>
       </p:sp>
@@ -416,7 +418,6 @@
           <a:p>
             <a:fld id="{D997B5FA-0921-464F-AAE1-844C04324D75}" type="datetimeFigureOut">
               <a:rPr lang="zh-CN" altLang="en-US" smtClean="0"/>
-              <a:t>2026/8/5</a:t>
             </a:fld>
             <a:endParaRPr lang="zh-CN" altLang="en-US"/>
           </a:p>
@@ -458,7 +459,6 @@
           <a:p>
             <a:fld id="{565CE74E-AB26-4998-AD42-012C4C1AD076}" type="slidenum">
               <a:rPr lang="zh-CN" altLang="en-US" smtClean="0"/>
-              <a:t>‹#›</a:t>
             </a:fld>
             <a:endParaRPr lang="zh-CN" altLang="en-US"/>
           </a:p>
@@ -513,6 +513,7 @@
               <a:rPr lang="zh-CN" altLang="en-US"/>
               <a:t>单击此处编辑母版标题样式</a:t>
             </a:r>
+            <a:endParaRPr lang="zh-CN" altLang="en-US"/>
           </a:p>
         </p:txBody>
       </p:sp>
@@ -541,6 +542,7 @@
               <a:rPr lang="zh-CN" altLang="en-US"/>
               <a:t>单击此处编辑母版文本样式</a:t>
             </a:r>
+            <a:endParaRPr lang="zh-CN" altLang="en-US"/>
           </a:p>
           <a:p>
             <a:pPr lvl="1"/>
@@ -548,6 +550,7 @@
               <a:rPr lang="zh-CN" altLang="en-US"/>
               <a:t>第二级</a:t>
             </a:r>
+            <a:endParaRPr lang="zh-CN" altLang="en-US"/>
           </a:p>
           <a:p>
             <a:pPr lvl="2"/>
@@ -555,6 +558,7 @@
               <a:rPr lang="zh-CN" altLang="en-US"/>
               <a:t>第三级</a:t>
             </a:r>
+            <a:endParaRPr lang="zh-CN" altLang="en-US"/>
           </a:p>
           <a:p>
             <a:pPr lvl="3"/>
@@ -562,6 +566,7 @@
               <a:rPr lang="zh-CN" altLang="en-US"/>
               <a:t>第四级</a:t>
             </a:r>
+            <a:endParaRPr lang="zh-CN" altLang="en-US"/>
           </a:p>
           <a:p>
             <a:pPr lvl="4"/>
@@ -569,6 +574,7 @@
               <a:rPr lang="zh-CN" altLang="en-US"/>
               <a:t>第五级</a:t>
             </a:r>
+            <a:endParaRPr lang="zh-CN" altLang="en-US"/>
           </a:p>
         </p:txBody>
       </p:sp>
@@ -589,7 +595,6 @@
           <a:p>
             <a:fld id="{D997B5FA-0921-464F-AAE1-844C04324D75}" type="datetimeFigureOut">
               <a:rPr lang="zh-CN" altLang="en-US" smtClean="0"/>
-              <a:t>2026/8/5</a:t>
             </a:fld>
             <a:endParaRPr lang="zh-CN" altLang="en-US"/>
           </a:p>
@@ -631,7 +636,6 @@
           <a:p>
             <a:fld id="{565CE74E-AB26-4998-AD42-012C4C1AD076}" type="slidenum">
               <a:rPr lang="zh-CN" altLang="en-US" smtClean="0"/>
-              <a:t>‹#›</a:t>
             </a:fld>
             <a:endParaRPr lang="zh-CN" altLang="en-US"/>
           </a:p>
@@ -681,6 +685,7 @@
               <a:rPr lang="zh-CN" altLang="en-US"/>
               <a:t>单击此处编辑母版标题样式</a:t>
             </a:r>
+            <a:endParaRPr lang="zh-CN" altLang="en-US"/>
           </a:p>
         </p:txBody>
       </p:sp>
@@ -704,6 +709,7 @@
               <a:rPr lang="zh-CN" altLang="en-US"/>
               <a:t>单击此处编辑母版文本样式</a:t>
             </a:r>
+            <a:endParaRPr lang="zh-CN" altLang="en-US"/>
           </a:p>
           <a:p>
             <a:pPr lvl="1"/>
@@ -711,6 +717,7 @@
               <a:rPr lang="zh-CN" altLang="en-US"/>
               <a:t>第二级</a:t>
             </a:r>
+            <a:endParaRPr lang="zh-CN" altLang="en-US"/>
           </a:p>
           <a:p>
             <a:pPr lvl="2"/>
@@ -718,6 +725,7 @@
               <a:rPr lang="zh-CN" altLang="en-US"/>
               <a:t>第三级</a:t>
             </a:r>
+            <a:endParaRPr lang="zh-CN" altLang="en-US"/>
           </a:p>
           <a:p>
             <a:pPr lvl="3"/>
@@ -725,6 +733,7 @@
               <a:rPr lang="zh-CN" altLang="en-US"/>
               <a:t>第四级</a:t>
             </a:r>
+            <a:endParaRPr lang="zh-CN" altLang="en-US"/>
           </a:p>
           <a:p>
             <a:pPr lvl="4"/>
@@ -732,6 +741,7 @@
               <a:rPr lang="zh-CN" altLang="en-US"/>
               <a:t>第五级</a:t>
             </a:r>
+            <a:endParaRPr lang="zh-CN" altLang="en-US"/>
           </a:p>
         </p:txBody>
       </p:sp>
@@ -752,7 +762,6 @@
           <a:p>
             <a:fld id="{D997B5FA-0921-464F-AAE1-844C04324D75}" type="datetimeFigureOut">
               <a:rPr lang="zh-CN" altLang="en-US" smtClean="0"/>
-              <a:t>2026/8/5</a:t>
             </a:fld>
             <a:endParaRPr lang="zh-CN" altLang="en-US"/>
           </a:p>
@@ -794,7 +803,6 @@
           <a:p>
             <a:fld id="{565CE74E-AB26-4998-AD42-012C4C1AD076}" type="slidenum">
               <a:rPr lang="zh-CN" altLang="en-US" smtClean="0"/>
-              <a:t>‹#›</a:t>
             </a:fld>
             <a:endParaRPr lang="zh-CN" altLang="en-US"/>
           </a:p>
@@ -853,6 +861,7 @@
               <a:rPr lang="zh-CN" altLang="en-US"/>
               <a:t>单击此处编辑母版标题样式</a:t>
             </a:r>
+            <a:endParaRPr lang="zh-CN" altLang="en-US"/>
           </a:p>
         </p:txBody>
       </p:sp>
@@ -972,6 +981,7 @@
               <a:rPr lang="zh-CN" altLang="en-US"/>
               <a:t>单击此处编辑母版文本样式</a:t>
             </a:r>
+            <a:endParaRPr lang="zh-CN" altLang="en-US"/>
           </a:p>
         </p:txBody>
       </p:sp>
@@ -992,7 +1002,6 @@
           <a:p>
             <a:fld id="{D997B5FA-0921-464F-AAE1-844C04324D75}" type="datetimeFigureOut">
               <a:rPr lang="zh-CN" altLang="en-US" smtClean="0"/>
-              <a:t>2026/8/5</a:t>
             </a:fld>
             <a:endParaRPr lang="zh-CN" altLang="en-US"/>
           </a:p>
@@ -1034,7 +1043,6 @@
           <a:p>
             <a:fld id="{565CE74E-AB26-4998-AD42-012C4C1AD076}" type="slidenum">
               <a:rPr lang="zh-CN" altLang="en-US" smtClean="0"/>
-              <a:t>‹#›</a:t>
             </a:fld>
             <a:endParaRPr lang="zh-CN" altLang="en-US"/>
           </a:p>
@@ -1084,6 +1092,7 @@
               <a:rPr lang="zh-CN" altLang="en-US"/>
               <a:t>单击此处编辑母版标题样式</a:t>
             </a:r>
+            <a:endParaRPr lang="zh-CN" altLang="en-US"/>
           </a:p>
         </p:txBody>
       </p:sp>
@@ -1112,6 +1121,7 @@
               <a:rPr lang="zh-CN" altLang="en-US"/>
               <a:t>单击此处编辑母版文本样式</a:t>
             </a:r>
+            <a:endParaRPr lang="zh-CN" altLang="en-US"/>
           </a:p>
           <a:p>
             <a:pPr lvl="1"/>
@@ -1119,6 +1129,7 @@
               <a:rPr lang="zh-CN" altLang="en-US"/>
               <a:t>第二级</a:t>
             </a:r>
+            <a:endParaRPr lang="zh-CN" altLang="en-US"/>
           </a:p>
           <a:p>
             <a:pPr lvl="2"/>
@@ -1126,6 +1137,7 @@
               <a:rPr lang="zh-CN" altLang="en-US"/>
               <a:t>第三级</a:t>
             </a:r>
+            <a:endParaRPr lang="zh-CN" altLang="en-US"/>
           </a:p>
           <a:p>
             <a:pPr lvl="3"/>
@@ -1133,6 +1145,7 @@
               <a:rPr lang="zh-CN" altLang="en-US"/>
               <a:t>第四级</a:t>
             </a:r>
+            <a:endParaRPr lang="zh-CN" altLang="en-US"/>
           </a:p>
           <a:p>
             <a:pPr lvl="4"/>
@@ -1140,6 +1153,7 @@
               <a:rPr lang="zh-CN" altLang="en-US"/>
               <a:t>第五级</a:t>
             </a:r>
+            <a:endParaRPr lang="zh-CN" altLang="en-US"/>
           </a:p>
         </p:txBody>
       </p:sp>
@@ -1168,6 +1182,7 @@
               <a:rPr lang="zh-CN" altLang="en-US"/>
               <a:t>单击此处编辑母版文本样式</a:t>
             </a:r>
+            <a:endParaRPr lang="zh-CN" altLang="en-US"/>
           </a:p>
           <a:p>
             <a:pPr lvl="1"/>
@@ -1175,6 +1190,7 @@
               <a:rPr lang="zh-CN" altLang="en-US"/>
               <a:t>第二级</a:t>
             </a:r>
+            <a:endParaRPr lang="zh-CN" altLang="en-US"/>
           </a:p>
           <a:p>
             <a:pPr lvl="2"/>
@@ -1182,6 +1198,7 @@
               <a:rPr lang="zh-CN" altLang="en-US"/>
               <a:t>第三级</a:t>
             </a:r>
+            <a:endParaRPr lang="zh-CN" altLang="en-US"/>
           </a:p>
           <a:p>
             <a:pPr lvl="3"/>
@@ -1189,6 +1206,7 @@
               <a:rPr lang="zh-CN" altLang="en-US"/>
               <a:t>第四级</a:t>
             </a:r>
+            <a:endParaRPr lang="zh-CN" altLang="en-US"/>
           </a:p>
           <a:p>
             <a:pPr lvl="4"/>
@@ -1196,6 +1214,7 @@
               <a:rPr lang="zh-CN" altLang="en-US"/>
               <a:t>第五级</a:t>
             </a:r>
+            <a:endParaRPr lang="zh-CN" altLang="en-US"/>
           </a:p>
         </p:txBody>
       </p:sp>
@@ -1216,7 +1235,6 @@
           <a:p>
             <a:fld id="{D997B5FA-0921-464F-AAE1-844C04324D75}" type="datetimeFigureOut">
               <a:rPr lang="zh-CN" altLang="en-US" smtClean="0"/>
-              <a:t>2026/8/5</a:t>
             </a:fld>
             <a:endParaRPr lang="zh-CN" altLang="en-US"/>
           </a:p>
@@ -1258,7 +1276,6 @@
           <a:p>
             <a:fld id="{565CE74E-AB26-4998-AD42-012C4C1AD076}" type="slidenum">
               <a:rPr lang="zh-CN" altLang="en-US" smtClean="0"/>
-              <a:t>‹#›</a:t>
             </a:fld>
             <a:endParaRPr lang="zh-CN" altLang="en-US"/>
           </a:p>
@@ -1313,6 +1330,7 @@
               <a:rPr lang="zh-CN" altLang="en-US"/>
               <a:t>单击此处编辑母版标题样式</a:t>
             </a:r>
+            <a:endParaRPr lang="zh-CN" altLang="en-US"/>
           </a:p>
         </p:txBody>
       </p:sp>
@@ -1378,6 +1396,7 @@
               <a:rPr lang="zh-CN" altLang="en-US"/>
               <a:t>单击此处编辑母版文本样式</a:t>
             </a:r>
+            <a:endParaRPr lang="zh-CN" altLang="en-US"/>
           </a:p>
         </p:txBody>
       </p:sp>
@@ -1406,6 +1425,7 @@
               <a:rPr lang="zh-CN" altLang="en-US"/>
               <a:t>单击此处编辑母版文本样式</a:t>
             </a:r>
+            <a:endParaRPr lang="zh-CN" altLang="en-US"/>
           </a:p>
           <a:p>
             <a:pPr lvl="1"/>
@@ -1413,6 +1433,7 @@
               <a:rPr lang="zh-CN" altLang="en-US"/>
               <a:t>第二级</a:t>
             </a:r>
+            <a:endParaRPr lang="zh-CN" altLang="en-US"/>
           </a:p>
           <a:p>
             <a:pPr lvl="2"/>
@@ -1420,6 +1441,7 @@
               <a:rPr lang="zh-CN" altLang="en-US"/>
               <a:t>第三级</a:t>
             </a:r>
+            <a:endParaRPr lang="zh-CN" altLang="en-US"/>
           </a:p>
           <a:p>
             <a:pPr lvl="3"/>
@@ -1427,6 +1449,7 @@
               <a:rPr lang="zh-CN" altLang="en-US"/>
               <a:t>第四级</a:t>
             </a:r>
+            <a:endParaRPr lang="zh-CN" altLang="en-US"/>
           </a:p>
           <a:p>
             <a:pPr lvl="4"/>
@@ -1434,6 +1457,7 @@
               <a:rPr lang="zh-CN" altLang="en-US"/>
               <a:t>第五级</a:t>
             </a:r>
+            <a:endParaRPr lang="zh-CN" altLang="en-US"/>
           </a:p>
         </p:txBody>
       </p:sp>
@@ -1499,6 +1523,7 @@
               <a:rPr lang="zh-CN" altLang="en-US"/>
               <a:t>单击此处编辑母版文本样式</a:t>
             </a:r>
+            <a:endParaRPr lang="zh-CN" altLang="en-US"/>
           </a:p>
         </p:txBody>
       </p:sp>
@@ -1527,6 +1552,7 @@
               <a:rPr lang="zh-CN" altLang="en-US"/>
               <a:t>单击此处编辑母版文本样式</a:t>
             </a:r>
+            <a:endParaRPr lang="zh-CN" altLang="en-US"/>
           </a:p>
           <a:p>
             <a:pPr lvl="1"/>
@@ -1534,6 +1560,7 @@
               <a:rPr lang="zh-CN" altLang="en-US"/>
               <a:t>第二级</a:t>
             </a:r>
+            <a:endParaRPr lang="zh-CN" altLang="en-US"/>
           </a:p>
           <a:p>
             <a:pPr lvl="2"/>
@@ -1541,6 +1568,7 @@
               <a:rPr lang="zh-CN" altLang="en-US"/>
               <a:t>第三级</a:t>
             </a:r>
+            <a:endParaRPr lang="zh-CN" altLang="en-US"/>
           </a:p>
           <a:p>
             <a:pPr lvl="3"/>
@@ -1548,6 +1576,7 @@
               <a:rPr lang="zh-CN" altLang="en-US"/>
               <a:t>第四级</a:t>
             </a:r>
+            <a:endParaRPr lang="zh-CN" altLang="en-US"/>
           </a:p>
           <a:p>
             <a:pPr lvl="4"/>
@@ -1555,6 +1584,7 @@
               <a:rPr lang="zh-CN" altLang="en-US"/>
               <a:t>第五级</a:t>
             </a:r>
+            <a:endParaRPr lang="zh-CN" altLang="en-US"/>
           </a:p>
         </p:txBody>
       </p:sp>
@@ -1575,7 +1605,6 @@
           <a:p>
             <a:fld id="{D997B5FA-0921-464F-AAE1-844C04324D75}" type="datetimeFigureOut">
               <a:rPr lang="zh-CN" altLang="en-US" smtClean="0"/>
-              <a:t>2026/8/5</a:t>
             </a:fld>
             <a:endParaRPr lang="zh-CN" altLang="en-US"/>
           </a:p>
@@ -1617,7 +1646,6 @@
           <a:p>
             <a:fld id="{565CE74E-AB26-4998-AD42-012C4C1AD076}" type="slidenum">
               <a:rPr lang="zh-CN" altLang="en-US" smtClean="0"/>
-              <a:t>‹#›</a:t>
             </a:fld>
             <a:endParaRPr lang="zh-CN" altLang="en-US"/>
           </a:p>
@@ -1667,6 +1695,7 @@
               <a:rPr lang="zh-CN" altLang="en-US"/>
               <a:t>单击此处编辑母版标题样式</a:t>
             </a:r>
+            <a:endParaRPr lang="zh-CN" altLang="en-US"/>
           </a:p>
         </p:txBody>
       </p:sp>
@@ -1687,7 +1716,6 @@
           <a:p>
             <a:fld id="{D997B5FA-0921-464F-AAE1-844C04324D75}" type="datetimeFigureOut">
               <a:rPr lang="zh-CN" altLang="en-US" smtClean="0"/>
-              <a:t>2026/8/5</a:t>
             </a:fld>
             <a:endParaRPr lang="zh-CN" altLang="en-US"/>
           </a:p>
@@ -1729,7 +1757,6 @@
           <a:p>
             <a:fld id="{565CE74E-AB26-4998-AD42-012C4C1AD076}" type="slidenum">
               <a:rPr lang="zh-CN" altLang="en-US" smtClean="0"/>
-              <a:t>‹#›</a:t>
             </a:fld>
             <a:endParaRPr lang="zh-CN" altLang="en-US"/>
           </a:p>
@@ -1777,7 +1804,6 @@
           <a:p>
             <a:fld id="{D997B5FA-0921-464F-AAE1-844C04324D75}" type="datetimeFigureOut">
               <a:rPr lang="zh-CN" altLang="en-US" smtClean="0"/>
-              <a:t>2026/8/5</a:t>
             </a:fld>
             <a:endParaRPr lang="zh-CN" altLang="en-US"/>
           </a:p>
@@ -1819,7 +1845,6 @@
           <a:p>
             <a:fld id="{565CE74E-AB26-4998-AD42-012C4C1AD076}" type="slidenum">
               <a:rPr lang="zh-CN" altLang="en-US" smtClean="0"/>
-              <a:t>‹#›</a:t>
             </a:fld>
             <a:endParaRPr lang="zh-CN" altLang="en-US"/>
           </a:p>
@@ -1878,6 +1903,7 @@
               <a:rPr lang="zh-CN" altLang="en-US"/>
               <a:t>单击此处编辑母版标题样式</a:t>
             </a:r>
+            <a:endParaRPr lang="zh-CN" altLang="en-US"/>
           </a:p>
         </p:txBody>
       </p:sp>
@@ -1934,6 +1960,7 @@
               <a:rPr lang="zh-CN" altLang="en-US"/>
               <a:t>单击此处编辑母版文本样式</a:t>
             </a:r>
+            <a:endParaRPr lang="zh-CN" altLang="en-US"/>
           </a:p>
           <a:p>
             <a:pPr lvl="1"/>
@@ -1941,6 +1968,7 @@
               <a:rPr lang="zh-CN" altLang="en-US"/>
               <a:t>第二级</a:t>
             </a:r>
+            <a:endParaRPr lang="zh-CN" altLang="en-US"/>
           </a:p>
           <a:p>
             <a:pPr lvl="2"/>
@@ -1948,6 +1976,7 @@
               <a:rPr lang="zh-CN" altLang="en-US"/>
               <a:t>第三级</a:t>
             </a:r>
+            <a:endParaRPr lang="zh-CN" altLang="en-US"/>
           </a:p>
           <a:p>
             <a:pPr lvl="3"/>
@@ -1955,6 +1984,7 @@
               <a:rPr lang="zh-CN" altLang="en-US"/>
               <a:t>第四级</a:t>
             </a:r>
+            <a:endParaRPr lang="zh-CN" altLang="en-US"/>
           </a:p>
           <a:p>
             <a:pPr lvl="4"/>
@@ -1962,6 +1992,7 @@
               <a:rPr lang="zh-CN" altLang="en-US"/>
               <a:t>第五级</a:t>
             </a:r>
+            <a:endParaRPr lang="zh-CN" altLang="en-US"/>
           </a:p>
         </p:txBody>
       </p:sp>
@@ -2027,6 +2058,7 @@
               <a:rPr lang="zh-CN" altLang="en-US"/>
               <a:t>单击此处编辑母版文本样式</a:t>
             </a:r>
+            <a:endParaRPr lang="zh-CN" altLang="en-US"/>
           </a:p>
         </p:txBody>
       </p:sp>
@@ -2047,7 +2079,6 @@
           <a:p>
             <a:fld id="{D997B5FA-0921-464F-AAE1-844C04324D75}" type="datetimeFigureOut">
               <a:rPr lang="zh-CN" altLang="en-US" smtClean="0"/>
-              <a:t>2026/8/5</a:t>
             </a:fld>
             <a:endParaRPr lang="zh-CN" altLang="en-US"/>
           </a:p>
@@ -2089,7 +2120,6 @@
           <a:p>
             <a:fld id="{565CE74E-AB26-4998-AD42-012C4C1AD076}" type="slidenum">
               <a:rPr lang="zh-CN" altLang="en-US" smtClean="0"/>
-              <a:t>‹#›</a:t>
             </a:fld>
             <a:endParaRPr lang="zh-CN" altLang="en-US"/>
           </a:p>
@@ -2148,6 +2178,7 @@
               <a:rPr lang="zh-CN" altLang="en-US"/>
               <a:t>单击此处编辑母版标题样式</a:t>
             </a:r>
+            <a:endParaRPr lang="zh-CN" altLang="en-US"/>
           </a:p>
         </p:txBody>
       </p:sp>
@@ -2274,6 +2305,7 @@
               <a:rPr lang="zh-CN" altLang="en-US"/>
               <a:t>单击此处编辑母版文本样式</a:t>
             </a:r>
+            <a:endParaRPr lang="zh-CN" altLang="en-US"/>
           </a:p>
         </p:txBody>
       </p:sp>
@@ -2294,7 +2326,6 @@
           <a:p>
             <a:fld id="{D997B5FA-0921-464F-AAE1-844C04324D75}" type="datetimeFigureOut">
               <a:rPr lang="zh-CN" altLang="en-US" smtClean="0"/>
-              <a:t>2026/8/5</a:t>
             </a:fld>
             <a:endParaRPr lang="zh-CN" altLang="en-US"/>
           </a:p>
@@ -2336,7 +2367,6 @@
           <a:p>
             <a:fld id="{565CE74E-AB26-4998-AD42-012C4C1AD076}" type="slidenum">
               <a:rPr lang="zh-CN" altLang="en-US" smtClean="0"/>
-              <a:t>‹#›</a:t>
             </a:fld>
             <a:endParaRPr lang="zh-CN" altLang="en-US"/>
           </a:p>
@@ -2401,6 +2431,7 @@
               <a:rPr lang="zh-CN" altLang="en-US"/>
               <a:t>单击此处编辑母版标题样式</a:t>
             </a:r>
+            <a:endParaRPr lang="zh-CN" altLang="en-US"/>
           </a:p>
         </p:txBody>
       </p:sp>
@@ -2434,6 +2465,7 @@
               <a:rPr lang="zh-CN" altLang="en-US"/>
               <a:t>单击此处编辑母版文本样式</a:t>
             </a:r>
+            <a:endParaRPr lang="zh-CN" altLang="en-US"/>
           </a:p>
           <a:p>
             <a:pPr lvl="1"/>
@@ -2441,6 +2473,7 @@
               <a:rPr lang="zh-CN" altLang="en-US"/>
               <a:t>第二级</a:t>
             </a:r>
+            <a:endParaRPr lang="zh-CN" altLang="en-US"/>
           </a:p>
           <a:p>
             <a:pPr lvl="2"/>
@@ -2448,6 +2481,7 @@
               <a:rPr lang="zh-CN" altLang="en-US"/>
               <a:t>第三级</a:t>
             </a:r>
+            <a:endParaRPr lang="zh-CN" altLang="en-US"/>
           </a:p>
           <a:p>
             <a:pPr lvl="3"/>
@@ -2455,6 +2489,7 @@
               <a:rPr lang="zh-CN" altLang="en-US"/>
               <a:t>第四级</a:t>
             </a:r>
+            <a:endParaRPr lang="zh-CN" altLang="en-US"/>
           </a:p>
           <a:p>
             <a:pPr lvl="4"/>
@@ -2462,6 +2497,7 @@
               <a:rPr lang="zh-CN" altLang="en-US"/>
               <a:t>第五级</a:t>
             </a:r>
+            <a:endParaRPr lang="zh-CN" altLang="en-US"/>
           </a:p>
         </p:txBody>
       </p:sp>
@@ -2500,7 +2536,6 @@
           <a:p>
             <a:fld id="{D997B5FA-0921-464F-AAE1-844C04324D75}" type="datetimeFigureOut">
               <a:rPr lang="zh-CN" altLang="en-US" smtClean="0"/>
-              <a:t>2026/8/5</a:t>
             </a:fld>
             <a:endParaRPr lang="zh-CN" altLang="en-US"/>
           </a:p>
@@ -2578,7 +2613,6 @@
           <a:p>
             <a:fld id="{565CE74E-AB26-4998-AD42-012C4C1AD076}" type="slidenum">
               <a:rPr lang="zh-CN" altLang="en-US" smtClean="0"/>
-              <a:t>‹#›</a:t>
             </a:fld>
             <a:endParaRPr lang="zh-CN" altLang="en-US"/>
           </a:p>
@@ -2932,6 +2966,7 @@
               <a:rPr lang="zh-CN" altLang="en-US"/>
               <a:t>浏览器</a:t>
             </a:r>
+            <a:endParaRPr lang="zh-CN" altLang="en-US"/>
           </a:p>
         </p:txBody>
       </p:sp>
@@ -3014,6 +3049,7 @@
               <a:rPr lang="zh-CN" altLang="en-US"/>
               <a:t>代理</a:t>
             </a:r>
+            <a:endParaRPr lang="zh-CN" altLang="en-US"/>
           </a:p>
         </p:txBody>
       </p:sp>
@@ -3099,6 +3135,7 @@
               <a:rPr lang="zh-CN" altLang="en-US"/>
               <a:t>本地开发服务器</a:t>
             </a:r>
+            <a:endParaRPr lang="zh-CN" altLang="en-US"/>
           </a:p>
         </p:txBody>
       </p:sp>
@@ -3214,6 +3251,7 @@
               <a:rPr lang="zh-CN" altLang="en-US"/>
               <a:t>提供代理请求</a:t>
             </a:r>
+            <a:endParaRPr lang="zh-CN" altLang="en-US"/>
           </a:p>
         </p:txBody>
       </p:sp>
@@ -3249,6 +3287,7 @@
               <a:rPr lang="zh-CN" altLang="en-US"/>
               <a:t>后端服务</a:t>
             </a:r>
+            <a:endParaRPr lang="zh-CN" altLang="en-US"/>
           </a:p>
           <a:p>
             <a:pPr algn="ctr"/>
@@ -3256,6 +3295,7 @@
               <a:rPr lang="zh-CN" altLang="en-US"/>
               <a:t>可能有多个</a:t>
             </a:r>
+            <a:endParaRPr lang="zh-CN" altLang="en-US"/>
           </a:p>
         </p:txBody>
       </p:sp>
@@ -3285,6 +3325,7 @@
               <a:rPr lang="zh-CN" altLang="en-US"/>
               <a:t>跨域接口请求</a:t>
             </a:r>
+            <a:endParaRPr lang="zh-CN" altLang="en-US"/>
           </a:p>
         </p:txBody>
       </p:sp>
@@ -3357,6 +3398,7 @@
               <a:rPr lang="zh-CN" altLang="en-US"/>
               <a:t>返回数据</a:t>
             </a:r>
+            <a:endParaRPr lang="zh-CN" altLang="en-US"/>
           </a:p>
         </p:txBody>
       </p:sp>
@@ -3429,12 +3471,14 @@
               <a:rPr lang="zh-CN" altLang="en-US"/>
               <a:t>返回</a:t>
             </a:r>
+            <a:endParaRPr lang="zh-CN" altLang="en-US"/>
           </a:p>
           <a:p>
             <a:r>
               <a:rPr lang="zh-CN" altLang="en-US"/>
               <a:t>数据</a:t>
             </a:r>
+            <a:endParaRPr lang="zh-CN" altLang="en-US"/>
           </a:p>
         </p:txBody>
       </p:sp>
@@ -3464,6 +3508,7 @@
               <a:rPr lang="zh-CN" altLang="en-US"/>
               <a:t>接口请求</a:t>
             </a:r>
+            <a:endParaRPr lang="zh-CN" altLang="en-US"/>
           </a:p>
         </p:txBody>
       </p:sp>
@@ -3536,6 +3581,7 @@
               <a:rPr lang="zh-CN" altLang="en-US"/>
               <a:t>返回数据</a:t>
             </a:r>
+            <a:endParaRPr lang="zh-CN" altLang="en-US"/>
           </a:p>
         </p:txBody>
       </p:sp>
@@ -3552,13 +3598,7 @@
   <p:cSld>
     <p:spTree>
       <p:nvGrpSpPr>
-        <p:cNvPr id="1" name="">
-          <a:extLst>
-            <a:ext uri="{FF2B5EF4-FFF2-40B4-BE49-F238E27FC236}">
-              <a16:creationId xmlns:a16="http://schemas.microsoft.com/office/drawing/2014/main" id="{11CB7C9A-C2BE-DEF0-2A71-32244C4B1A7E}"/>
-            </a:ext>
-          </a:extLst>
-        </p:cNvPr>
+        <p:cNvPr id="1" name=""/>
         <p:cNvGrpSpPr/>
         <p:nvPr/>
       </p:nvGrpSpPr>
@@ -3572,13 +3612,7 @@
       </p:grpSpPr>
       <p:sp>
         <p:nvSpPr>
-          <p:cNvPr id="5" name="文本框 4">
-            <a:extLst>
-              <a:ext uri="{FF2B5EF4-FFF2-40B4-BE49-F238E27FC236}">
-                <a16:creationId xmlns:a16="http://schemas.microsoft.com/office/drawing/2014/main" id="{F8723017-89D1-F105-13B6-21FF68505DAB}"/>
-              </a:ext>
-            </a:extLst>
-          </p:cNvPr>
+          <p:cNvPr id="5" name="文本框 4"/>
           <p:cNvSpPr txBox="1"/>
           <p:nvPr/>
         </p:nvSpPr>
@@ -3608,18 +3642,13 @@
               <a:rPr lang="zh-CN" altLang="en-US" sz="1400" dirty="0"/>
               <a:t>开发者</a:t>
             </a:r>
-          </a:p>
-        </p:txBody>
-      </p:sp>
-      <p:sp>
-        <p:nvSpPr>
-          <p:cNvPr id="15" name="文本框 14">
-            <a:extLst>
-              <a:ext uri="{FF2B5EF4-FFF2-40B4-BE49-F238E27FC236}">
-                <a16:creationId xmlns:a16="http://schemas.microsoft.com/office/drawing/2014/main" id="{F3D560F4-AADD-36CE-0F8E-2DC63D3AD708}"/>
-              </a:ext>
-            </a:extLst>
-          </p:cNvPr>
+            <a:endParaRPr lang="zh-CN" altLang="en-US" sz="1400" dirty="0"/>
+          </a:p>
+        </p:txBody>
+      </p:sp>
+      <p:sp>
+        <p:nvSpPr>
+          <p:cNvPr id="15" name="文本框 14"/>
           <p:cNvSpPr txBox="1"/>
           <p:nvPr/>
         </p:nvSpPr>
@@ -3649,21 +3678,14 @@
               <a:rPr lang="zh-CN" altLang="en-US" sz="1400" dirty="0"/>
               <a:t>本地服务</a:t>
             </a:r>
+            <a:endParaRPr lang="zh-CN" altLang="en-US" sz="1400" dirty="0"/>
           </a:p>
         </p:txBody>
       </p:sp>
       <p:cxnSp>
         <p:nvCxnSpPr>
-          <p:cNvPr id="2" name="直接连接符 1">
-            <a:extLst>
-              <a:ext uri="{FF2B5EF4-FFF2-40B4-BE49-F238E27FC236}">
-                <a16:creationId xmlns:a16="http://schemas.microsoft.com/office/drawing/2014/main" id="{1676E00A-1EF0-9440-8E13-A82F315A58A3}"/>
-              </a:ext>
-            </a:extLst>
-          </p:cNvPr>
-          <p:cNvCxnSpPr>
-            <a:cxnSpLocks/>
-          </p:cNvCxnSpPr>
+          <p:cNvPr id="2" name="直接连接符 1"/>
+          <p:cNvCxnSpPr/>
           <p:nvPr/>
         </p:nvCxnSpPr>
         <p:spPr>
@@ -3700,16 +3722,8 @@
       </p:cxnSp>
       <p:cxnSp>
         <p:nvCxnSpPr>
-          <p:cNvPr id="3" name="直接连接符 2">
-            <a:extLst>
-              <a:ext uri="{FF2B5EF4-FFF2-40B4-BE49-F238E27FC236}">
-                <a16:creationId xmlns:a16="http://schemas.microsoft.com/office/drawing/2014/main" id="{D7BC58BF-1A67-F28A-94E1-8A95D86F961A}"/>
-              </a:ext>
-            </a:extLst>
-          </p:cNvPr>
-          <p:cNvCxnSpPr>
-            <a:cxnSpLocks/>
-          </p:cNvCxnSpPr>
+          <p:cNvPr id="3" name="直接连接符 2"/>
+          <p:cNvCxnSpPr/>
           <p:nvPr/>
         </p:nvCxnSpPr>
         <p:spPr>
@@ -3746,13 +3760,7 @@
       </p:cxnSp>
       <p:sp>
         <p:nvSpPr>
-          <p:cNvPr id="25" name="文本框 24">
-            <a:extLst>
-              <a:ext uri="{FF2B5EF4-FFF2-40B4-BE49-F238E27FC236}">
-                <a16:creationId xmlns:a16="http://schemas.microsoft.com/office/drawing/2014/main" id="{F78C3EE3-23AF-2936-A5BF-ED7BDA4E25EF}"/>
-              </a:ext>
-            </a:extLst>
-          </p:cNvPr>
+          <p:cNvPr id="25" name="文本框 24"/>
           <p:cNvSpPr txBox="1"/>
           <p:nvPr/>
         </p:nvSpPr>
@@ -3777,18 +3785,13 @@
               <a:rPr lang="zh-CN" altLang="en-US" sz="1200" dirty="0"/>
               <a:t>打包代码，生成结果启动本地服务</a:t>
             </a:r>
-          </a:p>
-        </p:txBody>
-      </p:sp>
-      <p:sp>
-        <p:nvSpPr>
-          <p:cNvPr id="27" name="右箭头 26">
-            <a:extLst>
-              <a:ext uri="{FF2B5EF4-FFF2-40B4-BE49-F238E27FC236}">
-                <a16:creationId xmlns:a16="http://schemas.microsoft.com/office/drawing/2014/main" id="{5DBC3FC3-791F-DA87-8615-FB3F3212FCD1}"/>
-              </a:ext>
-            </a:extLst>
-          </p:cNvPr>
+            <a:endParaRPr lang="zh-CN" altLang="en-US" sz="1200" dirty="0"/>
+          </a:p>
+        </p:txBody>
+      </p:sp>
+      <p:sp>
+        <p:nvSpPr>
+          <p:cNvPr id="27" name="右箭头 26"/>
           <p:cNvSpPr/>
           <p:nvPr/>
         </p:nvSpPr>
@@ -3831,13 +3834,7 @@
       </p:sp>
       <p:sp>
         <p:nvSpPr>
-          <p:cNvPr id="4" name="右箭头 3">
-            <a:extLst>
-              <a:ext uri="{FF2B5EF4-FFF2-40B4-BE49-F238E27FC236}">
-                <a16:creationId xmlns:a16="http://schemas.microsoft.com/office/drawing/2014/main" id="{D9826BAE-F5DF-403B-201B-046E1670494D}"/>
-              </a:ext>
-            </a:extLst>
-          </p:cNvPr>
+          <p:cNvPr id="4" name="右箭头 3"/>
           <p:cNvSpPr/>
           <p:nvPr/>
         </p:nvSpPr>
@@ -3880,16 +3877,8 @@
       </p:sp>
       <p:cxnSp>
         <p:nvCxnSpPr>
-          <p:cNvPr id="7" name="直接连接符 6">
-            <a:extLst>
-              <a:ext uri="{FF2B5EF4-FFF2-40B4-BE49-F238E27FC236}">
-                <a16:creationId xmlns:a16="http://schemas.microsoft.com/office/drawing/2014/main" id="{B8490421-EF53-B012-E2CA-CD58913E44C3}"/>
-              </a:ext>
-            </a:extLst>
-          </p:cNvPr>
-          <p:cNvCxnSpPr>
-            <a:cxnSpLocks/>
-          </p:cNvCxnSpPr>
+          <p:cNvPr id="7" name="直接连接符 6"/>
+          <p:cNvCxnSpPr/>
           <p:nvPr/>
         </p:nvCxnSpPr>
         <p:spPr>
@@ -3926,13 +3915,7 @@
       </p:cxnSp>
       <p:sp>
         <p:nvSpPr>
-          <p:cNvPr id="8" name="文本框 7">
-            <a:extLst>
-              <a:ext uri="{FF2B5EF4-FFF2-40B4-BE49-F238E27FC236}">
-                <a16:creationId xmlns:a16="http://schemas.microsoft.com/office/drawing/2014/main" id="{5748A862-17B7-78E7-BD13-31E62611EC50}"/>
-              </a:ext>
-            </a:extLst>
-          </p:cNvPr>
+          <p:cNvPr id="8" name="文本框 7"/>
           <p:cNvSpPr txBox="1"/>
           <p:nvPr/>
         </p:nvSpPr>
@@ -3962,18 +3945,13 @@
               <a:rPr lang="zh-CN" altLang="en-US" sz="1400" dirty="0"/>
               <a:t>浏览器端</a:t>
             </a:r>
-          </a:p>
-        </p:txBody>
-      </p:sp>
-      <p:sp>
-        <p:nvSpPr>
-          <p:cNvPr id="9" name="右箭头 3">
-            <a:extLst>
-              <a:ext uri="{FF2B5EF4-FFF2-40B4-BE49-F238E27FC236}">
-                <a16:creationId xmlns:a16="http://schemas.microsoft.com/office/drawing/2014/main" id="{6F5FE3EA-6399-0400-F2AD-1625BFD7D0EF}"/>
-              </a:ext>
-            </a:extLst>
-          </p:cNvPr>
+            <a:endParaRPr lang="zh-CN" altLang="en-US" sz="1400" dirty="0"/>
+          </a:p>
+        </p:txBody>
+      </p:sp>
+      <p:sp>
+        <p:nvSpPr>
+          <p:cNvPr id="9" name="右箭头 3"/>
           <p:cNvSpPr/>
           <p:nvPr/>
         </p:nvSpPr>
@@ -4016,13 +3994,7 @@
       </p:sp>
       <p:sp>
         <p:nvSpPr>
-          <p:cNvPr id="10" name="文本框 9">
-            <a:extLst>
-              <a:ext uri="{FF2B5EF4-FFF2-40B4-BE49-F238E27FC236}">
-                <a16:creationId xmlns:a16="http://schemas.microsoft.com/office/drawing/2014/main" id="{2545C99C-B7C6-833D-B1CE-A74900AE8738}"/>
-              </a:ext>
-            </a:extLst>
-          </p:cNvPr>
+          <p:cNvPr id="10" name="文本框 9"/>
           <p:cNvSpPr txBox="1"/>
           <p:nvPr/>
         </p:nvSpPr>
@@ -4054,18 +4026,13 @@
               <a:rPr lang="zh-CN" altLang="en-US" sz="1200" dirty="0"/>
               <a:t>模式启动服务</a:t>
             </a:r>
-          </a:p>
-        </p:txBody>
-      </p:sp>
-      <p:sp>
-        <p:nvSpPr>
-          <p:cNvPr id="16" name="文本框 15">
-            <a:extLst>
-              <a:ext uri="{FF2B5EF4-FFF2-40B4-BE49-F238E27FC236}">
-                <a16:creationId xmlns:a16="http://schemas.microsoft.com/office/drawing/2014/main" id="{D8A5EC62-B7BD-225B-FE5D-86DD0B03C9E5}"/>
-              </a:ext>
-            </a:extLst>
-          </p:cNvPr>
+            <a:endParaRPr lang="zh-CN" altLang="en-US" sz="1200" dirty="0"/>
+          </a:p>
+        </p:txBody>
+      </p:sp>
+      <p:sp>
+        <p:nvSpPr>
+          <p:cNvPr id="16" name="文本框 15"/>
           <p:cNvSpPr txBox="1"/>
           <p:nvPr/>
         </p:nvSpPr>
@@ -4089,18 +4056,13 @@
               <a:rPr lang="zh-CN" altLang="en-US" sz="1200" dirty="0"/>
               <a:t>通知代码存在更新</a:t>
             </a:r>
-          </a:p>
-        </p:txBody>
-      </p:sp>
-      <p:sp>
-        <p:nvSpPr>
-          <p:cNvPr id="60" name="文本框 59">
-            <a:extLst>
-              <a:ext uri="{FF2B5EF4-FFF2-40B4-BE49-F238E27FC236}">
-                <a16:creationId xmlns:a16="http://schemas.microsoft.com/office/drawing/2014/main" id="{607DF931-91EB-98F7-8649-266E7DFF7C44}"/>
-              </a:ext>
-            </a:extLst>
-          </p:cNvPr>
+            <a:endParaRPr lang="zh-CN" altLang="en-US" sz="1200" dirty="0"/>
+          </a:p>
+        </p:txBody>
+      </p:sp>
+      <p:sp>
+        <p:nvSpPr>
+          <p:cNvPr id="60" name="文本框 59"/>
           <p:cNvSpPr txBox="1"/>
           <p:nvPr/>
         </p:nvSpPr>
@@ -4141,18 +4103,13 @@
               <a:rPr lang="zh-CN" altLang="en-US" sz="1200" dirty="0"/>
               <a:t>连接</a:t>
             </a:r>
-          </a:p>
-        </p:txBody>
-      </p:sp>
-      <p:sp>
-        <p:nvSpPr>
-          <p:cNvPr id="75" name="右箭头 3">
-            <a:extLst>
-              <a:ext uri="{FF2B5EF4-FFF2-40B4-BE49-F238E27FC236}">
-                <a16:creationId xmlns:a16="http://schemas.microsoft.com/office/drawing/2014/main" id="{E08DF61F-A8A4-3762-3D3D-EAF8940A2958}"/>
-              </a:ext>
-            </a:extLst>
-          </p:cNvPr>
+            <a:endParaRPr lang="zh-CN" altLang="en-US" sz="1200" dirty="0"/>
+          </a:p>
+        </p:txBody>
+      </p:sp>
+      <p:sp>
+        <p:nvSpPr>
+          <p:cNvPr id="75" name="右箭头 3"/>
           <p:cNvSpPr/>
           <p:nvPr/>
         </p:nvSpPr>
@@ -4195,13 +4152,7 @@
       </p:sp>
       <p:sp>
         <p:nvSpPr>
-          <p:cNvPr id="21" name="右箭头 3">
-            <a:extLst>
-              <a:ext uri="{FF2B5EF4-FFF2-40B4-BE49-F238E27FC236}">
-                <a16:creationId xmlns:a16="http://schemas.microsoft.com/office/drawing/2014/main" id="{4D09BF65-EBCE-24C5-CEA6-05CC716F26B2}"/>
-              </a:ext>
-            </a:extLst>
-          </p:cNvPr>
+          <p:cNvPr id="21" name="右箭头 3"/>
           <p:cNvSpPr/>
           <p:nvPr/>
         </p:nvSpPr>
@@ -4244,13 +4195,7 @@
       </p:sp>
       <p:sp>
         <p:nvSpPr>
-          <p:cNvPr id="24" name="文本框 23">
-            <a:extLst>
-              <a:ext uri="{FF2B5EF4-FFF2-40B4-BE49-F238E27FC236}">
-                <a16:creationId xmlns:a16="http://schemas.microsoft.com/office/drawing/2014/main" id="{496BFC8B-E1D6-C6BE-50E0-6ED21896AD7C}"/>
-              </a:ext>
-            </a:extLst>
-          </p:cNvPr>
+          <p:cNvPr id="24" name="文本框 23"/>
           <p:cNvSpPr txBox="1"/>
           <p:nvPr/>
         </p:nvSpPr>
@@ -4274,18 +4219,13 @@
               <a:rPr lang="zh-CN" altLang="en-US" sz="1200" dirty="0"/>
               <a:t>修改源码</a:t>
             </a:r>
-          </a:p>
-        </p:txBody>
-      </p:sp>
-      <p:sp>
-        <p:nvSpPr>
-          <p:cNvPr id="26" name="文本框 25">
-            <a:extLst>
-              <a:ext uri="{FF2B5EF4-FFF2-40B4-BE49-F238E27FC236}">
-                <a16:creationId xmlns:a16="http://schemas.microsoft.com/office/drawing/2014/main" id="{F0BB7F10-4E64-D961-091F-7A48A24D6A12}"/>
-              </a:ext>
-            </a:extLst>
-          </p:cNvPr>
+            <a:endParaRPr lang="zh-CN" altLang="en-US" sz="1200" dirty="0"/>
+          </a:p>
+        </p:txBody>
+      </p:sp>
+      <p:sp>
+        <p:nvSpPr>
+          <p:cNvPr id="26" name="文本框 25"/>
           <p:cNvSpPr txBox="1"/>
           <p:nvPr/>
         </p:nvSpPr>
@@ -4309,18 +4249,13 @@
               <a:rPr lang="zh-CN" altLang="en-US" sz="1200" dirty="0"/>
               <a:t>重新打包代码</a:t>
             </a:r>
-          </a:p>
-        </p:txBody>
-      </p:sp>
-      <p:sp>
-        <p:nvSpPr>
-          <p:cNvPr id="29" name="右箭头 26">
-            <a:extLst>
-              <a:ext uri="{FF2B5EF4-FFF2-40B4-BE49-F238E27FC236}">
-                <a16:creationId xmlns:a16="http://schemas.microsoft.com/office/drawing/2014/main" id="{D4D33EF2-6C54-F023-76BA-B5FAEF89C362}"/>
-              </a:ext>
-            </a:extLst>
-          </p:cNvPr>
+            <a:endParaRPr lang="zh-CN" altLang="en-US" sz="1200" dirty="0"/>
+          </a:p>
+        </p:txBody>
+      </p:sp>
+      <p:sp>
+        <p:nvSpPr>
+          <p:cNvPr id="29" name="右箭头 26"/>
           <p:cNvSpPr/>
           <p:nvPr/>
         </p:nvSpPr>
@@ -4363,13 +4298,7 @@
       </p:sp>
       <p:sp>
         <p:nvSpPr>
-          <p:cNvPr id="31" name="文本框 30">
-            <a:extLst>
-              <a:ext uri="{FF2B5EF4-FFF2-40B4-BE49-F238E27FC236}">
-                <a16:creationId xmlns:a16="http://schemas.microsoft.com/office/drawing/2014/main" id="{C435B378-1AF9-DA39-7030-52C494A4E5D5}"/>
-              </a:ext>
-            </a:extLst>
-          </p:cNvPr>
+          <p:cNvPr id="31" name="文本框 30"/>
           <p:cNvSpPr txBox="1"/>
           <p:nvPr/>
         </p:nvSpPr>
@@ -4401,18 +4330,13 @@
               <a:rPr lang="zh-CN" altLang="en-US" sz="1200" dirty="0"/>
               <a:t>，服务返回更新清单</a:t>
             </a:r>
-          </a:p>
-        </p:txBody>
-      </p:sp>
-      <p:sp>
-        <p:nvSpPr>
-          <p:cNvPr id="33" name="右箭头 3">
-            <a:extLst>
-              <a:ext uri="{FF2B5EF4-FFF2-40B4-BE49-F238E27FC236}">
-                <a16:creationId xmlns:a16="http://schemas.microsoft.com/office/drawing/2014/main" id="{36C8A68D-7E00-CEA8-E8AD-D000BA394EAD}"/>
-              </a:ext>
-            </a:extLst>
-          </p:cNvPr>
+            <a:endParaRPr lang="zh-CN" altLang="en-US" sz="1200" dirty="0"/>
+          </a:p>
+        </p:txBody>
+      </p:sp>
+      <p:sp>
+        <p:nvSpPr>
+          <p:cNvPr id="33" name="右箭头 3"/>
           <p:cNvSpPr/>
           <p:nvPr/>
         </p:nvSpPr>
@@ -4455,13 +4379,7 @@
       </p:sp>
       <p:sp>
         <p:nvSpPr>
-          <p:cNvPr id="34" name="文本框 33">
-            <a:extLst>
-              <a:ext uri="{FF2B5EF4-FFF2-40B4-BE49-F238E27FC236}">
-                <a16:creationId xmlns:a16="http://schemas.microsoft.com/office/drawing/2014/main" id="{455E1189-F4E0-869D-E6C7-7A7713BA9538}"/>
-              </a:ext>
-            </a:extLst>
-          </p:cNvPr>
+          <p:cNvPr id="34" name="文本框 33"/>
           <p:cNvSpPr txBox="1"/>
           <p:nvPr/>
         </p:nvSpPr>
@@ -4497,18 +4415,13 @@
               <a:rPr lang="zh-CN" altLang="en-US" sz="1200" dirty="0"/>
               <a:t>，服务返回</a:t>
             </a:r>
-          </a:p>
-        </p:txBody>
-      </p:sp>
-      <p:sp>
-        <p:nvSpPr>
-          <p:cNvPr id="35" name="右箭头 3">
-            <a:extLst>
-              <a:ext uri="{FF2B5EF4-FFF2-40B4-BE49-F238E27FC236}">
-                <a16:creationId xmlns:a16="http://schemas.microsoft.com/office/drawing/2014/main" id="{DC538117-5E0E-9192-AB58-87F7F9B36C03}"/>
-              </a:ext>
-            </a:extLst>
-          </p:cNvPr>
+            <a:endParaRPr lang="zh-CN" altLang="en-US" sz="1200" dirty="0"/>
+          </a:p>
+        </p:txBody>
+      </p:sp>
+      <p:sp>
+        <p:nvSpPr>
+          <p:cNvPr id="35" name="右箭头 3"/>
           <p:cNvSpPr/>
           <p:nvPr/>
         </p:nvSpPr>
@@ -4551,13 +4464,7 @@
       </p:sp>
       <p:sp>
         <p:nvSpPr>
-          <p:cNvPr id="36" name="右箭头 26">
-            <a:extLst>
-              <a:ext uri="{FF2B5EF4-FFF2-40B4-BE49-F238E27FC236}">
-                <a16:creationId xmlns:a16="http://schemas.microsoft.com/office/drawing/2014/main" id="{D37A77A6-EA50-D413-F08B-F991A39231A0}"/>
-              </a:ext>
-            </a:extLst>
-          </p:cNvPr>
+          <p:cNvPr id="36" name="右箭头 26"/>
           <p:cNvSpPr/>
           <p:nvPr/>
         </p:nvSpPr>
@@ -4600,13 +4507,7 @@
       </p:sp>
       <p:sp>
         <p:nvSpPr>
-          <p:cNvPr id="37" name="文本框 36">
-            <a:extLst>
-              <a:ext uri="{FF2B5EF4-FFF2-40B4-BE49-F238E27FC236}">
-                <a16:creationId xmlns:a16="http://schemas.microsoft.com/office/drawing/2014/main" id="{FF9D06FA-BA8C-03BD-DD92-24796080140F}"/>
-              </a:ext>
-            </a:extLst>
-          </p:cNvPr>
+          <p:cNvPr id="37" name="文本框 36"/>
           <p:cNvSpPr txBox="1"/>
           <p:nvPr/>
         </p:nvSpPr>
@@ -4636,13 +4537,7 @@
       </p:sp>
       <p:sp>
         <p:nvSpPr>
-          <p:cNvPr id="41" name="文本框 40">
-            <a:extLst>
-              <a:ext uri="{FF2B5EF4-FFF2-40B4-BE49-F238E27FC236}">
-                <a16:creationId xmlns:a16="http://schemas.microsoft.com/office/drawing/2014/main" id="{4E4D53B1-70FF-D036-BA73-2AD32B6272AB}"/>
-              </a:ext>
-            </a:extLst>
-          </p:cNvPr>
+          <p:cNvPr id="41" name="文本框 40"/>
           <p:cNvSpPr txBox="1"/>
           <p:nvPr/>
         </p:nvSpPr>
@@ -4671,11 +4566,2481 @@
         </p:txBody>
       </p:sp>
     </p:spTree>
-    <p:extLst>
-      <p:ext uri="{BB962C8B-B14F-4D97-AF65-F5344CB8AC3E}">
-        <p14:creationId xmlns:p14="http://schemas.microsoft.com/office/powerpoint/2010/main" val="3467654465"/>
-      </p:ext>
-    </p:extLst>
+  </p:cSld>
+  <p:clrMapOvr>
+    <a:masterClrMapping/>
+  </p:clrMapOvr>
+</p:sld>
+</file>
+
+<file path=ppt/slides/slide11.xml><?xml version="1.0" encoding="utf-8"?>
+<p:sld xmlns:a="http://schemas.openxmlformats.org/drawingml/2006/main" xmlns:r="http://schemas.openxmlformats.org/officeDocument/2006/relationships" xmlns:p="http://schemas.openxmlformats.org/presentationml/2006/main">
+  <p:cSld>
+    <p:spTree>
+      <p:nvGrpSpPr>
+        <p:cNvPr id="1" name=""/>
+        <p:cNvGrpSpPr/>
+        <p:nvPr/>
+      </p:nvGrpSpPr>
+      <p:grpSpPr>
+        <a:xfrm>
+          <a:off x="0" y="0"/>
+          <a:ext cx="0" cy="0"/>
+          <a:chOff x="0" y="0"/>
+          <a:chExt cx="0" cy="0"/>
+        </a:xfrm>
+      </p:grpSpPr>
+      <p:sp>
+        <p:nvSpPr>
+          <p:cNvPr id="5" name="文本框 4"/>
+          <p:cNvSpPr txBox="1"/>
+          <p:nvPr/>
+        </p:nvSpPr>
+        <p:spPr>
+          <a:xfrm>
+            <a:off x="1814830" y="605155"/>
+            <a:ext cx="1934210" cy="264160"/>
+          </a:xfrm>
+          <a:prstGeom prst="rect">
+            <a:avLst/>
+          </a:prstGeom>
+          <a:solidFill>
+            <a:schemeClr val="accent1">
+              <a:lumMod val="40000"/>
+              <a:lumOff val="60000"/>
+            </a:schemeClr>
+          </a:solidFill>
+          <a:ln w="12700">
+            <a:solidFill>
+              <a:schemeClr val="tx1"/>
+            </a:solidFill>
+          </a:ln>
+        </p:spPr>
+        <p:txBody>
+          <a:bodyPr wrap="square" rtlCol="0">
+            <a:noAutofit/>
+          </a:bodyPr>
+          <a:lstStyle/>
+          <a:p>
+            <a:pPr algn="ctr"/>
+            <a:r>
+              <a:rPr lang="zh-CN" altLang="en-US" sz="1200" dirty="0"/>
+              <a:t>用户输入的问题文本</a:t>
+            </a:r>
+            <a:endParaRPr lang="zh-CN" altLang="en-US" sz="1200" dirty="0"/>
+          </a:p>
+        </p:txBody>
+      </p:sp>
+      <p:sp>
+        <p:nvSpPr>
+          <p:cNvPr id="10" name="文本框 9"/>
+          <p:cNvSpPr txBox="1"/>
+          <p:nvPr/>
+        </p:nvSpPr>
+        <p:spPr>
+          <a:xfrm>
+            <a:off x="2915920" y="1009015"/>
+            <a:ext cx="1208405" cy="241300"/>
+          </a:xfrm>
+          <a:prstGeom prst="rect">
+            <a:avLst/>
+          </a:prstGeom>
+          <a:noFill/>
+        </p:spPr>
+        <p:txBody>
+          <a:bodyPr wrap="square" rtlCol="0">
+            <a:noAutofit/>
+          </a:bodyPr>
+          <a:lstStyle/>
+          <a:p>
+            <a:r>
+              <a:rPr lang="zh-CN" altLang="en-US" sz="1000" dirty="0"/>
+              <a:t>用分词器切分</a:t>
+            </a:r>
+            <a:endParaRPr lang="zh-CN" altLang="en-US" sz="1000" dirty="0"/>
+          </a:p>
+        </p:txBody>
+      </p:sp>
+      <p:sp>
+        <p:nvSpPr>
+          <p:cNvPr id="29" name="右箭头 26"/>
+          <p:cNvSpPr/>
+          <p:nvPr/>
+        </p:nvSpPr>
+        <p:spPr>
+          <a:xfrm rot="5400000">
+            <a:off x="2604135" y="1035050"/>
+            <a:ext cx="355600" cy="182245"/>
+          </a:xfrm>
+          <a:prstGeom prst="rightArrow">
+            <a:avLst/>
+          </a:prstGeom>
+          <a:ln>
+            <a:noFill/>
+          </a:ln>
+        </p:spPr>
+        <p:style>
+          <a:lnRef idx="2">
+            <a:schemeClr val="accent1">
+              <a:shade val="50000"/>
+            </a:schemeClr>
+          </a:lnRef>
+          <a:fillRef idx="1">
+            <a:schemeClr val="accent1"/>
+          </a:fillRef>
+          <a:effectRef idx="0">
+            <a:schemeClr val="accent1"/>
+          </a:effectRef>
+          <a:fontRef idx="minor">
+            <a:schemeClr val="lt1"/>
+          </a:fontRef>
+        </p:style>
+        <p:txBody>
+          <a:bodyPr rtlCol="0" anchor="ctr"/>
+          <a:lstStyle/>
+          <a:p>
+            <a:pPr algn="ctr"/>
+            <a:endParaRPr lang="zh-CN" altLang="en-US" sz="1200"/>
+          </a:p>
+        </p:txBody>
+      </p:sp>
+      <p:sp>
+        <p:nvSpPr>
+          <p:cNvPr id="46" name="文本框 45"/>
+          <p:cNvSpPr txBox="1"/>
+          <p:nvPr/>
+        </p:nvSpPr>
+        <p:spPr>
+          <a:xfrm>
+            <a:off x="1635125" y="114300"/>
+            <a:ext cx="2293620" cy="306705"/>
+          </a:xfrm>
+          <a:prstGeom prst="rect">
+            <a:avLst/>
+          </a:prstGeom>
+          <a:solidFill>
+            <a:srgbClr val="FFFF00"/>
+          </a:solidFill>
+          <a:ln w="12700">
+            <a:solidFill>
+              <a:schemeClr val="tx1"/>
+            </a:solidFill>
+          </a:ln>
+        </p:spPr>
+        <p:txBody>
+          <a:bodyPr wrap="square" rtlCol="0">
+            <a:spAutoFit/>
+          </a:bodyPr>
+          <a:lstStyle/>
+          <a:p>
+            <a:pPr algn="ctr"/>
+            <a:r>
+              <a:rPr lang="zh-CN" altLang="en-US" sz="1400"/>
+              <a:t>大模型推理</a:t>
+            </a:r>
+            <a:r>
+              <a:rPr lang="zh-CN" altLang="en-US" sz="1400"/>
+              <a:t>过程</a:t>
+            </a:r>
+            <a:endParaRPr lang="zh-CN" altLang="en-US" sz="1400"/>
+          </a:p>
+        </p:txBody>
+      </p:sp>
+      <p:sp>
+        <p:nvSpPr>
+          <p:cNvPr id="11" name="文本框 10"/>
+          <p:cNvSpPr txBox="1"/>
+          <p:nvPr/>
+        </p:nvSpPr>
+        <p:spPr>
+          <a:xfrm>
+            <a:off x="2096770" y="1392555"/>
+            <a:ext cx="1370330" cy="275590"/>
+          </a:xfrm>
+          <a:prstGeom prst="rect">
+            <a:avLst/>
+          </a:prstGeom>
+          <a:solidFill>
+            <a:schemeClr val="accent1">
+              <a:lumMod val="40000"/>
+              <a:lumOff val="60000"/>
+            </a:schemeClr>
+          </a:solidFill>
+          <a:ln w="12700">
+            <a:solidFill>
+              <a:schemeClr val="tx1"/>
+            </a:solidFill>
+          </a:ln>
+        </p:spPr>
+        <p:txBody>
+          <a:bodyPr wrap="square" rtlCol="0">
+            <a:spAutoFit/>
+          </a:bodyPr>
+          <a:lstStyle/>
+          <a:p>
+            <a:pPr algn="ctr"/>
+            <a:r>
+              <a:rPr lang="en-US" altLang="zh-CN" sz="1200" dirty="0"/>
+              <a:t>token</a:t>
+            </a:r>
+            <a:r>
+              <a:rPr lang="zh-CN" altLang="en-US" sz="1200" dirty="0"/>
+              <a:t>序列</a:t>
+            </a:r>
+            <a:endParaRPr lang="zh-CN" altLang="en-US" sz="1200" dirty="0"/>
+          </a:p>
+        </p:txBody>
+      </p:sp>
+      <p:sp>
+        <p:nvSpPr>
+          <p:cNvPr id="12" name="文本框 11"/>
+          <p:cNvSpPr txBox="1"/>
+          <p:nvPr/>
+        </p:nvSpPr>
+        <p:spPr>
+          <a:xfrm>
+            <a:off x="1832928" y="2191385"/>
+            <a:ext cx="1898015" cy="275590"/>
+          </a:xfrm>
+          <a:prstGeom prst="rect">
+            <a:avLst/>
+          </a:prstGeom>
+          <a:solidFill>
+            <a:schemeClr val="accent1">
+              <a:lumMod val="40000"/>
+              <a:lumOff val="60000"/>
+            </a:schemeClr>
+          </a:solidFill>
+          <a:ln w="12700">
+            <a:solidFill>
+              <a:schemeClr val="tx1"/>
+            </a:solidFill>
+          </a:ln>
+        </p:spPr>
+        <p:txBody>
+          <a:bodyPr wrap="square" rtlCol="0">
+            <a:spAutoFit/>
+          </a:bodyPr>
+          <a:lstStyle/>
+          <a:p>
+            <a:pPr algn="ctr"/>
+            <a:r>
+              <a:rPr lang="en-US" altLang="zh-CN" sz="1200" dirty="0"/>
+              <a:t>token</a:t>
+            </a:r>
+            <a:r>
+              <a:rPr lang="zh-CN" altLang="en-US" sz="1200" dirty="0"/>
+              <a:t>对应的向量</a:t>
+            </a:r>
+            <a:r>
+              <a:rPr lang="zh-CN" altLang="en-US" sz="1200" dirty="0">
+                <a:sym typeface="+mn-ea"/>
+              </a:rPr>
+              <a:t>序列</a:t>
+            </a:r>
+            <a:endParaRPr lang="en-US" altLang="zh-CN" sz="1200" dirty="0"/>
+          </a:p>
+        </p:txBody>
+      </p:sp>
+      <p:sp>
+        <p:nvSpPr>
+          <p:cNvPr id="13" name="右箭头 26"/>
+          <p:cNvSpPr/>
+          <p:nvPr/>
+        </p:nvSpPr>
+        <p:spPr>
+          <a:xfrm rot="5400000">
+            <a:off x="2618105" y="1855470"/>
+            <a:ext cx="327660" cy="181610"/>
+          </a:xfrm>
+          <a:prstGeom prst="rightArrow">
+            <a:avLst/>
+          </a:prstGeom>
+          <a:ln>
+            <a:noFill/>
+          </a:ln>
+        </p:spPr>
+        <p:style>
+          <a:lnRef idx="2">
+            <a:schemeClr val="accent1">
+              <a:shade val="50000"/>
+            </a:schemeClr>
+          </a:lnRef>
+          <a:fillRef idx="1">
+            <a:schemeClr val="accent1"/>
+          </a:fillRef>
+          <a:effectRef idx="0">
+            <a:schemeClr val="accent1"/>
+          </a:effectRef>
+          <a:fontRef idx="minor">
+            <a:schemeClr val="lt1"/>
+          </a:fontRef>
+        </p:style>
+        <p:txBody>
+          <a:bodyPr rtlCol="0" anchor="ctr"/>
+          <a:lstStyle/>
+          <a:p>
+            <a:pPr algn="ctr"/>
+            <a:endParaRPr lang="zh-CN" altLang="en-US" sz="1200"/>
+          </a:p>
+        </p:txBody>
+      </p:sp>
+      <p:sp>
+        <p:nvSpPr>
+          <p:cNvPr id="14" name="文本框 13"/>
+          <p:cNvSpPr txBox="1"/>
+          <p:nvPr/>
+        </p:nvSpPr>
+        <p:spPr>
+          <a:xfrm>
+            <a:off x="2915920" y="1740535"/>
+            <a:ext cx="1061085" cy="408940"/>
+          </a:xfrm>
+          <a:prstGeom prst="rect">
+            <a:avLst/>
+          </a:prstGeom>
+          <a:noFill/>
+        </p:spPr>
+        <p:txBody>
+          <a:bodyPr wrap="square" rtlCol="0">
+            <a:noAutofit/>
+          </a:bodyPr>
+          <a:lstStyle/>
+          <a:p>
+            <a:r>
+              <a:rPr lang="zh-CN" altLang="en-US" sz="1000" dirty="0"/>
+              <a:t>查找每个</a:t>
+            </a:r>
+            <a:r>
+              <a:rPr lang="en-US" altLang="zh-CN" sz="1000" dirty="0"/>
+              <a:t>token</a:t>
+            </a:r>
+            <a:r>
+              <a:rPr lang="zh-CN" altLang="en-US" sz="1000" dirty="0"/>
+              <a:t>对应的向量</a:t>
+            </a:r>
+            <a:endParaRPr lang="zh-CN" altLang="en-US" sz="1000" dirty="0"/>
+          </a:p>
+        </p:txBody>
+      </p:sp>
+      <p:sp>
+        <p:nvSpPr>
+          <p:cNvPr id="18" name="文本框 17"/>
+          <p:cNvSpPr txBox="1"/>
+          <p:nvPr/>
+        </p:nvSpPr>
+        <p:spPr>
+          <a:xfrm>
+            <a:off x="2122488" y="2903220"/>
+            <a:ext cx="1318895" cy="275590"/>
+          </a:xfrm>
+          <a:prstGeom prst="rect">
+            <a:avLst/>
+          </a:prstGeom>
+          <a:solidFill>
+            <a:schemeClr val="accent1">
+              <a:lumMod val="40000"/>
+              <a:lumOff val="60000"/>
+            </a:schemeClr>
+          </a:solidFill>
+          <a:ln w="12700">
+            <a:solidFill>
+              <a:schemeClr val="tx1"/>
+            </a:solidFill>
+          </a:ln>
+        </p:spPr>
+        <p:txBody>
+          <a:bodyPr wrap="square" rtlCol="0">
+            <a:noAutofit/>
+          </a:bodyPr>
+          <a:lstStyle/>
+          <a:p>
+            <a:pPr algn="ctr"/>
+            <a:r>
+              <a:rPr lang="zh-CN" altLang="en-US" sz="1200" dirty="0"/>
+              <a:t>模型第</a:t>
+            </a:r>
+            <a:r>
+              <a:rPr lang="en-US" altLang="zh-CN" sz="1200" dirty="0"/>
+              <a:t>1</a:t>
+            </a:r>
+            <a:r>
+              <a:rPr lang="zh-CN" altLang="en-US" sz="1200" dirty="0"/>
+              <a:t>层</a:t>
+            </a:r>
+            <a:endParaRPr lang="zh-CN" altLang="en-US" sz="1200" dirty="0"/>
+          </a:p>
+        </p:txBody>
+      </p:sp>
+      <p:sp>
+        <p:nvSpPr>
+          <p:cNvPr id="19" name="右箭头 26"/>
+          <p:cNvSpPr/>
+          <p:nvPr/>
+        </p:nvSpPr>
+        <p:spPr>
+          <a:xfrm rot="5400000">
+            <a:off x="2638743" y="2599690"/>
+            <a:ext cx="286385" cy="170815"/>
+          </a:xfrm>
+          <a:prstGeom prst="rightArrow">
+            <a:avLst/>
+          </a:prstGeom>
+          <a:ln>
+            <a:noFill/>
+          </a:ln>
+        </p:spPr>
+        <p:style>
+          <a:lnRef idx="2">
+            <a:schemeClr val="accent1">
+              <a:shade val="50000"/>
+            </a:schemeClr>
+          </a:lnRef>
+          <a:fillRef idx="1">
+            <a:schemeClr val="accent1"/>
+          </a:fillRef>
+          <a:effectRef idx="0">
+            <a:schemeClr val="accent1"/>
+          </a:effectRef>
+          <a:fontRef idx="minor">
+            <a:schemeClr val="lt1"/>
+          </a:fontRef>
+        </p:style>
+        <p:txBody>
+          <a:bodyPr rtlCol="0" anchor="ctr"/>
+          <a:lstStyle/>
+          <a:p>
+            <a:pPr algn="ctr"/>
+            <a:endParaRPr lang="zh-CN" altLang="en-US" sz="1200"/>
+          </a:p>
+        </p:txBody>
+      </p:sp>
+      <p:sp>
+        <p:nvSpPr>
+          <p:cNvPr id="20" name="文本框 19"/>
+          <p:cNvSpPr txBox="1"/>
+          <p:nvPr/>
+        </p:nvSpPr>
+        <p:spPr>
+          <a:xfrm>
+            <a:off x="2123758" y="4361815"/>
+            <a:ext cx="1316355" cy="287655"/>
+          </a:xfrm>
+          <a:prstGeom prst="rect">
+            <a:avLst/>
+          </a:prstGeom>
+          <a:solidFill>
+            <a:schemeClr val="accent1">
+              <a:lumMod val="40000"/>
+              <a:lumOff val="60000"/>
+            </a:schemeClr>
+          </a:solidFill>
+          <a:ln w="12700">
+            <a:solidFill>
+              <a:schemeClr val="tx1"/>
+            </a:solidFill>
+          </a:ln>
+        </p:spPr>
+        <p:txBody>
+          <a:bodyPr wrap="square" rtlCol="0">
+            <a:noAutofit/>
+          </a:bodyPr>
+          <a:lstStyle/>
+          <a:p>
+            <a:pPr algn="ctr"/>
+            <a:r>
+              <a:rPr lang="zh-CN" altLang="en-US" sz="1200" dirty="0"/>
+              <a:t>模型第</a:t>
+            </a:r>
+            <a:r>
+              <a:rPr lang="en-US" altLang="zh-CN" sz="1200" dirty="0"/>
+              <a:t>28</a:t>
+            </a:r>
+            <a:r>
+              <a:rPr lang="zh-CN" altLang="en-US" sz="1200" dirty="0"/>
+              <a:t>层</a:t>
+            </a:r>
+            <a:endParaRPr lang="zh-CN" altLang="en-US" sz="1200" dirty="0"/>
+          </a:p>
+        </p:txBody>
+      </p:sp>
+      <p:sp>
+        <p:nvSpPr>
+          <p:cNvPr id="23" name="文本框 22"/>
+          <p:cNvSpPr txBox="1"/>
+          <p:nvPr/>
+        </p:nvSpPr>
+        <p:spPr>
+          <a:xfrm>
+            <a:off x="2927985" y="2561590"/>
+            <a:ext cx="520065" cy="266065"/>
+          </a:xfrm>
+          <a:prstGeom prst="rect">
+            <a:avLst/>
+          </a:prstGeom>
+          <a:noFill/>
+        </p:spPr>
+        <p:txBody>
+          <a:bodyPr wrap="square" rtlCol="0">
+            <a:noAutofit/>
+          </a:bodyPr>
+          <a:lstStyle/>
+          <a:p>
+            <a:r>
+              <a:rPr lang="zh-CN" altLang="en-US" sz="1000" dirty="0"/>
+              <a:t>计算</a:t>
+            </a:r>
+            <a:endParaRPr lang="en-US" altLang="zh-CN" sz="1000" dirty="0"/>
+          </a:p>
+        </p:txBody>
+      </p:sp>
+      <p:sp>
+        <p:nvSpPr>
+          <p:cNvPr id="30" name="文本框 29"/>
+          <p:cNvSpPr txBox="1"/>
+          <p:nvPr/>
+        </p:nvSpPr>
+        <p:spPr>
+          <a:xfrm>
+            <a:off x="2124075" y="3573145"/>
+            <a:ext cx="1315720" cy="281305"/>
+          </a:xfrm>
+          <a:prstGeom prst="rect">
+            <a:avLst/>
+          </a:prstGeom>
+          <a:solidFill>
+            <a:schemeClr val="accent1">
+              <a:lumMod val="40000"/>
+              <a:lumOff val="60000"/>
+            </a:schemeClr>
+          </a:solidFill>
+          <a:ln w="12700">
+            <a:solidFill>
+              <a:schemeClr val="tx1"/>
+            </a:solidFill>
+          </a:ln>
+        </p:spPr>
+        <p:txBody>
+          <a:bodyPr wrap="square" rtlCol="0">
+            <a:noAutofit/>
+          </a:bodyPr>
+          <a:lstStyle/>
+          <a:p>
+            <a:pPr algn="ctr"/>
+            <a:r>
+              <a:rPr lang="zh-CN" altLang="en-US" sz="1200" dirty="0"/>
+              <a:t>模型第</a:t>
+            </a:r>
+            <a:r>
+              <a:rPr lang="en-US" altLang="zh-CN" sz="1200" dirty="0"/>
+              <a:t>2</a:t>
+            </a:r>
+            <a:r>
+              <a:rPr lang="zh-CN" altLang="en-US" sz="1200" dirty="0"/>
+              <a:t>层</a:t>
+            </a:r>
+            <a:endParaRPr lang="zh-CN" altLang="en-US" sz="1200" dirty="0"/>
+          </a:p>
+        </p:txBody>
+      </p:sp>
+      <p:sp>
+        <p:nvSpPr>
+          <p:cNvPr id="38" name="右箭头 26"/>
+          <p:cNvSpPr/>
+          <p:nvPr/>
+        </p:nvSpPr>
+        <p:spPr>
+          <a:xfrm rot="5400000">
+            <a:off x="2653030" y="3304540"/>
+            <a:ext cx="257810" cy="156845"/>
+          </a:xfrm>
+          <a:prstGeom prst="rightArrow">
+            <a:avLst/>
+          </a:prstGeom>
+          <a:ln>
+            <a:noFill/>
+          </a:ln>
+        </p:spPr>
+        <p:style>
+          <a:lnRef idx="2">
+            <a:schemeClr val="accent1">
+              <a:shade val="50000"/>
+            </a:schemeClr>
+          </a:lnRef>
+          <a:fillRef idx="1">
+            <a:schemeClr val="accent1"/>
+          </a:fillRef>
+          <a:effectRef idx="0">
+            <a:schemeClr val="accent1"/>
+          </a:effectRef>
+          <a:fontRef idx="minor">
+            <a:schemeClr val="lt1"/>
+          </a:fontRef>
+        </p:style>
+        <p:txBody>
+          <a:bodyPr rtlCol="0" anchor="ctr"/>
+          <a:lstStyle/>
+          <a:p>
+            <a:pPr algn="ctr"/>
+            <a:endParaRPr lang="zh-CN" altLang="en-US" sz="1200"/>
+          </a:p>
+        </p:txBody>
+      </p:sp>
+      <p:sp>
+        <p:nvSpPr>
+          <p:cNvPr id="39" name="文本框 38"/>
+          <p:cNvSpPr txBox="1"/>
+          <p:nvPr/>
+        </p:nvSpPr>
+        <p:spPr>
+          <a:xfrm>
+            <a:off x="2927985" y="3234690"/>
+            <a:ext cx="520065" cy="266065"/>
+          </a:xfrm>
+          <a:prstGeom prst="rect">
+            <a:avLst/>
+          </a:prstGeom>
+          <a:noFill/>
+        </p:spPr>
+        <p:txBody>
+          <a:bodyPr wrap="square" rtlCol="0">
+            <a:noAutofit/>
+          </a:bodyPr>
+          <a:lstStyle/>
+          <a:p>
+            <a:r>
+              <a:rPr lang="zh-CN" altLang="en-US" sz="1000" dirty="0"/>
+              <a:t>计算</a:t>
+            </a:r>
+            <a:endParaRPr lang="zh-CN" altLang="en-US" sz="1000" dirty="0"/>
+          </a:p>
+        </p:txBody>
+      </p:sp>
+      <p:sp>
+        <p:nvSpPr>
+          <p:cNvPr id="40" name="文本框 39"/>
+          <p:cNvSpPr txBox="1"/>
+          <p:nvPr/>
+        </p:nvSpPr>
+        <p:spPr>
+          <a:xfrm>
+            <a:off x="2007553" y="5080635"/>
+            <a:ext cx="1548765" cy="257810"/>
+          </a:xfrm>
+          <a:prstGeom prst="rect">
+            <a:avLst/>
+          </a:prstGeom>
+          <a:solidFill>
+            <a:schemeClr val="accent1">
+              <a:lumMod val="40000"/>
+              <a:lumOff val="60000"/>
+            </a:schemeClr>
+          </a:solidFill>
+          <a:ln w="12700">
+            <a:solidFill>
+              <a:schemeClr val="tx1"/>
+            </a:solidFill>
+          </a:ln>
+        </p:spPr>
+        <p:txBody>
+          <a:bodyPr wrap="square" rtlCol="0">
+            <a:noAutofit/>
+          </a:bodyPr>
+          <a:lstStyle/>
+          <a:p>
+            <a:pPr algn="ctr"/>
+            <a:r>
+              <a:rPr lang="zh-CN" altLang="en-US" sz="1200" dirty="0"/>
+              <a:t>得到下一个</a:t>
+            </a:r>
+            <a:r>
+              <a:rPr lang="en-US" altLang="zh-CN" sz="1200" dirty="0"/>
+              <a:t>token</a:t>
+            </a:r>
+            <a:endParaRPr lang="zh-CN" altLang="en-US" sz="1200" dirty="0"/>
+          </a:p>
+        </p:txBody>
+      </p:sp>
+      <p:sp>
+        <p:nvSpPr>
+          <p:cNvPr id="42" name="右箭头 26"/>
+          <p:cNvSpPr/>
+          <p:nvPr/>
+        </p:nvSpPr>
+        <p:spPr>
+          <a:xfrm rot="5400000">
+            <a:off x="2653348" y="4074160"/>
+            <a:ext cx="257175" cy="158115"/>
+          </a:xfrm>
+          <a:prstGeom prst="rightArrow">
+            <a:avLst/>
+          </a:prstGeom>
+          <a:ln>
+            <a:noFill/>
+          </a:ln>
+        </p:spPr>
+        <p:style>
+          <a:lnRef idx="2">
+            <a:schemeClr val="accent1">
+              <a:shade val="50000"/>
+            </a:schemeClr>
+          </a:lnRef>
+          <a:fillRef idx="1">
+            <a:schemeClr val="accent1"/>
+          </a:fillRef>
+          <a:effectRef idx="0">
+            <a:schemeClr val="accent1"/>
+          </a:effectRef>
+          <a:fontRef idx="minor">
+            <a:schemeClr val="lt1"/>
+          </a:fontRef>
+        </p:style>
+        <p:txBody>
+          <a:bodyPr rtlCol="0" anchor="ctr"/>
+          <a:lstStyle/>
+          <a:p>
+            <a:pPr algn="ctr"/>
+            <a:endParaRPr lang="zh-CN" altLang="en-US" sz="1200"/>
+          </a:p>
+        </p:txBody>
+      </p:sp>
+      <p:sp>
+        <p:nvSpPr>
+          <p:cNvPr id="43" name="文本框 42"/>
+          <p:cNvSpPr txBox="1"/>
+          <p:nvPr/>
+        </p:nvSpPr>
+        <p:spPr>
+          <a:xfrm>
+            <a:off x="2927985" y="3975100"/>
+            <a:ext cx="1397635" cy="269875"/>
+          </a:xfrm>
+          <a:prstGeom prst="rect">
+            <a:avLst/>
+          </a:prstGeom>
+          <a:noFill/>
+        </p:spPr>
+        <p:txBody>
+          <a:bodyPr wrap="square" rtlCol="0">
+            <a:noAutofit/>
+          </a:bodyPr>
+          <a:lstStyle/>
+          <a:p>
+            <a:r>
+              <a:rPr lang="zh-CN" altLang="en-US" sz="1000" dirty="0"/>
+              <a:t>依次通过所有层</a:t>
+            </a:r>
+            <a:r>
+              <a:rPr lang="en-US" altLang="zh-CN" sz="1000" dirty="0"/>
+              <a:t> </a:t>
+            </a:r>
+            <a:r>
+              <a:rPr lang="zh-CN" altLang="en-US" sz="1000" dirty="0"/>
+              <a:t>计算</a:t>
+            </a:r>
+            <a:endParaRPr lang="zh-CN" altLang="en-US" sz="1000" dirty="0"/>
+          </a:p>
+        </p:txBody>
+      </p:sp>
+      <p:sp>
+        <p:nvSpPr>
+          <p:cNvPr id="45" name="文本框 44"/>
+          <p:cNvSpPr txBox="1"/>
+          <p:nvPr/>
+        </p:nvSpPr>
+        <p:spPr>
+          <a:xfrm>
+            <a:off x="2590165" y="3790315"/>
+            <a:ext cx="383540" cy="266065"/>
+          </a:xfrm>
+          <a:prstGeom prst="rect">
+            <a:avLst/>
+          </a:prstGeom>
+          <a:noFill/>
+        </p:spPr>
+        <p:txBody>
+          <a:bodyPr wrap="square" rtlCol="0">
+            <a:noAutofit/>
+          </a:bodyPr>
+          <a:lstStyle/>
+          <a:p>
+            <a:r>
+              <a:rPr lang="en-US" altLang="zh-CN" sz="1000" dirty="0"/>
+              <a:t>......</a:t>
+            </a:r>
+            <a:endParaRPr lang="en-US" altLang="zh-CN" sz="1000" dirty="0"/>
+          </a:p>
+        </p:txBody>
+      </p:sp>
+      <p:sp>
+        <p:nvSpPr>
+          <p:cNvPr id="49" name="右箭头 26"/>
+          <p:cNvSpPr/>
+          <p:nvPr/>
+        </p:nvSpPr>
+        <p:spPr>
+          <a:xfrm rot="5400000">
+            <a:off x="2633345" y="4794250"/>
+            <a:ext cx="297180" cy="181610"/>
+          </a:xfrm>
+          <a:prstGeom prst="rightArrow">
+            <a:avLst/>
+          </a:prstGeom>
+          <a:ln>
+            <a:noFill/>
+          </a:ln>
+        </p:spPr>
+        <p:style>
+          <a:lnRef idx="2">
+            <a:schemeClr val="accent1">
+              <a:shade val="50000"/>
+            </a:schemeClr>
+          </a:lnRef>
+          <a:fillRef idx="1">
+            <a:schemeClr val="accent1"/>
+          </a:fillRef>
+          <a:effectRef idx="0">
+            <a:schemeClr val="accent1"/>
+          </a:effectRef>
+          <a:fontRef idx="minor">
+            <a:schemeClr val="lt1"/>
+          </a:fontRef>
+        </p:style>
+        <p:txBody>
+          <a:bodyPr rtlCol="0" anchor="ctr"/>
+          <a:lstStyle/>
+          <a:p>
+            <a:pPr algn="ctr"/>
+            <a:endParaRPr lang="zh-CN" altLang="en-US" sz="1200"/>
+          </a:p>
+        </p:txBody>
+      </p:sp>
+      <p:sp>
+        <p:nvSpPr>
+          <p:cNvPr id="50" name="文本框 49"/>
+          <p:cNvSpPr txBox="1"/>
+          <p:nvPr/>
+        </p:nvSpPr>
+        <p:spPr>
+          <a:xfrm>
+            <a:off x="2927985" y="4771390"/>
+            <a:ext cx="646430" cy="266065"/>
+          </a:xfrm>
+          <a:prstGeom prst="rect">
+            <a:avLst/>
+          </a:prstGeom>
+          <a:noFill/>
+        </p:spPr>
+        <p:txBody>
+          <a:bodyPr wrap="square" rtlCol="0">
+            <a:noAutofit/>
+          </a:bodyPr>
+          <a:lstStyle/>
+          <a:p>
+            <a:r>
+              <a:rPr lang="zh-CN" altLang="en-US" sz="1000" dirty="0"/>
+              <a:t>预测</a:t>
+            </a:r>
+            <a:endParaRPr lang="zh-CN" altLang="en-US" sz="1000" dirty="0"/>
+          </a:p>
+        </p:txBody>
+      </p:sp>
+      <p:sp>
+        <p:nvSpPr>
+          <p:cNvPr id="53" name="手杖形箭头 52"/>
+          <p:cNvSpPr/>
+          <p:nvPr/>
+        </p:nvSpPr>
+        <p:spPr>
+          <a:xfrm rot="5400000" flipH="1">
+            <a:off x="2081530" y="2983865"/>
+            <a:ext cx="3802380" cy="752475"/>
+          </a:xfrm>
+          <a:prstGeom prst="uturnArrow">
+            <a:avLst>
+              <a:gd name="adj1" fmla="val 9163"/>
+              <a:gd name="adj2" fmla="val 8520"/>
+              <a:gd name="adj3" fmla="val 13933"/>
+              <a:gd name="adj4" fmla="val 44480"/>
+              <a:gd name="adj5" fmla="val 100000"/>
+            </a:avLst>
+          </a:prstGeom>
+          <a:solidFill>
+            <a:schemeClr val="accent1"/>
+          </a:solidFill>
+          <a:ln>
+            <a:noFill/>
+          </a:ln>
+        </p:spPr>
+        <p:style>
+          <a:lnRef idx="2">
+            <a:schemeClr val="accent1">
+              <a:lumMod val="75000"/>
+            </a:schemeClr>
+          </a:lnRef>
+          <a:fillRef idx="1">
+            <a:schemeClr val="accent1"/>
+          </a:fillRef>
+          <a:effectRef idx="0">
+            <a:srgbClr val="FFFFFF"/>
+          </a:effectRef>
+          <a:fontRef idx="minor">
+            <a:schemeClr val="lt1"/>
+          </a:fontRef>
+        </p:style>
+        <p:txBody>
+          <a:bodyPr rtlCol="0" anchor="ctr"/>
+          <a:p>
+            <a:pPr algn="ctr"/>
+            <a:endParaRPr lang="zh-CN" altLang="en-US">
+              <a:ln>
+                <a:noFill/>
+              </a:ln>
+              <a:solidFill>
+                <a:schemeClr val="tx1"/>
+              </a:solidFill>
+            </a:endParaRPr>
+          </a:p>
+        </p:txBody>
+      </p:sp>
+      <p:sp>
+        <p:nvSpPr>
+          <p:cNvPr id="54" name="文本框 53"/>
+          <p:cNvSpPr txBox="1"/>
+          <p:nvPr/>
+        </p:nvSpPr>
+        <p:spPr>
+          <a:xfrm>
+            <a:off x="4446905" y="2717800"/>
+            <a:ext cx="838200" cy="536575"/>
+          </a:xfrm>
+          <a:prstGeom prst="rect">
+            <a:avLst/>
+          </a:prstGeom>
+          <a:noFill/>
+        </p:spPr>
+        <p:txBody>
+          <a:bodyPr wrap="square" rtlCol="0">
+            <a:noAutofit/>
+          </a:bodyPr>
+          <a:lstStyle/>
+          <a:p>
+            <a:r>
+              <a:rPr lang="zh-CN" altLang="en-US" sz="1000" dirty="0"/>
+              <a:t>加入</a:t>
+            </a:r>
+            <a:r>
+              <a:rPr lang="zh-CN" altLang="en-US" sz="1000" dirty="0">
+                <a:sym typeface="+mn-ea"/>
+              </a:rPr>
+              <a:t>序列</a:t>
+            </a:r>
+            <a:r>
+              <a:rPr lang="zh-CN" altLang="en-US" sz="1000" dirty="0"/>
+              <a:t>作为最后一个</a:t>
+            </a:r>
+            <a:r>
+              <a:rPr lang="en-US" altLang="zh-CN" sz="1000" dirty="0"/>
+              <a:t>token</a:t>
+            </a:r>
+            <a:endParaRPr lang="en-US" altLang="zh-CN" sz="1000" dirty="0"/>
+          </a:p>
+        </p:txBody>
+      </p:sp>
+      <p:sp>
+        <p:nvSpPr>
+          <p:cNvPr id="55" name="右箭头 26"/>
+          <p:cNvSpPr/>
+          <p:nvPr/>
+        </p:nvSpPr>
+        <p:spPr>
+          <a:xfrm rot="5400000">
+            <a:off x="2633345" y="5454650"/>
+            <a:ext cx="297180" cy="181610"/>
+          </a:xfrm>
+          <a:prstGeom prst="rightArrow">
+            <a:avLst/>
+          </a:prstGeom>
+          <a:ln>
+            <a:noFill/>
+          </a:ln>
+        </p:spPr>
+        <p:style>
+          <a:lnRef idx="2">
+            <a:schemeClr val="accent1">
+              <a:shade val="50000"/>
+            </a:schemeClr>
+          </a:lnRef>
+          <a:fillRef idx="1">
+            <a:schemeClr val="accent1"/>
+          </a:fillRef>
+          <a:effectRef idx="0">
+            <a:schemeClr val="accent1"/>
+          </a:effectRef>
+          <a:fontRef idx="minor">
+            <a:schemeClr val="lt1"/>
+          </a:fontRef>
+        </p:style>
+        <p:txBody>
+          <a:bodyPr rtlCol="0" anchor="ctr"/>
+          <a:lstStyle/>
+          <a:p>
+            <a:pPr algn="ctr"/>
+            <a:endParaRPr lang="zh-CN" altLang="en-US" sz="1200"/>
+          </a:p>
+        </p:txBody>
+      </p:sp>
+      <p:sp>
+        <p:nvSpPr>
+          <p:cNvPr id="56" name="文本框 55"/>
+          <p:cNvSpPr txBox="1"/>
+          <p:nvPr/>
+        </p:nvSpPr>
+        <p:spPr>
+          <a:xfrm>
+            <a:off x="2915920" y="5431790"/>
+            <a:ext cx="814705" cy="226695"/>
+          </a:xfrm>
+          <a:prstGeom prst="rect">
+            <a:avLst/>
+          </a:prstGeom>
+          <a:noFill/>
+        </p:spPr>
+        <p:txBody>
+          <a:bodyPr wrap="square" rtlCol="0">
+            <a:noAutofit/>
+          </a:bodyPr>
+          <a:lstStyle/>
+          <a:p>
+            <a:r>
+              <a:rPr lang="zh-CN" altLang="en-US" sz="1000" dirty="0"/>
+              <a:t>生成</a:t>
+            </a:r>
+            <a:r>
+              <a:rPr lang="zh-CN" altLang="en-US" sz="1000" dirty="0"/>
+              <a:t>结束</a:t>
+            </a:r>
+            <a:endParaRPr lang="zh-CN" altLang="en-US" sz="1000" dirty="0"/>
+          </a:p>
+        </p:txBody>
+      </p:sp>
+      <p:sp>
+        <p:nvSpPr>
+          <p:cNvPr id="57" name="文本框 56"/>
+          <p:cNvSpPr txBox="1"/>
+          <p:nvPr/>
+        </p:nvSpPr>
+        <p:spPr>
+          <a:xfrm>
+            <a:off x="2265680" y="5751830"/>
+            <a:ext cx="1032510" cy="253365"/>
+          </a:xfrm>
+          <a:prstGeom prst="rect">
+            <a:avLst/>
+          </a:prstGeom>
+          <a:solidFill>
+            <a:schemeClr val="accent1">
+              <a:lumMod val="40000"/>
+              <a:lumOff val="60000"/>
+            </a:schemeClr>
+          </a:solidFill>
+          <a:ln w="12700">
+            <a:solidFill>
+              <a:schemeClr val="tx1"/>
+            </a:solidFill>
+          </a:ln>
+        </p:spPr>
+        <p:txBody>
+          <a:bodyPr wrap="square" rtlCol="0">
+            <a:noAutofit/>
+          </a:bodyPr>
+          <a:lstStyle/>
+          <a:p>
+            <a:pPr algn="ctr"/>
+            <a:r>
+              <a:rPr lang="en-US" altLang="zh-CN" sz="1200" dirty="0"/>
+              <a:t>token</a:t>
+            </a:r>
+            <a:r>
+              <a:rPr lang="zh-CN" altLang="en-US" sz="1200" dirty="0"/>
+              <a:t>序列</a:t>
+            </a:r>
+            <a:endParaRPr lang="zh-CN" altLang="en-US" sz="1200" dirty="0"/>
+          </a:p>
+        </p:txBody>
+      </p:sp>
+      <p:sp>
+        <p:nvSpPr>
+          <p:cNvPr id="58" name="文本框 57"/>
+          <p:cNvSpPr txBox="1"/>
+          <p:nvPr/>
+        </p:nvSpPr>
+        <p:spPr>
+          <a:xfrm>
+            <a:off x="2265680" y="6390640"/>
+            <a:ext cx="1032510" cy="253365"/>
+          </a:xfrm>
+          <a:prstGeom prst="rect">
+            <a:avLst/>
+          </a:prstGeom>
+          <a:solidFill>
+            <a:schemeClr val="accent1">
+              <a:lumMod val="40000"/>
+              <a:lumOff val="60000"/>
+            </a:schemeClr>
+          </a:solidFill>
+          <a:ln w="12700">
+            <a:solidFill>
+              <a:schemeClr val="tx1"/>
+            </a:solidFill>
+          </a:ln>
+        </p:spPr>
+        <p:txBody>
+          <a:bodyPr wrap="square" rtlCol="0">
+            <a:noAutofit/>
+          </a:bodyPr>
+          <a:lstStyle/>
+          <a:p>
+            <a:pPr algn="ctr"/>
+            <a:r>
+              <a:rPr lang="zh-CN" altLang="en-US" sz="1200" dirty="0"/>
+              <a:t>答案文本</a:t>
+            </a:r>
+            <a:endParaRPr lang="zh-CN" altLang="en-US" sz="1200" dirty="0"/>
+          </a:p>
+        </p:txBody>
+      </p:sp>
+      <p:sp>
+        <p:nvSpPr>
+          <p:cNvPr id="59" name="右箭头 26"/>
+          <p:cNvSpPr/>
+          <p:nvPr/>
+        </p:nvSpPr>
+        <p:spPr>
+          <a:xfrm rot="5400000">
+            <a:off x="2633345" y="6111240"/>
+            <a:ext cx="297180" cy="181610"/>
+          </a:xfrm>
+          <a:prstGeom prst="rightArrow">
+            <a:avLst/>
+          </a:prstGeom>
+          <a:ln>
+            <a:noFill/>
+          </a:ln>
+        </p:spPr>
+        <p:style>
+          <a:lnRef idx="2">
+            <a:schemeClr val="accent1">
+              <a:shade val="50000"/>
+            </a:schemeClr>
+          </a:lnRef>
+          <a:fillRef idx="1">
+            <a:schemeClr val="accent1"/>
+          </a:fillRef>
+          <a:effectRef idx="0">
+            <a:schemeClr val="accent1"/>
+          </a:effectRef>
+          <a:fontRef idx="minor">
+            <a:schemeClr val="lt1"/>
+          </a:fontRef>
+        </p:style>
+        <p:txBody>
+          <a:bodyPr rtlCol="0" anchor="ctr"/>
+          <a:lstStyle/>
+          <a:p>
+            <a:pPr algn="ctr"/>
+            <a:endParaRPr lang="zh-CN" altLang="en-US" sz="1200"/>
+          </a:p>
+        </p:txBody>
+      </p:sp>
+      <p:sp>
+        <p:nvSpPr>
+          <p:cNvPr id="61" name="文本框 60"/>
+          <p:cNvSpPr txBox="1"/>
+          <p:nvPr/>
+        </p:nvSpPr>
+        <p:spPr>
+          <a:xfrm>
+            <a:off x="2915920" y="6061710"/>
+            <a:ext cx="473710" cy="210185"/>
+          </a:xfrm>
+          <a:prstGeom prst="rect">
+            <a:avLst/>
+          </a:prstGeom>
+          <a:noFill/>
+        </p:spPr>
+        <p:txBody>
+          <a:bodyPr wrap="square" rtlCol="0">
+            <a:noAutofit/>
+          </a:bodyPr>
+          <a:lstStyle/>
+          <a:p>
+            <a:r>
+              <a:rPr lang="zh-CN" altLang="en-US" sz="1000" dirty="0"/>
+              <a:t>转换</a:t>
+            </a:r>
+            <a:endParaRPr lang="zh-CN" altLang="en-US" sz="1000" dirty="0"/>
+          </a:p>
+        </p:txBody>
+      </p:sp>
+      <p:sp>
+        <p:nvSpPr>
+          <p:cNvPr id="121" name="文本框 120"/>
+          <p:cNvSpPr txBox="1"/>
+          <p:nvPr/>
+        </p:nvSpPr>
+        <p:spPr>
+          <a:xfrm>
+            <a:off x="6680835" y="606425"/>
+            <a:ext cx="1934210" cy="264160"/>
+          </a:xfrm>
+          <a:prstGeom prst="rect">
+            <a:avLst/>
+          </a:prstGeom>
+          <a:solidFill>
+            <a:schemeClr val="accent1">
+              <a:lumMod val="40000"/>
+              <a:lumOff val="60000"/>
+            </a:schemeClr>
+          </a:solidFill>
+          <a:ln w="12700">
+            <a:solidFill>
+              <a:schemeClr val="tx1"/>
+            </a:solidFill>
+          </a:ln>
+        </p:spPr>
+        <p:txBody>
+          <a:bodyPr wrap="square" rtlCol="0">
+            <a:noAutofit/>
+          </a:bodyPr>
+          <a:lstStyle/>
+          <a:p>
+            <a:pPr algn="ctr"/>
+            <a:r>
+              <a:rPr lang="zh-CN" altLang="en-US" sz="1200" dirty="0"/>
+              <a:t>今天天气如何</a:t>
+            </a:r>
+            <a:endParaRPr lang="zh-CN" altLang="en-US" sz="1200" dirty="0"/>
+          </a:p>
+        </p:txBody>
+      </p:sp>
+      <p:sp>
+        <p:nvSpPr>
+          <p:cNvPr id="122" name="文本框 121"/>
+          <p:cNvSpPr txBox="1"/>
+          <p:nvPr/>
+        </p:nvSpPr>
+        <p:spPr>
+          <a:xfrm>
+            <a:off x="7795260" y="1003300"/>
+            <a:ext cx="1208405" cy="288290"/>
+          </a:xfrm>
+          <a:prstGeom prst="rect">
+            <a:avLst/>
+          </a:prstGeom>
+          <a:noFill/>
+        </p:spPr>
+        <p:txBody>
+          <a:bodyPr wrap="square" rtlCol="0">
+            <a:noAutofit/>
+          </a:bodyPr>
+          <a:lstStyle/>
+          <a:p>
+            <a:r>
+              <a:rPr lang="zh-CN" altLang="en-US" sz="1000" dirty="0"/>
+              <a:t>用分词器切分</a:t>
+            </a:r>
+            <a:endParaRPr lang="zh-CN" altLang="en-US" sz="1000" dirty="0"/>
+          </a:p>
+        </p:txBody>
+      </p:sp>
+      <p:sp>
+        <p:nvSpPr>
+          <p:cNvPr id="123" name="右箭头 26"/>
+          <p:cNvSpPr/>
+          <p:nvPr/>
+        </p:nvSpPr>
+        <p:spPr>
+          <a:xfrm rot="5400000">
+            <a:off x="7470140" y="1036320"/>
+            <a:ext cx="355600" cy="182245"/>
+          </a:xfrm>
+          <a:prstGeom prst="rightArrow">
+            <a:avLst/>
+          </a:prstGeom>
+          <a:ln>
+            <a:noFill/>
+          </a:ln>
+        </p:spPr>
+        <p:style>
+          <a:lnRef idx="2">
+            <a:schemeClr val="accent1">
+              <a:shade val="50000"/>
+            </a:schemeClr>
+          </a:lnRef>
+          <a:fillRef idx="1">
+            <a:schemeClr val="accent1"/>
+          </a:fillRef>
+          <a:effectRef idx="0">
+            <a:schemeClr val="accent1"/>
+          </a:effectRef>
+          <a:fontRef idx="minor">
+            <a:schemeClr val="lt1"/>
+          </a:fontRef>
+        </p:style>
+        <p:txBody>
+          <a:bodyPr rtlCol="0" anchor="ctr"/>
+          <a:lstStyle/>
+          <a:p>
+            <a:pPr algn="ctr"/>
+            <a:endParaRPr lang="zh-CN" altLang="en-US" sz="1200"/>
+          </a:p>
+        </p:txBody>
+      </p:sp>
+      <p:sp>
+        <p:nvSpPr>
+          <p:cNvPr id="124" name="文本框 123"/>
+          <p:cNvSpPr txBox="1"/>
+          <p:nvPr/>
+        </p:nvSpPr>
+        <p:spPr>
+          <a:xfrm>
+            <a:off x="6501765" y="114300"/>
+            <a:ext cx="2293620" cy="306705"/>
+          </a:xfrm>
+          <a:prstGeom prst="rect">
+            <a:avLst/>
+          </a:prstGeom>
+          <a:solidFill>
+            <a:srgbClr val="FFFF00"/>
+          </a:solidFill>
+          <a:ln w="12700">
+            <a:solidFill>
+              <a:schemeClr val="tx1"/>
+            </a:solidFill>
+          </a:ln>
+        </p:spPr>
+        <p:txBody>
+          <a:bodyPr wrap="square" rtlCol="0">
+            <a:spAutoFit/>
+          </a:bodyPr>
+          <a:lstStyle/>
+          <a:p>
+            <a:pPr algn="ctr"/>
+            <a:r>
+              <a:rPr lang="zh-CN" altLang="en-US" sz="1400"/>
+              <a:t>推理数据</a:t>
+            </a:r>
+            <a:r>
+              <a:rPr lang="zh-CN" altLang="en-US" sz="1400"/>
+              <a:t>示例</a:t>
+            </a:r>
+            <a:endParaRPr lang="zh-CN" altLang="en-US" sz="1400"/>
+          </a:p>
+        </p:txBody>
+      </p:sp>
+      <p:sp>
+        <p:nvSpPr>
+          <p:cNvPr id="125" name="文本框 124"/>
+          <p:cNvSpPr txBox="1"/>
+          <p:nvPr/>
+        </p:nvSpPr>
+        <p:spPr>
+          <a:xfrm>
+            <a:off x="6183630" y="1376680"/>
+            <a:ext cx="2928620" cy="474980"/>
+          </a:xfrm>
+          <a:prstGeom prst="rect">
+            <a:avLst/>
+          </a:prstGeom>
+          <a:solidFill>
+            <a:schemeClr val="accent1">
+              <a:lumMod val="40000"/>
+              <a:lumOff val="60000"/>
+            </a:schemeClr>
+          </a:solidFill>
+          <a:ln w="12700">
+            <a:solidFill>
+              <a:schemeClr val="tx1"/>
+            </a:solidFill>
+          </a:ln>
+        </p:spPr>
+        <p:txBody>
+          <a:bodyPr wrap="square" rtlCol="0">
+            <a:noAutofit/>
+          </a:bodyPr>
+          <a:lstStyle/>
+          <a:p>
+            <a:pPr algn="ctr"/>
+            <a:r>
+              <a:rPr lang="zh-CN" altLang="en-US" sz="1200" dirty="0">
+                <a:sym typeface="+mn-ea"/>
+              </a:rPr>
+              <a:t>今天</a:t>
+            </a:r>
+            <a:r>
+              <a:rPr lang="en-US" altLang="zh-CN" sz="1200" dirty="0">
+                <a:sym typeface="+mn-ea"/>
+              </a:rPr>
+              <a:t> / </a:t>
+            </a:r>
+            <a:r>
+              <a:rPr lang="zh-CN" altLang="en-US" sz="1200" dirty="0">
+                <a:sym typeface="+mn-ea"/>
+              </a:rPr>
+              <a:t>天气</a:t>
+            </a:r>
+            <a:r>
+              <a:rPr lang="en-US" altLang="zh-CN" sz="1200" dirty="0">
+                <a:sym typeface="+mn-ea"/>
+              </a:rPr>
+              <a:t> / </a:t>
+            </a:r>
+            <a:r>
+              <a:rPr lang="zh-CN" altLang="en-US" sz="1200" dirty="0">
+                <a:sym typeface="+mn-ea"/>
+              </a:rPr>
+              <a:t>如何</a:t>
+            </a:r>
+            <a:endParaRPr lang="zh-CN" altLang="en-US" sz="1200" dirty="0">
+              <a:sym typeface="+mn-ea"/>
+            </a:endParaRPr>
+          </a:p>
+          <a:p>
+            <a:pPr algn="ctr"/>
+            <a:r>
+              <a:rPr lang="zh-CN" altLang="en-US" sz="1200" dirty="0">
+                <a:sym typeface="+mn-ea"/>
+              </a:rPr>
+              <a:t>实际为</a:t>
+            </a:r>
+            <a:r>
+              <a:rPr lang="en-US" altLang="zh-CN" sz="1200" dirty="0">
+                <a:sym typeface="+mn-ea"/>
+              </a:rPr>
+              <a:t>tokenId </a:t>
+            </a:r>
+            <a:r>
+              <a:rPr lang="zh-CN" altLang="en-US" sz="1200" dirty="0">
+                <a:sym typeface="+mn-ea"/>
+              </a:rPr>
+              <a:t>例如</a:t>
+            </a:r>
+            <a:r>
+              <a:rPr lang="en-US" altLang="zh-CN" sz="1200" dirty="0">
+                <a:sym typeface="+mn-ea"/>
+              </a:rPr>
+              <a:t> 15 / 1526 / 45987</a:t>
+            </a:r>
+            <a:endParaRPr lang="zh-CN" altLang="en-US" sz="1200" dirty="0">
+              <a:sym typeface="+mn-ea"/>
+            </a:endParaRPr>
+          </a:p>
+        </p:txBody>
+      </p:sp>
+      <p:sp>
+        <p:nvSpPr>
+          <p:cNvPr id="126" name="文本框 125"/>
+          <p:cNvSpPr txBox="1"/>
+          <p:nvPr/>
+        </p:nvSpPr>
+        <p:spPr>
+          <a:xfrm>
+            <a:off x="6624003" y="2346960"/>
+            <a:ext cx="2047875" cy="858520"/>
+          </a:xfrm>
+          <a:prstGeom prst="rect">
+            <a:avLst/>
+          </a:prstGeom>
+          <a:solidFill>
+            <a:schemeClr val="accent1">
+              <a:lumMod val="40000"/>
+              <a:lumOff val="60000"/>
+            </a:schemeClr>
+          </a:solidFill>
+          <a:ln w="12700">
+            <a:solidFill>
+              <a:schemeClr val="tx1"/>
+            </a:solidFill>
+          </a:ln>
+        </p:spPr>
+        <p:txBody>
+          <a:bodyPr wrap="square" rtlCol="0">
+            <a:noAutofit/>
+          </a:bodyPr>
+          <a:lstStyle/>
+          <a:p>
+            <a:pPr algn="ctr"/>
+            <a:r>
+              <a:rPr lang="en-US" altLang="zh-CN" sz="1200" dirty="0"/>
+              <a:t>[12, 45, 2.54, ....],</a:t>
+            </a:r>
+            <a:endParaRPr lang="en-US" altLang="zh-CN" sz="1200" dirty="0"/>
+          </a:p>
+          <a:p>
+            <a:pPr algn="ctr"/>
+            <a:r>
+              <a:rPr lang="en-US" altLang="zh-CN" sz="1200" dirty="0">
+                <a:sym typeface="+mn-ea"/>
+              </a:rPr>
+              <a:t>[87, 1.26, 74.54, ....], </a:t>
+            </a:r>
+            <a:r>
+              <a:rPr lang="en-US" altLang="zh-CN" sz="1200" dirty="0"/>
+              <a:t> </a:t>
+            </a:r>
+            <a:endParaRPr lang="en-US" altLang="zh-CN" sz="1200" dirty="0"/>
+          </a:p>
+          <a:p>
+            <a:pPr algn="ctr"/>
+            <a:r>
+              <a:rPr lang="en-US" altLang="zh-CN" sz="1200" dirty="0">
+                <a:sym typeface="+mn-ea"/>
+              </a:rPr>
+              <a:t>[154, 20, 5.54, ....], </a:t>
+            </a:r>
+            <a:endParaRPr lang="en-US" altLang="zh-CN" sz="1200" dirty="0">
+              <a:sym typeface="+mn-ea"/>
+            </a:endParaRPr>
+          </a:p>
+          <a:p>
+            <a:pPr algn="ctr"/>
+            <a:r>
+              <a:rPr lang="en-US" altLang="zh-CN" sz="1200" dirty="0">
+                <a:sym typeface="+mn-ea"/>
+              </a:rPr>
+              <a:t>...   </a:t>
+            </a:r>
+            <a:r>
+              <a:rPr lang="zh-CN" altLang="en-US" sz="1200" dirty="0">
+                <a:sym typeface="+mn-ea"/>
+              </a:rPr>
+              <a:t>每个向量</a:t>
+            </a:r>
+            <a:r>
+              <a:rPr lang="en-US" altLang="zh-CN" sz="1200" dirty="0">
+                <a:sym typeface="+mn-ea"/>
+              </a:rPr>
+              <a:t>1024</a:t>
+            </a:r>
+            <a:r>
+              <a:rPr lang="zh-CN" altLang="en-US" sz="1200" dirty="0">
+                <a:sym typeface="+mn-ea"/>
+              </a:rPr>
+              <a:t>维</a:t>
+            </a:r>
+            <a:endParaRPr lang="en-US" altLang="zh-CN" sz="1200" dirty="0">
+              <a:sym typeface="+mn-ea"/>
+            </a:endParaRPr>
+          </a:p>
+          <a:p>
+            <a:pPr algn="ctr"/>
+            <a:endParaRPr lang="en-US" altLang="zh-CN" sz="1200" dirty="0"/>
+          </a:p>
+        </p:txBody>
+      </p:sp>
+      <p:sp>
+        <p:nvSpPr>
+          <p:cNvPr id="127" name="右箭头 26"/>
+          <p:cNvSpPr/>
+          <p:nvPr/>
+        </p:nvSpPr>
+        <p:spPr>
+          <a:xfrm rot="5400000">
+            <a:off x="7484110" y="2011045"/>
+            <a:ext cx="327660" cy="181610"/>
+          </a:xfrm>
+          <a:prstGeom prst="rightArrow">
+            <a:avLst/>
+          </a:prstGeom>
+          <a:ln>
+            <a:noFill/>
+          </a:ln>
+        </p:spPr>
+        <p:style>
+          <a:lnRef idx="2">
+            <a:schemeClr val="accent1">
+              <a:shade val="50000"/>
+            </a:schemeClr>
+          </a:lnRef>
+          <a:fillRef idx="1">
+            <a:schemeClr val="accent1"/>
+          </a:fillRef>
+          <a:effectRef idx="0">
+            <a:schemeClr val="accent1"/>
+          </a:effectRef>
+          <a:fontRef idx="minor">
+            <a:schemeClr val="lt1"/>
+          </a:fontRef>
+        </p:style>
+        <p:txBody>
+          <a:bodyPr rtlCol="0" anchor="ctr"/>
+          <a:lstStyle/>
+          <a:p>
+            <a:pPr algn="ctr"/>
+            <a:endParaRPr lang="zh-CN" altLang="en-US" sz="1200"/>
+          </a:p>
+        </p:txBody>
+      </p:sp>
+      <p:sp>
+        <p:nvSpPr>
+          <p:cNvPr id="129" name="文本框 128"/>
+          <p:cNvSpPr txBox="1"/>
+          <p:nvPr/>
+        </p:nvSpPr>
+        <p:spPr>
+          <a:xfrm>
+            <a:off x="6988493" y="3615055"/>
+            <a:ext cx="1318895" cy="275590"/>
+          </a:xfrm>
+          <a:prstGeom prst="rect">
+            <a:avLst/>
+          </a:prstGeom>
+          <a:solidFill>
+            <a:schemeClr val="accent1">
+              <a:lumMod val="40000"/>
+              <a:lumOff val="60000"/>
+            </a:schemeClr>
+          </a:solidFill>
+          <a:ln w="12700">
+            <a:solidFill>
+              <a:schemeClr val="tx1"/>
+            </a:solidFill>
+          </a:ln>
+        </p:spPr>
+        <p:txBody>
+          <a:bodyPr wrap="square" rtlCol="0">
+            <a:noAutofit/>
+          </a:bodyPr>
+          <a:lstStyle/>
+          <a:p>
+            <a:pPr algn="ctr"/>
+            <a:r>
+              <a:rPr lang="zh-CN" altLang="en-US" sz="1200" dirty="0"/>
+              <a:t>模型第</a:t>
+            </a:r>
+            <a:r>
+              <a:rPr lang="en-US" altLang="zh-CN" sz="1200" dirty="0"/>
+              <a:t>1</a:t>
+            </a:r>
+            <a:r>
+              <a:rPr lang="zh-CN" altLang="en-US" sz="1200" dirty="0"/>
+              <a:t>层</a:t>
+            </a:r>
+            <a:endParaRPr lang="zh-CN" altLang="en-US" sz="1200" dirty="0"/>
+          </a:p>
+        </p:txBody>
+      </p:sp>
+      <p:sp>
+        <p:nvSpPr>
+          <p:cNvPr id="130" name="右箭头 26"/>
+          <p:cNvSpPr/>
+          <p:nvPr/>
+        </p:nvSpPr>
+        <p:spPr>
+          <a:xfrm rot="5400000">
+            <a:off x="7504748" y="3334385"/>
+            <a:ext cx="286385" cy="170815"/>
+          </a:xfrm>
+          <a:prstGeom prst="rightArrow">
+            <a:avLst/>
+          </a:prstGeom>
+          <a:ln>
+            <a:noFill/>
+          </a:ln>
+        </p:spPr>
+        <p:style>
+          <a:lnRef idx="2">
+            <a:schemeClr val="accent1">
+              <a:shade val="50000"/>
+            </a:schemeClr>
+          </a:lnRef>
+          <a:fillRef idx="1">
+            <a:schemeClr val="accent1"/>
+          </a:fillRef>
+          <a:effectRef idx="0">
+            <a:schemeClr val="accent1"/>
+          </a:effectRef>
+          <a:fontRef idx="minor">
+            <a:schemeClr val="lt1"/>
+          </a:fontRef>
+        </p:style>
+        <p:txBody>
+          <a:bodyPr rtlCol="0" anchor="ctr"/>
+          <a:lstStyle/>
+          <a:p>
+            <a:pPr algn="ctr"/>
+            <a:endParaRPr lang="zh-CN" altLang="en-US" sz="1200"/>
+          </a:p>
+        </p:txBody>
+      </p:sp>
+      <p:sp>
+        <p:nvSpPr>
+          <p:cNvPr id="131" name="文本框 130"/>
+          <p:cNvSpPr txBox="1"/>
+          <p:nvPr/>
+        </p:nvSpPr>
+        <p:spPr>
+          <a:xfrm>
+            <a:off x="6989763" y="4404360"/>
+            <a:ext cx="1316355" cy="287655"/>
+          </a:xfrm>
+          <a:prstGeom prst="rect">
+            <a:avLst/>
+          </a:prstGeom>
+          <a:solidFill>
+            <a:schemeClr val="accent1">
+              <a:lumMod val="40000"/>
+              <a:lumOff val="60000"/>
+            </a:schemeClr>
+          </a:solidFill>
+          <a:ln w="12700">
+            <a:solidFill>
+              <a:schemeClr val="tx1"/>
+            </a:solidFill>
+          </a:ln>
+        </p:spPr>
+        <p:txBody>
+          <a:bodyPr wrap="square" rtlCol="0">
+            <a:noAutofit/>
+          </a:bodyPr>
+          <a:lstStyle/>
+          <a:p>
+            <a:pPr algn="ctr"/>
+            <a:r>
+              <a:rPr lang="zh-CN" altLang="en-US" sz="1200" dirty="0"/>
+              <a:t>模型第</a:t>
+            </a:r>
+            <a:r>
+              <a:rPr lang="en-US" altLang="zh-CN" sz="1200" dirty="0"/>
+              <a:t>28</a:t>
+            </a:r>
+            <a:r>
+              <a:rPr lang="zh-CN" altLang="en-US" sz="1200" dirty="0"/>
+              <a:t>层</a:t>
+            </a:r>
+            <a:endParaRPr lang="zh-CN" altLang="en-US" sz="1200" dirty="0"/>
+          </a:p>
+        </p:txBody>
+      </p:sp>
+      <p:sp>
+        <p:nvSpPr>
+          <p:cNvPr id="136" name="文本框 135"/>
+          <p:cNvSpPr txBox="1"/>
+          <p:nvPr/>
+        </p:nvSpPr>
+        <p:spPr>
+          <a:xfrm>
+            <a:off x="6620193" y="5083810"/>
+            <a:ext cx="2055495" cy="257810"/>
+          </a:xfrm>
+          <a:prstGeom prst="rect">
+            <a:avLst/>
+          </a:prstGeom>
+          <a:solidFill>
+            <a:schemeClr val="accent1">
+              <a:lumMod val="40000"/>
+              <a:lumOff val="60000"/>
+            </a:schemeClr>
+          </a:solidFill>
+          <a:ln w="12700">
+            <a:solidFill>
+              <a:schemeClr val="tx1"/>
+            </a:solidFill>
+          </a:ln>
+        </p:spPr>
+        <p:txBody>
+          <a:bodyPr wrap="square" rtlCol="0">
+            <a:noAutofit/>
+          </a:bodyPr>
+          <a:lstStyle/>
+          <a:p>
+            <a:pPr algn="ctr"/>
+            <a:r>
+              <a:rPr lang="zh-CN" altLang="en-US" sz="1200" dirty="0"/>
+              <a:t>气温</a:t>
+            </a:r>
+            <a:r>
+              <a:rPr lang="zh-CN" altLang="en-US" sz="1200" dirty="0">
+                <a:sym typeface="+mn-ea"/>
+              </a:rPr>
+              <a:t>（</a:t>
+            </a:r>
+            <a:r>
+              <a:rPr lang="en-US" altLang="zh-CN" sz="1200" dirty="0">
+                <a:sym typeface="+mn-ea"/>
+              </a:rPr>
+              <a:t>tokenId</a:t>
+            </a:r>
+            <a:r>
+              <a:rPr lang="zh-CN" altLang="en-US" sz="1200" dirty="0">
+                <a:sym typeface="+mn-ea"/>
+              </a:rPr>
+              <a:t>，例如</a:t>
+            </a:r>
+            <a:r>
+              <a:rPr lang="en-US" altLang="zh-CN" sz="1200" dirty="0">
+                <a:sym typeface="+mn-ea"/>
+              </a:rPr>
+              <a:t> 45</a:t>
+            </a:r>
+            <a:r>
+              <a:rPr lang="zh-CN" altLang="en-US" sz="1200" dirty="0">
+                <a:sym typeface="+mn-ea"/>
+              </a:rPr>
+              <a:t>）</a:t>
+            </a:r>
+            <a:endParaRPr lang="zh-CN" altLang="en-US" sz="1200" dirty="0">
+              <a:sym typeface="+mn-ea"/>
+            </a:endParaRPr>
+          </a:p>
+          <a:p>
+            <a:pPr algn="ctr"/>
+            <a:endParaRPr lang="zh-CN" altLang="en-US" sz="1200" dirty="0"/>
+          </a:p>
+        </p:txBody>
+      </p:sp>
+      <p:sp>
+        <p:nvSpPr>
+          <p:cNvPr id="137" name="右箭头 26"/>
+          <p:cNvSpPr/>
+          <p:nvPr/>
+        </p:nvSpPr>
+        <p:spPr>
+          <a:xfrm rot="5400000">
+            <a:off x="7519353" y="4116705"/>
+            <a:ext cx="257175" cy="158115"/>
+          </a:xfrm>
+          <a:prstGeom prst="rightArrow">
+            <a:avLst/>
+          </a:prstGeom>
+          <a:ln>
+            <a:noFill/>
+          </a:ln>
+        </p:spPr>
+        <p:style>
+          <a:lnRef idx="2">
+            <a:schemeClr val="accent1">
+              <a:shade val="50000"/>
+            </a:schemeClr>
+          </a:lnRef>
+          <a:fillRef idx="1">
+            <a:schemeClr val="accent1"/>
+          </a:fillRef>
+          <a:effectRef idx="0">
+            <a:schemeClr val="accent1"/>
+          </a:effectRef>
+          <a:fontRef idx="minor">
+            <a:schemeClr val="lt1"/>
+          </a:fontRef>
+        </p:style>
+        <p:txBody>
+          <a:bodyPr rtlCol="0" anchor="ctr"/>
+          <a:lstStyle/>
+          <a:p>
+            <a:pPr algn="ctr"/>
+            <a:endParaRPr lang="zh-CN" altLang="en-US" sz="1200"/>
+          </a:p>
+        </p:txBody>
+      </p:sp>
+      <p:sp>
+        <p:nvSpPr>
+          <p:cNvPr id="138" name="文本框 137"/>
+          <p:cNvSpPr txBox="1"/>
+          <p:nvPr/>
+        </p:nvSpPr>
+        <p:spPr>
+          <a:xfrm>
+            <a:off x="7795260" y="4017645"/>
+            <a:ext cx="1397635" cy="269875"/>
+          </a:xfrm>
+          <a:prstGeom prst="rect">
+            <a:avLst/>
+          </a:prstGeom>
+          <a:noFill/>
+        </p:spPr>
+        <p:txBody>
+          <a:bodyPr wrap="square" rtlCol="0">
+            <a:noAutofit/>
+          </a:bodyPr>
+          <a:lstStyle/>
+          <a:p>
+            <a:r>
+              <a:rPr lang="zh-CN" altLang="en-US" sz="1000" dirty="0"/>
+              <a:t>依次通过所有层</a:t>
+            </a:r>
+            <a:r>
+              <a:rPr lang="en-US" altLang="zh-CN" sz="1000" dirty="0"/>
+              <a:t> </a:t>
+            </a:r>
+            <a:r>
+              <a:rPr lang="zh-CN" altLang="en-US" sz="1000" dirty="0"/>
+              <a:t>计算</a:t>
+            </a:r>
+            <a:endParaRPr lang="zh-CN" altLang="en-US" sz="1000" dirty="0"/>
+          </a:p>
+        </p:txBody>
+      </p:sp>
+      <p:sp>
+        <p:nvSpPr>
+          <p:cNvPr id="139" name="文本框 138"/>
+          <p:cNvSpPr txBox="1"/>
+          <p:nvPr/>
+        </p:nvSpPr>
+        <p:spPr>
+          <a:xfrm>
+            <a:off x="7456170" y="3832860"/>
+            <a:ext cx="383540" cy="266065"/>
+          </a:xfrm>
+          <a:prstGeom prst="rect">
+            <a:avLst/>
+          </a:prstGeom>
+          <a:noFill/>
+        </p:spPr>
+        <p:txBody>
+          <a:bodyPr wrap="square" rtlCol="0">
+            <a:noAutofit/>
+          </a:bodyPr>
+          <a:lstStyle/>
+          <a:p>
+            <a:r>
+              <a:rPr lang="en-US" altLang="zh-CN" sz="1000" dirty="0"/>
+              <a:t>......</a:t>
+            </a:r>
+            <a:endParaRPr lang="en-US" altLang="zh-CN" sz="1000" dirty="0"/>
+          </a:p>
+        </p:txBody>
+      </p:sp>
+      <p:sp>
+        <p:nvSpPr>
+          <p:cNvPr id="140" name="右箭头 26"/>
+          <p:cNvSpPr/>
+          <p:nvPr/>
+        </p:nvSpPr>
+        <p:spPr>
+          <a:xfrm rot="5400000">
+            <a:off x="7499350" y="4795520"/>
+            <a:ext cx="297180" cy="181610"/>
+          </a:xfrm>
+          <a:prstGeom prst="rightArrow">
+            <a:avLst/>
+          </a:prstGeom>
+          <a:ln>
+            <a:noFill/>
+          </a:ln>
+        </p:spPr>
+        <p:style>
+          <a:lnRef idx="2">
+            <a:schemeClr val="accent1">
+              <a:shade val="50000"/>
+            </a:schemeClr>
+          </a:lnRef>
+          <a:fillRef idx="1">
+            <a:schemeClr val="accent1"/>
+          </a:fillRef>
+          <a:effectRef idx="0">
+            <a:schemeClr val="accent1"/>
+          </a:effectRef>
+          <a:fontRef idx="minor">
+            <a:schemeClr val="lt1"/>
+          </a:fontRef>
+        </p:style>
+        <p:txBody>
+          <a:bodyPr rtlCol="0" anchor="ctr"/>
+          <a:lstStyle/>
+          <a:p>
+            <a:pPr algn="ctr"/>
+            <a:endParaRPr lang="zh-CN" altLang="en-US" sz="1200"/>
+          </a:p>
+        </p:txBody>
+      </p:sp>
+      <p:sp>
+        <p:nvSpPr>
+          <p:cNvPr id="141" name="文本框 140"/>
+          <p:cNvSpPr txBox="1"/>
+          <p:nvPr/>
+        </p:nvSpPr>
+        <p:spPr>
+          <a:xfrm>
+            <a:off x="7795260" y="4772660"/>
+            <a:ext cx="646430" cy="266065"/>
+          </a:xfrm>
+          <a:prstGeom prst="rect">
+            <a:avLst/>
+          </a:prstGeom>
+          <a:noFill/>
+        </p:spPr>
+        <p:txBody>
+          <a:bodyPr wrap="square" rtlCol="0">
+            <a:noAutofit/>
+          </a:bodyPr>
+          <a:lstStyle/>
+          <a:p>
+            <a:r>
+              <a:rPr lang="zh-CN" altLang="en-US" sz="1000" dirty="0"/>
+              <a:t>预测</a:t>
+            </a:r>
+            <a:endParaRPr lang="zh-CN" altLang="en-US" sz="1000" dirty="0"/>
+          </a:p>
+        </p:txBody>
+      </p:sp>
+      <p:sp>
+        <p:nvSpPr>
+          <p:cNvPr id="142" name="手杖形箭头 141"/>
+          <p:cNvSpPr/>
+          <p:nvPr/>
+        </p:nvSpPr>
+        <p:spPr>
+          <a:xfrm rot="5400000" flipH="1">
+            <a:off x="7294880" y="2976880"/>
+            <a:ext cx="3730625" cy="825500"/>
+          </a:xfrm>
+          <a:prstGeom prst="uturnArrow">
+            <a:avLst>
+              <a:gd name="adj1" fmla="val 8653"/>
+              <a:gd name="adj2" fmla="val 8520"/>
+              <a:gd name="adj3" fmla="val 13933"/>
+              <a:gd name="adj4" fmla="val 44480"/>
+              <a:gd name="adj5" fmla="val 52115"/>
+            </a:avLst>
+          </a:prstGeom>
+          <a:solidFill>
+            <a:schemeClr val="accent1"/>
+          </a:solidFill>
+          <a:ln>
+            <a:noFill/>
+          </a:ln>
+        </p:spPr>
+        <p:style>
+          <a:lnRef idx="2">
+            <a:schemeClr val="accent1">
+              <a:lumMod val="75000"/>
+            </a:schemeClr>
+          </a:lnRef>
+          <a:fillRef idx="1">
+            <a:schemeClr val="accent1"/>
+          </a:fillRef>
+          <a:effectRef idx="0">
+            <a:srgbClr val="FFFFFF"/>
+          </a:effectRef>
+          <a:fontRef idx="minor">
+            <a:schemeClr val="lt1"/>
+          </a:fontRef>
+        </p:style>
+        <p:txBody>
+          <a:bodyPr rtlCol="0" anchor="ctr"/>
+          <a:p>
+            <a:pPr algn="ctr"/>
+            <a:endParaRPr lang="zh-CN" altLang="en-US">
+              <a:ln>
+                <a:noFill/>
+              </a:ln>
+              <a:solidFill>
+                <a:schemeClr val="tx1"/>
+              </a:solidFill>
+            </a:endParaRPr>
+          </a:p>
+        </p:txBody>
+      </p:sp>
+      <p:sp>
+        <p:nvSpPr>
+          <p:cNvPr id="144" name="右箭头 26"/>
+          <p:cNvSpPr/>
+          <p:nvPr/>
+        </p:nvSpPr>
+        <p:spPr>
+          <a:xfrm rot="5400000">
+            <a:off x="7499350" y="5455920"/>
+            <a:ext cx="297180" cy="181610"/>
+          </a:xfrm>
+          <a:prstGeom prst="rightArrow">
+            <a:avLst/>
+          </a:prstGeom>
+          <a:ln>
+            <a:noFill/>
+          </a:ln>
+        </p:spPr>
+        <p:style>
+          <a:lnRef idx="2">
+            <a:schemeClr val="accent1">
+              <a:shade val="50000"/>
+            </a:schemeClr>
+          </a:lnRef>
+          <a:fillRef idx="1">
+            <a:schemeClr val="accent1"/>
+          </a:fillRef>
+          <a:effectRef idx="0">
+            <a:schemeClr val="accent1"/>
+          </a:effectRef>
+          <a:fontRef idx="minor">
+            <a:schemeClr val="lt1"/>
+          </a:fontRef>
+        </p:style>
+        <p:txBody>
+          <a:bodyPr rtlCol="0" anchor="ctr"/>
+          <a:lstStyle/>
+          <a:p>
+            <a:pPr algn="ctr"/>
+            <a:endParaRPr lang="zh-CN" altLang="en-US" sz="1200"/>
+          </a:p>
+        </p:txBody>
+      </p:sp>
+      <p:sp>
+        <p:nvSpPr>
+          <p:cNvPr id="145" name="文本框 144"/>
+          <p:cNvSpPr txBox="1"/>
+          <p:nvPr/>
+        </p:nvSpPr>
+        <p:spPr>
+          <a:xfrm>
+            <a:off x="7795260" y="5433060"/>
+            <a:ext cx="814705" cy="226695"/>
+          </a:xfrm>
+          <a:prstGeom prst="rect">
+            <a:avLst/>
+          </a:prstGeom>
+          <a:noFill/>
+        </p:spPr>
+        <p:txBody>
+          <a:bodyPr wrap="square" rtlCol="0">
+            <a:noAutofit/>
+          </a:bodyPr>
+          <a:lstStyle/>
+          <a:p>
+            <a:r>
+              <a:rPr lang="zh-CN" altLang="en-US" sz="1000" dirty="0"/>
+              <a:t>生成</a:t>
+            </a:r>
+            <a:r>
+              <a:rPr lang="zh-CN" altLang="en-US" sz="1000" dirty="0"/>
+              <a:t>结束</a:t>
+            </a:r>
+            <a:endParaRPr lang="zh-CN" altLang="en-US" sz="1000" dirty="0"/>
+          </a:p>
+        </p:txBody>
+      </p:sp>
+      <p:sp>
+        <p:nvSpPr>
+          <p:cNvPr id="146" name="文本框 145"/>
+          <p:cNvSpPr txBox="1"/>
+          <p:nvPr/>
+        </p:nvSpPr>
+        <p:spPr>
+          <a:xfrm>
+            <a:off x="6548120" y="5753100"/>
+            <a:ext cx="2199640" cy="262255"/>
+          </a:xfrm>
+          <a:prstGeom prst="rect">
+            <a:avLst/>
+          </a:prstGeom>
+          <a:solidFill>
+            <a:schemeClr val="accent1">
+              <a:lumMod val="40000"/>
+              <a:lumOff val="60000"/>
+            </a:schemeClr>
+          </a:solidFill>
+          <a:ln w="12700">
+            <a:solidFill>
+              <a:schemeClr val="tx1"/>
+            </a:solidFill>
+          </a:ln>
+        </p:spPr>
+        <p:txBody>
+          <a:bodyPr wrap="square" rtlCol="0">
+            <a:noAutofit/>
+          </a:bodyPr>
+          <a:lstStyle/>
+          <a:p>
+            <a:pPr algn="ctr"/>
+            <a:r>
+              <a:rPr lang="zh-CN" altLang="en-US" sz="1200" dirty="0">
+                <a:sym typeface="+mn-ea"/>
+              </a:rPr>
+              <a:t>气温</a:t>
+            </a:r>
+            <a:r>
+              <a:rPr lang="en-US" altLang="zh-CN" sz="1200" dirty="0">
+                <a:sym typeface="+mn-ea"/>
+              </a:rPr>
+              <a:t> / </a:t>
+            </a:r>
+            <a:r>
+              <a:rPr lang="zh-CN" altLang="en-US" sz="1200" dirty="0">
+                <a:sym typeface="+mn-ea"/>
+              </a:rPr>
+              <a:t>升高</a:t>
+            </a:r>
+            <a:r>
+              <a:rPr lang="en-US" altLang="zh-CN" sz="1200" dirty="0">
+                <a:sym typeface="+mn-ea"/>
+              </a:rPr>
+              <a:t> /</a:t>
+            </a:r>
+            <a:r>
+              <a:rPr lang="zh-CN" altLang="en-US" sz="1200" dirty="0">
+                <a:sym typeface="+mn-ea"/>
+              </a:rPr>
+              <a:t>，</a:t>
+            </a:r>
+            <a:r>
+              <a:rPr lang="en-US" altLang="zh-CN" sz="1200" dirty="0">
+                <a:sym typeface="+mn-ea"/>
+              </a:rPr>
+              <a:t>/ </a:t>
+            </a:r>
+            <a:r>
+              <a:rPr lang="zh-CN" altLang="en-US" sz="1200" dirty="0">
+                <a:sym typeface="+mn-ea"/>
+              </a:rPr>
+              <a:t>注意</a:t>
+            </a:r>
+            <a:r>
+              <a:rPr lang="en-US" altLang="zh-CN" sz="1200" dirty="0">
+                <a:sym typeface="+mn-ea"/>
+              </a:rPr>
+              <a:t> / </a:t>
+            </a:r>
+            <a:r>
+              <a:rPr lang="zh-CN" altLang="en-US" sz="1200" dirty="0">
+                <a:sym typeface="+mn-ea"/>
+              </a:rPr>
+              <a:t>防暑</a:t>
+            </a:r>
+            <a:endParaRPr lang="zh-CN" altLang="en-US" sz="1200" dirty="0">
+              <a:sym typeface="+mn-ea"/>
+            </a:endParaRPr>
+          </a:p>
+        </p:txBody>
+      </p:sp>
+      <p:sp>
+        <p:nvSpPr>
+          <p:cNvPr id="147" name="文本框 146"/>
+          <p:cNvSpPr txBox="1"/>
+          <p:nvPr/>
+        </p:nvSpPr>
+        <p:spPr>
+          <a:xfrm>
+            <a:off x="6769735" y="6381115"/>
+            <a:ext cx="1756410" cy="262890"/>
+          </a:xfrm>
+          <a:prstGeom prst="rect">
+            <a:avLst/>
+          </a:prstGeom>
+          <a:solidFill>
+            <a:schemeClr val="accent1">
+              <a:lumMod val="40000"/>
+              <a:lumOff val="60000"/>
+            </a:schemeClr>
+          </a:solidFill>
+          <a:ln w="12700">
+            <a:solidFill>
+              <a:schemeClr val="tx1"/>
+            </a:solidFill>
+          </a:ln>
+        </p:spPr>
+        <p:txBody>
+          <a:bodyPr wrap="square" rtlCol="0">
+            <a:noAutofit/>
+          </a:bodyPr>
+          <a:lstStyle/>
+          <a:p>
+            <a:pPr algn="ctr"/>
+            <a:r>
+              <a:rPr lang="zh-CN" altLang="en-US" sz="1200" dirty="0">
+                <a:sym typeface="+mn-ea"/>
+              </a:rPr>
+              <a:t>气温升高，注意防暑</a:t>
+            </a:r>
+            <a:endParaRPr lang="zh-CN" altLang="en-US" sz="1200" dirty="0"/>
+          </a:p>
+        </p:txBody>
+      </p:sp>
+      <p:sp>
+        <p:nvSpPr>
+          <p:cNvPr id="148" name="右箭头 26"/>
+          <p:cNvSpPr/>
+          <p:nvPr/>
+        </p:nvSpPr>
+        <p:spPr>
+          <a:xfrm rot="5400000">
+            <a:off x="7503160" y="6112510"/>
+            <a:ext cx="289560" cy="181610"/>
+          </a:xfrm>
+          <a:prstGeom prst="rightArrow">
+            <a:avLst/>
+          </a:prstGeom>
+          <a:ln>
+            <a:noFill/>
+          </a:ln>
+        </p:spPr>
+        <p:style>
+          <a:lnRef idx="2">
+            <a:schemeClr val="accent1">
+              <a:shade val="50000"/>
+            </a:schemeClr>
+          </a:lnRef>
+          <a:fillRef idx="1">
+            <a:schemeClr val="accent1"/>
+          </a:fillRef>
+          <a:effectRef idx="0">
+            <a:schemeClr val="accent1"/>
+          </a:effectRef>
+          <a:fontRef idx="minor">
+            <a:schemeClr val="lt1"/>
+          </a:fontRef>
+        </p:style>
+        <p:txBody>
+          <a:bodyPr rtlCol="0" anchor="ctr"/>
+          <a:lstStyle/>
+          <a:p>
+            <a:pPr algn="ctr"/>
+            <a:endParaRPr lang="zh-CN" altLang="en-US" sz="1200"/>
+          </a:p>
+        </p:txBody>
+      </p:sp>
+      <p:sp>
+        <p:nvSpPr>
+          <p:cNvPr id="149" name="文本框 148"/>
+          <p:cNvSpPr txBox="1"/>
+          <p:nvPr/>
+        </p:nvSpPr>
+        <p:spPr>
+          <a:xfrm>
+            <a:off x="7795260" y="6062980"/>
+            <a:ext cx="473710" cy="210185"/>
+          </a:xfrm>
+          <a:prstGeom prst="rect">
+            <a:avLst/>
+          </a:prstGeom>
+          <a:noFill/>
+        </p:spPr>
+        <p:txBody>
+          <a:bodyPr wrap="square" rtlCol="0">
+            <a:noAutofit/>
+          </a:bodyPr>
+          <a:lstStyle/>
+          <a:p>
+            <a:r>
+              <a:rPr lang="zh-CN" altLang="en-US" sz="1000" dirty="0"/>
+              <a:t>转换</a:t>
+            </a:r>
+            <a:endParaRPr lang="zh-CN" altLang="en-US" sz="1000" dirty="0"/>
+          </a:p>
+        </p:txBody>
+      </p:sp>
+      <p:sp>
+        <p:nvSpPr>
+          <p:cNvPr id="150" name="文本框 149"/>
+          <p:cNvSpPr txBox="1"/>
+          <p:nvPr/>
+        </p:nvSpPr>
+        <p:spPr>
+          <a:xfrm>
+            <a:off x="7795260" y="3276600"/>
+            <a:ext cx="520065" cy="266065"/>
+          </a:xfrm>
+          <a:prstGeom prst="rect">
+            <a:avLst/>
+          </a:prstGeom>
+          <a:noFill/>
+        </p:spPr>
+        <p:txBody>
+          <a:bodyPr wrap="square" rtlCol="0">
+            <a:noAutofit/>
+          </a:bodyPr>
+          <a:lstStyle/>
+          <a:p>
+            <a:r>
+              <a:rPr lang="zh-CN" altLang="en-US" sz="1000" dirty="0"/>
+              <a:t>计算</a:t>
+            </a:r>
+            <a:endParaRPr lang="zh-CN" altLang="en-US" sz="1000" dirty="0"/>
+          </a:p>
+        </p:txBody>
+      </p:sp>
+      <p:sp>
+        <p:nvSpPr>
+          <p:cNvPr id="152" name="文本框 151"/>
+          <p:cNvSpPr txBox="1"/>
+          <p:nvPr/>
+        </p:nvSpPr>
+        <p:spPr>
+          <a:xfrm>
+            <a:off x="7795260" y="1892935"/>
+            <a:ext cx="1061085" cy="408940"/>
+          </a:xfrm>
+          <a:prstGeom prst="rect">
+            <a:avLst/>
+          </a:prstGeom>
+          <a:noFill/>
+        </p:spPr>
+        <p:txBody>
+          <a:bodyPr wrap="square" rtlCol="0">
+            <a:noAutofit/>
+          </a:bodyPr>
+          <a:lstStyle/>
+          <a:p>
+            <a:r>
+              <a:rPr lang="zh-CN" altLang="en-US" sz="1000" dirty="0"/>
+              <a:t>查找每个</a:t>
+            </a:r>
+            <a:r>
+              <a:rPr lang="en-US" altLang="zh-CN" sz="1000" dirty="0"/>
+              <a:t>token</a:t>
+            </a:r>
+            <a:r>
+              <a:rPr lang="zh-CN" altLang="en-US" sz="1000" dirty="0"/>
+              <a:t>对应的向量</a:t>
+            </a:r>
+            <a:endParaRPr lang="zh-CN" altLang="en-US" sz="1000" dirty="0"/>
+          </a:p>
+        </p:txBody>
+      </p:sp>
+      <p:sp>
+        <p:nvSpPr>
+          <p:cNvPr id="153" name="文本框 152"/>
+          <p:cNvSpPr txBox="1"/>
+          <p:nvPr/>
+        </p:nvSpPr>
+        <p:spPr>
+          <a:xfrm>
+            <a:off x="9613900" y="2773045"/>
+            <a:ext cx="838200" cy="536575"/>
+          </a:xfrm>
+          <a:prstGeom prst="rect">
+            <a:avLst/>
+          </a:prstGeom>
+          <a:noFill/>
+        </p:spPr>
+        <p:txBody>
+          <a:bodyPr wrap="square" rtlCol="0">
+            <a:noAutofit/>
+          </a:bodyPr>
+          <a:lstStyle/>
+          <a:p>
+            <a:r>
+              <a:rPr lang="zh-CN" altLang="en-US" sz="1000" dirty="0"/>
+              <a:t>加入</a:t>
+            </a:r>
+            <a:r>
+              <a:rPr lang="zh-CN" altLang="en-US" sz="1000" dirty="0">
+                <a:sym typeface="+mn-ea"/>
+              </a:rPr>
+              <a:t>序列</a:t>
+            </a:r>
+            <a:r>
+              <a:rPr lang="zh-CN" altLang="en-US" sz="1000" dirty="0"/>
+              <a:t>作为最后一个</a:t>
+            </a:r>
+            <a:r>
+              <a:rPr lang="en-US" altLang="zh-CN" sz="1000" dirty="0"/>
+              <a:t>token</a:t>
+            </a:r>
+            <a:endParaRPr lang="en-US" altLang="zh-CN" sz="1000" dirty="0"/>
+          </a:p>
+        </p:txBody>
+      </p:sp>
+    </p:spTree>
   </p:cSld>
   <p:clrMapOvr>
     <a:masterClrMapping/>
@@ -4732,6 +7097,7 @@
               <a:rPr lang="zh-CN" altLang="en-US" sz="1400"/>
               <a:t>浏览器</a:t>
             </a:r>
+            <a:endParaRPr lang="zh-CN" altLang="en-US" sz="1400"/>
           </a:p>
         </p:txBody>
       </p:sp>
@@ -4847,6 +7213,7 @@
               <a:rPr lang="zh-CN" altLang="en-US" sz="1400"/>
               <a:t>准备页面数据</a:t>
             </a:r>
+            <a:endParaRPr lang="zh-CN" altLang="en-US" sz="1400"/>
           </a:p>
         </p:txBody>
       </p:sp>
@@ -4886,6 +7253,7 @@
               <a:rPr lang="zh-CN" altLang="en-US" sz="1400"/>
               <a:t>服务端</a:t>
             </a:r>
+            <a:endParaRPr lang="zh-CN" altLang="en-US" sz="1400"/>
           </a:p>
         </p:txBody>
       </p:sp>
@@ -4958,6 +7326,7 @@
               <a:rPr lang="zh-CN" altLang="en-US" sz="1400"/>
               <a:t>请求页面</a:t>
             </a:r>
+            <a:endParaRPr lang="zh-CN" altLang="en-US" sz="1400"/>
           </a:p>
         </p:txBody>
       </p:sp>
@@ -4987,6 +7356,7 @@
               <a:rPr lang="zh-CN" altLang="en-US" sz="1400"/>
               <a:t>收到请求</a:t>
             </a:r>
+            <a:endParaRPr lang="zh-CN" altLang="en-US" sz="1400"/>
           </a:p>
         </p:txBody>
       </p:sp>
@@ -5092,6 +7462,7 @@
               <a:rPr lang="zh-CN" altLang="en-US" sz="1400"/>
               <a:t>返回数据</a:t>
             </a:r>
+            <a:endParaRPr lang="zh-CN" altLang="en-US" sz="1400"/>
           </a:p>
         </p:txBody>
       </p:sp>
@@ -5121,6 +7492,7 @@
               <a:rPr lang="zh-CN" altLang="en-US" sz="1400"/>
               <a:t>收到数据</a:t>
             </a:r>
+            <a:endParaRPr lang="zh-CN" altLang="en-US" sz="1400"/>
           </a:p>
         </p:txBody>
       </p:sp>
@@ -5193,6 +7565,7 @@
               <a:rPr lang="zh-CN" altLang="en-US" sz="1400"/>
               <a:t>渲染</a:t>
             </a:r>
+            <a:endParaRPr lang="zh-CN" altLang="en-US" sz="1400"/>
           </a:p>
         </p:txBody>
       </p:sp>
@@ -5222,6 +7595,7 @@
               <a:rPr lang="zh-CN" altLang="en-US" sz="1400"/>
               <a:t>展示页面</a:t>
             </a:r>
+            <a:endParaRPr lang="zh-CN" altLang="en-US" sz="1400"/>
           </a:p>
         </p:txBody>
       </p:sp>
@@ -5257,6 +7631,7 @@
               <a:rPr lang="zh-CN" altLang="en-US" sz="1400"/>
               <a:t>浏览器</a:t>
             </a:r>
+            <a:endParaRPr lang="zh-CN" altLang="en-US" sz="1400"/>
           </a:p>
         </p:txBody>
       </p:sp>
@@ -5372,6 +7747,7 @@
               <a:rPr lang="zh-CN" altLang="en-US" sz="1400"/>
               <a:t>准备部分页面数据</a:t>
             </a:r>
+            <a:endParaRPr lang="zh-CN" altLang="en-US" sz="1400"/>
           </a:p>
         </p:txBody>
       </p:sp>
@@ -5411,6 +7787,7 @@
               <a:rPr lang="zh-CN" altLang="en-US" sz="1400"/>
               <a:t>服务端</a:t>
             </a:r>
+            <a:endParaRPr lang="zh-CN" altLang="en-US" sz="1400"/>
           </a:p>
         </p:txBody>
       </p:sp>
@@ -5483,6 +7860,7 @@
               <a:rPr lang="zh-CN" altLang="en-US" sz="1400"/>
               <a:t>请求页面</a:t>
             </a:r>
+            <a:endParaRPr lang="zh-CN" altLang="en-US" sz="1400"/>
           </a:p>
         </p:txBody>
       </p:sp>
@@ -5512,6 +7890,7 @@
               <a:rPr lang="zh-CN" altLang="en-US" sz="1400"/>
               <a:t>收到请求</a:t>
             </a:r>
+            <a:endParaRPr lang="zh-CN" altLang="en-US" sz="1400"/>
           </a:p>
         </p:txBody>
       </p:sp>
@@ -5617,6 +7996,7 @@
               <a:rPr lang="zh-CN" altLang="en-US" sz="1400"/>
               <a:t>返回部分数据</a:t>
             </a:r>
+            <a:endParaRPr lang="zh-CN" altLang="en-US" sz="1400"/>
           </a:p>
         </p:txBody>
       </p:sp>
@@ -5646,6 +8026,7 @@
               <a:rPr lang="zh-CN" altLang="en-US" sz="1400"/>
               <a:t>收到数据</a:t>
             </a:r>
+            <a:endParaRPr lang="zh-CN" altLang="en-US" sz="1400"/>
           </a:p>
         </p:txBody>
       </p:sp>
@@ -5718,6 +8099,7 @@
               <a:rPr lang="zh-CN" altLang="en-US" sz="1400"/>
               <a:t>渲染</a:t>
             </a:r>
+            <a:endParaRPr lang="zh-CN" altLang="en-US" sz="1400"/>
           </a:p>
         </p:txBody>
       </p:sp>
@@ -5747,6 +8129,7 @@
               <a:rPr lang="zh-CN" altLang="en-US" sz="1400"/>
               <a:t>展示部分页面</a:t>
             </a:r>
+            <a:endParaRPr lang="zh-CN" altLang="en-US" sz="1400"/>
           </a:p>
         </p:txBody>
       </p:sp>
@@ -5784,6 +8167,7 @@
               <a:rPr lang="zh-CN" altLang="en-US" sz="1400"/>
               <a:t>非流式渲染</a:t>
             </a:r>
+            <a:endParaRPr lang="zh-CN" altLang="en-US" sz="1400"/>
           </a:p>
         </p:txBody>
       </p:sp>
@@ -5856,6 +8240,7 @@
               <a:rPr lang="zh-CN" altLang="en-US" sz="1400"/>
               <a:t>准备部分页面数据</a:t>
             </a:r>
+            <a:endParaRPr lang="zh-CN" altLang="en-US" sz="1400"/>
           </a:p>
         </p:txBody>
       </p:sp>
@@ -5885,6 +8270,7 @@
               <a:rPr lang="zh-CN" altLang="en-US" sz="1400"/>
               <a:t>返回部分数据</a:t>
             </a:r>
+            <a:endParaRPr lang="zh-CN" altLang="en-US" sz="1400"/>
           </a:p>
         </p:txBody>
       </p:sp>
@@ -5957,6 +8343,7 @@
               <a:rPr lang="zh-CN" altLang="en-US" sz="1400"/>
               <a:t>收到数据</a:t>
             </a:r>
+            <a:endParaRPr lang="zh-CN" altLang="en-US" sz="1400"/>
           </a:p>
         </p:txBody>
       </p:sp>
@@ -6029,6 +8416,7 @@
               <a:rPr lang="zh-CN" altLang="en-US" sz="1400"/>
               <a:t>渲染</a:t>
             </a:r>
+            <a:endParaRPr lang="zh-CN" altLang="en-US" sz="1400"/>
           </a:p>
         </p:txBody>
       </p:sp>
@@ -6058,6 +8446,7 @@
               <a:rPr lang="zh-CN" altLang="en-US" sz="1400"/>
               <a:t>展示部分页面</a:t>
             </a:r>
+            <a:endParaRPr lang="zh-CN" altLang="en-US" sz="1400"/>
           </a:p>
         </p:txBody>
       </p:sp>
@@ -6095,6 +8484,7 @@
               <a:rPr lang="zh-CN" altLang="en-US" sz="1400"/>
               <a:t>流式渲染</a:t>
             </a:r>
+            <a:endParaRPr lang="zh-CN" altLang="en-US" sz="1400"/>
           </a:p>
         </p:txBody>
       </p:sp>
@@ -6223,6 +8613,7 @@
               <a:rPr lang="zh-CN" altLang="en-US" sz="1400"/>
               <a:t>可以重复多次</a:t>
             </a:r>
+            <a:endParaRPr lang="zh-CN" altLang="en-US" sz="1400"/>
           </a:p>
         </p:txBody>
       </p:sp>
@@ -6252,6 +8643,7 @@
               <a:rPr lang="zh-CN" altLang="en-US" sz="1400"/>
               <a:t>准备最后的数据</a:t>
             </a:r>
+            <a:endParaRPr lang="zh-CN" altLang="en-US" sz="1400"/>
           </a:p>
         </p:txBody>
       </p:sp>
@@ -6281,6 +8673,7 @@
               <a:rPr lang="zh-CN" altLang="en-US" sz="1400"/>
               <a:t>返回最后的数据</a:t>
             </a:r>
+            <a:endParaRPr lang="zh-CN" altLang="en-US" sz="1400"/>
           </a:p>
         </p:txBody>
       </p:sp>
@@ -6310,6 +8703,7 @@
               <a:rPr lang="zh-CN" altLang="en-US" sz="1400"/>
               <a:t>收到数据</a:t>
             </a:r>
+            <a:endParaRPr lang="zh-CN" altLang="en-US" sz="1400"/>
           </a:p>
         </p:txBody>
       </p:sp>
@@ -6382,6 +8776,7 @@
               <a:rPr lang="zh-CN" altLang="en-US" sz="1400"/>
               <a:t>渲染</a:t>
             </a:r>
+            <a:endParaRPr lang="zh-CN" altLang="en-US" sz="1400"/>
           </a:p>
         </p:txBody>
       </p:sp>
@@ -6411,6 +8806,7 @@
               <a:rPr lang="zh-CN" altLang="en-US" sz="1400"/>
               <a:t>展示完整页面</a:t>
             </a:r>
+            <a:endParaRPr lang="zh-CN" altLang="en-US" sz="1400"/>
           </a:p>
         </p:txBody>
       </p:sp>
@@ -6514,6 +8910,7 @@
               <a:rPr lang="zh-CN" altLang="en-US" sz="1400"/>
               <a:t>浏览器</a:t>
             </a:r>
+            <a:endParaRPr lang="zh-CN" altLang="en-US" sz="1400"/>
           </a:p>
         </p:txBody>
       </p:sp>
@@ -6629,6 +9026,7 @@
               <a:rPr lang="zh-CN" altLang="en-US" sz="1400"/>
               <a:t>准备数据</a:t>
             </a:r>
+            <a:endParaRPr lang="zh-CN" altLang="en-US" sz="1400"/>
           </a:p>
         </p:txBody>
       </p:sp>
@@ -6668,6 +9066,7 @@
               <a:rPr lang="zh-CN" altLang="en-US" sz="1400"/>
               <a:t>服务端</a:t>
             </a:r>
+            <a:endParaRPr lang="zh-CN" altLang="en-US" sz="1400"/>
           </a:p>
         </p:txBody>
       </p:sp>
@@ -6740,6 +9139,7 @@
               <a:rPr lang="zh-CN" altLang="en-US" sz="1400"/>
               <a:t>请求数据接口</a:t>
             </a:r>
+            <a:endParaRPr lang="zh-CN" altLang="en-US" sz="1400"/>
           </a:p>
         </p:txBody>
       </p:sp>
@@ -6769,6 +9169,7 @@
               <a:rPr lang="zh-CN" altLang="en-US" sz="1400"/>
               <a:t>收到请求</a:t>
             </a:r>
+            <a:endParaRPr lang="zh-CN" altLang="en-US" sz="1400"/>
           </a:p>
         </p:txBody>
       </p:sp>
@@ -6874,6 +9275,7 @@
               <a:rPr lang="zh-CN" altLang="en-US" sz="1400"/>
               <a:t>返回数据</a:t>
             </a:r>
+            <a:endParaRPr lang="zh-CN" altLang="en-US" sz="1400"/>
           </a:p>
         </p:txBody>
       </p:sp>
@@ -6903,6 +9305,7 @@
               <a:rPr lang="zh-CN" altLang="en-US" sz="1400"/>
               <a:t>收到数据</a:t>
             </a:r>
+            <a:endParaRPr lang="zh-CN" altLang="en-US" sz="1400"/>
           </a:p>
         </p:txBody>
       </p:sp>
@@ -6975,6 +9378,7 @@
               <a:rPr lang="zh-CN" altLang="en-US" sz="1400"/>
               <a:t>展示数据</a:t>
             </a:r>
+            <a:endParaRPr lang="zh-CN" altLang="en-US" sz="1400"/>
           </a:p>
         </p:txBody>
       </p:sp>
@@ -7010,6 +9414,7 @@
               <a:rPr lang="zh-CN" altLang="en-US" sz="1400"/>
               <a:t>浏览器</a:t>
             </a:r>
+            <a:endParaRPr lang="zh-CN" altLang="en-US" sz="1400"/>
           </a:p>
         </p:txBody>
       </p:sp>
@@ -7125,6 +9530,7 @@
               <a:rPr lang="zh-CN" altLang="en-US" sz="1400"/>
               <a:t>准备部分数据</a:t>
             </a:r>
+            <a:endParaRPr lang="zh-CN" altLang="en-US" sz="1400"/>
           </a:p>
         </p:txBody>
       </p:sp>
@@ -7164,6 +9570,7 @@
               <a:rPr lang="zh-CN" altLang="en-US" sz="1400"/>
               <a:t>服务端</a:t>
             </a:r>
+            <a:endParaRPr lang="zh-CN" altLang="en-US" sz="1400"/>
           </a:p>
         </p:txBody>
       </p:sp>
@@ -7268,6 +9675,7 @@
               <a:rPr lang="zh-CN" altLang="en-US" sz="1400"/>
               <a:t>收到请求</a:t>
             </a:r>
+            <a:endParaRPr lang="zh-CN" altLang="en-US" sz="1400"/>
           </a:p>
         </p:txBody>
       </p:sp>
@@ -7373,6 +9781,7 @@
               <a:rPr lang="zh-CN" altLang="en-US" sz="1400"/>
               <a:t>返回部分数据</a:t>
             </a:r>
+            <a:endParaRPr lang="zh-CN" altLang="en-US" sz="1400"/>
           </a:p>
         </p:txBody>
       </p:sp>
@@ -7402,6 +9811,7 @@
               <a:rPr lang="zh-CN" altLang="en-US" sz="1400"/>
               <a:t>收到数据</a:t>
             </a:r>
+            <a:endParaRPr lang="zh-CN" altLang="en-US" sz="1400"/>
           </a:p>
         </p:txBody>
       </p:sp>
@@ -7474,6 +9884,7 @@
               <a:rPr lang="zh-CN" altLang="en-US" sz="1400"/>
               <a:t>展示部分数据</a:t>
             </a:r>
+            <a:endParaRPr lang="zh-CN" altLang="en-US" sz="1400"/>
           </a:p>
         </p:txBody>
       </p:sp>
@@ -7511,6 +9922,7 @@
               <a:rPr lang="zh-CN" altLang="en-US" sz="1400"/>
               <a:t>非流式传输</a:t>
             </a:r>
+            <a:endParaRPr lang="zh-CN" altLang="en-US" sz="1400"/>
           </a:p>
         </p:txBody>
       </p:sp>
@@ -7584,6 +9996,7 @@
               <a:rPr lang="zh-CN" altLang="en-US" sz="1400"/>
               <a:t>准备部分数据</a:t>
             </a:r>
+            <a:endParaRPr lang="zh-CN" altLang="en-US" sz="1400"/>
           </a:p>
         </p:txBody>
       </p:sp>
@@ -7613,6 +10026,7 @@
               <a:rPr lang="zh-CN" altLang="en-US" sz="1400"/>
               <a:t>返回部分数据</a:t>
             </a:r>
+            <a:endParaRPr lang="zh-CN" altLang="en-US" sz="1400"/>
           </a:p>
         </p:txBody>
       </p:sp>
@@ -7685,6 +10099,7 @@
               <a:rPr lang="zh-CN" altLang="en-US" sz="1400"/>
               <a:t>收到数据</a:t>
             </a:r>
+            <a:endParaRPr lang="zh-CN" altLang="en-US" sz="1400"/>
           </a:p>
         </p:txBody>
       </p:sp>
@@ -7757,6 +10172,7 @@
               <a:rPr lang="zh-CN" altLang="en-US" sz="1400"/>
               <a:t>展示部分数据</a:t>
             </a:r>
+            <a:endParaRPr lang="zh-CN" altLang="en-US" sz="1400"/>
           </a:p>
         </p:txBody>
       </p:sp>
@@ -7794,6 +10210,7 @@
               <a:rPr lang="zh-CN" altLang="en-US" sz="1400"/>
               <a:t>流式传输</a:t>
             </a:r>
+            <a:endParaRPr lang="zh-CN" altLang="en-US" sz="1400"/>
           </a:p>
         </p:txBody>
       </p:sp>
@@ -7922,6 +10339,7 @@
               <a:rPr lang="zh-CN" altLang="en-US" sz="1400"/>
               <a:t>可以重复多次</a:t>
             </a:r>
+            <a:endParaRPr lang="zh-CN" altLang="en-US" sz="1400"/>
           </a:p>
         </p:txBody>
       </p:sp>
@@ -7951,6 +10369,7 @@
               <a:rPr lang="zh-CN" altLang="en-US" sz="1400"/>
               <a:t>准备最后的数据</a:t>
             </a:r>
+            <a:endParaRPr lang="zh-CN" altLang="en-US" sz="1400"/>
           </a:p>
         </p:txBody>
       </p:sp>
@@ -7980,6 +10399,7 @@
               <a:rPr lang="zh-CN" altLang="en-US" sz="1400"/>
               <a:t>返回最后的数据</a:t>
             </a:r>
+            <a:endParaRPr lang="zh-CN" altLang="en-US" sz="1400"/>
           </a:p>
         </p:txBody>
       </p:sp>
@@ -8009,6 +10429,7 @@
               <a:rPr lang="zh-CN" altLang="en-US" sz="1400"/>
               <a:t>收到数据</a:t>
             </a:r>
+            <a:endParaRPr lang="zh-CN" altLang="en-US" sz="1400"/>
           </a:p>
         </p:txBody>
       </p:sp>
@@ -8081,6 +10502,7 @@
               <a:rPr lang="zh-CN" altLang="en-US" sz="1400"/>
               <a:t>展示完整数据</a:t>
             </a:r>
+            <a:endParaRPr lang="zh-CN" altLang="en-US" sz="1400"/>
           </a:p>
         </p:txBody>
       </p:sp>
@@ -8227,6 +10649,7 @@
               <a:rPr lang="zh-CN" altLang="en-US" sz="1400"/>
               <a:t>代码</a:t>
             </a:r>
+            <a:endParaRPr lang="zh-CN" altLang="en-US" sz="1400"/>
           </a:p>
         </p:txBody>
       </p:sp>
@@ -8262,6 +10685,7 @@
               <a:rPr lang="en-US" altLang="zh-CN" sz="1400"/>
               <a:t>Tokens</a:t>
             </a:r>
+            <a:endParaRPr lang="en-US" altLang="zh-CN" sz="1400"/>
           </a:p>
         </p:txBody>
       </p:sp>
@@ -8297,6 +10721,7 @@
               <a:rPr lang="en-US" altLang="zh-CN" sz="1400"/>
               <a:t>AST</a:t>
             </a:r>
+            <a:endParaRPr lang="en-US" altLang="zh-CN" sz="1400"/>
           </a:p>
         </p:txBody>
       </p:sp>
@@ -8383,6 +10808,7 @@
                 <a:rPr lang="zh-CN" altLang="en-US" sz="1400"/>
                 <a:t>词法分析</a:t>
               </a:r>
+              <a:endParaRPr lang="zh-CN" altLang="en-US" sz="1400"/>
             </a:p>
           </p:txBody>
         </p:sp>
@@ -8470,6 +10896,7 @@
                 <a:rPr lang="zh-CN" altLang="en-US" sz="1400"/>
                 <a:t>语法分析</a:t>
               </a:r>
+              <a:endParaRPr lang="zh-CN" altLang="en-US" sz="1400"/>
             </a:p>
           </p:txBody>
         </p:sp>
@@ -8500,6 +10927,7 @@
               <a:rPr lang="zh-CN" altLang="en-US"/>
               <a:t>const a = 2 + 1</a:t>
             </a:r>
+            <a:endParaRPr lang="zh-CN" altLang="en-US"/>
           </a:p>
         </p:txBody>
       </p:sp>
@@ -8524,20 +10952,8 @@
                 <a:tableStyleId>{5C22544A-7EE6-4342-B048-85BDC9FD1C3A}</a:tableStyleId>
               </a:tblPr>
               <a:tblGrid>
-                <a:gridCol w="1045210">
-                  <a:extLst>
-                    <a:ext uri="{9D8B030D-6E8A-4147-A177-3AD203B41FA5}">
-                      <a16:colId xmlns:a16="http://schemas.microsoft.com/office/drawing/2014/main" val="20000"/>
-                    </a:ext>
-                  </a:extLst>
-                </a:gridCol>
-                <a:gridCol w="1045210">
-                  <a:extLst>
-                    <a:ext uri="{9D8B030D-6E8A-4147-A177-3AD203B41FA5}">
-                      <a16:colId xmlns:a16="http://schemas.microsoft.com/office/drawing/2014/main" val="20001"/>
-                    </a:ext>
-                  </a:extLst>
-                </a:gridCol>
+                <a:gridCol w="1045210"/>
+                <a:gridCol w="1045210"/>
               </a:tblGrid>
               <a:tr h="365760">
                 <a:tc>
@@ -8552,6 +10968,7 @@
                         <a:rPr lang="zh-CN" altLang="en-US" sz="1000"/>
                         <a:t>类型</a:t>
                       </a:r>
+                      <a:endParaRPr lang="zh-CN" altLang="en-US" sz="1000"/>
                     </a:p>
                   </a:txBody>
                   <a:tcPr anchor="ctr"/>
@@ -8568,15 +10985,11 @@
                         <a:rPr lang="zh-CN" altLang="en-US" sz="1000"/>
                         <a:t>值</a:t>
                       </a:r>
+                      <a:endParaRPr lang="zh-CN" altLang="en-US" sz="1000"/>
                     </a:p>
                   </a:txBody>
                   <a:tcPr anchor="ctr"/>
                 </a:tc>
-                <a:extLst>
-                  <a:ext uri="{0D108BD9-81ED-4DB2-BD59-A6C34878D82A}">
-                    <a16:rowId xmlns:a16="http://schemas.microsoft.com/office/drawing/2014/main" val="10000"/>
-                  </a:ext>
-                </a:extLst>
               </a:tr>
               <a:tr h="379095">
                 <a:tc>
@@ -8617,11 +11030,6 @@
                   </a:txBody>
                   <a:tcPr anchor="ctr"/>
                 </a:tc>
-                <a:extLst>
-                  <a:ext uri="{0D108BD9-81ED-4DB2-BD59-A6C34878D82A}">
-                    <a16:rowId xmlns:a16="http://schemas.microsoft.com/office/drawing/2014/main" val="10001"/>
-                  </a:ext>
-                </a:extLst>
               </a:tr>
               <a:tr h="379095">
                 <a:tc>
@@ -8662,11 +11070,6 @@
                   </a:txBody>
                   <a:tcPr anchor="ctr"/>
                 </a:tc>
-                <a:extLst>
-                  <a:ext uri="{0D108BD9-81ED-4DB2-BD59-A6C34878D82A}">
-                    <a16:rowId xmlns:a16="http://schemas.microsoft.com/office/drawing/2014/main" val="10002"/>
-                  </a:ext>
-                </a:extLst>
               </a:tr>
               <a:tr h="379095">
                 <a:tc>
@@ -8707,11 +11110,6 @@
                   </a:txBody>
                   <a:tcPr anchor="ctr"/>
                 </a:tc>
-                <a:extLst>
-                  <a:ext uri="{0D108BD9-81ED-4DB2-BD59-A6C34878D82A}">
-                    <a16:rowId xmlns:a16="http://schemas.microsoft.com/office/drawing/2014/main" val="10003"/>
-                  </a:ext>
-                </a:extLst>
               </a:tr>
               <a:tr h="379095">
                 <a:tc>
@@ -8752,11 +11150,6 @@
                   </a:txBody>
                   <a:tcPr anchor="ctr"/>
                 </a:tc>
-                <a:extLst>
-                  <a:ext uri="{0D108BD9-81ED-4DB2-BD59-A6C34878D82A}">
-                    <a16:rowId xmlns:a16="http://schemas.microsoft.com/office/drawing/2014/main" val="10004"/>
-                  </a:ext>
-                </a:extLst>
               </a:tr>
               <a:tr h="379095">
                 <a:tc>
@@ -8797,11 +11190,6 @@
                   </a:txBody>
                   <a:tcPr anchor="ctr"/>
                 </a:tc>
-                <a:extLst>
-                  <a:ext uri="{0D108BD9-81ED-4DB2-BD59-A6C34878D82A}">
-                    <a16:rowId xmlns:a16="http://schemas.microsoft.com/office/drawing/2014/main" val="10005"/>
-                  </a:ext>
-                </a:extLst>
               </a:tr>
               <a:tr h="379095">
                 <a:tc>
@@ -8842,11 +11230,6 @@
                   </a:txBody>
                   <a:tcPr anchor="ctr"/>
                 </a:tc>
-                <a:extLst>
-                  <a:ext uri="{0D108BD9-81ED-4DB2-BD59-A6C34878D82A}">
-                    <a16:rowId xmlns:a16="http://schemas.microsoft.com/office/drawing/2014/main" val="10006"/>
-                  </a:ext>
-                </a:extLst>
               </a:tr>
             </a:tbl>
           </a:graphicData>
@@ -8902,6 +11285,7 @@
                 <a:rPr lang="en-US" altLang="zh-CN" sz="1400"/>
                 <a:t> script</a:t>
               </a:r>
+              <a:endParaRPr lang="en-US" altLang="zh-CN" sz="1400"/>
             </a:p>
           </p:txBody>
         </p:sp>
@@ -8941,6 +11325,7 @@
                 <a:rPr lang="en-US" altLang="zh-CN" sz="1400"/>
                 <a:t> const</a:t>
               </a:r>
+              <a:endParaRPr lang="en-US" altLang="zh-CN" sz="1400"/>
             </a:p>
           </p:txBody>
         </p:sp>
@@ -8980,6 +11365,7 @@
                 <a:rPr lang="en-US" altLang="zh-CN" sz="1400"/>
                 <a:t> a</a:t>
               </a:r>
+              <a:endParaRPr lang="en-US" altLang="zh-CN" sz="1400"/>
             </a:p>
           </p:txBody>
         </p:sp>
@@ -9019,6 +11405,7 @@
                 <a:rPr lang="en-US" altLang="zh-CN" sz="1400"/>
                 <a:t> +</a:t>
               </a:r>
+              <a:endParaRPr lang="en-US" altLang="zh-CN" sz="1400"/>
             </a:p>
           </p:txBody>
         </p:sp>
@@ -9072,6 +11459,7 @@
                   <a:rPr lang="en-US" altLang="zh-CN" sz="1400"/>
                   <a:t> 2</a:t>
                 </a:r>
+                <a:endParaRPr lang="en-US" altLang="zh-CN" sz="1400"/>
               </a:p>
             </p:txBody>
           </p:sp>
@@ -9111,6 +11499,7 @@
                   <a:rPr lang="en-US" sz="1400"/>
                   <a:t> 1</a:t>
                 </a:r>
+                <a:endParaRPr lang="en-US" sz="1400"/>
               </a:p>
             </p:txBody>
           </p:sp>
@@ -9341,6 +11730,7 @@
               <a:rPr lang="zh-CN" altLang="en-US" sz="1400"/>
               <a:t>代码</a:t>
             </a:r>
+            <a:endParaRPr lang="zh-CN" altLang="en-US" sz="1400"/>
           </a:p>
         </p:txBody>
       </p:sp>
@@ -9427,6 +11817,7 @@
                 <a:rPr lang="zh-CN" altLang="en-US" sz="1400"/>
                 <a:t>解析</a:t>
               </a:r>
+              <a:endParaRPr lang="zh-CN" altLang="en-US" sz="1400"/>
             </a:p>
           </p:txBody>
         </p:sp>
@@ -9522,6 +11913,7 @@
                 <a:rPr lang="zh-CN" altLang="en-US" sz="1400"/>
                 <a:t>修改</a:t>
               </a:r>
+              <a:endParaRPr lang="zh-CN" altLang="en-US" sz="1400"/>
             </a:p>
           </p:txBody>
         </p:sp>
@@ -9563,6 +11955,7 @@
               <a:rPr lang="en-US" altLang="zh-CN"/>
               <a:t>console.log(a)</a:t>
             </a:r>
+            <a:endParaRPr lang="en-US" altLang="zh-CN"/>
           </a:p>
         </p:txBody>
       </p:sp>
@@ -9648,6 +12041,7 @@
                 <a:rPr lang="en-US" altLang="zh-CN" sz="1400"/>
                 <a:t>......</a:t>
               </a:r>
+              <a:endParaRPr lang="en-US" altLang="zh-CN" sz="1400"/>
             </a:p>
           </p:txBody>
         </p:sp>
@@ -9939,6 +12333,7 @@
               <a:rPr lang="zh-CN" altLang="en-US" sz="1400"/>
               <a:t>抽象语法树</a:t>
             </a:r>
+            <a:endParaRPr lang="zh-CN" altLang="en-US" sz="1400"/>
           </a:p>
         </p:txBody>
       </p:sp>
@@ -10024,6 +12419,7 @@
                 <a:rPr lang="en-US" altLang="zh-CN" sz="1400"/>
                 <a:t>......</a:t>
               </a:r>
+              <a:endParaRPr lang="en-US" altLang="zh-CN" sz="1400"/>
             </a:p>
           </p:txBody>
         </p:sp>
@@ -10402,6 +12798,7 @@
                 <a:rPr lang="zh-CN" altLang="en-US" sz="1400"/>
                 <a:t>生成</a:t>
               </a:r>
+              <a:endParaRPr lang="zh-CN" altLang="en-US" sz="1400"/>
             </a:p>
           </p:txBody>
         </p:sp>
@@ -10443,6 +12840,7 @@
               <a:rPr lang="en-US" altLang="zh-CN"/>
               <a:t>console.log(a)</a:t>
             </a:r>
+            <a:endParaRPr lang="en-US" altLang="zh-CN"/>
           </a:p>
         </p:txBody>
       </p:sp>
@@ -10543,6 +12941,7 @@
               <a:rPr lang="zh-CN" altLang="en-US"/>
               <a:t>.js</a:t>
             </a:r>
+            <a:endParaRPr lang="zh-CN" altLang="en-US"/>
           </a:p>
         </p:txBody>
       </p:sp>
@@ -10629,6 +13028,7 @@
                 <a:rPr lang="zh-CN" altLang="en-US"/>
                 <a:t>生成</a:t>
               </a:r>
+              <a:endParaRPr lang="zh-CN" altLang="en-US"/>
             </a:p>
           </p:txBody>
         </p:sp>
@@ -10669,6 +13069,7 @@
               <a:rPr lang="zh-CN" altLang="en-US"/>
               <a:t>.js</a:t>
             </a:r>
+            <a:endParaRPr lang="zh-CN" altLang="en-US"/>
           </a:p>
         </p:txBody>
       </p:sp>
@@ -10755,6 +13156,7 @@
                 <a:rPr lang="zh-CN" altLang="en-US"/>
                 <a:t>生成</a:t>
               </a:r>
+              <a:endParaRPr lang="zh-CN" altLang="en-US"/>
             </a:p>
           </p:txBody>
         </p:sp>
@@ -10795,6 +13197,7 @@
               <a:rPr lang="zh-CN" altLang="en-US"/>
               <a:t>.js</a:t>
             </a:r>
+            <a:endParaRPr lang="zh-CN" altLang="en-US"/>
           </a:p>
         </p:txBody>
       </p:sp>
@@ -10834,6 +13237,7 @@
               <a:rPr lang="zh-CN" altLang="en-US"/>
               <a:t>.js</a:t>
             </a:r>
+            <a:endParaRPr lang="zh-CN" altLang="en-US"/>
           </a:p>
         </p:txBody>
       </p:sp>
@@ -10877,6 +13281,7 @@
               <a:rPr lang="en-US" altLang="zh-CN"/>
               <a:t>.map</a:t>
             </a:r>
+            <a:endParaRPr lang="en-US" altLang="zh-CN"/>
           </a:p>
         </p:txBody>
       </p:sp>
@@ -10920,6 +13325,7 @@
               <a:rPr lang="en-US" altLang="zh-CN"/>
               <a:t>.map</a:t>
             </a:r>
+            <a:endParaRPr lang="en-US" altLang="zh-CN"/>
           </a:p>
         </p:txBody>
       </p:sp>
@@ -11006,6 +13412,7 @@
                 <a:rPr lang="zh-CN" altLang="en-US"/>
                 <a:t>生成</a:t>
               </a:r>
+              <a:endParaRPr lang="zh-CN" altLang="en-US"/>
             </a:p>
           </p:txBody>
         </p:sp>
@@ -11152,6 +13559,7 @@
               <a:rPr lang="zh-CN" altLang="en-US"/>
               <a:t>.js</a:t>
             </a:r>
+            <a:endParaRPr lang="zh-CN" altLang="en-US"/>
           </a:p>
         </p:txBody>
       </p:sp>
@@ -11238,6 +13646,7 @@
                 <a:rPr lang="zh-CN" altLang="en-US"/>
                 <a:t>生成</a:t>
               </a:r>
+              <a:endParaRPr lang="zh-CN" altLang="en-US"/>
             </a:p>
           </p:txBody>
         </p:sp>
@@ -11274,6 +13683,7 @@
               <a:rPr lang="en-US" altLang="zh-CN"/>
               <a:t>44</a:t>
             </a:r>
+            <a:endParaRPr lang="en-US" altLang="zh-CN"/>
           </a:p>
           <a:p>
             <a:pPr algn="ctr"/>
@@ -11285,6 +13695,7 @@
               <a:rPr lang="zh-CN" altLang="en-US"/>
               <a:t>中代码</a:t>
             </a:r>
+            <a:endParaRPr lang="zh-CN" altLang="en-US"/>
           </a:p>
         </p:txBody>
       </p:sp>
@@ -11324,6 +13735,7 @@
               <a:rPr lang="zh-CN" altLang="en-US"/>
               <a:t>.js</a:t>
             </a:r>
+            <a:endParaRPr lang="zh-CN" altLang="en-US"/>
           </a:p>
           <a:p>
             <a:pPr algn="ctr"/>
@@ -11331,6 +13743,7 @@
               <a:rPr lang="zh-CN" altLang="en-US"/>
               <a:t>源代码</a:t>
             </a:r>
+            <a:endParaRPr lang="zh-CN" altLang="en-US"/>
           </a:p>
         </p:txBody>
       </p:sp>
@@ -11370,6 +13783,7 @@
               <a:rPr lang="zh-CN" altLang="en-US"/>
               <a:t>数据</a:t>
             </a:r>
+            <a:endParaRPr lang="zh-CN" altLang="en-US"/>
           </a:p>
         </p:txBody>
       </p:sp>
@@ -11622,6 +14036,7 @@
                 <a:rPr lang="zh-CN" altLang="en-US"/>
                 <a:t>编译</a:t>
               </a:r>
+              <a:endParaRPr lang="zh-CN" altLang="en-US"/>
             </a:p>
           </p:txBody>
         </p:sp>
@@ -11666,6 +14081,7 @@
               <a:rPr lang="en-US" altLang="zh-CN"/>
               <a:t>scss</a:t>
             </a:r>
+            <a:endParaRPr lang="en-US" altLang="zh-CN"/>
           </a:p>
           <a:p>
             <a:pPr algn="ctr"/>
@@ -11677,6 +14093,7 @@
               <a:rPr lang="zh-CN" altLang="en-US"/>
               <a:t>文件</a:t>
             </a:r>
+            <a:endParaRPr lang="zh-CN" altLang="en-US"/>
           </a:p>
         </p:txBody>
       </p:sp>
@@ -11763,6 +14180,7 @@
                 <a:rPr lang="zh-CN" altLang="en-US"/>
                 <a:t>编译</a:t>
               </a:r>
+              <a:endParaRPr lang="zh-CN" altLang="en-US"/>
             </a:p>
           </p:txBody>
         </p:sp>
@@ -11807,6 +14225,7 @@
               <a:rPr lang="en-US" altLang="zh-CN"/>
               <a:t>less</a:t>
             </a:r>
+            <a:endParaRPr lang="en-US" altLang="zh-CN"/>
           </a:p>
           <a:p>
             <a:pPr algn="ctr"/>
@@ -11818,6 +14237,7 @@
               <a:rPr lang="zh-CN" altLang="en-US"/>
               <a:t>文件</a:t>
             </a:r>
+            <a:endParaRPr lang="zh-CN" altLang="en-US"/>
           </a:p>
         </p:txBody>
       </p:sp>
@@ -11861,6 +14281,7 @@
               <a:rPr lang="en-US" altLang="zh-CN"/>
               <a:t>css</a:t>
             </a:r>
+            <a:endParaRPr lang="en-US" altLang="zh-CN"/>
           </a:p>
           <a:p>
             <a:pPr algn="ctr"/>
@@ -11872,6 +14293,7 @@
               <a:rPr lang="zh-CN" altLang="en-US"/>
               <a:t>文件</a:t>
             </a:r>
+            <a:endParaRPr lang="zh-CN" altLang="en-US"/>
           </a:p>
           <a:p>
             <a:pPr algn="ctr"/>
@@ -11879,6 +14301,7 @@
               <a:rPr lang="zh-CN" altLang="en-US"/>
               <a:t>中间产物</a:t>
             </a:r>
+            <a:endParaRPr lang="zh-CN" altLang="en-US"/>
           </a:p>
         </p:txBody>
       </p:sp>
@@ -11965,6 +14388,7 @@
                 <a:rPr lang="zh-CN" altLang="en-US"/>
                 <a:t>编译</a:t>
               </a:r>
+              <a:endParaRPr lang="zh-CN" altLang="en-US"/>
             </a:p>
           </p:txBody>
         </p:sp>
@@ -12031,6 +14455,9 @@
               </a:rPr>
               <a:t>文件</a:t>
             </a:r>
+            <a:endParaRPr lang="zh-CN" altLang="en-US">
+              <a:sym typeface="+mn-ea"/>
+            </a:endParaRPr>
           </a:p>
           <a:p>
             <a:pPr algn="ctr"/>
@@ -12038,6 +14465,7 @@
               <a:rPr lang="zh-CN" altLang="en-US"/>
               <a:t>最终产物</a:t>
             </a:r>
+            <a:endParaRPr lang="zh-CN" altLang="en-US"/>
           </a:p>
         </p:txBody>
       </p:sp>
@@ -12127,6 +14555,7 @@
               <a:rPr lang="zh-CN" altLang="en-US"/>
               <a:t>预处理器</a:t>
             </a:r>
+            <a:endParaRPr lang="zh-CN" altLang="en-US"/>
           </a:p>
         </p:txBody>
       </p:sp>
@@ -12216,6 +14645,7 @@
               <a:rPr lang="zh-CN" altLang="en-US"/>
               <a:t>后处理器</a:t>
             </a:r>
+            <a:endParaRPr lang="zh-CN" altLang="en-US"/>
           </a:p>
         </p:txBody>
       </p:sp>
@@ -12232,13 +14662,7 @@
   <p:cSld>
     <p:spTree>
       <p:nvGrpSpPr>
-        <p:cNvPr id="1" name="">
-          <a:extLst>
-            <a:ext uri="{FF2B5EF4-FFF2-40B4-BE49-F238E27FC236}">
-              <a16:creationId xmlns:a16="http://schemas.microsoft.com/office/drawing/2014/main" id="{8309A1E3-B2F1-76B3-2635-C4336E3A694C}"/>
-            </a:ext>
-          </a:extLst>
-        </p:cNvPr>
+        <p:cNvPr id="1" name=""/>
         <p:cNvGrpSpPr/>
         <p:nvPr/>
       </p:nvGrpSpPr>
@@ -12252,13 +14676,7 @@
       </p:grpSpPr>
       <p:sp>
         <p:nvSpPr>
-          <p:cNvPr id="5" name="文本框 4">
-            <a:extLst>
-              <a:ext uri="{FF2B5EF4-FFF2-40B4-BE49-F238E27FC236}">
-                <a16:creationId xmlns:a16="http://schemas.microsoft.com/office/drawing/2014/main" id="{0E3AB260-D1EC-2A5A-831B-BE5230D7129C}"/>
-              </a:ext>
-            </a:extLst>
-          </p:cNvPr>
+          <p:cNvPr id="5" name="文本框 4"/>
           <p:cNvSpPr txBox="1"/>
           <p:nvPr/>
         </p:nvSpPr>
@@ -12288,18 +14706,13 @@
               <a:rPr lang="zh-CN" altLang="en-US" sz="1400" dirty="0"/>
               <a:t>用户</a:t>
             </a:r>
-          </a:p>
-        </p:txBody>
-      </p:sp>
-      <p:sp>
-        <p:nvSpPr>
-          <p:cNvPr id="15" name="文本框 14">
-            <a:extLst>
-              <a:ext uri="{FF2B5EF4-FFF2-40B4-BE49-F238E27FC236}">
-                <a16:creationId xmlns:a16="http://schemas.microsoft.com/office/drawing/2014/main" id="{D53D0C52-B368-F842-068A-CBEB92E39B85}"/>
-              </a:ext>
-            </a:extLst>
-          </p:cNvPr>
+            <a:endParaRPr lang="zh-CN" altLang="en-US" sz="1400" dirty="0"/>
+          </a:p>
+        </p:txBody>
+      </p:sp>
+      <p:sp>
+        <p:nvSpPr>
+          <p:cNvPr id="15" name="文本框 14"/>
           <p:cNvSpPr txBox="1"/>
           <p:nvPr/>
         </p:nvSpPr>
@@ -12333,18 +14746,13 @@
               <a:rPr lang="zh-CN" altLang="en-US" sz="1400" dirty="0"/>
               <a:t>软件</a:t>
             </a:r>
-          </a:p>
-        </p:txBody>
-      </p:sp>
-      <p:sp>
-        <p:nvSpPr>
-          <p:cNvPr id="17" name="右箭头 16">
-            <a:extLst>
-              <a:ext uri="{FF2B5EF4-FFF2-40B4-BE49-F238E27FC236}">
-                <a16:creationId xmlns:a16="http://schemas.microsoft.com/office/drawing/2014/main" id="{B31FE6E8-3B67-2717-0F5C-12BEC33D5180}"/>
-              </a:ext>
-            </a:extLst>
-          </p:cNvPr>
+            <a:endParaRPr lang="zh-CN" altLang="en-US" sz="1400" dirty="0"/>
+          </a:p>
+        </p:txBody>
+      </p:sp>
+      <p:sp>
+        <p:nvSpPr>
+          <p:cNvPr id="17" name="右箭头 16"/>
           <p:cNvSpPr/>
           <p:nvPr/>
         </p:nvSpPr>
@@ -12387,13 +14795,7 @@
       </p:sp>
       <p:sp>
         <p:nvSpPr>
-          <p:cNvPr id="18" name="文本框 17">
-            <a:extLst>
-              <a:ext uri="{FF2B5EF4-FFF2-40B4-BE49-F238E27FC236}">
-                <a16:creationId xmlns:a16="http://schemas.microsoft.com/office/drawing/2014/main" id="{4BF56C4A-4CDD-CB90-7E36-393E108C93EA}"/>
-              </a:ext>
-            </a:extLst>
-          </p:cNvPr>
+          <p:cNvPr id="18" name="文本框 17"/>
           <p:cNvSpPr txBox="1"/>
           <p:nvPr/>
         </p:nvSpPr>
@@ -12433,21 +14835,14 @@
               <a:rPr lang="zh-CN" altLang="en-US" sz="1200" dirty="0"/>
               <a:t>执行命令等</a:t>
             </a:r>
+            <a:endParaRPr lang="zh-CN" altLang="en-US" sz="1200" dirty="0"/>
           </a:p>
         </p:txBody>
       </p:sp>
       <p:cxnSp>
         <p:nvCxnSpPr>
-          <p:cNvPr id="2" name="直接连接符 1">
-            <a:extLst>
-              <a:ext uri="{FF2B5EF4-FFF2-40B4-BE49-F238E27FC236}">
-                <a16:creationId xmlns:a16="http://schemas.microsoft.com/office/drawing/2014/main" id="{5A50B811-E678-D3CB-F11A-05E289F74390}"/>
-              </a:ext>
-            </a:extLst>
-          </p:cNvPr>
-          <p:cNvCxnSpPr>
-            <a:cxnSpLocks/>
-          </p:cNvCxnSpPr>
+          <p:cNvPr id="2" name="直接连接符 1"/>
+          <p:cNvCxnSpPr/>
           <p:nvPr/>
         </p:nvCxnSpPr>
         <p:spPr>
@@ -12484,16 +14879,8 @@
       </p:cxnSp>
       <p:cxnSp>
         <p:nvCxnSpPr>
-          <p:cNvPr id="3" name="直接连接符 2">
-            <a:extLst>
-              <a:ext uri="{FF2B5EF4-FFF2-40B4-BE49-F238E27FC236}">
-                <a16:creationId xmlns:a16="http://schemas.microsoft.com/office/drawing/2014/main" id="{735DC50B-EFC4-79B5-C58C-5E4660B81B91}"/>
-              </a:ext>
-            </a:extLst>
-          </p:cNvPr>
-          <p:cNvCxnSpPr>
-            <a:cxnSpLocks/>
-          </p:cNvCxnSpPr>
+          <p:cNvPr id="3" name="直接连接符 2"/>
+          <p:cNvCxnSpPr/>
           <p:nvPr/>
         </p:nvCxnSpPr>
         <p:spPr>
@@ -12530,13 +14917,7 @@
       </p:cxnSp>
       <p:sp>
         <p:nvSpPr>
-          <p:cNvPr id="25" name="文本框 24">
-            <a:extLst>
-              <a:ext uri="{FF2B5EF4-FFF2-40B4-BE49-F238E27FC236}">
-                <a16:creationId xmlns:a16="http://schemas.microsoft.com/office/drawing/2014/main" id="{308E3629-0FA5-DDDD-7A0E-3AD783FDD0A1}"/>
-              </a:ext>
-            </a:extLst>
-          </p:cNvPr>
+          <p:cNvPr id="25" name="文本框 24"/>
           <p:cNvSpPr txBox="1"/>
           <p:nvPr/>
         </p:nvSpPr>
@@ -12560,18 +14941,13 @@
               <a:rPr lang="zh-CN" altLang="en-US" sz="1200" dirty="0"/>
               <a:t>访问网页</a:t>
             </a:r>
-          </a:p>
-        </p:txBody>
-      </p:sp>
-      <p:sp>
-        <p:nvSpPr>
-          <p:cNvPr id="27" name="右箭头 26">
-            <a:extLst>
-              <a:ext uri="{FF2B5EF4-FFF2-40B4-BE49-F238E27FC236}">
-                <a16:creationId xmlns:a16="http://schemas.microsoft.com/office/drawing/2014/main" id="{65C57FA4-93B7-2C48-500F-DC2E65B5DF7F}"/>
-              </a:ext>
-            </a:extLst>
-          </p:cNvPr>
+            <a:endParaRPr lang="zh-CN" altLang="en-US" sz="1200" dirty="0"/>
+          </a:p>
+        </p:txBody>
+      </p:sp>
+      <p:sp>
+        <p:nvSpPr>
+          <p:cNvPr id="27" name="右箭头 26"/>
           <p:cNvSpPr/>
           <p:nvPr/>
         </p:nvSpPr>
@@ -12614,13 +14990,7 @@
       </p:sp>
       <p:sp>
         <p:nvSpPr>
-          <p:cNvPr id="4" name="右箭头 3">
-            <a:extLst>
-              <a:ext uri="{FF2B5EF4-FFF2-40B4-BE49-F238E27FC236}">
-                <a16:creationId xmlns:a16="http://schemas.microsoft.com/office/drawing/2014/main" id="{15F12ABC-6C90-684B-9636-036103048017}"/>
-              </a:ext>
-            </a:extLst>
-          </p:cNvPr>
+          <p:cNvPr id="4" name="右箭头 3"/>
           <p:cNvSpPr/>
           <p:nvPr/>
         </p:nvSpPr>
@@ -12663,16 +15033,8 @@
       </p:sp>
       <p:cxnSp>
         <p:nvCxnSpPr>
-          <p:cNvPr id="7" name="直接连接符 6">
-            <a:extLst>
-              <a:ext uri="{FF2B5EF4-FFF2-40B4-BE49-F238E27FC236}">
-                <a16:creationId xmlns:a16="http://schemas.microsoft.com/office/drawing/2014/main" id="{69372EE3-FADD-2F11-3811-1161E4864F05}"/>
-              </a:ext>
-            </a:extLst>
-          </p:cNvPr>
-          <p:cNvCxnSpPr>
-            <a:cxnSpLocks/>
-          </p:cNvCxnSpPr>
+          <p:cNvPr id="7" name="直接连接符 6"/>
+          <p:cNvCxnSpPr/>
           <p:nvPr/>
         </p:nvCxnSpPr>
         <p:spPr>
@@ -12709,13 +15071,7 @@
       </p:cxnSp>
       <p:sp>
         <p:nvSpPr>
-          <p:cNvPr id="8" name="文本框 7">
-            <a:extLst>
-              <a:ext uri="{FF2B5EF4-FFF2-40B4-BE49-F238E27FC236}">
-                <a16:creationId xmlns:a16="http://schemas.microsoft.com/office/drawing/2014/main" id="{1917D9CB-7C30-EB24-FFB2-777CC9D2AAC9}"/>
-              </a:ext>
-            </a:extLst>
-          </p:cNvPr>
+          <p:cNvPr id="8" name="文本框 7"/>
           <p:cNvSpPr txBox="1"/>
           <p:nvPr/>
         </p:nvSpPr>
@@ -12745,18 +15101,13 @@
               <a:rPr lang="zh-CN" altLang="en-US" sz="1400" dirty="0"/>
               <a:t>大模型</a:t>
             </a:r>
-          </a:p>
-        </p:txBody>
-      </p:sp>
-      <p:sp>
-        <p:nvSpPr>
-          <p:cNvPr id="9" name="右箭头 3">
-            <a:extLst>
-              <a:ext uri="{FF2B5EF4-FFF2-40B4-BE49-F238E27FC236}">
-                <a16:creationId xmlns:a16="http://schemas.microsoft.com/office/drawing/2014/main" id="{9DDA457B-19D4-F43F-A03E-3C9D116F3D67}"/>
-              </a:ext>
-            </a:extLst>
-          </p:cNvPr>
+            <a:endParaRPr lang="zh-CN" altLang="en-US" sz="1400" dirty="0"/>
+          </a:p>
+        </p:txBody>
+      </p:sp>
+      <p:sp>
+        <p:nvSpPr>
+          <p:cNvPr id="9" name="右箭头 3"/>
           <p:cNvSpPr/>
           <p:nvPr/>
         </p:nvSpPr>
@@ -12799,13 +15150,7 @@
       </p:sp>
       <p:sp>
         <p:nvSpPr>
-          <p:cNvPr id="10" name="文本框 9">
-            <a:extLst>
-              <a:ext uri="{FF2B5EF4-FFF2-40B4-BE49-F238E27FC236}">
-                <a16:creationId xmlns:a16="http://schemas.microsoft.com/office/drawing/2014/main" id="{3C40FADA-13EB-4393-5F07-4EFF679AF956}"/>
-              </a:ext>
-            </a:extLst>
-          </p:cNvPr>
+          <p:cNvPr id="10" name="文本框 9"/>
           <p:cNvSpPr txBox="1"/>
           <p:nvPr/>
         </p:nvSpPr>
@@ -12829,18 +15174,13 @@
               <a:rPr lang="zh-CN" altLang="en-US" sz="1200" dirty="0"/>
               <a:t>用户要求完成某个任务</a:t>
             </a:r>
-          </a:p>
-        </p:txBody>
-      </p:sp>
-      <p:sp>
-        <p:nvSpPr>
-          <p:cNvPr id="16" name="文本框 15">
-            <a:extLst>
-              <a:ext uri="{FF2B5EF4-FFF2-40B4-BE49-F238E27FC236}">
-                <a16:creationId xmlns:a16="http://schemas.microsoft.com/office/drawing/2014/main" id="{FC9BA993-E666-713E-BFF1-E2D75CC64660}"/>
-              </a:ext>
-            </a:extLst>
-          </p:cNvPr>
+            <a:endParaRPr lang="zh-CN" altLang="en-US" sz="1200" dirty="0"/>
+          </a:p>
+        </p:txBody>
+      </p:sp>
+      <p:sp>
+        <p:nvSpPr>
+          <p:cNvPr id="16" name="文本框 15"/>
           <p:cNvSpPr txBox="1"/>
           <p:nvPr/>
         </p:nvSpPr>
@@ -12864,18 +15204,13 @@
               <a:rPr lang="zh-CN" altLang="en-US" sz="1200" dirty="0"/>
               <a:t>将要求转发给大模型</a:t>
             </a:r>
-          </a:p>
-        </p:txBody>
-      </p:sp>
-      <p:sp>
-        <p:nvSpPr>
-          <p:cNvPr id="19" name="文本框 18">
-            <a:extLst>
-              <a:ext uri="{FF2B5EF4-FFF2-40B4-BE49-F238E27FC236}">
-                <a16:creationId xmlns:a16="http://schemas.microsoft.com/office/drawing/2014/main" id="{391069A4-42DD-B067-ECD1-61654AA2A7FC}"/>
-              </a:ext>
-            </a:extLst>
-          </p:cNvPr>
+            <a:endParaRPr lang="zh-CN" altLang="en-US" sz="1200" dirty="0"/>
+          </a:p>
+        </p:txBody>
+      </p:sp>
+      <p:sp>
+        <p:nvSpPr>
+          <p:cNvPr id="19" name="文本框 18"/>
           <p:cNvSpPr txBox="1"/>
           <p:nvPr/>
         </p:nvSpPr>
@@ -12907,18 +15242,13 @@
               <a:rPr lang="zh-CN" altLang="en-US" sz="1200" dirty="0"/>
               <a:t>调用某些能力，例如访问网页</a:t>
             </a:r>
-          </a:p>
-        </p:txBody>
-      </p:sp>
-      <p:sp>
-        <p:nvSpPr>
-          <p:cNvPr id="20" name="文本框 19">
-            <a:extLst>
-              <a:ext uri="{FF2B5EF4-FFF2-40B4-BE49-F238E27FC236}">
-                <a16:creationId xmlns:a16="http://schemas.microsoft.com/office/drawing/2014/main" id="{2C417CB5-0514-66FB-7580-647194250E94}"/>
-              </a:ext>
-            </a:extLst>
-          </p:cNvPr>
+            <a:endParaRPr lang="zh-CN" altLang="en-US" sz="1200" dirty="0"/>
+          </a:p>
+        </p:txBody>
+      </p:sp>
+      <p:sp>
+        <p:nvSpPr>
+          <p:cNvPr id="20" name="文本框 19"/>
           <p:cNvSpPr txBox="1"/>
           <p:nvPr/>
         </p:nvSpPr>
@@ -12942,18 +15272,13 @@
               <a:rPr lang="zh-CN" altLang="en-US" sz="1200" dirty="0"/>
               <a:t>思考</a:t>
             </a:r>
-          </a:p>
-        </p:txBody>
-      </p:sp>
-      <p:sp>
-        <p:nvSpPr>
-          <p:cNvPr id="22" name="右箭头 26">
-            <a:extLst>
-              <a:ext uri="{FF2B5EF4-FFF2-40B4-BE49-F238E27FC236}">
-                <a16:creationId xmlns:a16="http://schemas.microsoft.com/office/drawing/2014/main" id="{AD867472-9C8D-B08A-453D-B71CE75BAF22}"/>
-              </a:ext>
-            </a:extLst>
-          </p:cNvPr>
+            <a:endParaRPr lang="zh-CN" altLang="en-US" sz="1200" dirty="0"/>
+          </a:p>
+        </p:txBody>
+      </p:sp>
+      <p:sp>
+        <p:nvSpPr>
+          <p:cNvPr id="22" name="右箭头 26"/>
           <p:cNvSpPr/>
           <p:nvPr/>
         </p:nvSpPr>
@@ -12996,13 +15321,7 @@
       </p:sp>
       <p:sp>
         <p:nvSpPr>
-          <p:cNvPr id="28" name="文本框 27">
-            <a:extLst>
-              <a:ext uri="{FF2B5EF4-FFF2-40B4-BE49-F238E27FC236}">
-                <a16:creationId xmlns:a16="http://schemas.microsoft.com/office/drawing/2014/main" id="{BB0047A4-7DBD-4F0A-62E1-37B826E808B8}"/>
-              </a:ext>
-            </a:extLst>
-          </p:cNvPr>
+          <p:cNvPr id="28" name="文本框 27"/>
           <p:cNvSpPr txBox="1"/>
           <p:nvPr/>
         </p:nvSpPr>
@@ -13026,18 +15345,13 @@
               <a:rPr lang="zh-CN" altLang="en-US" sz="1200" dirty="0"/>
               <a:t>网页内容返回给大模型</a:t>
             </a:r>
-          </a:p>
-        </p:txBody>
-      </p:sp>
-      <p:sp>
-        <p:nvSpPr>
-          <p:cNvPr id="30" name="文本框 29">
-            <a:extLst>
-              <a:ext uri="{FF2B5EF4-FFF2-40B4-BE49-F238E27FC236}">
-                <a16:creationId xmlns:a16="http://schemas.microsoft.com/office/drawing/2014/main" id="{2EC295D3-B2CE-196A-5336-0F5A18EC5345}"/>
-              </a:ext>
-            </a:extLst>
-          </p:cNvPr>
+            <a:endParaRPr lang="zh-CN" altLang="en-US" sz="1200" dirty="0"/>
+          </a:p>
+        </p:txBody>
+      </p:sp>
+      <p:sp>
+        <p:nvSpPr>
+          <p:cNvPr id="30" name="文本框 29"/>
           <p:cNvSpPr txBox="1"/>
           <p:nvPr/>
         </p:nvSpPr>
@@ -13061,18 +15375,13 @@
               <a:rPr lang="zh-CN" altLang="en-US" sz="1200" dirty="0"/>
               <a:t>思考</a:t>
             </a:r>
-          </a:p>
-        </p:txBody>
-      </p:sp>
-      <p:sp>
-        <p:nvSpPr>
-          <p:cNvPr id="44" name="右箭头 26">
-            <a:extLst>
-              <a:ext uri="{FF2B5EF4-FFF2-40B4-BE49-F238E27FC236}">
-                <a16:creationId xmlns:a16="http://schemas.microsoft.com/office/drawing/2014/main" id="{00A29DDD-847A-E257-6ACA-5B9916F28041}"/>
-              </a:ext>
-            </a:extLst>
-          </p:cNvPr>
+            <a:endParaRPr lang="zh-CN" altLang="en-US" sz="1200" dirty="0"/>
+          </a:p>
+        </p:txBody>
+      </p:sp>
+      <p:sp>
+        <p:nvSpPr>
+          <p:cNvPr id="44" name="右箭头 26"/>
           <p:cNvSpPr/>
           <p:nvPr/>
         </p:nvSpPr>
@@ -13115,13 +15424,7 @@
       </p:sp>
       <p:sp>
         <p:nvSpPr>
-          <p:cNvPr id="57" name="文本框 56">
-            <a:extLst>
-              <a:ext uri="{FF2B5EF4-FFF2-40B4-BE49-F238E27FC236}">
-                <a16:creationId xmlns:a16="http://schemas.microsoft.com/office/drawing/2014/main" id="{A4330A45-BDDF-3184-F1F4-48424A18B090}"/>
-              </a:ext>
-            </a:extLst>
-          </p:cNvPr>
+          <p:cNvPr id="57" name="文本框 56"/>
           <p:cNvSpPr txBox="1"/>
           <p:nvPr/>
         </p:nvSpPr>
@@ -13145,18 +15448,13 @@
               <a:rPr lang="zh-CN" altLang="en-US" sz="1200" dirty="0"/>
               <a:t>给出最后结果</a:t>
             </a:r>
-          </a:p>
-        </p:txBody>
-      </p:sp>
-      <p:sp>
-        <p:nvSpPr>
-          <p:cNvPr id="59" name="右箭头 16">
-            <a:extLst>
-              <a:ext uri="{FF2B5EF4-FFF2-40B4-BE49-F238E27FC236}">
-                <a16:creationId xmlns:a16="http://schemas.microsoft.com/office/drawing/2014/main" id="{0B3BED17-0C6F-3267-BCD9-C33B60FCFB21}"/>
-              </a:ext>
-            </a:extLst>
-          </p:cNvPr>
+            <a:endParaRPr lang="zh-CN" altLang="en-US" sz="1200" dirty="0"/>
+          </a:p>
+        </p:txBody>
+      </p:sp>
+      <p:sp>
+        <p:nvSpPr>
+          <p:cNvPr id="59" name="右箭头 16"/>
           <p:cNvSpPr/>
           <p:nvPr/>
         </p:nvSpPr>
@@ -13199,13 +15497,7 @@
       </p:sp>
       <p:sp>
         <p:nvSpPr>
-          <p:cNvPr id="60" name="文本框 59">
-            <a:extLst>
-              <a:ext uri="{FF2B5EF4-FFF2-40B4-BE49-F238E27FC236}">
-                <a16:creationId xmlns:a16="http://schemas.microsoft.com/office/drawing/2014/main" id="{77BEAAFE-39B5-B5B1-FD30-A58590172550}"/>
-              </a:ext>
-            </a:extLst>
-          </p:cNvPr>
+          <p:cNvPr id="60" name="文本框 59"/>
           <p:cNvSpPr txBox="1"/>
           <p:nvPr/>
         </p:nvSpPr>
@@ -13229,18 +15521,13 @@
               <a:rPr lang="zh-CN" altLang="en-US" sz="1200" dirty="0"/>
               <a:t>返回结果给用户</a:t>
             </a:r>
-          </a:p>
-        </p:txBody>
-      </p:sp>
-      <p:sp>
-        <p:nvSpPr>
-          <p:cNvPr id="75" name="右箭头 3">
-            <a:extLst>
-              <a:ext uri="{FF2B5EF4-FFF2-40B4-BE49-F238E27FC236}">
-                <a16:creationId xmlns:a16="http://schemas.microsoft.com/office/drawing/2014/main" id="{3F8B3BE0-334A-A669-66B0-42238A915C4A}"/>
-              </a:ext>
-            </a:extLst>
-          </p:cNvPr>
+            <a:endParaRPr lang="zh-CN" altLang="en-US" sz="1200" dirty="0"/>
+          </a:p>
+        </p:txBody>
+      </p:sp>
+      <p:sp>
+        <p:nvSpPr>
+          <p:cNvPr id="75" name="右箭头 3"/>
           <p:cNvSpPr/>
           <p:nvPr/>
         </p:nvSpPr>
@@ -13283,13 +15570,7 @@
       </p:sp>
       <p:sp>
         <p:nvSpPr>
-          <p:cNvPr id="76" name="右箭头 3">
-            <a:extLst>
-              <a:ext uri="{FF2B5EF4-FFF2-40B4-BE49-F238E27FC236}">
-                <a16:creationId xmlns:a16="http://schemas.microsoft.com/office/drawing/2014/main" id="{1493F43E-5E09-1485-9413-453E287050AD}"/>
-              </a:ext>
-            </a:extLst>
-          </p:cNvPr>
+          <p:cNvPr id="76" name="右箭头 3"/>
           <p:cNvSpPr/>
           <p:nvPr/>
         </p:nvSpPr>
@@ -13332,13 +15613,7 @@
       </p:sp>
       <p:sp>
         <p:nvSpPr>
-          <p:cNvPr id="77" name="右箭头 16">
-            <a:extLst>
-              <a:ext uri="{FF2B5EF4-FFF2-40B4-BE49-F238E27FC236}">
-                <a16:creationId xmlns:a16="http://schemas.microsoft.com/office/drawing/2014/main" id="{9935EDAC-8FD1-B632-1428-DF885D921575}"/>
-              </a:ext>
-            </a:extLst>
-          </p:cNvPr>
+          <p:cNvPr id="77" name="右箭头 16"/>
           <p:cNvSpPr/>
           <p:nvPr/>
         </p:nvSpPr>
@@ -13380,11 +15655,6 @@
         </p:txBody>
       </p:sp>
     </p:spTree>
-    <p:extLst>
-      <p:ext uri="{BB962C8B-B14F-4D97-AF65-F5344CB8AC3E}">
-        <p14:creationId xmlns:p14="http://schemas.microsoft.com/office/powerpoint/2010/main" val="2290987455"/>
-      </p:ext>
-    </p:extLst>
   </p:cSld>
   <p:clrMapOvr>
     <a:masterClrMapping/>
@@ -13393,17 +15663,17 @@
 </file>
 
 <file path=ppt/tags/tag1.xml><?xml version="1.0" encoding="utf-8"?>
-<p:tagLst xmlns:a="http://schemas.openxmlformats.org/drawingml/2006/main" xmlns:r="http://schemas.openxmlformats.org/officeDocument/2006/relationships" xmlns:p="http://schemas.openxmlformats.org/presentationml/2006/main">
-  <p:tag name="COMMONDATA" val="eyJoZGlkIjoiMjllZmI5NGRiYWI2ZDdkMDRmZDNiMGUwOWVjNmRmODYifQ=="/>
-  <p:tag name="KSO_WPP_MARK_KEY" val="7792a17e-91d7-4c44-992a-cf0a45656bd2"/>
+<p:tagLst xmlns:p="http://schemas.openxmlformats.org/presentationml/2006/main">
+  <p:tag name="KSO_WM_UNIT_TABLE_BEAUTIFY" val="smartTable{e8ebea44-6430-4dd4-bcdd-21c1d86577b7}"/>
+  <p:tag name="TABLE_ENDDRAG_ORIGIN_RECT" val="164*208"/>
+  <p:tag name="TABLE_ENDDRAG_RECT" val="144*165*164*208"/>
 </p:tagLst>
 </file>
 
 <file path=ppt/tags/tag2.xml><?xml version="1.0" encoding="utf-8"?>
-<p:tagLst xmlns:a="http://schemas.openxmlformats.org/drawingml/2006/main" xmlns:r="http://schemas.openxmlformats.org/officeDocument/2006/relationships" xmlns:p="http://schemas.openxmlformats.org/presentationml/2006/main">
-  <p:tag name="KSO_WM_UNIT_TABLE_BEAUTIFY" val="smartTable{e8ebea44-6430-4dd4-bcdd-21c1d86577b7}"/>
-  <p:tag name="TABLE_ENDDRAG_ORIGIN_RECT" val="164*208"/>
-  <p:tag name="TABLE_ENDDRAG_RECT" val="144*165*164*208"/>
+<p:tagLst xmlns:p="http://schemas.openxmlformats.org/presentationml/2006/main">
+  <p:tag name="COMMONDATA" val="eyJoZGlkIjoiMjllZmI5NGRiYWI2ZDdkMDRmZDNiMGUwOWVjNmRmODYifQ=="/>
+  <p:tag name="KSO_WPP_MARK_KEY" val="7792a17e-91d7-4c44-992a-cf0a45656bd2"/>
 </p:tagLst>
 </file>
 
@@ -13658,8 +15928,6 @@
       </a:bgFillStyleLst>
     </a:fmtScheme>
   </a:themeElements>
-  <a:objectDefaults/>
-  <a:extraClrSchemeLst/>
   <a:extLst>
     <a:ext uri="{05A4C25C-085E-4340-85A3-A5531E510DB2}">
       <thm15:themeFamily xmlns:thm15="http://schemas.microsoft.com/office/thememl/2012/main" name="Office Theme" id="{62F939B6-93AF-4DB8-9C6B-D6C7DFDC589F}" vid="{4A3C46E8-61CC-4603-A589-7422A47A8E4A}"/>

--- a/raws/画图.pptx
+++ b/raws/画图.pptx
@@ -16,11 +16,12 @@
     <p:sldId id="265" r:id="rId11"/>
     <p:sldId id="266" r:id="rId12"/>
     <p:sldId id="267" r:id="rId13"/>
+    <p:sldId id="268" r:id="rId14"/>
   </p:sldIdLst>
   <p:sldSz cx="12192000" cy="6858000"/>
   <p:notesSz cx="6858000" cy="9144000"/>
   <p:custDataLst>
-    <p:tags r:id="rId17"/>
+    <p:tags r:id="rId18"/>
   </p:custDataLst>
   <p:defaultTextStyle>
     <a:defPPr>
@@ -7037,6 +7038,941 @@
               <a:t>token</a:t>
             </a:r>
             <a:endParaRPr lang="en-US" altLang="zh-CN" sz="1000" dirty="0"/>
+          </a:p>
+        </p:txBody>
+      </p:sp>
+    </p:spTree>
+  </p:cSld>
+  <p:clrMapOvr>
+    <a:masterClrMapping/>
+  </p:clrMapOvr>
+</p:sld>
+</file>
+
+<file path=ppt/slides/slide12.xml><?xml version="1.0" encoding="utf-8"?>
+<p:sld xmlns:a="http://schemas.openxmlformats.org/drawingml/2006/main" xmlns:r="http://schemas.openxmlformats.org/officeDocument/2006/relationships" xmlns:p="http://schemas.openxmlformats.org/presentationml/2006/main">
+  <p:cSld>
+    <p:spTree>
+      <p:nvGrpSpPr>
+        <p:cNvPr id="1" name=""/>
+        <p:cNvGrpSpPr/>
+        <p:nvPr/>
+      </p:nvGrpSpPr>
+      <p:grpSpPr/>
+      <p:sp>
+        <p:nvSpPr>
+          <p:cNvPr id="9" name="文本框 8"/>
+          <p:cNvSpPr txBox="1"/>
+          <p:nvPr/>
+        </p:nvSpPr>
+        <p:spPr>
+          <a:xfrm>
+            <a:off x="3662680" y="3244215"/>
+            <a:ext cx="1244600" cy="645160"/>
+          </a:xfrm>
+          <a:prstGeom prst="rect">
+            <a:avLst/>
+          </a:prstGeom>
+          <a:noFill/>
+          <a:ln w="12700">
+            <a:solidFill>
+              <a:schemeClr val="tx1"/>
+            </a:solidFill>
+          </a:ln>
+        </p:spPr>
+        <p:txBody>
+          <a:bodyPr wrap="square" rtlCol="0">
+            <a:spAutoFit/>
+          </a:bodyPr>
+          <a:lstStyle/>
+          <a:p>
+            <a:pPr algn="ctr"/>
+            <a:r>
+              <a:rPr lang="en-US" altLang="zh-CN"/>
+              <a:t>http-proxy</a:t>
+            </a:r>
+            <a:r>
+              <a:rPr lang="zh-CN" altLang="en-US"/>
+              <a:t>代理</a:t>
+            </a:r>
+            <a:endParaRPr lang="zh-CN" altLang="en-US"/>
+          </a:p>
+        </p:txBody>
+      </p:sp>
+      <p:sp>
+        <p:nvSpPr>
+          <p:cNvPr id="10" name="矩形 9"/>
+          <p:cNvSpPr/>
+          <p:nvPr/>
+        </p:nvSpPr>
+        <p:spPr>
+          <a:xfrm>
+            <a:off x="780415" y="274955"/>
+            <a:ext cx="10357485" cy="5548630"/>
+          </a:xfrm>
+          <a:prstGeom prst="rect">
+            <a:avLst/>
+          </a:prstGeom>
+          <a:solidFill>
+            <a:schemeClr val="bg2"/>
+          </a:solidFill>
+          <a:ln w="12700">
+            <a:solidFill>
+              <a:schemeClr val="tx1"/>
+            </a:solidFill>
+          </a:ln>
+        </p:spPr>
+        <p:style>
+          <a:lnRef idx="2">
+            <a:schemeClr val="accent1">
+              <a:shade val="50000"/>
+            </a:schemeClr>
+          </a:lnRef>
+          <a:fillRef idx="1">
+            <a:schemeClr val="accent1"/>
+          </a:fillRef>
+          <a:effectRef idx="0">
+            <a:schemeClr val="accent1"/>
+          </a:effectRef>
+          <a:fontRef idx="minor">
+            <a:schemeClr val="lt1"/>
+          </a:fontRef>
+        </p:style>
+        <p:txBody>
+          <a:bodyPr rtlCol="0" anchor="ctr"/>
+          <a:lstStyle/>
+          <a:p>
+            <a:pPr algn="ctr"/>
+            <a:endParaRPr lang="zh-CN" altLang="en-US"/>
+          </a:p>
+        </p:txBody>
+      </p:sp>
+      <p:sp>
+        <p:nvSpPr>
+          <p:cNvPr id="11" name="文本框 10"/>
+          <p:cNvSpPr txBox="1"/>
+          <p:nvPr/>
+        </p:nvSpPr>
+        <p:spPr>
+          <a:xfrm>
+            <a:off x="956310" y="421005"/>
+            <a:ext cx="7654290" cy="368300"/>
+          </a:xfrm>
+          <a:prstGeom prst="rect">
+            <a:avLst/>
+          </a:prstGeom>
+          <a:noFill/>
+        </p:spPr>
+        <p:txBody>
+          <a:bodyPr wrap="square" rtlCol="0" anchor="t">
+            <a:spAutoFit/>
+          </a:bodyPr>
+          <a:lstStyle/>
+          <a:p>
+            <a:pPr algn="l"/>
+            <a:r>
+              <a:rPr lang="zh-CN" altLang="en-US"/>
+              <a:t>大模型参数量</a:t>
+            </a:r>
+            <a:r>
+              <a:rPr lang="en-US" altLang="zh-CN"/>
+              <a:t> </a:t>
+            </a:r>
+            <a:r>
+              <a:rPr lang="en-US" altLang="zh-CN">
+                <a:sym typeface="+mn-ea"/>
+              </a:rPr>
+              <a:t>155,582,464 + </a:t>
+            </a:r>
+            <a:r>
+              <a:rPr lang="en-US" altLang="zh-CN">
+                <a:sym typeface="+mn-ea"/>
+              </a:rPr>
+              <a:t>440,401,920 = 595,984,384 ≈ </a:t>
+            </a:r>
+            <a:r>
+              <a:rPr lang="en-US" altLang="zh-CN">
+                <a:sym typeface="+mn-ea"/>
+              </a:rPr>
+              <a:t>596M </a:t>
+            </a:r>
+            <a:r>
+              <a:rPr lang="en-US" altLang="zh-CN">
+                <a:sym typeface="+mn-ea"/>
+              </a:rPr>
+              <a:t>≈ </a:t>
+            </a:r>
+            <a:r>
+              <a:rPr lang="en-US" altLang="zh-CN"/>
+              <a:t>0.6</a:t>
+            </a:r>
+            <a:r>
+              <a:rPr lang="en-US" altLang="zh-CN"/>
+              <a:t>B</a:t>
+            </a:r>
+            <a:endParaRPr lang="en-US" altLang="zh-CN"/>
+          </a:p>
+        </p:txBody>
+      </p:sp>
+      <p:grpSp>
+        <p:nvGrpSpPr>
+          <p:cNvPr id="8" name="组合 7"/>
+          <p:cNvGrpSpPr/>
+          <p:nvPr/>
+        </p:nvGrpSpPr>
+        <p:grpSpPr>
+          <a:xfrm>
+            <a:off x="1018540" y="1045210"/>
+            <a:ext cx="2974975" cy="4498975"/>
+            <a:chOff x="4909" y="4185"/>
+            <a:chExt cx="3558" cy="3190"/>
+          </a:xfrm>
+        </p:grpSpPr>
+        <p:sp>
+          <p:nvSpPr>
+            <p:cNvPr id="4" name="矩形 3"/>
+            <p:cNvSpPr/>
+            <p:nvPr/>
+          </p:nvSpPr>
+          <p:spPr>
+            <a:xfrm>
+              <a:off x="4909" y="4185"/>
+              <a:ext cx="3559" cy="3190"/>
+            </a:xfrm>
+            <a:prstGeom prst="rect">
+              <a:avLst/>
+            </a:prstGeom>
+            <a:solidFill>
+              <a:schemeClr val="accent1">
+                <a:lumMod val="40000"/>
+                <a:lumOff val="60000"/>
+              </a:schemeClr>
+            </a:solidFill>
+            <a:ln w="12700">
+              <a:solidFill>
+                <a:schemeClr val="tx1"/>
+              </a:solidFill>
+            </a:ln>
+          </p:spPr>
+          <p:style>
+            <a:lnRef idx="2">
+              <a:schemeClr val="accent1">
+                <a:shade val="50000"/>
+              </a:schemeClr>
+            </a:lnRef>
+            <a:fillRef idx="1">
+              <a:schemeClr val="accent1"/>
+            </a:fillRef>
+            <a:effectRef idx="0">
+              <a:schemeClr val="accent1"/>
+            </a:effectRef>
+            <a:fontRef idx="minor">
+              <a:schemeClr val="lt1"/>
+            </a:fontRef>
+          </p:style>
+          <p:txBody>
+            <a:bodyPr rtlCol="0" anchor="ctr"/>
+            <a:lstStyle/>
+            <a:p>
+              <a:pPr algn="ctr"/>
+              <a:endParaRPr lang="zh-CN" altLang="en-US"/>
+            </a:p>
+          </p:txBody>
+        </p:sp>
+        <p:sp>
+          <p:nvSpPr>
+            <p:cNvPr id="5" name="文本框 4"/>
+            <p:cNvSpPr txBox="1"/>
+            <p:nvPr/>
+          </p:nvSpPr>
+          <p:spPr>
+            <a:xfrm>
+              <a:off x="5005" y="4294"/>
+              <a:ext cx="3010" cy="1864"/>
+            </a:xfrm>
+            <a:prstGeom prst="rect">
+              <a:avLst/>
+            </a:prstGeom>
+            <a:noFill/>
+            <a:ln>
+              <a:noFill/>
+            </a:ln>
+          </p:spPr>
+          <p:txBody>
+            <a:bodyPr wrap="square" rtlCol="0" anchor="t">
+              <a:noAutofit/>
+            </a:bodyPr>
+            <a:lstStyle/>
+            <a:p>
+              <a:pPr algn="l"/>
+              <a:r>
+                <a:rPr lang="zh-CN" altLang="en-US"/>
+                <a:t>词嵌入</a:t>
+              </a:r>
+              <a:endParaRPr lang="zh-CN" altLang="en-US"/>
+            </a:p>
+            <a:p>
+              <a:pPr algn="l"/>
+              <a:r>
+                <a:rPr lang="en-US" altLang="zh-CN"/>
+                <a:t>151,936 × 1,024 </a:t>
+              </a:r>
+              <a:endParaRPr lang="en-US" altLang="zh-CN"/>
+            </a:p>
+            <a:p>
+              <a:pPr algn="l"/>
+              <a:r>
+                <a:rPr lang="en-US" altLang="zh-CN"/>
+                <a:t>= 155,582,464 </a:t>
+              </a:r>
+              <a:r>
+                <a:rPr lang="en-US" altLang="zh-CN">
+                  <a:sym typeface="+mn-ea"/>
+                </a:rPr>
+                <a:t>≈ 156M</a:t>
+              </a:r>
+              <a:endParaRPr lang="en-US" altLang="zh-CN"/>
+            </a:p>
+          </p:txBody>
+        </p:sp>
+      </p:grpSp>
+      <p:sp>
+        <p:nvSpPr>
+          <p:cNvPr id="32" name="矩形 31"/>
+          <p:cNvSpPr/>
+          <p:nvPr/>
+        </p:nvSpPr>
+        <p:spPr>
+          <a:xfrm>
+            <a:off x="4371975" y="1045210"/>
+            <a:ext cx="6425565" cy="4498975"/>
+          </a:xfrm>
+          <a:prstGeom prst="rect">
+            <a:avLst/>
+          </a:prstGeom>
+          <a:solidFill>
+            <a:schemeClr val="accent6">
+              <a:lumMod val="40000"/>
+              <a:lumOff val="60000"/>
+            </a:schemeClr>
+          </a:solidFill>
+          <a:ln w="12700">
+            <a:solidFill>
+              <a:schemeClr val="tx1"/>
+            </a:solidFill>
+          </a:ln>
+        </p:spPr>
+        <p:style>
+          <a:lnRef idx="2">
+            <a:schemeClr val="accent1">
+              <a:shade val="50000"/>
+            </a:schemeClr>
+          </a:lnRef>
+          <a:fillRef idx="1">
+            <a:schemeClr val="accent1"/>
+          </a:fillRef>
+          <a:effectRef idx="0">
+            <a:schemeClr val="accent1"/>
+          </a:effectRef>
+          <a:fontRef idx="minor">
+            <a:schemeClr val="lt1"/>
+          </a:fontRef>
+        </p:style>
+        <p:txBody>
+          <a:bodyPr rtlCol="0" anchor="ctr"/>
+          <a:lstStyle/>
+          <a:p>
+            <a:pPr algn="ctr"/>
+            <a:endParaRPr lang="zh-CN" altLang="en-US"/>
+          </a:p>
+        </p:txBody>
+      </p:sp>
+      <p:grpSp>
+        <p:nvGrpSpPr>
+          <p:cNvPr id="35" name="组合 34"/>
+          <p:cNvGrpSpPr/>
+          <p:nvPr/>
+        </p:nvGrpSpPr>
+        <p:grpSpPr>
+          <a:xfrm>
+            <a:off x="4699635" y="1945640"/>
+            <a:ext cx="5950585" cy="3331210"/>
+            <a:chOff x="7027" y="2563"/>
+            <a:chExt cx="9371" cy="5246"/>
+          </a:xfrm>
+        </p:grpSpPr>
+        <p:grpSp>
+          <p:nvGrpSpPr>
+            <p:cNvPr id="34" name="组合 33"/>
+            <p:cNvGrpSpPr/>
+            <p:nvPr/>
+          </p:nvGrpSpPr>
+          <p:grpSpPr>
+            <a:xfrm>
+              <a:off x="7027" y="2563"/>
+              <a:ext cx="7866" cy="5246"/>
+              <a:chOff x="7027" y="2563"/>
+              <a:chExt cx="7866" cy="5246"/>
+            </a:xfrm>
+          </p:grpSpPr>
+          <p:sp>
+            <p:nvSpPr>
+              <p:cNvPr id="7" name="矩形 6"/>
+              <p:cNvSpPr/>
+              <p:nvPr/>
+            </p:nvSpPr>
+            <p:spPr>
+              <a:xfrm>
+                <a:off x="7027" y="2563"/>
+                <a:ext cx="7866" cy="5247"/>
+              </a:xfrm>
+              <a:prstGeom prst="rect">
+                <a:avLst/>
+              </a:prstGeom>
+              <a:solidFill>
+                <a:schemeClr val="accent2">
+                  <a:lumMod val="40000"/>
+                  <a:lumOff val="60000"/>
+                </a:schemeClr>
+              </a:solidFill>
+              <a:ln w="12700">
+                <a:solidFill>
+                  <a:schemeClr val="tx1"/>
+                </a:solidFill>
+              </a:ln>
+            </p:spPr>
+            <p:style>
+              <a:lnRef idx="2">
+                <a:schemeClr val="accent1">
+                  <a:shade val="50000"/>
+                </a:schemeClr>
+              </a:lnRef>
+              <a:fillRef idx="1">
+                <a:schemeClr val="accent1"/>
+              </a:fillRef>
+              <a:effectRef idx="0">
+                <a:schemeClr val="accent1"/>
+              </a:effectRef>
+              <a:fontRef idx="minor">
+                <a:schemeClr val="lt1"/>
+              </a:fontRef>
+            </p:style>
+            <p:txBody>
+              <a:bodyPr rtlCol="0" anchor="ctr"/>
+              <a:lstStyle/>
+              <a:p>
+                <a:pPr algn="ctr"/>
+                <a:endParaRPr lang="zh-CN" altLang="en-US"/>
+              </a:p>
+            </p:txBody>
+          </p:sp>
+          <p:sp>
+            <p:nvSpPr>
+              <p:cNvPr id="15" name="文本框 14"/>
+              <p:cNvSpPr txBox="1"/>
+              <p:nvPr/>
+            </p:nvSpPr>
+            <p:spPr>
+              <a:xfrm>
+                <a:off x="7151" y="2641"/>
+                <a:ext cx="3470" cy="1006"/>
+              </a:xfrm>
+              <a:prstGeom prst="rect">
+                <a:avLst/>
+              </a:prstGeom>
+              <a:solidFill>
+                <a:schemeClr val="accent2">
+                  <a:lumMod val="40000"/>
+                  <a:lumOff val="60000"/>
+                </a:schemeClr>
+              </a:solidFill>
+            </p:spPr>
+            <p:txBody>
+              <a:bodyPr wrap="square" rtlCol="0" anchor="t">
+                <a:noAutofit/>
+              </a:bodyPr>
+              <a:lstStyle/>
+              <a:p>
+                <a:pPr algn="l"/>
+                <a:r>
+                  <a:rPr lang="zh-CN" altLang="en-US"/>
+                  <a:t>单个</a:t>
+                </a:r>
+                <a:r>
+                  <a:rPr lang="en-US" altLang="zh-CN"/>
+                  <a:t>Transformer</a:t>
+                </a:r>
+                <a:r>
+                  <a:rPr lang="zh-CN" altLang="en-US"/>
+                  <a:t>层</a:t>
+                </a:r>
+                <a:endParaRPr lang="zh-CN" altLang="en-US"/>
+              </a:p>
+              <a:p>
+                <a:pPr algn="l"/>
+                <a:r>
+                  <a:rPr lang="en-US" altLang="zh-CN"/>
+                  <a:t>15,728,640 </a:t>
+                </a:r>
+                <a:r>
+                  <a:rPr lang="en-US" altLang="zh-CN">
+                    <a:sym typeface="+mn-ea"/>
+                  </a:rPr>
+                  <a:t>≈ 16</a:t>
+                </a:r>
+                <a:r>
+                  <a:rPr lang="en-US" altLang="zh-CN">
+                    <a:sym typeface="+mn-ea"/>
+                  </a:rPr>
+                  <a:t>M</a:t>
+                </a:r>
+                <a:endParaRPr lang="en-US" altLang="zh-CN">
+                  <a:sym typeface="+mn-ea"/>
+                </a:endParaRPr>
+              </a:p>
+            </p:txBody>
+          </p:sp>
+          <p:grpSp>
+            <p:nvGrpSpPr>
+              <p:cNvPr id="25" name="组合 24"/>
+              <p:cNvGrpSpPr/>
+              <p:nvPr/>
+            </p:nvGrpSpPr>
+            <p:grpSpPr>
+              <a:xfrm>
+                <a:off x="7948" y="3809"/>
+                <a:ext cx="5942" cy="1740"/>
+                <a:chOff x="7948" y="3945"/>
+                <a:chExt cx="5942" cy="1740"/>
+              </a:xfrm>
+            </p:grpSpPr>
+            <p:sp>
+              <p:nvSpPr>
+                <p:cNvPr id="18" name="矩形 17"/>
+                <p:cNvSpPr/>
+                <p:nvPr/>
+              </p:nvSpPr>
+              <p:spPr>
+                <a:xfrm>
+                  <a:off x="7948" y="3945"/>
+                  <a:ext cx="5942" cy="1741"/>
+                </a:xfrm>
+                <a:prstGeom prst="rect">
+                  <a:avLst/>
+                </a:prstGeom>
+                <a:solidFill>
+                  <a:schemeClr val="accent4">
+                    <a:lumMod val="40000"/>
+                    <a:lumOff val="60000"/>
+                  </a:schemeClr>
+                </a:solidFill>
+                <a:ln w="12700">
+                  <a:solidFill>
+                    <a:schemeClr val="tx1"/>
+                  </a:solidFill>
+                </a:ln>
+              </p:spPr>
+              <p:style>
+                <a:lnRef idx="2">
+                  <a:schemeClr val="accent1">
+                    <a:shade val="50000"/>
+                  </a:schemeClr>
+                </a:lnRef>
+                <a:fillRef idx="1">
+                  <a:schemeClr val="accent1"/>
+                </a:fillRef>
+                <a:effectRef idx="0">
+                  <a:schemeClr val="accent1"/>
+                </a:effectRef>
+                <a:fontRef idx="minor">
+                  <a:schemeClr val="lt1"/>
+                </a:fontRef>
+              </p:style>
+              <p:txBody>
+                <a:bodyPr rtlCol="0" anchor="ctr"/>
+                <a:lstStyle/>
+                <a:p>
+                  <a:pPr algn="ctr"/>
+                  <a:endParaRPr lang="zh-CN" altLang="en-US">
+                    <a:solidFill>
+                      <a:schemeClr val="accent4">
+                        <a:lumMod val="40000"/>
+                        <a:lumOff val="60000"/>
+                      </a:schemeClr>
+                    </a:solidFill>
+                  </a:endParaRPr>
+                </a:p>
+              </p:txBody>
+            </p:sp>
+            <p:sp>
+              <p:nvSpPr>
+                <p:cNvPr id="21" name="文本框 20"/>
+                <p:cNvSpPr txBox="1"/>
+                <p:nvPr/>
+              </p:nvSpPr>
+              <p:spPr>
+                <a:xfrm>
+                  <a:off x="8072" y="4103"/>
+                  <a:ext cx="5749" cy="1408"/>
+                </a:xfrm>
+                <a:prstGeom prst="rect">
+                  <a:avLst/>
+                </a:prstGeom>
+                <a:noFill/>
+                <a:extLst>
+                  <a:ext uri="{909E8E84-426E-40DD-AFC4-6F175D3DCCD1}">
+                    <a14:hiddenFill xmlns:a14="http://schemas.microsoft.com/office/drawing/2010/main">
+                      <a:solidFill>
+                        <a:schemeClr val="accent2">
+                          <a:lumMod val="40000"/>
+                          <a:lumOff val="60000"/>
+                        </a:schemeClr>
+                      </a:solidFill>
+                    </a14:hiddenFill>
+                  </a:ext>
+                </a:extLst>
+              </p:spPr>
+              <p:txBody>
+                <a:bodyPr wrap="square" rtlCol="0" anchor="t">
+                  <a:noAutofit/>
+                </a:bodyPr>
+                <a:lstStyle/>
+                <a:p>
+                  <a:pPr algn="l"/>
+                  <a:r>
+                    <a:rPr lang="en-US" altLang="zh-CN">
+                      <a:solidFill>
+                        <a:schemeClr val="tx1"/>
+                      </a:solidFill>
+                    </a:rPr>
+                    <a:t>Q/K/V/O</a:t>
+                  </a:r>
+                  <a:r>
+                    <a:rPr lang="zh-CN" altLang="en-US">
+                      <a:solidFill>
+                        <a:schemeClr val="tx1"/>
+                      </a:solidFill>
+                    </a:rPr>
+                    <a:t>投影矩阵</a:t>
+                  </a:r>
+                  <a:endParaRPr lang="zh-CN" altLang="en-US">
+                    <a:solidFill>
+                      <a:schemeClr val="tx1"/>
+                    </a:solidFill>
+                  </a:endParaRPr>
+                </a:p>
+                <a:p>
+                  <a:pPr algn="l"/>
+                  <a:r>
+                    <a:rPr lang="en-US" altLang="zh-CN">
+                      <a:solidFill>
+                        <a:schemeClr val="tx1"/>
+                      </a:solidFill>
+                    </a:rPr>
+                    <a:t>1024 × 1024 × 2 + 1024 × 2048 × 2</a:t>
+                  </a:r>
+                  <a:endParaRPr lang="en-US" altLang="zh-CN">
+                    <a:solidFill>
+                      <a:schemeClr val="tx1"/>
+                    </a:solidFill>
+                  </a:endParaRPr>
+                </a:p>
+                <a:p>
+                  <a:pPr algn="l"/>
+                  <a:r>
+                    <a:rPr lang="en-US" altLang="zh-CN">
+                      <a:solidFill>
+                        <a:schemeClr val="tx1"/>
+                      </a:solidFill>
+                    </a:rPr>
+                    <a:t>= 6,291,456 </a:t>
+                  </a:r>
+                  <a:r>
+                    <a:rPr lang="en-US" altLang="zh-CN">
+                      <a:solidFill>
+                        <a:schemeClr val="tx1"/>
+                      </a:solidFill>
+                      <a:sym typeface="+mn-ea"/>
+                    </a:rPr>
+                    <a:t>≈ 6M</a:t>
+                  </a:r>
+                  <a:endParaRPr lang="en-US" altLang="zh-CN">
+                    <a:solidFill>
+                      <a:schemeClr val="tx1"/>
+                    </a:solidFill>
+                    <a:sym typeface="+mn-ea"/>
+                  </a:endParaRPr>
+                </a:p>
+              </p:txBody>
+            </p:sp>
+          </p:grpSp>
+          <p:sp>
+            <p:nvSpPr>
+              <p:cNvPr id="23" name="矩形 22"/>
+              <p:cNvSpPr/>
+              <p:nvPr/>
+            </p:nvSpPr>
+            <p:spPr>
+              <a:xfrm>
+                <a:off x="7948" y="5989"/>
+                <a:ext cx="5941" cy="1310"/>
+              </a:xfrm>
+              <a:prstGeom prst="rect">
+                <a:avLst/>
+              </a:prstGeom>
+              <a:solidFill>
+                <a:schemeClr val="accent4">
+                  <a:lumMod val="40000"/>
+                  <a:lumOff val="60000"/>
+                </a:schemeClr>
+              </a:solidFill>
+              <a:ln w="12700">
+                <a:solidFill>
+                  <a:schemeClr val="tx1"/>
+                </a:solidFill>
+              </a:ln>
+            </p:spPr>
+            <p:style>
+              <a:lnRef idx="2">
+                <a:schemeClr val="accent1">
+                  <a:shade val="50000"/>
+                </a:schemeClr>
+              </a:lnRef>
+              <a:fillRef idx="1">
+                <a:schemeClr val="accent1"/>
+              </a:fillRef>
+              <a:effectRef idx="0">
+                <a:schemeClr val="accent1"/>
+              </a:effectRef>
+              <a:fontRef idx="minor">
+                <a:schemeClr val="lt1"/>
+              </a:fontRef>
+            </p:style>
+            <p:txBody>
+              <a:bodyPr rtlCol="0" anchor="ctr"/>
+              <a:lstStyle/>
+              <a:p>
+                <a:pPr algn="ctr"/>
+                <a:endParaRPr lang="zh-CN" altLang="en-US">
+                  <a:solidFill>
+                    <a:schemeClr val="accent4">
+                      <a:lumMod val="40000"/>
+                      <a:lumOff val="60000"/>
+                    </a:schemeClr>
+                  </a:solidFill>
+                </a:endParaRPr>
+              </a:p>
+            </p:txBody>
+          </p:sp>
+          <p:sp>
+            <p:nvSpPr>
+              <p:cNvPr id="24" name="文本框 23"/>
+              <p:cNvSpPr txBox="1"/>
+              <p:nvPr/>
+            </p:nvSpPr>
+            <p:spPr>
+              <a:xfrm>
+                <a:off x="8072" y="6147"/>
+                <a:ext cx="5817" cy="1152"/>
+              </a:xfrm>
+              <a:prstGeom prst="rect">
+                <a:avLst/>
+              </a:prstGeom>
+              <a:noFill/>
+              <a:extLst>
+                <a:ext uri="{909E8E84-426E-40DD-AFC4-6F175D3DCCD1}">
+                  <a14:hiddenFill xmlns:a14="http://schemas.microsoft.com/office/drawing/2010/main">
+                    <a:solidFill>
+                      <a:schemeClr val="accent2">
+                        <a:lumMod val="40000"/>
+                        <a:lumOff val="60000"/>
+                      </a:schemeClr>
+                    </a:solidFill>
+                  </a14:hiddenFill>
+                </a:ext>
+              </a:extLst>
+            </p:spPr>
+            <p:txBody>
+              <a:bodyPr wrap="square" rtlCol="0" anchor="t">
+                <a:noAutofit/>
+              </a:bodyPr>
+              <a:lstStyle/>
+              <a:p>
+                <a:pPr algn="l"/>
+                <a:r>
+                  <a:rPr lang="zh-CN" altLang="en-US">
+                    <a:solidFill>
+                      <a:schemeClr val="tx1"/>
+                    </a:solidFill>
+                  </a:rPr>
+                  <a:t>前馈网络</a:t>
+                </a:r>
+                <a:endParaRPr lang="zh-CN" altLang="en-US">
+                  <a:solidFill>
+                    <a:schemeClr val="tx1"/>
+                  </a:solidFill>
+                </a:endParaRPr>
+              </a:p>
+              <a:p>
+                <a:pPr algn="l"/>
+                <a:r>
+                  <a:rPr lang="en-US" altLang="zh-CN">
+                    <a:solidFill>
+                      <a:schemeClr val="tx1"/>
+                    </a:solidFill>
+                  </a:rPr>
+                  <a:t>1024 × 3072 × 3  = 9,437,184 </a:t>
+                </a:r>
+                <a:r>
+                  <a:rPr lang="en-US" altLang="zh-CN">
+                    <a:sym typeface="+mn-ea"/>
+                  </a:rPr>
+                  <a:t> </a:t>
+                </a:r>
+                <a:r>
+                  <a:rPr lang="en-US" altLang="zh-CN">
+                    <a:sym typeface="+mn-ea"/>
+                  </a:rPr>
+                  <a:t>≈ 9M</a:t>
+                </a:r>
+                <a:endParaRPr lang="en-US" altLang="zh-CN">
+                  <a:solidFill>
+                    <a:schemeClr val="tx1"/>
+                  </a:solidFill>
+                  <a:sym typeface="+mn-ea"/>
+                </a:endParaRPr>
+              </a:p>
+              <a:p>
+                <a:pPr algn="l"/>
+                <a:endParaRPr lang="en-US" altLang="zh-CN">
+                  <a:solidFill>
+                    <a:schemeClr val="tx1"/>
+                  </a:solidFill>
+                </a:endParaRPr>
+              </a:p>
+            </p:txBody>
+          </p:sp>
+        </p:grpSp>
+        <p:sp>
+          <p:nvSpPr>
+            <p:cNvPr id="26" name="文本框 25"/>
+            <p:cNvSpPr txBox="1"/>
+            <p:nvPr/>
+          </p:nvSpPr>
+          <p:spPr>
+            <a:xfrm>
+              <a:off x="14952" y="4975"/>
+              <a:ext cx="1447" cy="608"/>
+            </a:xfrm>
+            <a:prstGeom prst="rect">
+              <a:avLst/>
+            </a:prstGeom>
+            <a:noFill/>
+            <a:extLst>
+              <a:ext uri="{909E8E84-426E-40DD-AFC4-6F175D3DCCD1}">
+                <a14:hiddenFill xmlns:a14="http://schemas.microsoft.com/office/drawing/2010/main">
+                  <a:solidFill>
+                    <a:schemeClr val="accent2">
+                      <a:lumMod val="40000"/>
+                      <a:lumOff val="60000"/>
+                    </a:schemeClr>
+                  </a:solidFill>
+                </a14:hiddenFill>
+              </a:ext>
+            </a:extLst>
+          </p:spPr>
+          <p:txBody>
+            <a:bodyPr wrap="square" rtlCol="0" anchor="t">
+              <a:noAutofit/>
+            </a:bodyPr>
+            <a:lstStyle/>
+            <a:p>
+              <a:pPr algn="l"/>
+              <a:r>
+                <a:rPr lang="en-US" altLang="zh-CN">
+                  <a:sym typeface="+mn-ea"/>
+                </a:rPr>
+                <a:t>× 28</a:t>
+              </a:r>
+              <a:r>
+                <a:rPr lang="zh-CN" altLang="en-US">
+                  <a:sym typeface="+mn-ea"/>
+                </a:rPr>
+                <a:t>层</a:t>
+              </a:r>
+              <a:endParaRPr lang="zh-CN" altLang="en-US">
+                <a:sym typeface="+mn-ea"/>
+              </a:endParaRPr>
+            </a:p>
+          </p:txBody>
+        </p:sp>
+      </p:grpSp>
+      <p:sp>
+        <p:nvSpPr>
+          <p:cNvPr id="33" name="文本框 32"/>
+          <p:cNvSpPr txBox="1"/>
+          <p:nvPr/>
+        </p:nvSpPr>
+        <p:spPr>
+          <a:xfrm>
+            <a:off x="4583430" y="1213485"/>
+            <a:ext cx="5429250" cy="732155"/>
+          </a:xfrm>
+          <a:prstGeom prst="rect">
+            <a:avLst/>
+          </a:prstGeom>
+          <a:noFill/>
+          <a:extLst>
+            <a:ext uri="{909E8E84-426E-40DD-AFC4-6F175D3DCCD1}">
+              <a14:hiddenFill xmlns:a14="http://schemas.microsoft.com/office/drawing/2010/main">
+                <a:solidFill>
+                  <a:schemeClr val="accent2">
+                    <a:lumMod val="40000"/>
+                    <a:lumOff val="60000"/>
+                  </a:schemeClr>
+                </a:solidFill>
+              </a14:hiddenFill>
+            </a:ext>
+          </a:extLst>
+        </p:spPr>
+        <p:txBody>
+          <a:bodyPr wrap="square" rtlCol="0" anchor="t">
+            <a:noAutofit/>
+          </a:bodyPr>
+          <a:lstStyle/>
+          <a:p>
+            <a:pPr algn="l"/>
+            <a:r>
+              <a:rPr lang="zh-CN" altLang="en-US">
+                <a:sym typeface="+mn-ea"/>
+              </a:rPr>
+              <a:t>所有层的参数总量</a:t>
+            </a:r>
+            <a:endParaRPr lang="zh-CN" altLang="en-US">
+              <a:sym typeface="+mn-ea"/>
+            </a:endParaRPr>
+          </a:p>
+          <a:p>
+            <a:pPr algn="l"/>
+            <a:r>
+              <a:rPr lang="en-US" altLang="zh-CN">
+                <a:sym typeface="+mn-ea"/>
+              </a:rPr>
+              <a:t>15,728,640 × 28 = 440,401,920 </a:t>
+            </a:r>
+            <a:r>
+              <a:rPr lang="en-US" altLang="zh-CN">
+                <a:sym typeface="+mn-ea"/>
+              </a:rPr>
+              <a:t>≈ 440M</a:t>
+            </a:r>
+            <a:endParaRPr lang="en-US" altLang="zh-CN"/>
+          </a:p>
+          <a:p>
+            <a:pPr algn="l"/>
+            <a:endParaRPr lang="en-US" altLang="zh-CN">
+              <a:sym typeface="+mn-ea"/>
+            </a:endParaRPr>
           </a:p>
         </p:txBody>
       </p:sp>

--- a/raws/画图.pptx
+++ b/raws/画图.pptx
@@ -17,11 +17,13 @@
     <p:sldId id="266" r:id="rId12"/>
     <p:sldId id="267" r:id="rId13"/>
     <p:sldId id="268" r:id="rId14"/>
+    <p:sldId id="269" r:id="rId15"/>
+    <p:sldId id="270" r:id="rId16"/>
   </p:sldIdLst>
   <p:sldSz cx="12192000" cy="6858000"/>
   <p:notesSz cx="6858000" cy="9144000"/>
   <p:custDataLst>
-    <p:tags r:id="rId18"/>
+    <p:tags r:id="rId20"/>
   </p:custDataLst>
   <p:defaultTextStyle>
     <a:defPPr>
@@ -7984,6 +7986,1825 @@
 </p:sld>
 </file>
 
+<file path=ppt/slides/slide13.xml><?xml version="1.0" encoding="utf-8"?>
+<p:sld xmlns:a="http://schemas.openxmlformats.org/drawingml/2006/main" xmlns:r="http://schemas.openxmlformats.org/officeDocument/2006/relationships" xmlns:p="http://schemas.openxmlformats.org/presentationml/2006/main">
+  <p:cSld>
+    <p:spTree>
+      <p:nvGrpSpPr>
+        <p:cNvPr id="1" name=""/>
+        <p:cNvGrpSpPr/>
+        <p:nvPr/>
+      </p:nvGrpSpPr>
+      <p:grpSpPr/>
+      <p:sp>
+        <p:nvSpPr>
+          <p:cNvPr id="9" name="文本框 8"/>
+          <p:cNvSpPr txBox="1"/>
+          <p:nvPr/>
+        </p:nvSpPr>
+        <p:spPr>
+          <a:xfrm>
+            <a:off x="3662680" y="3244215"/>
+            <a:ext cx="1244600" cy="645160"/>
+          </a:xfrm>
+          <a:prstGeom prst="rect">
+            <a:avLst/>
+          </a:prstGeom>
+          <a:noFill/>
+          <a:ln w="12700">
+            <a:solidFill>
+              <a:schemeClr val="tx1"/>
+            </a:solidFill>
+          </a:ln>
+        </p:spPr>
+        <p:txBody>
+          <a:bodyPr wrap="square" rtlCol="0">
+            <a:spAutoFit/>
+          </a:bodyPr>
+          <a:lstStyle/>
+          <a:p>
+            <a:pPr algn="ctr"/>
+            <a:r>
+              <a:rPr lang="en-US" altLang="zh-CN"/>
+              <a:t>http-proxy</a:t>
+            </a:r>
+            <a:r>
+              <a:rPr lang="zh-CN" altLang="en-US"/>
+              <a:t>代理</a:t>
+            </a:r>
+            <a:endParaRPr lang="zh-CN" altLang="en-US"/>
+          </a:p>
+        </p:txBody>
+      </p:sp>
+      <p:sp>
+        <p:nvSpPr>
+          <p:cNvPr id="10" name="矩形 9"/>
+          <p:cNvSpPr/>
+          <p:nvPr/>
+        </p:nvSpPr>
+        <p:spPr>
+          <a:xfrm>
+            <a:off x="780415" y="360680"/>
+            <a:ext cx="9209405" cy="4421505"/>
+          </a:xfrm>
+          <a:prstGeom prst="rect">
+            <a:avLst/>
+          </a:prstGeom>
+          <a:solidFill>
+            <a:schemeClr val="bg2"/>
+          </a:solidFill>
+          <a:ln w="12700">
+            <a:solidFill>
+              <a:schemeClr val="tx1"/>
+            </a:solidFill>
+          </a:ln>
+        </p:spPr>
+        <p:style>
+          <a:lnRef idx="2">
+            <a:schemeClr val="accent1">
+              <a:shade val="50000"/>
+            </a:schemeClr>
+          </a:lnRef>
+          <a:fillRef idx="1">
+            <a:schemeClr val="accent1"/>
+          </a:fillRef>
+          <a:effectRef idx="0">
+            <a:schemeClr val="accent1"/>
+          </a:effectRef>
+          <a:fontRef idx="minor">
+            <a:schemeClr val="lt1"/>
+          </a:fontRef>
+        </p:style>
+        <p:txBody>
+          <a:bodyPr rtlCol="0" anchor="ctr"/>
+          <a:lstStyle/>
+          <a:p>
+            <a:pPr algn="ctr"/>
+            <a:endParaRPr lang="zh-CN" altLang="en-US"/>
+          </a:p>
+        </p:txBody>
+      </p:sp>
+      <p:sp>
+        <p:nvSpPr>
+          <p:cNvPr id="11" name="文本框 10"/>
+          <p:cNvSpPr txBox="1"/>
+          <p:nvPr/>
+        </p:nvSpPr>
+        <p:spPr>
+          <a:xfrm>
+            <a:off x="956945" y="516890"/>
+            <a:ext cx="7654290" cy="368300"/>
+          </a:xfrm>
+          <a:prstGeom prst="rect">
+            <a:avLst/>
+          </a:prstGeom>
+          <a:noFill/>
+        </p:spPr>
+        <p:txBody>
+          <a:bodyPr wrap="square" rtlCol="0" anchor="t">
+            <a:spAutoFit/>
+          </a:bodyPr>
+          <a:lstStyle/>
+          <a:p>
+            <a:pPr algn="l"/>
+            <a:r>
+              <a:rPr lang="zh-CN" altLang="en-US"/>
+              <a:t>超级块</a:t>
+            </a:r>
+            <a:r>
+              <a:rPr lang="en-US" altLang="zh-CN"/>
+              <a:t>  </a:t>
+            </a:r>
+            <a:r>
+              <a:rPr lang="zh-CN" altLang="en-US"/>
+              <a:t>包含</a:t>
+            </a:r>
+            <a:r>
+              <a:rPr lang="en-US" altLang="zh-CN"/>
+              <a:t>256</a:t>
+            </a:r>
+            <a:r>
+              <a:rPr lang="zh-CN" altLang="en-US"/>
+              <a:t>个</a:t>
+            </a:r>
+            <a:r>
+              <a:rPr lang="zh-CN" altLang="en-US"/>
+              <a:t>参数</a:t>
+            </a:r>
+            <a:endParaRPr lang="zh-CN" altLang="en-US"/>
+          </a:p>
+        </p:txBody>
+      </p:sp>
+      <p:grpSp>
+        <p:nvGrpSpPr>
+          <p:cNvPr id="42" name="组合 41"/>
+          <p:cNvGrpSpPr/>
+          <p:nvPr/>
+        </p:nvGrpSpPr>
+        <p:grpSpPr>
+          <a:xfrm>
+            <a:off x="1017905" y="2047240"/>
+            <a:ext cx="3277870" cy="1381760"/>
+            <a:chOff x="1604" y="1646"/>
+            <a:chExt cx="4748" cy="2176"/>
+          </a:xfrm>
+        </p:grpSpPr>
+        <p:grpSp>
+          <p:nvGrpSpPr>
+            <p:cNvPr id="13" name="组合 12"/>
+            <p:cNvGrpSpPr/>
+            <p:nvPr/>
+          </p:nvGrpSpPr>
+          <p:grpSpPr>
+            <a:xfrm>
+              <a:off x="1604" y="2998"/>
+              <a:ext cx="4749" cy="824"/>
+              <a:chOff x="1604" y="3742"/>
+              <a:chExt cx="5042" cy="1040"/>
+            </a:xfrm>
+          </p:grpSpPr>
+          <p:sp>
+            <p:nvSpPr>
+              <p:cNvPr id="6" name="矩形 5"/>
+              <p:cNvSpPr/>
+              <p:nvPr/>
+            </p:nvSpPr>
+            <p:spPr>
+              <a:xfrm>
+                <a:off x="1604" y="3742"/>
+                <a:ext cx="5042" cy="1040"/>
+              </a:xfrm>
+              <a:prstGeom prst="rect">
+                <a:avLst/>
+              </a:prstGeom>
+              <a:solidFill>
+                <a:schemeClr val="accent1">
+                  <a:lumMod val="40000"/>
+                  <a:lumOff val="60000"/>
+                </a:schemeClr>
+              </a:solidFill>
+              <a:ln w="12700">
+                <a:solidFill>
+                  <a:schemeClr val="tx1"/>
+                </a:solidFill>
+              </a:ln>
+            </p:spPr>
+            <p:style>
+              <a:lnRef idx="2">
+                <a:schemeClr val="accent1">
+                  <a:shade val="50000"/>
+                </a:schemeClr>
+              </a:lnRef>
+              <a:fillRef idx="1">
+                <a:schemeClr val="accent1"/>
+              </a:fillRef>
+              <a:effectRef idx="0">
+                <a:schemeClr val="accent1"/>
+              </a:effectRef>
+              <a:fontRef idx="minor">
+                <a:schemeClr val="lt1"/>
+              </a:fontRef>
+            </p:style>
+            <p:txBody>
+              <a:bodyPr rtlCol="0" anchor="ctr"/>
+              <a:lstStyle/>
+              <a:p>
+                <a:pPr algn="ctr"/>
+                <a:endParaRPr lang="zh-CN" altLang="en-US"/>
+              </a:p>
+            </p:txBody>
+          </p:sp>
+          <p:sp>
+            <p:nvSpPr>
+              <p:cNvPr id="12" name="文本框 11"/>
+              <p:cNvSpPr txBox="1"/>
+              <p:nvPr/>
+            </p:nvSpPr>
+            <p:spPr>
+              <a:xfrm>
+                <a:off x="1730" y="3896"/>
+                <a:ext cx="4831" cy="798"/>
+              </a:xfrm>
+              <a:prstGeom prst="rect">
+                <a:avLst/>
+              </a:prstGeom>
+              <a:noFill/>
+              <a:ln>
+                <a:noFill/>
+              </a:ln>
+            </p:spPr>
+            <p:txBody>
+              <a:bodyPr wrap="square" rtlCol="0" anchor="t">
+                <a:noAutofit/>
+              </a:bodyPr>
+              <a:lstStyle/>
+              <a:p>
+                <a:pPr algn="l"/>
+                <a:r>
+                  <a:rPr lang="zh-CN" altLang="en-US"/>
+                  <a:t>超级块最小值</a:t>
+                </a:r>
+                <a:r>
+                  <a:rPr lang="en-US" altLang="zh-CN"/>
+                  <a:t>       16</a:t>
+                </a:r>
+                <a:r>
+                  <a:rPr lang="en-US" altLang="zh-CN"/>
+                  <a:t>bits   d</a:t>
+                </a:r>
+                <a:r>
+                  <a:rPr lang="en-US" altLang="zh-CN"/>
+                  <a:t>min</a:t>
+                </a:r>
+                <a:endParaRPr lang="en-US" altLang="zh-CN"/>
+              </a:p>
+            </p:txBody>
+          </p:sp>
+        </p:grpSp>
+        <p:sp>
+          <p:nvSpPr>
+            <p:cNvPr id="4" name="矩形 3"/>
+            <p:cNvSpPr/>
+            <p:nvPr/>
+          </p:nvSpPr>
+          <p:spPr>
+            <a:xfrm>
+              <a:off x="1604" y="1646"/>
+              <a:ext cx="4748" cy="888"/>
+            </a:xfrm>
+            <a:prstGeom prst="rect">
+              <a:avLst/>
+            </a:prstGeom>
+            <a:solidFill>
+              <a:schemeClr val="accent1">
+                <a:lumMod val="40000"/>
+                <a:lumOff val="60000"/>
+              </a:schemeClr>
+            </a:solidFill>
+            <a:ln w="12700">
+              <a:solidFill>
+                <a:schemeClr val="tx1"/>
+              </a:solidFill>
+            </a:ln>
+          </p:spPr>
+          <p:style>
+            <a:lnRef idx="2">
+              <a:schemeClr val="accent1">
+                <a:shade val="50000"/>
+              </a:schemeClr>
+            </a:lnRef>
+            <a:fillRef idx="1">
+              <a:schemeClr val="accent1"/>
+            </a:fillRef>
+            <a:effectRef idx="0">
+              <a:schemeClr val="accent1"/>
+            </a:effectRef>
+            <a:fontRef idx="minor">
+              <a:schemeClr val="lt1"/>
+            </a:fontRef>
+          </p:style>
+          <p:txBody>
+            <a:bodyPr rtlCol="0" anchor="ctr"/>
+            <a:lstStyle/>
+            <a:p>
+              <a:pPr algn="ctr"/>
+              <a:endParaRPr lang="zh-CN" altLang="en-US"/>
+            </a:p>
+          </p:txBody>
+        </p:sp>
+        <p:sp>
+          <p:nvSpPr>
+            <p:cNvPr id="5" name="文本框 4"/>
+            <p:cNvSpPr txBox="1"/>
+            <p:nvPr/>
+          </p:nvSpPr>
+          <p:spPr>
+            <a:xfrm>
+              <a:off x="1723" y="1800"/>
+              <a:ext cx="4354" cy="798"/>
+            </a:xfrm>
+            <a:prstGeom prst="rect">
+              <a:avLst/>
+            </a:prstGeom>
+            <a:noFill/>
+            <a:ln>
+              <a:noFill/>
+            </a:ln>
+          </p:spPr>
+          <p:txBody>
+            <a:bodyPr wrap="square" rtlCol="0" anchor="t">
+              <a:noAutofit/>
+            </a:bodyPr>
+            <a:lstStyle/>
+            <a:p>
+              <a:pPr algn="l"/>
+              <a:r>
+                <a:rPr lang="zh-CN" altLang="en-US"/>
+                <a:t>超级块缩放因子</a:t>
+              </a:r>
+              <a:r>
+                <a:rPr lang="en-US" altLang="zh-CN"/>
+                <a:t>  16bits </a:t>
+              </a:r>
+              <a:r>
+                <a:rPr lang="en-US" altLang="zh-CN"/>
+                <a:t>  </a:t>
+              </a:r>
+              <a:r>
+                <a:rPr lang="en-US" altLang="zh-CN"/>
+                <a:t>d</a:t>
+              </a:r>
+              <a:endParaRPr lang="en-US" altLang="zh-CN"/>
+            </a:p>
+          </p:txBody>
+        </p:sp>
+      </p:grpSp>
+      <p:grpSp>
+        <p:nvGrpSpPr>
+          <p:cNvPr id="43" name="组合 42"/>
+          <p:cNvGrpSpPr/>
+          <p:nvPr/>
+        </p:nvGrpSpPr>
+        <p:grpSpPr>
+          <a:xfrm>
+            <a:off x="4583430" y="1045210"/>
+            <a:ext cx="5640705" cy="3361055"/>
+            <a:chOff x="6885" y="1646"/>
+            <a:chExt cx="8883" cy="5293"/>
+          </a:xfrm>
+        </p:grpSpPr>
+        <p:sp>
+          <p:nvSpPr>
+            <p:cNvPr id="32" name="矩形 31"/>
+            <p:cNvSpPr/>
+            <p:nvPr/>
+          </p:nvSpPr>
+          <p:spPr>
+            <a:xfrm>
+              <a:off x="6885" y="1646"/>
+              <a:ext cx="6953" cy="5293"/>
+            </a:xfrm>
+            <a:prstGeom prst="rect">
+              <a:avLst/>
+            </a:prstGeom>
+            <a:solidFill>
+              <a:schemeClr val="accent6">
+                <a:lumMod val="40000"/>
+                <a:lumOff val="60000"/>
+              </a:schemeClr>
+            </a:solidFill>
+            <a:ln w="12700">
+              <a:solidFill>
+                <a:schemeClr val="tx1"/>
+              </a:solidFill>
+            </a:ln>
+          </p:spPr>
+          <p:style>
+            <a:lnRef idx="2">
+              <a:schemeClr val="accent1">
+                <a:shade val="50000"/>
+              </a:schemeClr>
+            </a:lnRef>
+            <a:fillRef idx="1">
+              <a:schemeClr val="accent1"/>
+            </a:fillRef>
+            <a:effectRef idx="0">
+              <a:schemeClr val="accent1"/>
+            </a:effectRef>
+            <a:fontRef idx="minor">
+              <a:schemeClr val="lt1"/>
+            </a:fontRef>
+          </p:style>
+          <p:txBody>
+            <a:bodyPr rtlCol="0" anchor="ctr"/>
+            <a:lstStyle/>
+            <a:p>
+              <a:pPr algn="ctr"/>
+              <a:endParaRPr lang="zh-CN" altLang="en-US"/>
+            </a:p>
+          </p:txBody>
+        </p:sp>
+        <p:grpSp>
+          <p:nvGrpSpPr>
+            <p:cNvPr id="34" name="组合 33"/>
+            <p:cNvGrpSpPr/>
+            <p:nvPr/>
+          </p:nvGrpSpPr>
+          <p:grpSpPr>
+            <a:xfrm rot="0">
+              <a:off x="7345" y="5421"/>
+              <a:ext cx="4751" cy="763"/>
+              <a:chOff x="7013" y="4465"/>
+              <a:chExt cx="5298" cy="1248"/>
+            </a:xfrm>
+          </p:grpSpPr>
+          <p:sp>
+            <p:nvSpPr>
+              <p:cNvPr id="7" name="矩形 6"/>
+              <p:cNvSpPr/>
+              <p:nvPr/>
+            </p:nvSpPr>
+            <p:spPr>
+              <a:xfrm>
+                <a:off x="7013" y="4465"/>
+                <a:ext cx="5298" cy="1248"/>
+              </a:xfrm>
+              <a:prstGeom prst="rect">
+                <a:avLst/>
+              </a:prstGeom>
+              <a:solidFill>
+                <a:schemeClr val="accent2">
+                  <a:lumMod val="40000"/>
+                  <a:lumOff val="60000"/>
+                </a:schemeClr>
+              </a:solidFill>
+              <a:ln w="12700">
+                <a:solidFill>
+                  <a:schemeClr val="tx1"/>
+                </a:solidFill>
+              </a:ln>
+            </p:spPr>
+            <p:style>
+              <a:lnRef idx="2">
+                <a:schemeClr val="accent1">
+                  <a:shade val="50000"/>
+                </a:schemeClr>
+              </a:lnRef>
+              <a:fillRef idx="1">
+                <a:schemeClr val="accent1"/>
+              </a:fillRef>
+              <a:effectRef idx="0">
+                <a:schemeClr val="accent1"/>
+              </a:effectRef>
+              <a:fontRef idx="minor">
+                <a:schemeClr val="lt1"/>
+              </a:fontRef>
+            </p:style>
+            <p:txBody>
+              <a:bodyPr rtlCol="0" anchor="ctr"/>
+              <a:lstStyle/>
+              <a:p>
+                <a:pPr algn="ctr"/>
+                <a:endParaRPr lang="zh-CN" altLang="en-US"/>
+              </a:p>
+            </p:txBody>
+          </p:sp>
+          <p:sp>
+            <p:nvSpPr>
+              <p:cNvPr id="15" name="文本框 14"/>
+              <p:cNvSpPr txBox="1"/>
+              <p:nvPr/>
+            </p:nvSpPr>
+            <p:spPr>
+              <a:xfrm>
+                <a:off x="7137" y="4594"/>
+                <a:ext cx="4398" cy="1006"/>
+              </a:xfrm>
+              <a:prstGeom prst="rect">
+                <a:avLst/>
+              </a:prstGeom>
+              <a:solidFill>
+                <a:schemeClr val="accent2">
+                  <a:lumMod val="40000"/>
+                  <a:lumOff val="60000"/>
+                </a:schemeClr>
+              </a:solidFill>
+            </p:spPr>
+            <p:txBody>
+              <a:bodyPr wrap="square" rtlCol="0" anchor="t">
+                <a:noAutofit/>
+              </a:bodyPr>
+              <a:lstStyle/>
+              <a:p>
+                <a:pPr algn="l"/>
+                <a:r>
+                  <a:rPr lang="zh-CN" altLang="en-US">
+                    <a:sym typeface="+mn-ea"/>
+                  </a:rPr>
+                  <a:t>单个参数</a:t>
+                </a:r>
+                <a:r>
+                  <a:rPr lang="en-US" altLang="zh-CN">
+                    <a:sym typeface="+mn-ea"/>
+                  </a:rPr>
+                  <a:t>          4</a:t>
+                </a:r>
+                <a:r>
+                  <a:rPr lang="en-US" altLang="zh-CN">
+                    <a:sym typeface="+mn-ea"/>
+                  </a:rPr>
+                  <a:t>bits</a:t>
+                </a:r>
+                <a:endParaRPr lang="en-US" altLang="zh-CN">
+                  <a:sym typeface="+mn-ea"/>
+                </a:endParaRPr>
+              </a:p>
+            </p:txBody>
+          </p:sp>
+        </p:grpSp>
+        <p:sp>
+          <p:nvSpPr>
+            <p:cNvPr id="26" name="文本框 25"/>
+            <p:cNvSpPr txBox="1"/>
+            <p:nvPr/>
+          </p:nvSpPr>
+          <p:spPr>
+            <a:xfrm>
+              <a:off x="12198" y="5508"/>
+              <a:ext cx="1447" cy="608"/>
+            </a:xfrm>
+            <a:prstGeom prst="rect">
+              <a:avLst/>
+            </a:prstGeom>
+            <a:noFill/>
+            <a:extLst>
+              <a:ext uri="{909E8E84-426E-40DD-AFC4-6F175D3DCCD1}">
+                <a14:hiddenFill xmlns:a14="http://schemas.microsoft.com/office/drawing/2010/main">
+                  <a:solidFill>
+                    <a:schemeClr val="accent2">
+                      <a:lumMod val="40000"/>
+                      <a:lumOff val="60000"/>
+                    </a:schemeClr>
+                  </a:solidFill>
+                </a14:hiddenFill>
+              </a:ext>
+            </a:extLst>
+          </p:spPr>
+          <p:txBody>
+            <a:bodyPr wrap="square" rtlCol="0" anchor="t">
+              <a:noAutofit/>
+            </a:bodyPr>
+            <a:lstStyle/>
+            <a:p>
+              <a:pPr algn="l"/>
+              <a:r>
+                <a:rPr lang="en-US" altLang="zh-CN">
+                  <a:sym typeface="+mn-ea"/>
+                </a:rPr>
+                <a:t>× 32</a:t>
+              </a:r>
+              <a:r>
+                <a:rPr lang="zh-CN" altLang="en-US">
+                  <a:sym typeface="+mn-ea"/>
+                </a:rPr>
+                <a:t>个</a:t>
+              </a:r>
+              <a:endParaRPr lang="zh-CN" altLang="en-US">
+                <a:sym typeface="+mn-ea"/>
+              </a:endParaRPr>
+            </a:p>
+          </p:txBody>
+        </p:sp>
+        <p:sp>
+          <p:nvSpPr>
+            <p:cNvPr id="16" name="文本框 15"/>
+            <p:cNvSpPr txBox="1"/>
+            <p:nvPr/>
+          </p:nvSpPr>
+          <p:spPr>
+            <a:xfrm>
+              <a:off x="13952" y="4176"/>
+              <a:ext cx="1447" cy="608"/>
+            </a:xfrm>
+            <a:prstGeom prst="rect">
+              <a:avLst/>
+            </a:prstGeom>
+            <a:noFill/>
+            <a:extLst>
+              <a:ext uri="{909E8E84-426E-40DD-AFC4-6F175D3DCCD1}">
+                <a14:hiddenFill xmlns:a14="http://schemas.microsoft.com/office/drawing/2010/main">
+                  <a:solidFill>
+                    <a:schemeClr val="accent2">
+                      <a:lumMod val="40000"/>
+                      <a:lumOff val="60000"/>
+                    </a:schemeClr>
+                  </a:solidFill>
+                </a14:hiddenFill>
+              </a:ext>
+            </a:extLst>
+          </p:spPr>
+          <p:txBody>
+            <a:bodyPr wrap="square" rtlCol="0" anchor="t">
+              <a:noAutofit/>
+            </a:bodyPr>
+            <a:lstStyle/>
+            <a:p>
+              <a:pPr algn="l"/>
+              <a:r>
+                <a:rPr lang="en-US" altLang="zh-CN">
+                  <a:sym typeface="+mn-ea"/>
+                </a:rPr>
+                <a:t>× 8</a:t>
+              </a:r>
+              <a:r>
+                <a:rPr lang="zh-CN" altLang="en-US">
+                  <a:sym typeface="+mn-ea"/>
+                </a:rPr>
+                <a:t>块</a:t>
+              </a:r>
+              <a:endParaRPr lang="zh-CN" altLang="en-US">
+                <a:sym typeface="+mn-ea"/>
+              </a:endParaRPr>
+            </a:p>
+          </p:txBody>
+        </p:sp>
+        <p:sp>
+          <p:nvSpPr>
+            <p:cNvPr id="33" name="文本框 32"/>
+            <p:cNvSpPr txBox="1"/>
+            <p:nvPr/>
+          </p:nvSpPr>
+          <p:spPr>
+            <a:xfrm>
+              <a:off x="7218" y="1911"/>
+              <a:ext cx="8550" cy="609"/>
+            </a:xfrm>
+            <a:prstGeom prst="rect">
+              <a:avLst/>
+            </a:prstGeom>
+            <a:noFill/>
+            <a:extLst>
+              <a:ext uri="{909E8E84-426E-40DD-AFC4-6F175D3DCCD1}">
+                <a14:hiddenFill xmlns:a14="http://schemas.microsoft.com/office/drawing/2010/main">
+                  <a:solidFill>
+                    <a:schemeClr val="accent2">
+                      <a:lumMod val="40000"/>
+                      <a:lumOff val="60000"/>
+                    </a:schemeClr>
+                  </a:solidFill>
+                </a14:hiddenFill>
+              </a:ext>
+            </a:extLst>
+          </p:spPr>
+          <p:txBody>
+            <a:bodyPr wrap="square" rtlCol="0" anchor="t">
+              <a:noAutofit/>
+            </a:bodyPr>
+            <a:lstStyle/>
+            <a:p>
+              <a:pPr algn="l"/>
+              <a:r>
+                <a:rPr lang="zh-CN" altLang="en-US">
+                  <a:sym typeface="+mn-ea"/>
+                </a:rPr>
+                <a:t>子块</a:t>
+              </a:r>
+              <a:r>
+                <a:rPr lang="en-US" altLang="zh-CN">
+                  <a:sym typeface="+mn-ea"/>
+                </a:rPr>
+                <a:t>  </a:t>
+              </a:r>
+              <a:r>
+                <a:rPr lang="zh-CN" altLang="en-US">
+                  <a:sym typeface="+mn-ea"/>
+                </a:rPr>
+                <a:t>包含</a:t>
+              </a:r>
+              <a:r>
+                <a:rPr lang="en-US" altLang="zh-CN">
+                  <a:sym typeface="+mn-ea"/>
+                </a:rPr>
+                <a:t>32</a:t>
+              </a:r>
+              <a:r>
+                <a:rPr lang="zh-CN" altLang="en-US">
+                  <a:sym typeface="+mn-ea"/>
+                </a:rPr>
+                <a:t>个参数</a:t>
+              </a:r>
+              <a:endParaRPr lang="en-US" altLang="zh-CN">
+                <a:sym typeface="+mn-ea"/>
+              </a:endParaRPr>
+            </a:p>
+            <a:p>
+              <a:pPr algn="l"/>
+              <a:endParaRPr lang="en-US" altLang="zh-CN">
+                <a:sym typeface="+mn-ea"/>
+              </a:endParaRPr>
+            </a:p>
+          </p:txBody>
+        </p:sp>
+        <p:grpSp>
+          <p:nvGrpSpPr>
+            <p:cNvPr id="41" name="组合 40"/>
+            <p:cNvGrpSpPr/>
+            <p:nvPr/>
+          </p:nvGrpSpPr>
+          <p:grpSpPr>
+            <a:xfrm>
+              <a:off x="7346" y="2865"/>
+              <a:ext cx="4749" cy="2207"/>
+              <a:chOff x="10132" y="1885"/>
+              <a:chExt cx="4749" cy="2207"/>
+            </a:xfrm>
+          </p:grpSpPr>
+          <p:sp>
+            <p:nvSpPr>
+              <p:cNvPr id="36" name="矩形 35"/>
+              <p:cNvSpPr/>
+              <p:nvPr/>
+            </p:nvSpPr>
+            <p:spPr>
+              <a:xfrm>
+                <a:off x="10132" y="1885"/>
+                <a:ext cx="4748" cy="888"/>
+              </a:xfrm>
+              <a:prstGeom prst="rect">
+                <a:avLst/>
+              </a:prstGeom>
+              <a:solidFill>
+                <a:schemeClr val="accent1">
+                  <a:lumMod val="40000"/>
+                  <a:lumOff val="60000"/>
+                </a:schemeClr>
+              </a:solidFill>
+              <a:ln w="12700">
+                <a:solidFill>
+                  <a:schemeClr val="tx1"/>
+                </a:solidFill>
+              </a:ln>
+            </p:spPr>
+            <p:style>
+              <a:lnRef idx="2">
+                <a:schemeClr val="accent1">
+                  <a:shade val="50000"/>
+                </a:schemeClr>
+              </a:lnRef>
+              <a:fillRef idx="1">
+                <a:schemeClr val="accent1"/>
+              </a:fillRef>
+              <a:effectRef idx="0">
+                <a:schemeClr val="accent1"/>
+              </a:effectRef>
+              <a:fontRef idx="minor">
+                <a:schemeClr val="lt1"/>
+              </a:fontRef>
+            </p:style>
+            <p:txBody>
+              <a:bodyPr rtlCol="0" anchor="ctr"/>
+              <a:lstStyle/>
+              <a:p>
+                <a:pPr algn="ctr"/>
+                <a:endParaRPr lang="zh-CN" altLang="en-US"/>
+              </a:p>
+            </p:txBody>
+          </p:sp>
+          <p:sp>
+            <p:nvSpPr>
+              <p:cNvPr id="37" name="文本框 36"/>
+              <p:cNvSpPr txBox="1"/>
+              <p:nvPr/>
+            </p:nvSpPr>
+            <p:spPr>
+              <a:xfrm>
+                <a:off x="10242" y="2057"/>
+                <a:ext cx="4498" cy="661"/>
+              </a:xfrm>
+              <a:prstGeom prst="rect">
+                <a:avLst/>
+              </a:prstGeom>
+              <a:noFill/>
+              <a:ln>
+                <a:noFill/>
+              </a:ln>
+            </p:spPr>
+            <p:txBody>
+              <a:bodyPr wrap="square" rtlCol="0" anchor="t">
+                <a:noAutofit/>
+              </a:bodyPr>
+              <a:lstStyle/>
+              <a:p>
+                <a:pPr algn="l"/>
+                <a:r>
+                  <a:rPr lang="zh-CN" altLang="en-US">
+                    <a:sym typeface="+mn-ea"/>
+                  </a:rPr>
+                  <a:t>子块</a:t>
+                </a:r>
+                <a:r>
+                  <a:rPr lang="zh-CN" altLang="en-US"/>
+                  <a:t>缩放因子</a:t>
+                </a:r>
+                <a:r>
+                  <a:rPr lang="en-US" altLang="zh-CN"/>
+                  <a:t> </a:t>
+                </a:r>
+                <a:r>
+                  <a:rPr lang="en-US"/>
+                  <a:t>6bits</a:t>
+                </a:r>
+                <a:r>
+                  <a:rPr lang="en-US" altLang="zh-CN"/>
+                  <a:t>  scales</a:t>
+                </a:r>
+                <a:endParaRPr lang="en-US" altLang="zh-CN"/>
+              </a:p>
+            </p:txBody>
+          </p:sp>
+          <p:sp>
+            <p:nvSpPr>
+              <p:cNvPr id="39" name="矩形 38"/>
+              <p:cNvSpPr/>
+              <p:nvPr/>
+            </p:nvSpPr>
+            <p:spPr>
+              <a:xfrm>
+                <a:off x="10133" y="3140"/>
+                <a:ext cx="4748" cy="888"/>
+              </a:xfrm>
+              <a:prstGeom prst="rect">
+                <a:avLst/>
+              </a:prstGeom>
+              <a:solidFill>
+                <a:schemeClr val="accent1">
+                  <a:lumMod val="40000"/>
+                  <a:lumOff val="60000"/>
+                </a:schemeClr>
+              </a:solidFill>
+              <a:ln w="12700">
+                <a:solidFill>
+                  <a:schemeClr val="tx1"/>
+                </a:solidFill>
+              </a:ln>
+            </p:spPr>
+            <p:style>
+              <a:lnRef idx="2">
+                <a:schemeClr val="accent1">
+                  <a:shade val="50000"/>
+                </a:schemeClr>
+              </a:lnRef>
+              <a:fillRef idx="1">
+                <a:schemeClr val="accent1"/>
+              </a:fillRef>
+              <a:effectRef idx="0">
+                <a:schemeClr val="accent1"/>
+              </a:effectRef>
+              <a:fontRef idx="minor">
+                <a:schemeClr val="lt1"/>
+              </a:fontRef>
+            </p:style>
+            <p:txBody>
+              <a:bodyPr rtlCol="0" anchor="ctr"/>
+              <a:lstStyle/>
+              <a:p>
+                <a:pPr algn="ctr"/>
+                <a:endParaRPr lang="zh-CN" altLang="en-US"/>
+              </a:p>
+            </p:txBody>
+          </p:sp>
+          <p:sp>
+            <p:nvSpPr>
+              <p:cNvPr id="40" name="文本框 39"/>
+              <p:cNvSpPr txBox="1"/>
+              <p:nvPr/>
+            </p:nvSpPr>
+            <p:spPr>
+              <a:xfrm>
+                <a:off x="10231" y="3294"/>
+                <a:ext cx="4498" cy="798"/>
+              </a:xfrm>
+              <a:prstGeom prst="rect">
+                <a:avLst/>
+              </a:prstGeom>
+              <a:noFill/>
+              <a:ln>
+                <a:noFill/>
+              </a:ln>
+            </p:spPr>
+            <p:txBody>
+              <a:bodyPr wrap="square" rtlCol="0" anchor="t">
+                <a:noAutofit/>
+              </a:bodyPr>
+              <a:lstStyle/>
+              <a:p>
+                <a:pPr algn="l"/>
+                <a:r>
+                  <a:rPr lang="zh-CN" altLang="en-US">
+                    <a:sym typeface="+mn-ea"/>
+                  </a:rPr>
+                  <a:t>子块</a:t>
+                </a:r>
+                <a:r>
+                  <a:rPr lang="zh-CN" altLang="en-US">
+                    <a:sym typeface="+mn-ea"/>
+                  </a:rPr>
+                  <a:t>最小值</a:t>
+                </a:r>
+                <a:r>
+                  <a:rPr lang="en-US" altLang="zh-CN"/>
+                  <a:t>     </a:t>
+                </a:r>
+                <a:r>
+                  <a:rPr lang="en-US"/>
+                  <a:t>6bits</a:t>
+                </a:r>
+                <a:r>
+                  <a:rPr lang="en-US" altLang="zh-CN"/>
+                  <a:t>   mins</a:t>
+                </a:r>
+                <a:endParaRPr lang="en-US" altLang="zh-CN"/>
+              </a:p>
+            </p:txBody>
+          </p:sp>
+        </p:grpSp>
+      </p:grpSp>
+    </p:spTree>
+  </p:cSld>
+  <p:clrMapOvr>
+    <a:masterClrMapping/>
+  </p:clrMapOvr>
+</p:sld>
+</file>
+
+<file path=ppt/slides/slide14.xml><?xml version="1.0" encoding="utf-8"?>
+<p:sld xmlns:a="http://schemas.openxmlformats.org/drawingml/2006/main" xmlns:r="http://schemas.openxmlformats.org/officeDocument/2006/relationships" xmlns:p="http://schemas.openxmlformats.org/presentationml/2006/main">
+  <p:cSld>
+    <p:spTree>
+      <p:nvGrpSpPr>
+        <p:cNvPr id="1" name=""/>
+        <p:cNvGrpSpPr/>
+        <p:nvPr/>
+      </p:nvGrpSpPr>
+      <p:grpSpPr/>
+      <p:sp>
+        <p:nvSpPr>
+          <p:cNvPr id="11" name="文本框 10"/>
+          <p:cNvSpPr txBox="1"/>
+          <p:nvPr/>
+        </p:nvSpPr>
+        <p:spPr>
+          <a:xfrm>
+            <a:off x="866775" y="516890"/>
+            <a:ext cx="3148330" cy="368300"/>
+          </a:xfrm>
+          <a:prstGeom prst="rect">
+            <a:avLst/>
+          </a:prstGeom>
+          <a:noFill/>
+        </p:spPr>
+        <p:txBody>
+          <a:bodyPr wrap="square" rtlCol="0" anchor="t">
+            <a:spAutoFit/>
+          </a:bodyPr>
+          <a:lstStyle/>
+          <a:p>
+            <a:pPr algn="l"/>
+            <a:r>
+              <a:rPr lang="en-US" altLang="zh-CN"/>
+              <a:t>FP16</a:t>
+            </a:r>
+            <a:endParaRPr lang="en-US" altLang="zh-CN"/>
+          </a:p>
+        </p:txBody>
+      </p:sp>
+      <p:grpSp>
+        <p:nvGrpSpPr>
+          <p:cNvPr id="42" name="组合 41"/>
+          <p:cNvGrpSpPr/>
+          <p:nvPr/>
+        </p:nvGrpSpPr>
+        <p:grpSpPr>
+          <a:xfrm>
+            <a:off x="1017905" y="2047240"/>
+            <a:ext cx="3277870" cy="1381760"/>
+            <a:chOff x="1604" y="1646"/>
+            <a:chExt cx="4748" cy="2176"/>
+          </a:xfrm>
+        </p:grpSpPr>
+        <p:grpSp>
+          <p:nvGrpSpPr>
+            <p:cNvPr id="13" name="组合 12"/>
+            <p:cNvGrpSpPr/>
+            <p:nvPr/>
+          </p:nvGrpSpPr>
+          <p:grpSpPr>
+            <a:xfrm>
+              <a:off x="1604" y="2998"/>
+              <a:ext cx="4749" cy="824"/>
+              <a:chOff x="1604" y="3742"/>
+              <a:chExt cx="5042" cy="1040"/>
+            </a:xfrm>
+          </p:grpSpPr>
+          <p:sp>
+            <p:nvSpPr>
+              <p:cNvPr id="6" name="矩形 5"/>
+              <p:cNvSpPr/>
+              <p:nvPr/>
+            </p:nvSpPr>
+            <p:spPr>
+              <a:xfrm>
+                <a:off x="1604" y="3742"/>
+                <a:ext cx="5042" cy="1040"/>
+              </a:xfrm>
+              <a:prstGeom prst="rect">
+                <a:avLst/>
+              </a:prstGeom>
+              <a:solidFill>
+                <a:schemeClr val="accent1">
+                  <a:lumMod val="40000"/>
+                  <a:lumOff val="60000"/>
+                </a:schemeClr>
+              </a:solidFill>
+              <a:ln w="12700">
+                <a:solidFill>
+                  <a:schemeClr val="tx1"/>
+                </a:solidFill>
+              </a:ln>
+            </p:spPr>
+            <p:style>
+              <a:lnRef idx="2">
+                <a:schemeClr val="accent1">
+                  <a:shade val="50000"/>
+                </a:schemeClr>
+              </a:lnRef>
+              <a:fillRef idx="1">
+                <a:schemeClr val="accent1"/>
+              </a:fillRef>
+              <a:effectRef idx="0">
+                <a:schemeClr val="accent1"/>
+              </a:effectRef>
+              <a:fontRef idx="minor">
+                <a:schemeClr val="lt1"/>
+              </a:fontRef>
+            </p:style>
+            <p:txBody>
+              <a:bodyPr rtlCol="0" anchor="ctr"/>
+              <a:lstStyle/>
+              <a:p>
+                <a:pPr algn="ctr"/>
+                <a:endParaRPr lang="zh-CN" altLang="en-US"/>
+              </a:p>
+            </p:txBody>
+          </p:sp>
+          <p:sp>
+            <p:nvSpPr>
+              <p:cNvPr id="12" name="文本框 11"/>
+              <p:cNvSpPr txBox="1"/>
+              <p:nvPr/>
+            </p:nvSpPr>
+            <p:spPr>
+              <a:xfrm>
+                <a:off x="1730" y="3896"/>
+                <a:ext cx="4831" cy="798"/>
+              </a:xfrm>
+              <a:prstGeom prst="rect">
+                <a:avLst/>
+              </a:prstGeom>
+              <a:noFill/>
+              <a:ln>
+                <a:noFill/>
+              </a:ln>
+            </p:spPr>
+            <p:txBody>
+              <a:bodyPr wrap="square" rtlCol="0" anchor="t">
+                <a:noAutofit/>
+              </a:bodyPr>
+              <a:lstStyle/>
+              <a:p>
+                <a:pPr algn="l"/>
+                <a:r>
+                  <a:rPr lang="zh-CN" altLang="en-US"/>
+                  <a:t>超级块最小值</a:t>
+                </a:r>
+                <a:r>
+                  <a:rPr lang="en-US" altLang="zh-CN"/>
+                  <a:t>       16</a:t>
+                </a:r>
+                <a:r>
+                  <a:rPr lang="en-US" altLang="zh-CN"/>
+                  <a:t>bits   d</a:t>
+                </a:r>
+                <a:r>
+                  <a:rPr lang="en-US" altLang="zh-CN"/>
+                  <a:t>min</a:t>
+                </a:r>
+                <a:endParaRPr lang="en-US" altLang="zh-CN"/>
+              </a:p>
+            </p:txBody>
+          </p:sp>
+        </p:grpSp>
+        <p:sp>
+          <p:nvSpPr>
+            <p:cNvPr id="4" name="矩形 3"/>
+            <p:cNvSpPr/>
+            <p:nvPr/>
+          </p:nvSpPr>
+          <p:spPr>
+            <a:xfrm>
+              <a:off x="1604" y="1646"/>
+              <a:ext cx="4748" cy="888"/>
+            </a:xfrm>
+            <a:prstGeom prst="rect">
+              <a:avLst/>
+            </a:prstGeom>
+            <a:solidFill>
+              <a:schemeClr val="accent1">
+                <a:lumMod val="40000"/>
+                <a:lumOff val="60000"/>
+              </a:schemeClr>
+            </a:solidFill>
+            <a:ln w="12700">
+              <a:solidFill>
+                <a:schemeClr val="tx1"/>
+              </a:solidFill>
+            </a:ln>
+          </p:spPr>
+          <p:style>
+            <a:lnRef idx="2">
+              <a:schemeClr val="accent1">
+                <a:shade val="50000"/>
+              </a:schemeClr>
+            </a:lnRef>
+            <a:fillRef idx="1">
+              <a:schemeClr val="accent1"/>
+            </a:fillRef>
+            <a:effectRef idx="0">
+              <a:schemeClr val="accent1"/>
+            </a:effectRef>
+            <a:fontRef idx="minor">
+              <a:schemeClr val="lt1"/>
+            </a:fontRef>
+          </p:style>
+          <p:txBody>
+            <a:bodyPr rtlCol="0" anchor="ctr"/>
+            <a:lstStyle/>
+            <a:p>
+              <a:pPr algn="ctr"/>
+              <a:endParaRPr lang="zh-CN" altLang="en-US"/>
+            </a:p>
+          </p:txBody>
+        </p:sp>
+        <p:sp>
+          <p:nvSpPr>
+            <p:cNvPr id="5" name="文本框 4"/>
+            <p:cNvSpPr txBox="1"/>
+            <p:nvPr/>
+          </p:nvSpPr>
+          <p:spPr>
+            <a:xfrm>
+              <a:off x="1723" y="1800"/>
+              <a:ext cx="4354" cy="798"/>
+            </a:xfrm>
+            <a:prstGeom prst="rect">
+              <a:avLst/>
+            </a:prstGeom>
+            <a:noFill/>
+            <a:ln>
+              <a:noFill/>
+            </a:ln>
+          </p:spPr>
+          <p:txBody>
+            <a:bodyPr wrap="square" rtlCol="0" anchor="t">
+              <a:noAutofit/>
+            </a:bodyPr>
+            <a:lstStyle/>
+            <a:p>
+              <a:pPr algn="l"/>
+              <a:r>
+                <a:rPr lang="zh-CN" altLang="en-US"/>
+                <a:t>超级块缩放因子</a:t>
+              </a:r>
+              <a:r>
+                <a:rPr lang="en-US" altLang="zh-CN"/>
+                <a:t>  16bits </a:t>
+              </a:r>
+              <a:r>
+                <a:rPr lang="en-US" altLang="zh-CN"/>
+                <a:t>  </a:t>
+              </a:r>
+              <a:r>
+                <a:rPr lang="en-US" altLang="zh-CN"/>
+                <a:t>d</a:t>
+              </a:r>
+              <a:endParaRPr lang="en-US" altLang="zh-CN"/>
+            </a:p>
+          </p:txBody>
+        </p:sp>
+      </p:grpSp>
+      <p:sp>
+        <p:nvSpPr>
+          <p:cNvPr id="32" name="矩形 31"/>
+          <p:cNvSpPr/>
+          <p:nvPr/>
+        </p:nvSpPr>
+        <p:spPr>
+          <a:xfrm>
+            <a:off x="6699885" y="3268345"/>
+            <a:ext cx="4415155" cy="3361055"/>
+          </a:xfrm>
+          <a:prstGeom prst="rect">
+            <a:avLst/>
+          </a:prstGeom>
+          <a:solidFill>
+            <a:schemeClr val="accent6">
+              <a:lumMod val="40000"/>
+              <a:lumOff val="60000"/>
+            </a:schemeClr>
+          </a:solidFill>
+          <a:ln w="12700">
+            <a:solidFill>
+              <a:schemeClr val="tx1"/>
+            </a:solidFill>
+          </a:ln>
+        </p:spPr>
+        <p:style>
+          <a:lnRef idx="2">
+            <a:schemeClr val="accent1">
+              <a:shade val="50000"/>
+            </a:schemeClr>
+          </a:lnRef>
+          <a:fillRef idx="1">
+            <a:schemeClr val="accent1"/>
+          </a:fillRef>
+          <a:effectRef idx="0">
+            <a:schemeClr val="accent1"/>
+          </a:effectRef>
+          <a:fontRef idx="minor">
+            <a:schemeClr val="lt1"/>
+          </a:fontRef>
+        </p:style>
+        <p:txBody>
+          <a:bodyPr rtlCol="0" anchor="ctr"/>
+          <a:lstStyle/>
+          <a:p>
+            <a:pPr algn="ctr"/>
+            <a:endParaRPr lang="zh-CN" altLang="en-US"/>
+          </a:p>
+        </p:txBody>
+      </p:sp>
+      <p:grpSp>
+        <p:nvGrpSpPr>
+          <p:cNvPr id="34" name="组合 33"/>
+          <p:cNvGrpSpPr/>
+          <p:nvPr/>
+        </p:nvGrpSpPr>
+        <p:grpSpPr>
+          <a:xfrm rot="0">
+            <a:off x="6273800" y="3489960"/>
+            <a:ext cx="3016885" cy="484505"/>
+            <a:chOff x="7013" y="4465"/>
+            <a:chExt cx="5298" cy="1248"/>
+          </a:xfrm>
+        </p:grpSpPr>
+        <p:sp>
+          <p:nvSpPr>
+            <p:cNvPr id="7" name="矩形 6"/>
+            <p:cNvSpPr/>
+            <p:nvPr/>
+          </p:nvSpPr>
+          <p:spPr>
+            <a:xfrm>
+              <a:off x="7013" y="4465"/>
+              <a:ext cx="5298" cy="1248"/>
+            </a:xfrm>
+            <a:prstGeom prst="rect">
+              <a:avLst/>
+            </a:prstGeom>
+            <a:solidFill>
+              <a:schemeClr val="accent2">
+                <a:lumMod val="40000"/>
+                <a:lumOff val="60000"/>
+              </a:schemeClr>
+            </a:solidFill>
+            <a:ln w="12700">
+              <a:solidFill>
+                <a:schemeClr val="tx1"/>
+              </a:solidFill>
+            </a:ln>
+          </p:spPr>
+          <p:style>
+            <a:lnRef idx="2">
+              <a:schemeClr val="accent1">
+                <a:shade val="50000"/>
+              </a:schemeClr>
+            </a:lnRef>
+            <a:fillRef idx="1">
+              <a:schemeClr val="accent1"/>
+            </a:fillRef>
+            <a:effectRef idx="0">
+              <a:schemeClr val="accent1"/>
+            </a:effectRef>
+            <a:fontRef idx="minor">
+              <a:schemeClr val="lt1"/>
+            </a:fontRef>
+          </p:style>
+          <p:txBody>
+            <a:bodyPr rtlCol="0" anchor="ctr"/>
+            <a:lstStyle/>
+            <a:p>
+              <a:pPr algn="ctr"/>
+              <a:endParaRPr lang="zh-CN" altLang="en-US"/>
+            </a:p>
+          </p:txBody>
+        </p:sp>
+        <p:sp>
+          <p:nvSpPr>
+            <p:cNvPr id="15" name="文本框 14"/>
+            <p:cNvSpPr txBox="1"/>
+            <p:nvPr/>
+          </p:nvSpPr>
+          <p:spPr>
+            <a:xfrm>
+              <a:off x="7137" y="4594"/>
+              <a:ext cx="4398" cy="1006"/>
+            </a:xfrm>
+            <a:prstGeom prst="rect">
+              <a:avLst/>
+            </a:prstGeom>
+            <a:solidFill>
+              <a:schemeClr val="accent2">
+                <a:lumMod val="40000"/>
+                <a:lumOff val="60000"/>
+              </a:schemeClr>
+            </a:solidFill>
+          </p:spPr>
+          <p:txBody>
+            <a:bodyPr wrap="square" rtlCol="0" anchor="t">
+              <a:noAutofit/>
+            </a:bodyPr>
+            <a:lstStyle/>
+            <a:p>
+              <a:pPr algn="l"/>
+              <a:r>
+                <a:rPr lang="zh-CN" altLang="en-US">
+                  <a:sym typeface="+mn-ea"/>
+                </a:rPr>
+                <a:t>单个参数</a:t>
+              </a:r>
+              <a:r>
+                <a:rPr lang="en-US" altLang="zh-CN">
+                  <a:sym typeface="+mn-ea"/>
+                </a:rPr>
+                <a:t>          4</a:t>
+              </a:r>
+              <a:r>
+                <a:rPr lang="en-US" altLang="zh-CN">
+                  <a:sym typeface="+mn-ea"/>
+                </a:rPr>
+                <a:t>bits</a:t>
+              </a:r>
+              <a:endParaRPr lang="en-US" altLang="zh-CN">
+                <a:sym typeface="+mn-ea"/>
+              </a:endParaRPr>
+            </a:p>
+          </p:txBody>
+        </p:sp>
+      </p:grpSp>
+      <p:sp>
+        <p:nvSpPr>
+          <p:cNvPr id="26" name="文本框 25"/>
+          <p:cNvSpPr txBox="1"/>
+          <p:nvPr/>
+        </p:nvSpPr>
+        <p:spPr>
+          <a:xfrm>
+            <a:off x="9355455" y="3545205"/>
+            <a:ext cx="918845" cy="386080"/>
+          </a:xfrm>
+          <a:prstGeom prst="rect">
+            <a:avLst/>
+          </a:prstGeom>
+          <a:noFill/>
+          <a:extLst>
+            <a:ext uri="{909E8E84-426E-40DD-AFC4-6F175D3DCCD1}">
+              <a14:hiddenFill xmlns:a14="http://schemas.microsoft.com/office/drawing/2010/main">
+                <a:solidFill>
+                  <a:schemeClr val="accent2">
+                    <a:lumMod val="40000"/>
+                    <a:lumOff val="60000"/>
+                  </a:schemeClr>
+                </a:solidFill>
+              </a14:hiddenFill>
+            </a:ext>
+          </a:extLst>
+        </p:spPr>
+        <p:txBody>
+          <a:bodyPr wrap="square" rtlCol="0" anchor="t">
+            <a:noAutofit/>
+          </a:bodyPr>
+          <a:lstStyle/>
+          <a:p>
+            <a:pPr algn="l"/>
+            <a:r>
+              <a:rPr lang="en-US" altLang="zh-CN">
+                <a:sym typeface="+mn-ea"/>
+              </a:rPr>
+              <a:t>× 32</a:t>
+            </a:r>
+            <a:r>
+              <a:rPr lang="zh-CN" altLang="en-US">
+                <a:sym typeface="+mn-ea"/>
+              </a:rPr>
+              <a:t>个</a:t>
+            </a:r>
+            <a:endParaRPr lang="zh-CN" altLang="en-US">
+              <a:sym typeface="+mn-ea"/>
+            </a:endParaRPr>
+          </a:p>
+        </p:txBody>
+      </p:sp>
+      <p:sp>
+        <p:nvSpPr>
+          <p:cNvPr id="16" name="文本框 15"/>
+          <p:cNvSpPr txBox="1"/>
+          <p:nvPr/>
+        </p:nvSpPr>
+        <p:spPr>
+          <a:xfrm>
+            <a:off x="10469245" y="2699385"/>
+            <a:ext cx="918845" cy="386080"/>
+          </a:xfrm>
+          <a:prstGeom prst="rect">
+            <a:avLst/>
+          </a:prstGeom>
+          <a:noFill/>
+          <a:extLst>
+            <a:ext uri="{909E8E84-426E-40DD-AFC4-6F175D3DCCD1}">
+              <a14:hiddenFill xmlns:a14="http://schemas.microsoft.com/office/drawing/2010/main">
+                <a:solidFill>
+                  <a:schemeClr val="accent2">
+                    <a:lumMod val="40000"/>
+                    <a:lumOff val="60000"/>
+                  </a:schemeClr>
+                </a:solidFill>
+              </a14:hiddenFill>
+            </a:ext>
+          </a:extLst>
+        </p:spPr>
+        <p:txBody>
+          <a:bodyPr wrap="square" rtlCol="0" anchor="t">
+            <a:noAutofit/>
+          </a:bodyPr>
+          <a:lstStyle/>
+          <a:p>
+            <a:pPr algn="l"/>
+            <a:r>
+              <a:rPr lang="en-US" altLang="zh-CN">
+                <a:sym typeface="+mn-ea"/>
+              </a:rPr>
+              <a:t>× 8</a:t>
+            </a:r>
+            <a:r>
+              <a:rPr lang="zh-CN" altLang="en-US">
+                <a:sym typeface="+mn-ea"/>
+              </a:rPr>
+              <a:t>块</a:t>
+            </a:r>
+            <a:endParaRPr lang="zh-CN" altLang="en-US">
+              <a:sym typeface="+mn-ea"/>
+            </a:endParaRPr>
+          </a:p>
+        </p:txBody>
+      </p:sp>
+      <p:sp>
+        <p:nvSpPr>
+          <p:cNvPr id="33" name="文本框 32"/>
+          <p:cNvSpPr txBox="1"/>
+          <p:nvPr/>
+        </p:nvSpPr>
+        <p:spPr>
+          <a:xfrm>
+            <a:off x="6193155" y="1261110"/>
+            <a:ext cx="2541270" cy="386715"/>
+          </a:xfrm>
+          <a:prstGeom prst="rect">
+            <a:avLst/>
+          </a:prstGeom>
+          <a:noFill/>
+          <a:extLst>
+            <a:ext uri="{909E8E84-426E-40DD-AFC4-6F175D3DCCD1}">
+              <a14:hiddenFill xmlns:a14="http://schemas.microsoft.com/office/drawing/2010/main">
+                <a:solidFill>
+                  <a:schemeClr val="accent2">
+                    <a:lumMod val="40000"/>
+                    <a:lumOff val="60000"/>
+                  </a:schemeClr>
+                </a:solidFill>
+              </a14:hiddenFill>
+            </a:ext>
+          </a:extLst>
+        </p:spPr>
+        <p:txBody>
+          <a:bodyPr wrap="square" rtlCol="0" anchor="t">
+            <a:noAutofit/>
+          </a:bodyPr>
+          <a:lstStyle/>
+          <a:p>
+            <a:pPr algn="l"/>
+            <a:r>
+              <a:rPr lang="zh-CN" altLang="en-US">
+                <a:sym typeface="+mn-ea"/>
+              </a:rPr>
+              <a:t>子块</a:t>
+            </a:r>
+            <a:r>
+              <a:rPr lang="en-US" altLang="zh-CN">
+                <a:sym typeface="+mn-ea"/>
+              </a:rPr>
+              <a:t>  </a:t>
+            </a:r>
+            <a:r>
+              <a:rPr lang="zh-CN" altLang="en-US">
+                <a:sym typeface="+mn-ea"/>
+              </a:rPr>
+              <a:t>包含</a:t>
+            </a:r>
+            <a:r>
+              <a:rPr lang="en-US" altLang="zh-CN">
+                <a:sym typeface="+mn-ea"/>
+              </a:rPr>
+              <a:t>32</a:t>
+            </a:r>
+            <a:r>
+              <a:rPr lang="zh-CN" altLang="en-US">
+                <a:sym typeface="+mn-ea"/>
+              </a:rPr>
+              <a:t>个参数</a:t>
+            </a:r>
+            <a:endParaRPr lang="en-US" altLang="zh-CN">
+              <a:sym typeface="+mn-ea"/>
+            </a:endParaRPr>
+          </a:p>
+          <a:p>
+            <a:pPr algn="l"/>
+            <a:endParaRPr lang="en-US" altLang="zh-CN">
+              <a:sym typeface="+mn-ea"/>
+            </a:endParaRPr>
+          </a:p>
+        </p:txBody>
+      </p:sp>
+      <p:grpSp>
+        <p:nvGrpSpPr>
+          <p:cNvPr id="41" name="组合 40"/>
+          <p:cNvGrpSpPr/>
+          <p:nvPr/>
+        </p:nvGrpSpPr>
+        <p:grpSpPr>
+          <a:xfrm rot="0">
+            <a:off x="6274435" y="1866900"/>
+            <a:ext cx="3015615" cy="1401445"/>
+            <a:chOff x="10132" y="1885"/>
+            <a:chExt cx="4749" cy="2207"/>
+          </a:xfrm>
+        </p:grpSpPr>
+        <p:sp>
+          <p:nvSpPr>
+            <p:cNvPr id="36" name="矩形 35"/>
+            <p:cNvSpPr/>
+            <p:nvPr/>
+          </p:nvSpPr>
+          <p:spPr>
+            <a:xfrm>
+              <a:off x="10132" y="1885"/>
+              <a:ext cx="4748" cy="888"/>
+            </a:xfrm>
+            <a:prstGeom prst="rect">
+              <a:avLst/>
+            </a:prstGeom>
+            <a:solidFill>
+              <a:schemeClr val="accent1">
+                <a:lumMod val="40000"/>
+                <a:lumOff val="60000"/>
+              </a:schemeClr>
+            </a:solidFill>
+            <a:ln w="12700">
+              <a:solidFill>
+                <a:schemeClr val="tx1"/>
+              </a:solidFill>
+            </a:ln>
+          </p:spPr>
+          <p:style>
+            <a:lnRef idx="2">
+              <a:schemeClr val="accent1">
+                <a:shade val="50000"/>
+              </a:schemeClr>
+            </a:lnRef>
+            <a:fillRef idx="1">
+              <a:schemeClr val="accent1"/>
+            </a:fillRef>
+            <a:effectRef idx="0">
+              <a:schemeClr val="accent1"/>
+            </a:effectRef>
+            <a:fontRef idx="minor">
+              <a:schemeClr val="lt1"/>
+            </a:fontRef>
+          </p:style>
+          <p:txBody>
+            <a:bodyPr rtlCol="0" anchor="ctr"/>
+            <a:lstStyle/>
+            <a:p>
+              <a:pPr algn="ctr"/>
+              <a:endParaRPr lang="zh-CN" altLang="en-US"/>
+            </a:p>
+          </p:txBody>
+        </p:sp>
+        <p:sp>
+          <p:nvSpPr>
+            <p:cNvPr id="37" name="文本框 36"/>
+            <p:cNvSpPr txBox="1"/>
+            <p:nvPr/>
+          </p:nvSpPr>
+          <p:spPr>
+            <a:xfrm>
+              <a:off x="10242" y="2057"/>
+              <a:ext cx="4498" cy="661"/>
+            </a:xfrm>
+            <a:prstGeom prst="rect">
+              <a:avLst/>
+            </a:prstGeom>
+            <a:noFill/>
+            <a:ln>
+              <a:noFill/>
+            </a:ln>
+          </p:spPr>
+          <p:txBody>
+            <a:bodyPr wrap="square" rtlCol="0" anchor="t">
+              <a:noAutofit/>
+            </a:bodyPr>
+            <a:lstStyle/>
+            <a:p>
+              <a:pPr algn="l"/>
+              <a:r>
+                <a:rPr lang="zh-CN" altLang="en-US">
+                  <a:sym typeface="+mn-ea"/>
+                </a:rPr>
+                <a:t>子块</a:t>
+              </a:r>
+              <a:r>
+                <a:rPr lang="zh-CN" altLang="en-US"/>
+                <a:t>缩放因子</a:t>
+              </a:r>
+              <a:r>
+                <a:rPr lang="en-US" altLang="zh-CN"/>
+                <a:t> </a:t>
+              </a:r>
+              <a:r>
+                <a:rPr lang="en-US"/>
+                <a:t>6bits</a:t>
+              </a:r>
+              <a:r>
+                <a:rPr lang="en-US" altLang="zh-CN"/>
+                <a:t>  scales</a:t>
+              </a:r>
+              <a:endParaRPr lang="en-US" altLang="zh-CN"/>
+            </a:p>
+          </p:txBody>
+        </p:sp>
+        <p:sp>
+          <p:nvSpPr>
+            <p:cNvPr id="39" name="矩形 38"/>
+            <p:cNvSpPr/>
+            <p:nvPr/>
+          </p:nvSpPr>
+          <p:spPr>
+            <a:xfrm>
+              <a:off x="10133" y="3140"/>
+              <a:ext cx="4748" cy="888"/>
+            </a:xfrm>
+            <a:prstGeom prst="rect">
+              <a:avLst/>
+            </a:prstGeom>
+            <a:solidFill>
+              <a:schemeClr val="accent1">
+                <a:lumMod val="40000"/>
+                <a:lumOff val="60000"/>
+              </a:schemeClr>
+            </a:solidFill>
+            <a:ln w="12700">
+              <a:solidFill>
+                <a:schemeClr val="tx1"/>
+              </a:solidFill>
+            </a:ln>
+          </p:spPr>
+          <p:style>
+            <a:lnRef idx="2">
+              <a:schemeClr val="accent1">
+                <a:shade val="50000"/>
+              </a:schemeClr>
+            </a:lnRef>
+            <a:fillRef idx="1">
+              <a:schemeClr val="accent1"/>
+            </a:fillRef>
+            <a:effectRef idx="0">
+              <a:schemeClr val="accent1"/>
+            </a:effectRef>
+            <a:fontRef idx="minor">
+              <a:schemeClr val="lt1"/>
+            </a:fontRef>
+          </p:style>
+          <p:txBody>
+            <a:bodyPr rtlCol="0" anchor="ctr"/>
+            <a:lstStyle/>
+            <a:p>
+              <a:pPr algn="ctr"/>
+              <a:endParaRPr lang="zh-CN" altLang="en-US"/>
+            </a:p>
+          </p:txBody>
+        </p:sp>
+        <p:sp>
+          <p:nvSpPr>
+            <p:cNvPr id="40" name="文本框 39"/>
+            <p:cNvSpPr txBox="1"/>
+            <p:nvPr/>
+          </p:nvSpPr>
+          <p:spPr>
+            <a:xfrm>
+              <a:off x="10231" y="3294"/>
+              <a:ext cx="4498" cy="798"/>
+            </a:xfrm>
+            <a:prstGeom prst="rect">
+              <a:avLst/>
+            </a:prstGeom>
+            <a:noFill/>
+            <a:ln>
+              <a:noFill/>
+            </a:ln>
+          </p:spPr>
+          <p:txBody>
+            <a:bodyPr wrap="square" rtlCol="0" anchor="t">
+              <a:noAutofit/>
+            </a:bodyPr>
+            <a:lstStyle/>
+            <a:p>
+              <a:pPr algn="l"/>
+              <a:r>
+                <a:rPr lang="zh-CN" altLang="en-US">
+                  <a:sym typeface="+mn-ea"/>
+                </a:rPr>
+                <a:t>子块</a:t>
+              </a:r>
+              <a:r>
+                <a:rPr lang="zh-CN" altLang="en-US">
+                  <a:sym typeface="+mn-ea"/>
+                </a:rPr>
+                <a:t>最小值</a:t>
+              </a:r>
+              <a:r>
+                <a:rPr lang="en-US" altLang="zh-CN"/>
+                <a:t>     </a:t>
+              </a:r>
+              <a:r>
+                <a:rPr lang="en-US"/>
+                <a:t>6bits</a:t>
+              </a:r>
+              <a:r>
+                <a:rPr lang="en-US" altLang="zh-CN"/>
+                <a:t>   mins</a:t>
+              </a:r>
+              <a:endParaRPr lang="en-US" altLang="zh-CN"/>
+            </a:p>
+          </p:txBody>
+        </p:sp>
+      </p:grpSp>
+    </p:spTree>
+  </p:cSld>
+  <p:clrMapOvr>
+    <a:masterClrMapping/>
+  </p:clrMapOvr>
+</p:sld>
+</file>
+
 <file path=ppt/slides/slide2.xml><?xml version="1.0" encoding="utf-8"?>
 <p:sld xmlns:a="http://schemas.openxmlformats.org/drawingml/2006/main" xmlns:r="http://schemas.openxmlformats.org/officeDocument/2006/relationships" xmlns:p="http://schemas.openxmlformats.org/presentationml/2006/main">
   <p:cSld>
